--- a/exposicion/presentacion.pptx
+++ b/exposicion/presentacion.pptx
@@ -2,24 +2,24 @@
 <file path=ppt/presentation.xml><?xml version="1.0" encoding="utf-8"?>
 <p:presentation xmlns:p="http://schemas.openxmlformats.org/presentationml/2006/main">
   <p:sldMasterIdLst>
-    <p:sldMasterId xmlns:r="http://schemas.openxmlformats.org/officeDocument/2006/relationships" id="2147483648" r:id="R2e2fc2001bba4920"/>
+    <p:sldMasterId xmlns:r="http://schemas.openxmlformats.org/officeDocument/2006/relationships" id="2147483648" r:id="R54b9f44c9e804494"/>
   </p:sldMasterIdLst>
   <p:notesMasterIdLst>
-    <p:notesMasterId xmlns:r="http://schemas.openxmlformats.org/officeDocument/2006/relationships" r:id="R1f794f9eb6ce4326"/>
+    <p:notesMasterId xmlns:r="http://schemas.openxmlformats.org/officeDocument/2006/relationships" r:id="R49287653c12f4265"/>
   </p:notesMasterIdLst>
   <p:sldIdLst>
-    <p:sldId xmlns:r="http://schemas.openxmlformats.org/officeDocument/2006/relationships" id="256" r:id="Rae8d23c1173a4462"/>
-    <p:sldId xmlns:r="http://schemas.openxmlformats.org/officeDocument/2006/relationships" id="257" r:id="R2b543c37a6214799"/>
-    <p:sldId xmlns:r="http://schemas.openxmlformats.org/officeDocument/2006/relationships" id="258" r:id="R0ce68a8290024306"/>
-    <p:sldId xmlns:r="http://schemas.openxmlformats.org/officeDocument/2006/relationships" id="259" r:id="Rf120ea9c8c8a4047"/>
-    <p:sldId xmlns:r="http://schemas.openxmlformats.org/officeDocument/2006/relationships" id="260" r:id="Rea3e25d28e0a42c2"/>
-    <p:sldId xmlns:r="http://schemas.openxmlformats.org/officeDocument/2006/relationships" id="261" r:id="Raae3323aae054e73"/>
-    <p:sldId xmlns:r="http://schemas.openxmlformats.org/officeDocument/2006/relationships" id="262" r:id="R6be460910e0c4f84"/>
-    <p:sldId xmlns:r="http://schemas.openxmlformats.org/officeDocument/2006/relationships" id="263" r:id="Rc77297016bb74789"/>
-    <p:sldId xmlns:r="http://schemas.openxmlformats.org/officeDocument/2006/relationships" id="264" r:id="R4824ade1b9164aaf"/>
-    <p:sldId xmlns:r="http://schemas.openxmlformats.org/officeDocument/2006/relationships" id="265" r:id="R7d69dbf2e275459c"/>
-    <p:sldId xmlns:r="http://schemas.openxmlformats.org/officeDocument/2006/relationships" id="266" r:id="Ra03247899c10456d"/>
-    <p:sldId xmlns:r="http://schemas.openxmlformats.org/officeDocument/2006/relationships" id="267" r:id="Re8be3b27ce044a71"/>
+    <p:sldId xmlns:r="http://schemas.openxmlformats.org/officeDocument/2006/relationships" id="256" r:id="R27a69285e97e4c3e"/>
+    <p:sldId xmlns:r="http://schemas.openxmlformats.org/officeDocument/2006/relationships" id="257" r:id="Rbcd88ee8473c4b7b"/>
+    <p:sldId xmlns:r="http://schemas.openxmlformats.org/officeDocument/2006/relationships" id="258" r:id="R19c7a2bf8ee74eba"/>
+    <p:sldId xmlns:r="http://schemas.openxmlformats.org/officeDocument/2006/relationships" id="259" r:id="R9f9be6555ef24ac0"/>
+    <p:sldId xmlns:r="http://schemas.openxmlformats.org/officeDocument/2006/relationships" id="260" r:id="R4b78c1763aa44209"/>
+    <p:sldId xmlns:r="http://schemas.openxmlformats.org/officeDocument/2006/relationships" id="261" r:id="R2962f82d5ba54f19"/>
+    <p:sldId xmlns:r="http://schemas.openxmlformats.org/officeDocument/2006/relationships" id="262" r:id="R354629d9d8584b36"/>
+    <p:sldId xmlns:r="http://schemas.openxmlformats.org/officeDocument/2006/relationships" id="263" r:id="R01019ea0744d432a"/>
+    <p:sldId xmlns:r="http://schemas.openxmlformats.org/officeDocument/2006/relationships" id="264" r:id="Rf835eafc0e984ed9"/>
+    <p:sldId xmlns:r="http://schemas.openxmlformats.org/officeDocument/2006/relationships" id="265" r:id="Rb675f01f4e664294"/>
+    <p:sldId xmlns:r="http://schemas.openxmlformats.org/officeDocument/2006/relationships" id="266" r:id="R16cf6ce1bd144695"/>
+    <p:sldId xmlns:r="http://schemas.openxmlformats.org/officeDocument/2006/relationships" id="267" r:id="Rce51b6edf0a64c96"/>
   </p:sldIdLst>
   <p:sldSz cx="9144000" cy="5143500"/>
   <p:notesSz cx="6858000" cy="9144000"/>
@@ -453,7 +453,7 @@
           <a:lstStyle xmlns:a="http://schemas.openxmlformats.org/drawingml/2006/main"/>
           <a:p xmlns:a="http://schemas.openxmlformats.org/drawingml/2006/main">
             <a:r>
-              <a:t>Presentación de 12–15 minutos. Reparto sugerido, pendiente de ensayo del equipo. Las propuestas P04–P12 son borradores asistidos por IA para validación.</a:t>
+              <a:t>Codex (OpenAI): apoyo en la elaboración del proyecto. Las propuestas P04–P12 siguen pendientes de validación.</a:t>
             </a:r>
           </a:p>
         </p:txBody>
@@ -4106,12 +4106,12 @@
   </p:cSld>
   <p:clrMap bg1="lt1" tx1="dk1" bg2="lt2" tx2="dk2" accent1="accent1" accent2="accent2" accent3="accent3" accent4="accent4" accent5="accent5" accent6="accent6" hlink="hlink" folHlink="folHlink"/>
   <p:sldLayoutIdLst>
-    <p:sldLayoutId xmlns:r="http://schemas.openxmlformats.org/officeDocument/2006/relationships" id="2147483649" r:id="R9869e00b0e8e47b6"/>
-    <p:sldLayoutId xmlns:r="http://schemas.openxmlformats.org/officeDocument/2006/relationships" id="2147483650" r:id="R09e4abb9314b4c5c"/>
-    <p:sldLayoutId xmlns:r="http://schemas.openxmlformats.org/officeDocument/2006/relationships" id="2147483651" r:id="R3896880c7e97437f"/>
-    <p:sldLayoutId xmlns:r="http://schemas.openxmlformats.org/officeDocument/2006/relationships" id="2147483652" r:id="R797d9928e348474d"/>
-    <p:sldLayoutId xmlns:r="http://schemas.openxmlformats.org/officeDocument/2006/relationships" id="2147483653" r:id="Rbba597a1a79a411d"/>
-    <p:sldLayoutId xmlns:r="http://schemas.openxmlformats.org/officeDocument/2006/relationships" id="2147483654" r:id="R889ba0ab36d24300"/>
+    <p:sldLayoutId xmlns:r="http://schemas.openxmlformats.org/officeDocument/2006/relationships" id="2147483649" r:id="R39923a88985f42fa"/>
+    <p:sldLayoutId xmlns:r="http://schemas.openxmlformats.org/officeDocument/2006/relationships" id="2147483650" r:id="R8e6536e81a324407"/>
+    <p:sldLayoutId xmlns:r="http://schemas.openxmlformats.org/officeDocument/2006/relationships" id="2147483651" r:id="Re7b58f14f1974e4c"/>
+    <p:sldLayoutId xmlns:r="http://schemas.openxmlformats.org/officeDocument/2006/relationships" id="2147483652" r:id="R525e91182b7348ce"/>
+    <p:sldLayoutId xmlns:r="http://schemas.openxmlformats.org/officeDocument/2006/relationships" id="2147483653" r:id="Ra8c3bdd506c74378"/>
+    <p:sldLayoutId xmlns:r="http://schemas.openxmlformats.org/officeDocument/2006/relationships" id="2147483654" r:id="R5bb76b6b2f334396"/>
   </p:sldLayoutIdLst>
   <p:txStyles>
     <p:titleStyle>
@@ -4699,6 +4699,7 @@
               </a:defRPr>
             </a:defPPr>
             <a:lvl1pPr>
+              <a:buNone/>
               <a:defRPr sz="900" b="1">
                 <a:solidFill>
                   <a:srgbClr val="802D42"/>
@@ -4709,6 +4710,7 @@
               </a:defRPr>
             </a:lvl1pPr>
             <a:lvl2pPr>
+              <a:buNone/>
               <a:defRPr sz="900" b="1">
                 <a:solidFill>
                   <a:srgbClr val="802D42"/>
@@ -4719,6 +4721,7 @@
               </a:defRPr>
             </a:lvl2pPr>
             <a:lvl3pPr>
+              <a:buNone/>
               <a:defRPr sz="900" b="1">
                 <a:solidFill>
                   <a:srgbClr val="802D42"/>
@@ -4729,6 +4732,7 @@
               </a:defRPr>
             </a:lvl3pPr>
             <a:lvl4pPr>
+              <a:buNone/>
               <a:defRPr sz="900" b="1">
                 <a:solidFill>
                   <a:srgbClr val="802D42"/>
@@ -4739,6 +4743,7 @@
               </a:defRPr>
             </a:lvl4pPr>
             <a:lvl5pPr>
+              <a:buNone/>
               <a:defRPr sz="900" b="1">
                 <a:solidFill>
                   <a:srgbClr val="802D42"/>
@@ -4749,6 +4754,7 @@
               </a:defRPr>
             </a:lvl5pPr>
             <a:lvl6pPr>
+              <a:buNone/>
               <a:defRPr sz="900" b="1">
                 <a:solidFill>
                   <a:srgbClr val="802D42"/>
@@ -4759,6 +4765,7 @@
               </a:defRPr>
             </a:lvl6pPr>
             <a:lvl7pPr>
+              <a:buNone/>
               <a:defRPr sz="900" b="1">
                 <a:solidFill>
                   <a:srgbClr val="802D42"/>
@@ -4769,6 +4776,7 @@
               </a:defRPr>
             </a:lvl7pPr>
             <a:lvl8pPr>
+              <a:buNone/>
               <a:defRPr sz="900" b="1">
                 <a:solidFill>
                   <a:srgbClr val="802D42"/>
@@ -4779,6 +4787,7 @@
               </a:defRPr>
             </a:lvl8pPr>
             <a:lvl9pPr>
+              <a:buNone/>
               <a:defRPr sz="900" b="1">
                 <a:solidFill>
                   <a:srgbClr val="802D42"/>
@@ -4791,6 +4800,7 @@
           </a:lstStyle>
           <a:p xmlns:a="http://schemas.openxmlformats.org/drawingml/2006/main">
             <a:pPr>
+              <a:buNone/>
               <a:defRPr sz="900" b="1">
                 <a:solidFill>
                   <a:srgbClr val="802D42"/>
@@ -4856,6 +4866,7 @@
               </a:defRPr>
             </a:defPPr>
             <a:lvl1pPr>
+              <a:buNone/>
               <a:defRPr sz="2400" b="1">
                 <a:solidFill>
                   <a:srgbClr val="243244"/>
@@ -4866,6 +4877,7 @@
               </a:defRPr>
             </a:lvl1pPr>
             <a:lvl2pPr>
+              <a:buNone/>
               <a:defRPr sz="2400" b="1">
                 <a:solidFill>
                   <a:srgbClr val="243244"/>
@@ -4876,6 +4888,7 @@
               </a:defRPr>
             </a:lvl2pPr>
             <a:lvl3pPr>
+              <a:buNone/>
               <a:defRPr sz="2400" b="1">
                 <a:solidFill>
                   <a:srgbClr val="243244"/>
@@ -4886,6 +4899,7 @@
               </a:defRPr>
             </a:lvl3pPr>
             <a:lvl4pPr>
+              <a:buNone/>
               <a:defRPr sz="2400" b="1">
                 <a:solidFill>
                   <a:srgbClr val="243244"/>
@@ -4896,6 +4910,7 @@
               </a:defRPr>
             </a:lvl4pPr>
             <a:lvl5pPr>
+              <a:buNone/>
               <a:defRPr sz="2400" b="1">
                 <a:solidFill>
                   <a:srgbClr val="243244"/>
@@ -4906,6 +4921,7 @@
               </a:defRPr>
             </a:lvl5pPr>
             <a:lvl6pPr>
+              <a:buNone/>
               <a:defRPr sz="2400" b="1">
                 <a:solidFill>
                   <a:srgbClr val="243244"/>
@@ -4916,6 +4932,7 @@
               </a:defRPr>
             </a:lvl6pPr>
             <a:lvl7pPr>
+              <a:buNone/>
               <a:defRPr sz="2400" b="1">
                 <a:solidFill>
                   <a:srgbClr val="243244"/>
@@ -4926,6 +4943,7 @@
               </a:defRPr>
             </a:lvl7pPr>
             <a:lvl8pPr>
+              <a:buNone/>
               <a:defRPr sz="2400" b="1">
                 <a:solidFill>
                   <a:srgbClr val="243244"/>
@@ -4936,6 +4954,7 @@
               </a:defRPr>
             </a:lvl8pPr>
             <a:lvl9pPr>
+              <a:buNone/>
               <a:defRPr sz="2400" b="1">
                 <a:solidFill>
                   <a:srgbClr val="243244"/>
@@ -4948,6 +4967,7 @@
           </a:lstStyle>
           <a:p xmlns:a="http://schemas.openxmlformats.org/drawingml/2006/main">
             <a:pPr>
+              <a:buNone/>
               <a:defRPr sz="2400" b="1">
                 <a:solidFill>
                   <a:srgbClr val="243244"/>
@@ -5013,6 +5033,7 @@
               </a:defRPr>
             </a:defPPr>
             <a:lvl1pPr>
+              <a:buNone/>
               <a:defRPr sz="1275" b="0">
                 <a:solidFill>
                   <a:srgbClr val="596678"/>
@@ -5023,6 +5044,7 @@
               </a:defRPr>
             </a:lvl1pPr>
             <a:lvl2pPr>
+              <a:buNone/>
               <a:defRPr sz="1275" b="0">
                 <a:solidFill>
                   <a:srgbClr val="596678"/>
@@ -5033,6 +5055,7 @@
               </a:defRPr>
             </a:lvl2pPr>
             <a:lvl3pPr>
+              <a:buNone/>
               <a:defRPr sz="1275" b="0">
                 <a:solidFill>
                   <a:srgbClr val="596678"/>
@@ -5043,6 +5066,7 @@
               </a:defRPr>
             </a:lvl3pPr>
             <a:lvl4pPr>
+              <a:buNone/>
               <a:defRPr sz="1275" b="0">
                 <a:solidFill>
                   <a:srgbClr val="596678"/>
@@ -5053,6 +5077,7 @@
               </a:defRPr>
             </a:lvl4pPr>
             <a:lvl5pPr>
+              <a:buNone/>
               <a:defRPr sz="1275" b="0">
                 <a:solidFill>
                   <a:srgbClr val="596678"/>
@@ -5063,6 +5088,7 @@
               </a:defRPr>
             </a:lvl5pPr>
             <a:lvl6pPr>
+              <a:buNone/>
               <a:defRPr sz="1275" b="0">
                 <a:solidFill>
                   <a:srgbClr val="596678"/>
@@ -5073,6 +5099,7 @@
               </a:defRPr>
             </a:lvl6pPr>
             <a:lvl7pPr>
+              <a:buNone/>
               <a:defRPr sz="1275" b="0">
                 <a:solidFill>
                   <a:srgbClr val="596678"/>
@@ -5083,6 +5110,7 @@
               </a:defRPr>
             </a:lvl7pPr>
             <a:lvl8pPr>
+              <a:buNone/>
               <a:defRPr sz="1275" b="0">
                 <a:solidFill>
                   <a:srgbClr val="596678"/>
@@ -5093,6 +5121,7 @@
               </a:defRPr>
             </a:lvl8pPr>
             <a:lvl9pPr>
+              <a:buNone/>
               <a:defRPr sz="1275" b="0">
                 <a:solidFill>
                   <a:srgbClr val="596678"/>
@@ -5105,6 +5134,7 @@
           </a:lstStyle>
           <a:p xmlns:a="http://schemas.openxmlformats.org/drawingml/2006/main">
             <a:pPr>
+              <a:buNone/>
               <a:defRPr sz="1275" b="0">
                 <a:solidFill>
                   <a:srgbClr val="596678"/>
@@ -5170,6 +5200,7 @@
               </a:defRPr>
             </a:defPPr>
             <a:lvl1pPr>
+              <a:buNone/>
               <a:defRPr sz="825" b="0">
                 <a:solidFill>
                   <a:srgbClr val="596678"/>
@@ -5180,6 +5211,7 @@
               </a:defRPr>
             </a:lvl1pPr>
             <a:lvl2pPr>
+              <a:buNone/>
               <a:defRPr sz="825" b="0">
                 <a:solidFill>
                   <a:srgbClr val="596678"/>
@@ -5190,6 +5222,7 @@
               </a:defRPr>
             </a:lvl2pPr>
             <a:lvl3pPr>
+              <a:buNone/>
               <a:defRPr sz="825" b="0">
                 <a:solidFill>
                   <a:srgbClr val="596678"/>
@@ -5200,6 +5233,7 @@
               </a:defRPr>
             </a:lvl3pPr>
             <a:lvl4pPr>
+              <a:buNone/>
               <a:defRPr sz="825" b="0">
                 <a:solidFill>
                   <a:srgbClr val="596678"/>
@@ -5210,6 +5244,7 @@
               </a:defRPr>
             </a:lvl4pPr>
             <a:lvl5pPr>
+              <a:buNone/>
               <a:defRPr sz="825" b="0">
                 <a:solidFill>
                   <a:srgbClr val="596678"/>
@@ -5220,6 +5255,7 @@
               </a:defRPr>
             </a:lvl5pPr>
             <a:lvl6pPr>
+              <a:buNone/>
               <a:defRPr sz="825" b="0">
                 <a:solidFill>
                   <a:srgbClr val="596678"/>
@@ -5230,6 +5266,7 @@
               </a:defRPr>
             </a:lvl6pPr>
             <a:lvl7pPr>
+              <a:buNone/>
               <a:defRPr sz="825" b="0">
                 <a:solidFill>
                   <a:srgbClr val="596678"/>
@@ -5240,6 +5277,7 @@
               </a:defRPr>
             </a:lvl7pPr>
             <a:lvl8pPr>
+              <a:buNone/>
               <a:defRPr sz="825" b="0">
                 <a:solidFill>
                   <a:srgbClr val="596678"/>
@@ -5250,6 +5288,7 @@
               </a:defRPr>
             </a:lvl8pPr>
             <a:lvl9pPr>
+              <a:buNone/>
               <a:defRPr sz="825" b="0">
                 <a:solidFill>
                   <a:srgbClr val="596678"/>
@@ -5262,6 +5301,7 @@
           </a:lstStyle>
           <a:p xmlns:a="http://schemas.openxmlformats.org/drawingml/2006/main">
             <a:pPr>
+              <a:buNone/>
               <a:defRPr sz="825" b="0">
                 <a:solidFill>
                   <a:srgbClr val="596678"/>
@@ -5327,6 +5367,7 @@
               </a:defRPr>
             </a:defPPr>
             <a:lvl1pPr>
+              <a:buNone/>
               <a:defRPr sz="825" b="1">
                 <a:solidFill>
                   <a:srgbClr val="802D42"/>
@@ -5337,6 +5378,7 @@
               </a:defRPr>
             </a:lvl1pPr>
             <a:lvl2pPr>
+              <a:buNone/>
               <a:defRPr sz="825" b="1">
                 <a:solidFill>
                   <a:srgbClr val="802D42"/>
@@ -5347,6 +5389,7 @@
               </a:defRPr>
             </a:lvl2pPr>
             <a:lvl3pPr>
+              <a:buNone/>
               <a:defRPr sz="825" b="1">
                 <a:solidFill>
                   <a:srgbClr val="802D42"/>
@@ -5357,6 +5400,7 @@
               </a:defRPr>
             </a:lvl3pPr>
             <a:lvl4pPr>
+              <a:buNone/>
               <a:defRPr sz="825" b="1">
                 <a:solidFill>
                   <a:srgbClr val="802D42"/>
@@ -5367,6 +5411,7 @@
               </a:defRPr>
             </a:lvl4pPr>
             <a:lvl5pPr>
+              <a:buNone/>
               <a:defRPr sz="825" b="1">
                 <a:solidFill>
                   <a:srgbClr val="802D42"/>
@@ -5377,6 +5422,7 @@
               </a:defRPr>
             </a:lvl5pPr>
             <a:lvl6pPr>
+              <a:buNone/>
               <a:defRPr sz="825" b="1">
                 <a:solidFill>
                   <a:srgbClr val="802D42"/>
@@ -5387,6 +5433,7 @@
               </a:defRPr>
             </a:lvl6pPr>
             <a:lvl7pPr>
+              <a:buNone/>
               <a:defRPr sz="825" b="1">
                 <a:solidFill>
                   <a:srgbClr val="802D42"/>
@@ -5397,6 +5444,7 @@
               </a:defRPr>
             </a:lvl7pPr>
             <a:lvl8pPr>
+              <a:buNone/>
               <a:defRPr sz="825" b="1">
                 <a:solidFill>
                   <a:srgbClr val="802D42"/>
@@ -5407,6 +5455,7 @@
               </a:defRPr>
             </a:lvl8pPr>
             <a:lvl9pPr>
+              <a:buNone/>
               <a:defRPr sz="825" b="1">
                 <a:solidFill>
                   <a:srgbClr val="802D42"/>
@@ -5419,6 +5468,7 @@
           </a:lstStyle>
           <a:p xmlns:a="http://schemas.openxmlformats.org/drawingml/2006/main">
             <a:pPr>
+              <a:buNone/>
               <a:defRPr sz="825" b="1">
                 <a:solidFill>
                   <a:srgbClr val="802D42"/>
@@ -5484,6 +5534,7 @@
               </a:defRPr>
             </a:defPPr>
             <a:lvl1pPr>
+              <a:buNone/>
               <a:defRPr sz="1725" b="0">
                 <a:solidFill>
                   <a:srgbClr val="243244"/>
@@ -5494,6 +5545,7 @@
               </a:defRPr>
             </a:lvl1pPr>
             <a:lvl2pPr>
+              <a:buNone/>
               <a:defRPr sz="1725" b="0">
                 <a:solidFill>
                   <a:srgbClr val="243244"/>
@@ -5504,6 +5556,7 @@
               </a:defRPr>
             </a:lvl2pPr>
             <a:lvl3pPr>
+              <a:buNone/>
               <a:defRPr sz="1725" b="0">
                 <a:solidFill>
                   <a:srgbClr val="243244"/>
@@ -5514,6 +5567,7 @@
               </a:defRPr>
             </a:lvl3pPr>
             <a:lvl4pPr>
+              <a:buNone/>
               <a:defRPr sz="1725" b="0">
                 <a:solidFill>
                   <a:srgbClr val="243244"/>
@@ -5524,6 +5578,7 @@
               </a:defRPr>
             </a:lvl4pPr>
             <a:lvl5pPr>
+              <a:buNone/>
               <a:defRPr sz="1725" b="0">
                 <a:solidFill>
                   <a:srgbClr val="243244"/>
@@ -5534,6 +5589,7 @@
               </a:defRPr>
             </a:lvl5pPr>
             <a:lvl6pPr>
+              <a:buNone/>
               <a:defRPr sz="1725" b="0">
                 <a:solidFill>
                   <a:srgbClr val="243244"/>
@@ -5544,6 +5600,7 @@
               </a:defRPr>
             </a:lvl6pPr>
             <a:lvl7pPr>
+              <a:buNone/>
               <a:defRPr sz="1725" b="0">
                 <a:solidFill>
                   <a:srgbClr val="243244"/>
@@ -5554,6 +5611,7 @@
               </a:defRPr>
             </a:lvl7pPr>
             <a:lvl8pPr>
+              <a:buNone/>
               <a:defRPr sz="1725" b="0">
                 <a:solidFill>
                   <a:srgbClr val="243244"/>
@@ -5564,6 +5622,7 @@
               </a:defRPr>
             </a:lvl8pPr>
             <a:lvl9pPr>
+              <a:buNone/>
               <a:defRPr sz="1725" b="0">
                 <a:solidFill>
                   <a:srgbClr val="243244"/>
@@ -5576,6 +5635,7 @@
           </a:lstStyle>
           <a:p xmlns:a="http://schemas.openxmlformats.org/drawingml/2006/main">
             <a:pPr>
+              <a:buNone/>
               <a:defRPr sz="1725" b="0">
                 <a:solidFill>
                   <a:srgbClr val="243244"/>
@@ -5599,6 +5659,7 @@
           </a:p>
           <a:p xmlns:a="http://schemas.openxmlformats.org/drawingml/2006/main">
             <a:pPr>
+              <a:buNone/>
               <a:defRPr sz="1725" b="0">
                 <a:solidFill>
                   <a:srgbClr val="243244"/>
@@ -5622,6 +5683,7 @@
           </a:p>
           <a:p xmlns:a="http://schemas.openxmlformats.org/drawingml/2006/main">
             <a:pPr>
+              <a:buNone/>
               <a:defRPr sz="1725" b="0">
                 <a:solidFill>
                   <a:srgbClr val="243244"/>
@@ -5645,6 +5707,7 @@
           </a:p>
           <a:p xmlns:a="http://schemas.openxmlformats.org/drawingml/2006/main">
             <a:pPr>
+              <a:buNone/>
               <a:defRPr sz="1725" b="0">
                 <a:solidFill>
                   <a:srgbClr val="243244"/>
@@ -5710,6 +5773,7 @@
               </a:defRPr>
             </a:defPPr>
             <a:lvl1pPr>
+              <a:buNone/>
               <a:defRPr sz="1200" b="0">
                 <a:solidFill>
                   <a:srgbClr val="596678"/>
@@ -5720,6 +5784,7 @@
               </a:defRPr>
             </a:lvl1pPr>
             <a:lvl2pPr>
+              <a:buNone/>
               <a:defRPr sz="1200" b="0">
                 <a:solidFill>
                   <a:srgbClr val="596678"/>
@@ -5730,6 +5795,7 @@
               </a:defRPr>
             </a:lvl2pPr>
             <a:lvl3pPr>
+              <a:buNone/>
               <a:defRPr sz="1200" b="0">
                 <a:solidFill>
                   <a:srgbClr val="596678"/>
@@ -5740,6 +5806,7 @@
               </a:defRPr>
             </a:lvl3pPr>
             <a:lvl4pPr>
+              <a:buNone/>
               <a:defRPr sz="1200" b="0">
                 <a:solidFill>
                   <a:srgbClr val="596678"/>
@@ -5750,6 +5817,7 @@
               </a:defRPr>
             </a:lvl4pPr>
             <a:lvl5pPr>
+              <a:buNone/>
               <a:defRPr sz="1200" b="0">
                 <a:solidFill>
                   <a:srgbClr val="596678"/>
@@ -5760,6 +5828,7 @@
               </a:defRPr>
             </a:lvl5pPr>
             <a:lvl6pPr>
+              <a:buNone/>
               <a:defRPr sz="1200" b="0">
                 <a:solidFill>
                   <a:srgbClr val="596678"/>
@@ -5770,6 +5839,7 @@
               </a:defRPr>
             </a:lvl6pPr>
             <a:lvl7pPr>
+              <a:buNone/>
               <a:defRPr sz="1200" b="0">
                 <a:solidFill>
                   <a:srgbClr val="596678"/>
@@ -5780,6 +5850,7 @@
               </a:defRPr>
             </a:lvl7pPr>
             <a:lvl8pPr>
+              <a:buNone/>
               <a:defRPr sz="1200" b="0">
                 <a:solidFill>
                   <a:srgbClr val="596678"/>
@@ -5790,6 +5861,7 @@
               </a:defRPr>
             </a:lvl8pPr>
             <a:lvl9pPr>
+              <a:buNone/>
               <a:defRPr sz="1200" b="0">
                 <a:solidFill>
                   <a:srgbClr val="596678"/>
@@ -5802,6 +5874,7 @@
           </a:lstStyle>
           <a:p xmlns:a="http://schemas.openxmlformats.org/drawingml/2006/main">
             <a:pPr>
+              <a:buNone/>
               <a:defRPr sz="1200" b="0">
                 <a:solidFill>
                   <a:srgbClr val="596678"/>
@@ -5896,6 +5969,7 @@
               </a:defRPr>
             </a:defPPr>
             <a:lvl1pPr>
+              <a:buNone/>
               <a:defRPr sz="900" b="1">
                 <a:solidFill>
                   <a:srgbClr val="802D42"/>
@@ -5906,6 +5980,7 @@
               </a:defRPr>
             </a:lvl1pPr>
             <a:lvl2pPr>
+              <a:buNone/>
               <a:defRPr sz="900" b="1">
                 <a:solidFill>
                   <a:srgbClr val="802D42"/>
@@ -5916,6 +5991,7 @@
               </a:defRPr>
             </a:lvl2pPr>
             <a:lvl3pPr>
+              <a:buNone/>
               <a:defRPr sz="900" b="1">
                 <a:solidFill>
                   <a:srgbClr val="802D42"/>
@@ -5926,6 +6002,7 @@
               </a:defRPr>
             </a:lvl3pPr>
             <a:lvl4pPr>
+              <a:buNone/>
               <a:defRPr sz="900" b="1">
                 <a:solidFill>
                   <a:srgbClr val="802D42"/>
@@ -5936,6 +6013,7 @@
               </a:defRPr>
             </a:lvl4pPr>
             <a:lvl5pPr>
+              <a:buNone/>
               <a:defRPr sz="900" b="1">
                 <a:solidFill>
                   <a:srgbClr val="802D42"/>
@@ -5946,6 +6024,7 @@
               </a:defRPr>
             </a:lvl5pPr>
             <a:lvl6pPr>
+              <a:buNone/>
               <a:defRPr sz="900" b="1">
                 <a:solidFill>
                   <a:srgbClr val="802D42"/>
@@ -5956,6 +6035,7 @@
               </a:defRPr>
             </a:lvl6pPr>
             <a:lvl7pPr>
+              <a:buNone/>
               <a:defRPr sz="900" b="1">
                 <a:solidFill>
                   <a:srgbClr val="802D42"/>
@@ -5966,6 +6046,7 @@
               </a:defRPr>
             </a:lvl7pPr>
             <a:lvl8pPr>
+              <a:buNone/>
               <a:defRPr sz="900" b="1">
                 <a:solidFill>
                   <a:srgbClr val="802D42"/>
@@ -5976,6 +6057,7 @@
               </a:defRPr>
             </a:lvl8pPr>
             <a:lvl9pPr>
+              <a:buNone/>
               <a:defRPr sz="900" b="1">
                 <a:solidFill>
                   <a:srgbClr val="802D42"/>
@@ -5988,6 +6070,7 @@
           </a:lstStyle>
           <a:p xmlns:a="http://schemas.openxmlformats.org/drawingml/2006/main">
             <a:pPr>
+              <a:buNone/>
               <a:defRPr sz="900" b="1">
                 <a:solidFill>
                   <a:srgbClr val="802D42"/>
@@ -6053,6 +6136,7 @@
               </a:defRPr>
             </a:defPPr>
             <a:lvl1pPr>
+              <a:buNone/>
               <a:defRPr sz="2400" b="1">
                 <a:solidFill>
                   <a:srgbClr val="243244"/>
@@ -6063,6 +6147,7 @@
               </a:defRPr>
             </a:lvl1pPr>
             <a:lvl2pPr>
+              <a:buNone/>
               <a:defRPr sz="2400" b="1">
                 <a:solidFill>
                   <a:srgbClr val="243244"/>
@@ -6073,6 +6158,7 @@
               </a:defRPr>
             </a:lvl2pPr>
             <a:lvl3pPr>
+              <a:buNone/>
               <a:defRPr sz="2400" b="1">
                 <a:solidFill>
                   <a:srgbClr val="243244"/>
@@ -6083,6 +6169,7 @@
               </a:defRPr>
             </a:lvl3pPr>
             <a:lvl4pPr>
+              <a:buNone/>
               <a:defRPr sz="2400" b="1">
                 <a:solidFill>
                   <a:srgbClr val="243244"/>
@@ -6093,6 +6180,7 @@
               </a:defRPr>
             </a:lvl4pPr>
             <a:lvl5pPr>
+              <a:buNone/>
               <a:defRPr sz="2400" b="1">
                 <a:solidFill>
                   <a:srgbClr val="243244"/>
@@ -6103,6 +6191,7 @@
               </a:defRPr>
             </a:lvl5pPr>
             <a:lvl6pPr>
+              <a:buNone/>
               <a:defRPr sz="2400" b="1">
                 <a:solidFill>
                   <a:srgbClr val="243244"/>
@@ -6113,6 +6202,7 @@
               </a:defRPr>
             </a:lvl6pPr>
             <a:lvl7pPr>
+              <a:buNone/>
               <a:defRPr sz="2400" b="1">
                 <a:solidFill>
                   <a:srgbClr val="243244"/>
@@ -6123,6 +6213,7 @@
               </a:defRPr>
             </a:lvl7pPr>
             <a:lvl8pPr>
+              <a:buNone/>
               <a:defRPr sz="2400" b="1">
                 <a:solidFill>
                   <a:srgbClr val="243244"/>
@@ -6133,6 +6224,7 @@
               </a:defRPr>
             </a:lvl8pPr>
             <a:lvl9pPr>
+              <a:buNone/>
               <a:defRPr sz="2400" b="1">
                 <a:solidFill>
                   <a:srgbClr val="243244"/>
@@ -6145,6 +6237,7 @@
           </a:lstStyle>
           <a:p xmlns:a="http://schemas.openxmlformats.org/drawingml/2006/main">
             <a:pPr>
+              <a:buNone/>
               <a:defRPr sz="2400" b="1">
                 <a:solidFill>
                   <a:srgbClr val="243244"/>
@@ -6210,6 +6303,7 @@
               </a:defRPr>
             </a:defPPr>
             <a:lvl1pPr>
+              <a:buNone/>
               <a:defRPr sz="1275" b="0">
                 <a:solidFill>
                   <a:srgbClr val="596678"/>
@@ -6220,6 +6314,7 @@
               </a:defRPr>
             </a:lvl1pPr>
             <a:lvl2pPr>
+              <a:buNone/>
               <a:defRPr sz="1275" b="0">
                 <a:solidFill>
                   <a:srgbClr val="596678"/>
@@ -6230,6 +6325,7 @@
               </a:defRPr>
             </a:lvl2pPr>
             <a:lvl3pPr>
+              <a:buNone/>
               <a:defRPr sz="1275" b="0">
                 <a:solidFill>
                   <a:srgbClr val="596678"/>
@@ -6240,6 +6336,7 @@
               </a:defRPr>
             </a:lvl3pPr>
             <a:lvl4pPr>
+              <a:buNone/>
               <a:defRPr sz="1275" b="0">
                 <a:solidFill>
                   <a:srgbClr val="596678"/>
@@ -6250,6 +6347,7 @@
               </a:defRPr>
             </a:lvl4pPr>
             <a:lvl5pPr>
+              <a:buNone/>
               <a:defRPr sz="1275" b="0">
                 <a:solidFill>
                   <a:srgbClr val="596678"/>
@@ -6260,6 +6358,7 @@
               </a:defRPr>
             </a:lvl5pPr>
             <a:lvl6pPr>
+              <a:buNone/>
               <a:defRPr sz="1275" b="0">
                 <a:solidFill>
                   <a:srgbClr val="596678"/>
@@ -6270,6 +6369,7 @@
               </a:defRPr>
             </a:lvl6pPr>
             <a:lvl7pPr>
+              <a:buNone/>
               <a:defRPr sz="1275" b="0">
                 <a:solidFill>
                   <a:srgbClr val="596678"/>
@@ -6280,6 +6380,7 @@
               </a:defRPr>
             </a:lvl7pPr>
             <a:lvl8pPr>
+              <a:buNone/>
               <a:defRPr sz="1275" b="0">
                 <a:solidFill>
                   <a:srgbClr val="596678"/>
@@ -6290,6 +6391,7 @@
               </a:defRPr>
             </a:lvl8pPr>
             <a:lvl9pPr>
+              <a:buNone/>
               <a:defRPr sz="1275" b="0">
                 <a:solidFill>
                   <a:srgbClr val="596678"/>
@@ -6302,6 +6404,7 @@
           </a:lstStyle>
           <a:p xmlns:a="http://schemas.openxmlformats.org/drawingml/2006/main">
             <a:pPr>
+              <a:buNone/>
               <a:defRPr sz="1275" b="0">
                 <a:solidFill>
                   <a:srgbClr val="596678"/>
@@ -6367,6 +6470,7 @@
               </a:defRPr>
             </a:defPPr>
             <a:lvl1pPr>
+              <a:buNone/>
               <a:defRPr sz="825" b="0">
                 <a:solidFill>
                   <a:srgbClr val="596678"/>
@@ -6377,6 +6481,7 @@
               </a:defRPr>
             </a:lvl1pPr>
             <a:lvl2pPr>
+              <a:buNone/>
               <a:defRPr sz="825" b="0">
                 <a:solidFill>
                   <a:srgbClr val="596678"/>
@@ -6387,6 +6492,7 @@
               </a:defRPr>
             </a:lvl2pPr>
             <a:lvl3pPr>
+              <a:buNone/>
               <a:defRPr sz="825" b="0">
                 <a:solidFill>
                   <a:srgbClr val="596678"/>
@@ -6397,6 +6503,7 @@
               </a:defRPr>
             </a:lvl3pPr>
             <a:lvl4pPr>
+              <a:buNone/>
               <a:defRPr sz="825" b="0">
                 <a:solidFill>
                   <a:srgbClr val="596678"/>
@@ -6407,6 +6514,7 @@
               </a:defRPr>
             </a:lvl4pPr>
             <a:lvl5pPr>
+              <a:buNone/>
               <a:defRPr sz="825" b="0">
                 <a:solidFill>
                   <a:srgbClr val="596678"/>
@@ -6417,6 +6525,7 @@
               </a:defRPr>
             </a:lvl5pPr>
             <a:lvl6pPr>
+              <a:buNone/>
               <a:defRPr sz="825" b="0">
                 <a:solidFill>
                   <a:srgbClr val="596678"/>
@@ -6427,6 +6536,7 @@
               </a:defRPr>
             </a:lvl6pPr>
             <a:lvl7pPr>
+              <a:buNone/>
               <a:defRPr sz="825" b="0">
                 <a:solidFill>
                   <a:srgbClr val="596678"/>
@@ -6437,6 +6547,7 @@
               </a:defRPr>
             </a:lvl7pPr>
             <a:lvl8pPr>
+              <a:buNone/>
               <a:defRPr sz="825" b="0">
                 <a:solidFill>
                   <a:srgbClr val="596678"/>
@@ -6447,6 +6558,7 @@
               </a:defRPr>
             </a:lvl8pPr>
             <a:lvl9pPr>
+              <a:buNone/>
               <a:defRPr sz="825" b="0">
                 <a:solidFill>
                   <a:srgbClr val="596678"/>
@@ -6459,6 +6571,7 @@
           </a:lstStyle>
           <a:p xmlns:a="http://schemas.openxmlformats.org/drawingml/2006/main">
             <a:pPr>
+              <a:buNone/>
               <a:defRPr sz="825" b="0">
                 <a:solidFill>
                   <a:srgbClr val="596678"/>
@@ -6524,6 +6637,7 @@
               </a:defRPr>
             </a:defPPr>
             <a:lvl1pPr>
+              <a:buNone/>
               <a:defRPr sz="825" b="1">
                 <a:solidFill>
                   <a:srgbClr val="802D42"/>
@@ -6534,6 +6648,7 @@
               </a:defRPr>
             </a:lvl1pPr>
             <a:lvl2pPr>
+              <a:buNone/>
               <a:defRPr sz="825" b="1">
                 <a:solidFill>
                   <a:srgbClr val="802D42"/>
@@ -6544,6 +6659,7 @@
               </a:defRPr>
             </a:lvl2pPr>
             <a:lvl3pPr>
+              <a:buNone/>
               <a:defRPr sz="825" b="1">
                 <a:solidFill>
                   <a:srgbClr val="802D42"/>
@@ -6554,6 +6670,7 @@
               </a:defRPr>
             </a:lvl3pPr>
             <a:lvl4pPr>
+              <a:buNone/>
               <a:defRPr sz="825" b="1">
                 <a:solidFill>
                   <a:srgbClr val="802D42"/>
@@ -6564,6 +6681,7 @@
               </a:defRPr>
             </a:lvl4pPr>
             <a:lvl5pPr>
+              <a:buNone/>
               <a:defRPr sz="825" b="1">
                 <a:solidFill>
                   <a:srgbClr val="802D42"/>
@@ -6574,6 +6692,7 @@
               </a:defRPr>
             </a:lvl5pPr>
             <a:lvl6pPr>
+              <a:buNone/>
               <a:defRPr sz="825" b="1">
                 <a:solidFill>
                   <a:srgbClr val="802D42"/>
@@ -6584,6 +6703,7 @@
               </a:defRPr>
             </a:lvl6pPr>
             <a:lvl7pPr>
+              <a:buNone/>
               <a:defRPr sz="825" b="1">
                 <a:solidFill>
                   <a:srgbClr val="802D42"/>
@@ -6594,6 +6714,7 @@
               </a:defRPr>
             </a:lvl7pPr>
             <a:lvl8pPr>
+              <a:buNone/>
               <a:defRPr sz="825" b="1">
                 <a:solidFill>
                   <a:srgbClr val="802D42"/>
@@ -6604,6 +6725,7 @@
               </a:defRPr>
             </a:lvl8pPr>
             <a:lvl9pPr>
+              <a:buNone/>
               <a:defRPr sz="825" b="1">
                 <a:solidFill>
                   <a:srgbClr val="802D42"/>
@@ -6616,6 +6738,7 @@
           </a:lstStyle>
           <a:p xmlns:a="http://schemas.openxmlformats.org/drawingml/2006/main">
             <a:pPr>
+              <a:buNone/>
               <a:defRPr sz="825" b="1">
                 <a:solidFill>
                   <a:srgbClr val="802D42"/>
@@ -6681,6 +6804,7 @@
               </a:defRPr>
             </a:defPPr>
             <a:lvl1pPr>
+              <a:buNone/>
               <a:defRPr sz="1725" b="1">
                 <a:solidFill>
                   <a:srgbClr val="243244"/>
@@ -6691,6 +6815,7 @@
               </a:defRPr>
             </a:lvl1pPr>
             <a:lvl2pPr>
+              <a:buNone/>
               <a:defRPr sz="1725" b="1">
                 <a:solidFill>
                   <a:srgbClr val="243244"/>
@@ -6701,6 +6826,7 @@
               </a:defRPr>
             </a:lvl2pPr>
             <a:lvl3pPr>
+              <a:buNone/>
               <a:defRPr sz="1725" b="1">
                 <a:solidFill>
                   <a:srgbClr val="243244"/>
@@ -6711,6 +6837,7 @@
               </a:defRPr>
             </a:lvl3pPr>
             <a:lvl4pPr>
+              <a:buNone/>
               <a:defRPr sz="1725" b="1">
                 <a:solidFill>
                   <a:srgbClr val="243244"/>
@@ -6721,6 +6848,7 @@
               </a:defRPr>
             </a:lvl4pPr>
             <a:lvl5pPr>
+              <a:buNone/>
               <a:defRPr sz="1725" b="1">
                 <a:solidFill>
                   <a:srgbClr val="243244"/>
@@ -6731,6 +6859,7 @@
               </a:defRPr>
             </a:lvl5pPr>
             <a:lvl6pPr>
+              <a:buNone/>
               <a:defRPr sz="1725" b="1">
                 <a:solidFill>
                   <a:srgbClr val="243244"/>
@@ -6741,6 +6870,7 @@
               </a:defRPr>
             </a:lvl6pPr>
             <a:lvl7pPr>
+              <a:buNone/>
               <a:defRPr sz="1725" b="1">
                 <a:solidFill>
                   <a:srgbClr val="243244"/>
@@ -6751,6 +6881,7 @@
               </a:defRPr>
             </a:lvl7pPr>
             <a:lvl8pPr>
+              <a:buNone/>
               <a:defRPr sz="1725" b="1">
                 <a:solidFill>
                   <a:srgbClr val="243244"/>
@@ -6761,6 +6892,7 @@
               </a:defRPr>
             </a:lvl8pPr>
             <a:lvl9pPr>
+              <a:buNone/>
               <a:defRPr sz="1725" b="1">
                 <a:solidFill>
                   <a:srgbClr val="243244"/>
@@ -6773,6 +6905,7 @@
           </a:lstStyle>
           <a:p xmlns:a="http://schemas.openxmlformats.org/drawingml/2006/main">
             <a:pPr>
+              <a:buNone/>
               <a:defRPr sz="1725" b="1">
                 <a:solidFill>
                   <a:srgbClr val="243244"/>
@@ -6838,6 +6971,7 @@
               </a:defRPr>
             </a:defPPr>
             <a:lvl1pPr>
+              <a:buNone/>
               <a:defRPr sz="1275" b="0">
                 <a:solidFill>
                   <a:srgbClr val="596678"/>
@@ -6848,6 +6982,7 @@
               </a:defRPr>
             </a:lvl1pPr>
             <a:lvl2pPr>
+              <a:buNone/>
               <a:defRPr sz="1275" b="0">
                 <a:solidFill>
                   <a:srgbClr val="596678"/>
@@ -6858,6 +6993,7 @@
               </a:defRPr>
             </a:lvl2pPr>
             <a:lvl3pPr>
+              <a:buNone/>
               <a:defRPr sz="1275" b="0">
                 <a:solidFill>
                   <a:srgbClr val="596678"/>
@@ -6868,6 +7004,7 @@
               </a:defRPr>
             </a:lvl3pPr>
             <a:lvl4pPr>
+              <a:buNone/>
               <a:defRPr sz="1275" b="0">
                 <a:solidFill>
                   <a:srgbClr val="596678"/>
@@ -6878,6 +7015,7 @@
               </a:defRPr>
             </a:lvl4pPr>
             <a:lvl5pPr>
+              <a:buNone/>
               <a:defRPr sz="1275" b="0">
                 <a:solidFill>
                   <a:srgbClr val="596678"/>
@@ -6888,6 +7026,7 @@
               </a:defRPr>
             </a:lvl5pPr>
             <a:lvl6pPr>
+              <a:buNone/>
               <a:defRPr sz="1275" b="0">
                 <a:solidFill>
                   <a:srgbClr val="596678"/>
@@ -6898,6 +7037,7 @@
               </a:defRPr>
             </a:lvl6pPr>
             <a:lvl7pPr>
+              <a:buNone/>
               <a:defRPr sz="1275" b="0">
                 <a:solidFill>
                   <a:srgbClr val="596678"/>
@@ -6908,6 +7048,7 @@
               </a:defRPr>
             </a:lvl7pPr>
             <a:lvl8pPr>
+              <a:buNone/>
               <a:defRPr sz="1275" b="0">
                 <a:solidFill>
                   <a:srgbClr val="596678"/>
@@ -6918,6 +7059,7 @@
               </a:defRPr>
             </a:lvl8pPr>
             <a:lvl9pPr>
+              <a:buNone/>
               <a:defRPr sz="1275" b="0">
                 <a:solidFill>
                   <a:srgbClr val="596678"/>
@@ -6930,6 +7072,7 @@
           </a:lstStyle>
           <a:p xmlns:a="http://schemas.openxmlformats.org/drawingml/2006/main">
             <a:pPr>
+              <a:buNone/>
               <a:defRPr sz="1275" b="0">
                 <a:solidFill>
                   <a:srgbClr val="596678"/>
@@ -6995,6 +7138,7 @@
               </a:defRPr>
             </a:defPPr>
             <a:lvl1pPr>
+              <a:buNone/>
               <a:defRPr sz="1725" b="1">
                 <a:solidFill>
                   <a:srgbClr val="243244"/>
@@ -7005,6 +7149,7 @@
               </a:defRPr>
             </a:lvl1pPr>
             <a:lvl2pPr>
+              <a:buNone/>
               <a:defRPr sz="1725" b="1">
                 <a:solidFill>
                   <a:srgbClr val="243244"/>
@@ -7015,6 +7160,7 @@
               </a:defRPr>
             </a:lvl2pPr>
             <a:lvl3pPr>
+              <a:buNone/>
               <a:defRPr sz="1725" b="1">
                 <a:solidFill>
                   <a:srgbClr val="243244"/>
@@ -7025,6 +7171,7 @@
               </a:defRPr>
             </a:lvl3pPr>
             <a:lvl4pPr>
+              <a:buNone/>
               <a:defRPr sz="1725" b="1">
                 <a:solidFill>
                   <a:srgbClr val="243244"/>
@@ -7035,6 +7182,7 @@
               </a:defRPr>
             </a:lvl4pPr>
             <a:lvl5pPr>
+              <a:buNone/>
               <a:defRPr sz="1725" b="1">
                 <a:solidFill>
                   <a:srgbClr val="243244"/>
@@ -7045,6 +7193,7 @@
               </a:defRPr>
             </a:lvl5pPr>
             <a:lvl6pPr>
+              <a:buNone/>
               <a:defRPr sz="1725" b="1">
                 <a:solidFill>
                   <a:srgbClr val="243244"/>
@@ -7055,6 +7204,7 @@
               </a:defRPr>
             </a:lvl6pPr>
             <a:lvl7pPr>
+              <a:buNone/>
               <a:defRPr sz="1725" b="1">
                 <a:solidFill>
                   <a:srgbClr val="243244"/>
@@ -7065,6 +7215,7 @@
               </a:defRPr>
             </a:lvl7pPr>
             <a:lvl8pPr>
+              <a:buNone/>
               <a:defRPr sz="1725" b="1">
                 <a:solidFill>
                   <a:srgbClr val="243244"/>
@@ -7075,6 +7226,7 @@
               </a:defRPr>
             </a:lvl8pPr>
             <a:lvl9pPr>
+              <a:buNone/>
               <a:defRPr sz="1725" b="1">
                 <a:solidFill>
                   <a:srgbClr val="243244"/>
@@ -7087,6 +7239,7 @@
           </a:lstStyle>
           <a:p xmlns:a="http://schemas.openxmlformats.org/drawingml/2006/main">
             <a:pPr>
+              <a:buNone/>
               <a:defRPr sz="1725" b="1">
                 <a:solidFill>
                   <a:srgbClr val="243244"/>
@@ -7152,6 +7305,7 @@
               </a:defRPr>
             </a:defPPr>
             <a:lvl1pPr>
+              <a:buNone/>
               <a:defRPr sz="1275" b="0">
                 <a:solidFill>
                   <a:srgbClr val="596678"/>
@@ -7162,6 +7316,7 @@
               </a:defRPr>
             </a:lvl1pPr>
             <a:lvl2pPr>
+              <a:buNone/>
               <a:defRPr sz="1275" b="0">
                 <a:solidFill>
                   <a:srgbClr val="596678"/>
@@ -7172,6 +7327,7 @@
               </a:defRPr>
             </a:lvl2pPr>
             <a:lvl3pPr>
+              <a:buNone/>
               <a:defRPr sz="1275" b="0">
                 <a:solidFill>
                   <a:srgbClr val="596678"/>
@@ -7182,6 +7338,7 @@
               </a:defRPr>
             </a:lvl3pPr>
             <a:lvl4pPr>
+              <a:buNone/>
               <a:defRPr sz="1275" b="0">
                 <a:solidFill>
                   <a:srgbClr val="596678"/>
@@ -7192,6 +7349,7 @@
               </a:defRPr>
             </a:lvl4pPr>
             <a:lvl5pPr>
+              <a:buNone/>
               <a:defRPr sz="1275" b="0">
                 <a:solidFill>
                   <a:srgbClr val="596678"/>
@@ -7202,6 +7360,7 @@
               </a:defRPr>
             </a:lvl5pPr>
             <a:lvl6pPr>
+              <a:buNone/>
               <a:defRPr sz="1275" b="0">
                 <a:solidFill>
                   <a:srgbClr val="596678"/>
@@ -7212,6 +7371,7 @@
               </a:defRPr>
             </a:lvl6pPr>
             <a:lvl7pPr>
+              <a:buNone/>
               <a:defRPr sz="1275" b="0">
                 <a:solidFill>
                   <a:srgbClr val="596678"/>
@@ -7222,6 +7382,7 @@
               </a:defRPr>
             </a:lvl7pPr>
             <a:lvl8pPr>
+              <a:buNone/>
               <a:defRPr sz="1275" b="0">
                 <a:solidFill>
                   <a:srgbClr val="596678"/>
@@ -7232,6 +7393,7 @@
               </a:defRPr>
             </a:lvl8pPr>
             <a:lvl9pPr>
+              <a:buNone/>
               <a:defRPr sz="1275" b="0">
                 <a:solidFill>
                   <a:srgbClr val="596678"/>
@@ -7244,6 +7406,7 @@
           </a:lstStyle>
           <a:p xmlns:a="http://schemas.openxmlformats.org/drawingml/2006/main">
             <a:pPr>
+              <a:buNone/>
               <a:defRPr sz="1275" b="0">
                 <a:solidFill>
                   <a:srgbClr val="596678"/>
@@ -7309,6 +7472,7 @@
               </a:defRPr>
             </a:defPPr>
             <a:lvl1pPr>
+              <a:buNone/>
               <a:defRPr sz="1725" b="1">
                 <a:solidFill>
                   <a:srgbClr val="243244"/>
@@ -7319,6 +7483,7 @@
               </a:defRPr>
             </a:lvl1pPr>
             <a:lvl2pPr>
+              <a:buNone/>
               <a:defRPr sz="1725" b="1">
                 <a:solidFill>
                   <a:srgbClr val="243244"/>
@@ -7329,6 +7494,7 @@
               </a:defRPr>
             </a:lvl2pPr>
             <a:lvl3pPr>
+              <a:buNone/>
               <a:defRPr sz="1725" b="1">
                 <a:solidFill>
                   <a:srgbClr val="243244"/>
@@ -7339,6 +7505,7 @@
               </a:defRPr>
             </a:lvl3pPr>
             <a:lvl4pPr>
+              <a:buNone/>
               <a:defRPr sz="1725" b="1">
                 <a:solidFill>
                   <a:srgbClr val="243244"/>
@@ -7349,6 +7516,7 @@
               </a:defRPr>
             </a:lvl4pPr>
             <a:lvl5pPr>
+              <a:buNone/>
               <a:defRPr sz="1725" b="1">
                 <a:solidFill>
                   <a:srgbClr val="243244"/>
@@ -7359,6 +7527,7 @@
               </a:defRPr>
             </a:lvl5pPr>
             <a:lvl6pPr>
+              <a:buNone/>
               <a:defRPr sz="1725" b="1">
                 <a:solidFill>
                   <a:srgbClr val="243244"/>
@@ -7369,6 +7538,7 @@
               </a:defRPr>
             </a:lvl6pPr>
             <a:lvl7pPr>
+              <a:buNone/>
               <a:defRPr sz="1725" b="1">
                 <a:solidFill>
                   <a:srgbClr val="243244"/>
@@ -7379,6 +7549,7 @@
               </a:defRPr>
             </a:lvl7pPr>
             <a:lvl8pPr>
+              <a:buNone/>
               <a:defRPr sz="1725" b="1">
                 <a:solidFill>
                   <a:srgbClr val="243244"/>
@@ -7389,6 +7560,7 @@
               </a:defRPr>
             </a:lvl8pPr>
             <a:lvl9pPr>
+              <a:buNone/>
               <a:defRPr sz="1725" b="1">
                 <a:solidFill>
                   <a:srgbClr val="243244"/>
@@ -7401,6 +7573,7 @@
           </a:lstStyle>
           <a:p xmlns:a="http://schemas.openxmlformats.org/drawingml/2006/main">
             <a:pPr>
+              <a:buNone/>
               <a:defRPr sz="1725" b="1">
                 <a:solidFill>
                   <a:srgbClr val="243244"/>
@@ -7466,6 +7639,7 @@
               </a:defRPr>
             </a:defPPr>
             <a:lvl1pPr>
+              <a:buNone/>
               <a:defRPr sz="1275" b="0">
                 <a:solidFill>
                   <a:srgbClr val="596678"/>
@@ -7476,6 +7650,7 @@
               </a:defRPr>
             </a:lvl1pPr>
             <a:lvl2pPr>
+              <a:buNone/>
               <a:defRPr sz="1275" b="0">
                 <a:solidFill>
                   <a:srgbClr val="596678"/>
@@ -7486,6 +7661,7 @@
               </a:defRPr>
             </a:lvl2pPr>
             <a:lvl3pPr>
+              <a:buNone/>
               <a:defRPr sz="1275" b="0">
                 <a:solidFill>
                   <a:srgbClr val="596678"/>
@@ -7496,6 +7672,7 @@
               </a:defRPr>
             </a:lvl3pPr>
             <a:lvl4pPr>
+              <a:buNone/>
               <a:defRPr sz="1275" b="0">
                 <a:solidFill>
                   <a:srgbClr val="596678"/>
@@ -7506,6 +7683,7 @@
               </a:defRPr>
             </a:lvl4pPr>
             <a:lvl5pPr>
+              <a:buNone/>
               <a:defRPr sz="1275" b="0">
                 <a:solidFill>
                   <a:srgbClr val="596678"/>
@@ -7516,6 +7694,7 @@
               </a:defRPr>
             </a:lvl5pPr>
             <a:lvl6pPr>
+              <a:buNone/>
               <a:defRPr sz="1275" b="0">
                 <a:solidFill>
                   <a:srgbClr val="596678"/>
@@ -7526,6 +7705,7 @@
               </a:defRPr>
             </a:lvl6pPr>
             <a:lvl7pPr>
+              <a:buNone/>
               <a:defRPr sz="1275" b="0">
                 <a:solidFill>
                   <a:srgbClr val="596678"/>
@@ -7536,6 +7716,7 @@
               </a:defRPr>
             </a:lvl7pPr>
             <a:lvl8pPr>
+              <a:buNone/>
               <a:defRPr sz="1275" b="0">
                 <a:solidFill>
                   <a:srgbClr val="596678"/>
@@ -7546,6 +7727,7 @@
               </a:defRPr>
             </a:lvl8pPr>
             <a:lvl9pPr>
+              <a:buNone/>
               <a:defRPr sz="1275" b="0">
                 <a:solidFill>
                   <a:srgbClr val="596678"/>
@@ -7558,6 +7740,7 @@
           </a:lstStyle>
           <a:p xmlns:a="http://schemas.openxmlformats.org/drawingml/2006/main">
             <a:pPr>
+              <a:buNone/>
               <a:defRPr sz="1275" b="0">
                 <a:solidFill>
                   <a:srgbClr val="596678"/>
@@ -7652,6 +7835,7 @@
               </a:defRPr>
             </a:defPPr>
             <a:lvl1pPr>
+              <a:buNone/>
               <a:defRPr sz="900" b="1">
                 <a:solidFill>
                   <a:srgbClr val="802D42"/>
@@ -7662,6 +7846,7 @@
               </a:defRPr>
             </a:lvl1pPr>
             <a:lvl2pPr>
+              <a:buNone/>
               <a:defRPr sz="900" b="1">
                 <a:solidFill>
                   <a:srgbClr val="802D42"/>
@@ -7672,6 +7857,7 @@
               </a:defRPr>
             </a:lvl2pPr>
             <a:lvl3pPr>
+              <a:buNone/>
               <a:defRPr sz="900" b="1">
                 <a:solidFill>
                   <a:srgbClr val="802D42"/>
@@ -7682,6 +7868,7 @@
               </a:defRPr>
             </a:lvl3pPr>
             <a:lvl4pPr>
+              <a:buNone/>
               <a:defRPr sz="900" b="1">
                 <a:solidFill>
                   <a:srgbClr val="802D42"/>
@@ -7692,6 +7879,7 @@
               </a:defRPr>
             </a:lvl4pPr>
             <a:lvl5pPr>
+              <a:buNone/>
               <a:defRPr sz="900" b="1">
                 <a:solidFill>
                   <a:srgbClr val="802D42"/>
@@ -7702,6 +7890,7 @@
               </a:defRPr>
             </a:lvl5pPr>
             <a:lvl6pPr>
+              <a:buNone/>
               <a:defRPr sz="900" b="1">
                 <a:solidFill>
                   <a:srgbClr val="802D42"/>
@@ -7712,6 +7901,7 @@
               </a:defRPr>
             </a:lvl6pPr>
             <a:lvl7pPr>
+              <a:buNone/>
               <a:defRPr sz="900" b="1">
                 <a:solidFill>
                   <a:srgbClr val="802D42"/>
@@ -7722,6 +7912,7 @@
               </a:defRPr>
             </a:lvl7pPr>
             <a:lvl8pPr>
+              <a:buNone/>
               <a:defRPr sz="900" b="1">
                 <a:solidFill>
                   <a:srgbClr val="802D42"/>
@@ -7732,6 +7923,7 @@
               </a:defRPr>
             </a:lvl8pPr>
             <a:lvl9pPr>
+              <a:buNone/>
               <a:defRPr sz="900" b="1">
                 <a:solidFill>
                   <a:srgbClr val="802D42"/>
@@ -7744,6 +7936,7 @@
           </a:lstStyle>
           <a:p xmlns:a="http://schemas.openxmlformats.org/drawingml/2006/main">
             <a:pPr>
+              <a:buNone/>
               <a:defRPr sz="900" b="1">
                 <a:solidFill>
                   <a:srgbClr val="802D42"/>
@@ -7809,6 +8002,7 @@
               </a:defRPr>
             </a:defPPr>
             <a:lvl1pPr>
+              <a:buNone/>
               <a:defRPr sz="2400" b="1">
                 <a:solidFill>
                   <a:srgbClr val="243244"/>
@@ -7819,6 +8013,7 @@
               </a:defRPr>
             </a:lvl1pPr>
             <a:lvl2pPr>
+              <a:buNone/>
               <a:defRPr sz="2400" b="1">
                 <a:solidFill>
                   <a:srgbClr val="243244"/>
@@ -7829,6 +8024,7 @@
               </a:defRPr>
             </a:lvl2pPr>
             <a:lvl3pPr>
+              <a:buNone/>
               <a:defRPr sz="2400" b="1">
                 <a:solidFill>
                   <a:srgbClr val="243244"/>
@@ -7839,6 +8035,7 @@
               </a:defRPr>
             </a:lvl3pPr>
             <a:lvl4pPr>
+              <a:buNone/>
               <a:defRPr sz="2400" b="1">
                 <a:solidFill>
                   <a:srgbClr val="243244"/>
@@ -7849,6 +8046,7 @@
               </a:defRPr>
             </a:lvl4pPr>
             <a:lvl5pPr>
+              <a:buNone/>
               <a:defRPr sz="2400" b="1">
                 <a:solidFill>
                   <a:srgbClr val="243244"/>
@@ -7859,6 +8057,7 @@
               </a:defRPr>
             </a:lvl5pPr>
             <a:lvl6pPr>
+              <a:buNone/>
               <a:defRPr sz="2400" b="1">
                 <a:solidFill>
                   <a:srgbClr val="243244"/>
@@ -7869,6 +8068,7 @@
               </a:defRPr>
             </a:lvl6pPr>
             <a:lvl7pPr>
+              <a:buNone/>
               <a:defRPr sz="2400" b="1">
                 <a:solidFill>
                   <a:srgbClr val="243244"/>
@@ -7879,6 +8079,7 @@
               </a:defRPr>
             </a:lvl7pPr>
             <a:lvl8pPr>
+              <a:buNone/>
               <a:defRPr sz="2400" b="1">
                 <a:solidFill>
                   <a:srgbClr val="243244"/>
@@ -7889,6 +8090,7 @@
               </a:defRPr>
             </a:lvl8pPr>
             <a:lvl9pPr>
+              <a:buNone/>
               <a:defRPr sz="2400" b="1">
                 <a:solidFill>
                   <a:srgbClr val="243244"/>
@@ -7901,6 +8103,7 @@
           </a:lstStyle>
           <a:p xmlns:a="http://schemas.openxmlformats.org/drawingml/2006/main">
             <a:pPr>
+              <a:buNone/>
               <a:defRPr sz="2400" b="1">
                 <a:solidFill>
                   <a:srgbClr val="243244"/>
@@ -7966,6 +8169,7 @@
               </a:defRPr>
             </a:defPPr>
             <a:lvl1pPr>
+              <a:buNone/>
               <a:defRPr sz="1275" b="0">
                 <a:solidFill>
                   <a:srgbClr val="596678"/>
@@ -7976,6 +8180,7 @@
               </a:defRPr>
             </a:lvl1pPr>
             <a:lvl2pPr>
+              <a:buNone/>
               <a:defRPr sz="1275" b="0">
                 <a:solidFill>
                   <a:srgbClr val="596678"/>
@@ -7986,6 +8191,7 @@
               </a:defRPr>
             </a:lvl2pPr>
             <a:lvl3pPr>
+              <a:buNone/>
               <a:defRPr sz="1275" b="0">
                 <a:solidFill>
                   <a:srgbClr val="596678"/>
@@ -7996,6 +8202,7 @@
               </a:defRPr>
             </a:lvl3pPr>
             <a:lvl4pPr>
+              <a:buNone/>
               <a:defRPr sz="1275" b="0">
                 <a:solidFill>
                   <a:srgbClr val="596678"/>
@@ -8006,6 +8213,7 @@
               </a:defRPr>
             </a:lvl4pPr>
             <a:lvl5pPr>
+              <a:buNone/>
               <a:defRPr sz="1275" b="0">
                 <a:solidFill>
                   <a:srgbClr val="596678"/>
@@ -8016,6 +8224,7 @@
               </a:defRPr>
             </a:lvl5pPr>
             <a:lvl6pPr>
+              <a:buNone/>
               <a:defRPr sz="1275" b="0">
                 <a:solidFill>
                   <a:srgbClr val="596678"/>
@@ -8026,6 +8235,7 @@
               </a:defRPr>
             </a:lvl6pPr>
             <a:lvl7pPr>
+              <a:buNone/>
               <a:defRPr sz="1275" b="0">
                 <a:solidFill>
                   <a:srgbClr val="596678"/>
@@ -8036,6 +8246,7 @@
               </a:defRPr>
             </a:lvl7pPr>
             <a:lvl8pPr>
+              <a:buNone/>
               <a:defRPr sz="1275" b="0">
                 <a:solidFill>
                   <a:srgbClr val="596678"/>
@@ -8046,6 +8257,7 @@
               </a:defRPr>
             </a:lvl8pPr>
             <a:lvl9pPr>
+              <a:buNone/>
               <a:defRPr sz="1275" b="0">
                 <a:solidFill>
                   <a:srgbClr val="596678"/>
@@ -8058,6 +8270,7 @@
           </a:lstStyle>
           <a:p xmlns:a="http://schemas.openxmlformats.org/drawingml/2006/main">
             <a:pPr>
+              <a:buNone/>
               <a:defRPr sz="1275" b="0">
                 <a:solidFill>
                   <a:srgbClr val="596678"/>
@@ -8123,6 +8336,7 @@
               </a:defRPr>
             </a:defPPr>
             <a:lvl1pPr>
+              <a:buNone/>
               <a:defRPr sz="825" b="0">
                 <a:solidFill>
                   <a:srgbClr val="596678"/>
@@ -8133,6 +8347,7 @@
               </a:defRPr>
             </a:lvl1pPr>
             <a:lvl2pPr>
+              <a:buNone/>
               <a:defRPr sz="825" b="0">
                 <a:solidFill>
                   <a:srgbClr val="596678"/>
@@ -8143,6 +8358,7 @@
               </a:defRPr>
             </a:lvl2pPr>
             <a:lvl3pPr>
+              <a:buNone/>
               <a:defRPr sz="825" b="0">
                 <a:solidFill>
                   <a:srgbClr val="596678"/>
@@ -8153,6 +8369,7 @@
               </a:defRPr>
             </a:lvl3pPr>
             <a:lvl4pPr>
+              <a:buNone/>
               <a:defRPr sz="825" b="0">
                 <a:solidFill>
                   <a:srgbClr val="596678"/>
@@ -8163,6 +8380,7 @@
               </a:defRPr>
             </a:lvl4pPr>
             <a:lvl5pPr>
+              <a:buNone/>
               <a:defRPr sz="825" b="0">
                 <a:solidFill>
                   <a:srgbClr val="596678"/>
@@ -8173,6 +8391,7 @@
               </a:defRPr>
             </a:lvl5pPr>
             <a:lvl6pPr>
+              <a:buNone/>
               <a:defRPr sz="825" b="0">
                 <a:solidFill>
                   <a:srgbClr val="596678"/>
@@ -8183,6 +8402,7 @@
               </a:defRPr>
             </a:lvl6pPr>
             <a:lvl7pPr>
+              <a:buNone/>
               <a:defRPr sz="825" b="0">
                 <a:solidFill>
                   <a:srgbClr val="596678"/>
@@ -8193,6 +8413,7 @@
               </a:defRPr>
             </a:lvl7pPr>
             <a:lvl8pPr>
+              <a:buNone/>
               <a:defRPr sz="825" b="0">
                 <a:solidFill>
                   <a:srgbClr val="596678"/>
@@ -8203,6 +8424,7 @@
               </a:defRPr>
             </a:lvl8pPr>
             <a:lvl9pPr>
+              <a:buNone/>
               <a:defRPr sz="825" b="0">
                 <a:solidFill>
                   <a:srgbClr val="596678"/>
@@ -8215,6 +8437,7 @@
           </a:lstStyle>
           <a:p xmlns:a="http://schemas.openxmlformats.org/drawingml/2006/main">
             <a:pPr>
+              <a:buNone/>
               <a:defRPr sz="825" b="0">
                 <a:solidFill>
                   <a:srgbClr val="596678"/>
@@ -8280,6 +8503,7 @@
               </a:defRPr>
             </a:defPPr>
             <a:lvl1pPr>
+              <a:buNone/>
               <a:defRPr sz="825" b="1">
                 <a:solidFill>
                   <a:srgbClr val="802D42"/>
@@ -8290,6 +8514,7 @@
               </a:defRPr>
             </a:lvl1pPr>
             <a:lvl2pPr>
+              <a:buNone/>
               <a:defRPr sz="825" b="1">
                 <a:solidFill>
                   <a:srgbClr val="802D42"/>
@@ -8300,6 +8525,7 @@
               </a:defRPr>
             </a:lvl2pPr>
             <a:lvl3pPr>
+              <a:buNone/>
               <a:defRPr sz="825" b="1">
                 <a:solidFill>
                   <a:srgbClr val="802D42"/>
@@ -8310,6 +8536,7 @@
               </a:defRPr>
             </a:lvl3pPr>
             <a:lvl4pPr>
+              <a:buNone/>
               <a:defRPr sz="825" b="1">
                 <a:solidFill>
                   <a:srgbClr val="802D42"/>
@@ -8320,6 +8547,7 @@
               </a:defRPr>
             </a:lvl4pPr>
             <a:lvl5pPr>
+              <a:buNone/>
               <a:defRPr sz="825" b="1">
                 <a:solidFill>
                   <a:srgbClr val="802D42"/>
@@ -8330,6 +8558,7 @@
               </a:defRPr>
             </a:lvl5pPr>
             <a:lvl6pPr>
+              <a:buNone/>
               <a:defRPr sz="825" b="1">
                 <a:solidFill>
                   <a:srgbClr val="802D42"/>
@@ -8340,6 +8569,7 @@
               </a:defRPr>
             </a:lvl6pPr>
             <a:lvl7pPr>
+              <a:buNone/>
               <a:defRPr sz="825" b="1">
                 <a:solidFill>
                   <a:srgbClr val="802D42"/>
@@ -8350,6 +8580,7 @@
               </a:defRPr>
             </a:lvl7pPr>
             <a:lvl8pPr>
+              <a:buNone/>
               <a:defRPr sz="825" b="1">
                 <a:solidFill>
                   <a:srgbClr val="802D42"/>
@@ -8360,6 +8591,7 @@
               </a:defRPr>
             </a:lvl8pPr>
             <a:lvl9pPr>
+              <a:buNone/>
               <a:defRPr sz="825" b="1">
                 <a:solidFill>
                   <a:srgbClr val="802D42"/>
@@ -8372,6 +8604,7 @@
           </a:lstStyle>
           <a:p xmlns:a="http://schemas.openxmlformats.org/drawingml/2006/main">
             <a:pPr>
+              <a:buNone/>
               <a:defRPr sz="825" b="1">
                 <a:solidFill>
                   <a:srgbClr val="802D42"/>
@@ -8437,6 +8670,7 @@
               </a:defRPr>
             </a:defPPr>
             <a:lvl1pPr>
+              <a:buNone/>
               <a:defRPr sz="1725" b="1">
                 <a:solidFill>
                   <a:srgbClr val="243244"/>
@@ -8447,6 +8681,7 @@
               </a:defRPr>
             </a:lvl1pPr>
             <a:lvl2pPr>
+              <a:buNone/>
               <a:defRPr sz="1725" b="1">
                 <a:solidFill>
                   <a:srgbClr val="243244"/>
@@ -8457,6 +8692,7 @@
               </a:defRPr>
             </a:lvl2pPr>
             <a:lvl3pPr>
+              <a:buNone/>
               <a:defRPr sz="1725" b="1">
                 <a:solidFill>
                   <a:srgbClr val="243244"/>
@@ -8467,6 +8703,7 @@
               </a:defRPr>
             </a:lvl3pPr>
             <a:lvl4pPr>
+              <a:buNone/>
               <a:defRPr sz="1725" b="1">
                 <a:solidFill>
                   <a:srgbClr val="243244"/>
@@ -8477,6 +8714,7 @@
               </a:defRPr>
             </a:lvl4pPr>
             <a:lvl5pPr>
+              <a:buNone/>
               <a:defRPr sz="1725" b="1">
                 <a:solidFill>
                   <a:srgbClr val="243244"/>
@@ -8487,6 +8725,7 @@
               </a:defRPr>
             </a:lvl5pPr>
             <a:lvl6pPr>
+              <a:buNone/>
               <a:defRPr sz="1725" b="1">
                 <a:solidFill>
                   <a:srgbClr val="243244"/>
@@ -8497,6 +8736,7 @@
               </a:defRPr>
             </a:lvl6pPr>
             <a:lvl7pPr>
+              <a:buNone/>
               <a:defRPr sz="1725" b="1">
                 <a:solidFill>
                   <a:srgbClr val="243244"/>
@@ -8507,6 +8747,7 @@
               </a:defRPr>
             </a:lvl7pPr>
             <a:lvl8pPr>
+              <a:buNone/>
               <a:defRPr sz="1725" b="1">
                 <a:solidFill>
                   <a:srgbClr val="243244"/>
@@ -8517,6 +8758,7 @@
               </a:defRPr>
             </a:lvl8pPr>
             <a:lvl9pPr>
+              <a:buNone/>
               <a:defRPr sz="1725" b="1">
                 <a:solidFill>
                   <a:srgbClr val="243244"/>
@@ -8529,6 +8771,7 @@
           </a:lstStyle>
           <a:p xmlns:a="http://schemas.openxmlformats.org/drawingml/2006/main">
             <a:pPr>
+              <a:buNone/>
               <a:defRPr sz="1725" b="1">
                 <a:solidFill>
                   <a:srgbClr val="243244"/>
@@ -8594,6 +8837,7 @@
               </a:defRPr>
             </a:defPPr>
             <a:lvl1pPr>
+              <a:buNone/>
               <a:defRPr sz="1275" b="0">
                 <a:solidFill>
                   <a:srgbClr val="596678"/>
@@ -8604,6 +8848,7 @@
               </a:defRPr>
             </a:lvl1pPr>
             <a:lvl2pPr>
+              <a:buNone/>
               <a:defRPr sz="1275" b="0">
                 <a:solidFill>
                   <a:srgbClr val="596678"/>
@@ -8614,6 +8859,7 @@
               </a:defRPr>
             </a:lvl2pPr>
             <a:lvl3pPr>
+              <a:buNone/>
               <a:defRPr sz="1275" b="0">
                 <a:solidFill>
                   <a:srgbClr val="596678"/>
@@ -8624,6 +8870,7 @@
               </a:defRPr>
             </a:lvl3pPr>
             <a:lvl4pPr>
+              <a:buNone/>
               <a:defRPr sz="1275" b="0">
                 <a:solidFill>
                   <a:srgbClr val="596678"/>
@@ -8634,6 +8881,7 @@
               </a:defRPr>
             </a:lvl4pPr>
             <a:lvl5pPr>
+              <a:buNone/>
               <a:defRPr sz="1275" b="0">
                 <a:solidFill>
                   <a:srgbClr val="596678"/>
@@ -8644,6 +8892,7 @@
               </a:defRPr>
             </a:lvl5pPr>
             <a:lvl6pPr>
+              <a:buNone/>
               <a:defRPr sz="1275" b="0">
                 <a:solidFill>
                   <a:srgbClr val="596678"/>
@@ -8654,6 +8903,7 @@
               </a:defRPr>
             </a:lvl6pPr>
             <a:lvl7pPr>
+              <a:buNone/>
               <a:defRPr sz="1275" b="0">
                 <a:solidFill>
                   <a:srgbClr val="596678"/>
@@ -8664,6 +8914,7 @@
               </a:defRPr>
             </a:lvl7pPr>
             <a:lvl8pPr>
+              <a:buNone/>
               <a:defRPr sz="1275" b="0">
                 <a:solidFill>
                   <a:srgbClr val="596678"/>
@@ -8674,6 +8925,7 @@
               </a:defRPr>
             </a:lvl8pPr>
             <a:lvl9pPr>
+              <a:buNone/>
               <a:defRPr sz="1275" b="0">
                 <a:solidFill>
                   <a:srgbClr val="596678"/>
@@ -8686,6 +8938,7 @@
           </a:lstStyle>
           <a:p xmlns:a="http://schemas.openxmlformats.org/drawingml/2006/main">
             <a:pPr>
+              <a:buNone/>
               <a:defRPr sz="1275" b="0">
                 <a:solidFill>
                   <a:srgbClr val="596678"/>
@@ -8751,6 +9004,7 @@
               </a:defRPr>
             </a:defPPr>
             <a:lvl1pPr>
+              <a:buNone/>
               <a:defRPr sz="1725" b="1">
                 <a:solidFill>
                   <a:srgbClr val="243244"/>
@@ -8761,6 +9015,7 @@
               </a:defRPr>
             </a:lvl1pPr>
             <a:lvl2pPr>
+              <a:buNone/>
               <a:defRPr sz="1725" b="1">
                 <a:solidFill>
                   <a:srgbClr val="243244"/>
@@ -8771,6 +9026,7 @@
               </a:defRPr>
             </a:lvl2pPr>
             <a:lvl3pPr>
+              <a:buNone/>
               <a:defRPr sz="1725" b="1">
                 <a:solidFill>
                   <a:srgbClr val="243244"/>
@@ -8781,6 +9037,7 @@
               </a:defRPr>
             </a:lvl3pPr>
             <a:lvl4pPr>
+              <a:buNone/>
               <a:defRPr sz="1725" b="1">
                 <a:solidFill>
                   <a:srgbClr val="243244"/>
@@ -8791,6 +9048,7 @@
               </a:defRPr>
             </a:lvl4pPr>
             <a:lvl5pPr>
+              <a:buNone/>
               <a:defRPr sz="1725" b="1">
                 <a:solidFill>
                   <a:srgbClr val="243244"/>
@@ -8801,6 +9059,7 @@
               </a:defRPr>
             </a:lvl5pPr>
             <a:lvl6pPr>
+              <a:buNone/>
               <a:defRPr sz="1725" b="1">
                 <a:solidFill>
                   <a:srgbClr val="243244"/>
@@ -8811,6 +9070,7 @@
               </a:defRPr>
             </a:lvl6pPr>
             <a:lvl7pPr>
+              <a:buNone/>
               <a:defRPr sz="1725" b="1">
                 <a:solidFill>
                   <a:srgbClr val="243244"/>
@@ -8821,6 +9081,7 @@
               </a:defRPr>
             </a:lvl7pPr>
             <a:lvl8pPr>
+              <a:buNone/>
               <a:defRPr sz="1725" b="1">
                 <a:solidFill>
                   <a:srgbClr val="243244"/>
@@ -8831,6 +9092,7 @@
               </a:defRPr>
             </a:lvl8pPr>
             <a:lvl9pPr>
+              <a:buNone/>
               <a:defRPr sz="1725" b="1">
                 <a:solidFill>
                   <a:srgbClr val="243244"/>
@@ -8843,6 +9105,7 @@
           </a:lstStyle>
           <a:p xmlns:a="http://schemas.openxmlformats.org/drawingml/2006/main">
             <a:pPr>
+              <a:buNone/>
               <a:defRPr sz="1725" b="1">
                 <a:solidFill>
                   <a:srgbClr val="243244"/>
@@ -8908,6 +9171,7 @@
               </a:defRPr>
             </a:defPPr>
             <a:lvl1pPr>
+              <a:buNone/>
               <a:defRPr sz="1275" b="0">
                 <a:solidFill>
                   <a:srgbClr val="596678"/>
@@ -8918,6 +9182,7 @@
               </a:defRPr>
             </a:lvl1pPr>
             <a:lvl2pPr>
+              <a:buNone/>
               <a:defRPr sz="1275" b="0">
                 <a:solidFill>
                   <a:srgbClr val="596678"/>
@@ -8928,6 +9193,7 @@
               </a:defRPr>
             </a:lvl2pPr>
             <a:lvl3pPr>
+              <a:buNone/>
               <a:defRPr sz="1275" b="0">
                 <a:solidFill>
                   <a:srgbClr val="596678"/>
@@ -8938,6 +9204,7 @@
               </a:defRPr>
             </a:lvl3pPr>
             <a:lvl4pPr>
+              <a:buNone/>
               <a:defRPr sz="1275" b="0">
                 <a:solidFill>
                   <a:srgbClr val="596678"/>
@@ -8948,6 +9215,7 @@
               </a:defRPr>
             </a:lvl4pPr>
             <a:lvl5pPr>
+              <a:buNone/>
               <a:defRPr sz="1275" b="0">
                 <a:solidFill>
                   <a:srgbClr val="596678"/>
@@ -8958,6 +9226,7 @@
               </a:defRPr>
             </a:lvl5pPr>
             <a:lvl6pPr>
+              <a:buNone/>
               <a:defRPr sz="1275" b="0">
                 <a:solidFill>
                   <a:srgbClr val="596678"/>
@@ -8968,6 +9237,7 @@
               </a:defRPr>
             </a:lvl6pPr>
             <a:lvl7pPr>
+              <a:buNone/>
               <a:defRPr sz="1275" b="0">
                 <a:solidFill>
                   <a:srgbClr val="596678"/>
@@ -8978,6 +9248,7 @@
               </a:defRPr>
             </a:lvl7pPr>
             <a:lvl8pPr>
+              <a:buNone/>
               <a:defRPr sz="1275" b="0">
                 <a:solidFill>
                   <a:srgbClr val="596678"/>
@@ -8988,6 +9259,7 @@
               </a:defRPr>
             </a:lvl8pPr>
             <a:lvl9pPr>
+              <a:buNone/>
               <a:defRPr sz="1275" b="0">
                 <a:solidFill>
                   <a:srgbClr val="596678"/>
@@ -9000,6 +9272,7 @@
           </a:lstStyle>
           <a:p xmlns:a="http://schemas.openxmlformats.org/drawingml/2006/main">
             <a:pPr>
+              <a:buNone/>
               <a:defRPr sz="1275" b="0">
                 <a:solidFill>
                   <a:srgbClr val="596678"/>
@@ -9065,6 +9338,7 @@
               </a:defRPr>
             </a:defPPr>
             <a:lvl1pPr>
+              <a:buNone/>
               <a:defRPr sz="1725" b="1">
                 <a:solidFill>
                   <a:srgbClr val="243244"/>
@@ -9075,6 +9349,7 @@
               </a:defRPr>
             </a:lvl1pPr>
             <a:lvl2pPr>
+              <a:buNone/>
               <a:defRPr sz="1725" b="1">
                 <a:solidFill>
                   <a:srgbClr val="243244"/>
@@ -9085,6 +9360,7 @@
               </a:defRPr>
             </a:lvl2pPr>
             <a:lvl3pPr>
+              <a:buNone/>
               <a:defRPr sz="1725" b="1">
                 <a:solidFill>
                   <a:srgbClr val="243244"/>
@@ -9095,6 +9371,7 @@
               </a:defRPr>
             </a:lvl3pPr>
             <a:lvl4pPr>
+              <a:buNone/>
               <a:defRPr sz="1725" b="1">
                 <a:solidFill>
                   <a:srgbClr val="243244"/>
@@ -9105,6 +9382,7 @@
               </a:defRPr>
             </a:lvl4pPr>
             <a:lvl5pPr>
+              <a:buNone/>
               <a:defRPr sz="1725" b="1">
                 <a:solidFill>
                   <a:srgbClr val="243244"/>
@@ -9115,6 +9393,7 @@
               </a:defRPr>
             </a:lvl5pPr>
             <a:lvl6pPr>
+              <a:buNone/>
               <a:defRPr sz="1725" b="1">
                 <a:solidFill>
                   <a:srgbClr val="243244"/>
@@ -9125,6 +9404,7 @@
               </a:defRPr>
             </a:lvl6pPr>
             <a:lvl7pPr>
+              <a:buNone/>
               <a:defRPr sz="1725" b="1">
                 <a:solidFill>
                   <a:srgbClr val="243244"/>
@@ -9135,6 +9415,7 @@
               </a:defRPr>
             </a:lvl7pPr>
             <a:lvl8pPr>
+              <a:buNone/>
               <a:defRPr sz="1725" b="1">
                 <a:solidFill>
                   <a:srgbClr val="243244"/>
@@ -9145,6 +9426,7 @@
               </a:defRPr>
             </a:lvl8pPr>
             <a:lvl9pPr>
+              <a:buNone/>
               <a:defRPr sz="1725" b="1">
                 <a:solidFill>
                   <a:srgbClr val="243244"/>
@@ -9157,6 +9439,7 @@
           </a:lstStyle>
           <a:p xmlns:a="http://schemas.openxmlformats.org/drawingml/2006/main">
             <a:pPr>
+              <a:buNone/>
               <a:defRPr sz="1725" b="1">
                 <a:solidFill>
                   <a:srgbClr val="243244"/>
@@ -9222,6 +9505,7 @@
               </a:defRPr>
             </a:defPPr>
             <a:lvl1pPr>
+              <a:buNone/>
               <a:defRPr sz="1275" b="0">
                 <a:solidFill>
                   <a:srgbClr val="596678"/>
@@ -9232,6 +9516,7 @@
               </a:defRPr>
             </a:lvl1pPr>
             <a:lvl2pPr>
+              <a:buNone/>
               <a:defRPr sz="1275" b="0">
                 <a:solidFill>
                   <a:srgbClr val="596678"/>
@@ -9242,6 +9527,7 @@
               </a:defRPr>
             </a:lvl2pPr>
             <a:lvl3pPr>
+              <a:buNone/>
               <a:defRPr sz="1275" b="0">
                 <a:solidFill>
                   <a:srgbClr val="596678"/>
@@ -9252,6 +9538,7 @@
               </a:defRPr>
             </a:lvl3pPr>
             <a:lvl4pPr>
+              <a:buNone/>
               <a:defRPr sz="1275" b="0">
                 <a:solidFill>
                   <a:srgbClr val="596678"/>
@@ -9262,6 +9549,7 @@
               </a:defRPr>
             </a:lvl4pPr>
             <a:lvl5pPr>
+              <a:buNone/>
               <a:defRPr sz="1275" b="0">
                 <a:solidFill>
                   <a:srgbClr val="596678"/>
@@ -9272,6 +9560,7 @@
               </a:defRPr>
             </a:lvl5pPr>
             <a:lvl6pPr>
+              <a:buNone/>
               <a:defRPr sz="1275" b="0">
                 <a:solidFill>
                   <a:srgbClr val="596678"/>
@@ -9282,6 +9571,7 @@
               </a:defRPr>
             </a:lvl6pPr>
             <a:lvl7pPr>
+              <a:buNone/>
               <a:defRPr sz="1275" b="0">
                 <a:solidFill>
                   <a:srgbClr val="596678"/>
@@ -9292,6 +9582,7 @@
               </a:defRPr>
             </a:lvl7pPr>
             <a:lvl8pPr>
+              <a:buNone/>
               <a:defRPr sz="1275" b="0">
                 <a:solidFill>
                   <a:srgbClr val="596678"/>
@@ -9302,6 +9593,7 @@
               </a:defRPr>
             </a:lvl8pPr>
             <a:lvl9pPr>
+              <a:buNone/>
               <a:defRPr sz="1275" b="0">
                 <a:solidFill>
                   <a:srgbClr val="596678"/>
@@ -9314,6 +9606,7 @@
           </a:lstStyle>
           <a:p xmlns:a="http://schemas.openxmlformats.org/drawingml/2006/main">
             <a:pPr>
+              <a:buNone/>
               <a:defRPr sz="1275" b="0">
                 <a:solidFill>
                   <a:srgbClr val="596678"/>
@@ -9408,6 +9701,7 @@
               </a:defRPr>
             </a:defPPr>
             <a:lvl1pPr>
+              <a:buNone/>
               <a:defRPr sz="900" b="1">
                 <a:solidFill>
                   <a:srgbClr val="802D42"/>
@@ -9418,6 +9712,7 @@
               </a:defRPr>
             </a:lvl1pPr>
             <a:lvl2pPr>
+              <a:buNone/>
               <a:defRPr sz="900" b="1">
                 <a:solidFill>
                   <a:srgbClr val="802D42"/>
@@ -9428,6 +9723,7 @@
               </a:defRPr>
             </a:lvl2pPr>
             <a:lvl3pPr>
+              <a:buNone/>
               <a:defRPr sz="900" b="1">
                 <a:solidFill>
                   <a:srgbClr val="802D42"/>
@@ -9438,6 +9734,7 @@
               </a:defRPr>
             </a:lvl3pPr>
             <a:lvl4pPr>
+              <a:buNone/>
               <a:defRPr sz="900" b="1">
                 <a:solidFill>
                   <a:srgbClr val="802D42"/>
@@ -9448,6 +9745,7 @@
               </a:defRPr>
             </a:lvl4pPr>
             <a:lvl5pPr>
+              <a:buNone/>
               <a:defRPr sz="900" b="1">
                 <a:solidFill>
                   <a:srgbClr val="802D42"/>
@@ -9458,6 +9756,7 @@
               </a:defRPr>
             </a:lvl5pPr>
             <a:lvl6pPr>
+              <a:buNone/>
               <a:defRPr sz="900" b="1">
                 <a:solidFill>
                   <a:srgbClr val="802D42"/>
@@ -9468,6 +9767,7 @@
               </a:defRPr>
             </a:lvl6pPr>
             <a:lvl7pPr>
+              <a:buNone/>
               <a:defRPr sz="900" b="1">
                 <a:solidFill>
                   <a:srgbClr val="802D42"/>
@@ -9478,6 +9778,7 @@
               </a:defRPr>
             </a:lvl7pPr>
             <a:lvl8pPr>
+              <a:buNone/>
               <a:defRPr sz="900" b="1">
                 <a:solidFill>
                   <a:srgbClr val="802D42"/>
@@ -9488,6 +9789,7 @@
               </a:defRPr>
             </a:lvl8pPr>
             <a:lvl9pPr>
+              <a:buNone/>
               <a:defRPr sz="900" b="1">
                 <a:solidFill>
                   <a:srgbClr val="802D42"/>
@@ -9500,6 +9802,7 @@
           </a:lstStyle>
           <a:p xmlns:a="http://schemas.openxmlformats.org/drawingml/2006/main">
             <a:pPr>
+              <a:buNone/>
               <a:defRPr sz="900" b="1">
                 <a:solidFill>
                   <a:srgbClr val="802D42"/>
@@ -9565,6 +9868,7 @@
               </a:defRPr>
             </a:defPPr>
             <a:lvl1pPr>
+              <a:buNone/>
               <a:defRPr sz="2400" b="1">
                 <a:solidFill>
                   <a:srgbClr val="243244"/>
@@ -9575,6 +9879,7 @@
               </a:defRPr>
             </a:lvl1pPr>
             <a:lvl2pPr>
+              <a:buNone/>
               <a:defRPr sz="2400" b="1">
                 <a:solidFill>
                   <a:srgbClr val="243244"/>
@@ -9585,6 +9890,7 @@
               </a:defRPr>
             </a:lvl2pPr>
             <a:lvl3pPr>
+              <a:buNone/>
               <a:defRPr sz="2400" b="1">
                 <a:solidFill>
                   <a:srgbClr val="243244"/>
@@ -9595,6 +9901,7 @@
               </a:defRPr>
             </a:lvl3pPr>
             <a:lvl4pPr>
+              <a:buNone/>
               <a:defRPr sz="2400" b="1">
                 <a:solidFill>
                   <a:srgbClr val="243244"/>
@@ -9605,6 +9912,7 @@
               </a:defRPr>
             </a:lvl4pPr>
             <a:lvl5pPr>
+              <a:buNone/>
               <a:defRPr sz="2400" b="1">
                 <a:solidFill>
                   <a:srgbClr val="243244"/>
@@ -9615,6 +9923,7 @@
               </a:defRPr>
             </a:lvl5pPr>
             <a:lvl6pPr>
+              <a:buNone/>
               <a:defRPr sz="2400" b="1">
                 <a:solidFill>
                   <a:srgbClr val="243244"/>
@@ -9625,6 +9934,7 @@
               </a:defRPr>
             </a:lvl6pPr>
             <a:lvl7pPr>
+              <a:buNone/>
               <a:defRPr sz="2400" b="1">
                 <a:solidFill>
                   <a:srgbClr val="243244"/>
@@ -9635,6 +9945,7 @@
               </a:defRPr>
             </a:lvl7pPr>
             <a:lvl8pPr>
+              <a:buNone/>
               <a:defRPr sz="2400" b="1">
                 <a:solidFill>
                   <a:srgbClr val="243244"/>
@@ -9645,6 +9956,7 @@
               </a:defRPr>
             </a:lvl8pPr>
             <a:lvl9pPr>
+              <a:buNone/>
               <a:defRPr sz="2400" b="1">
                 <a:solidFill>
                   <a:srgbClr val="243244"/>
@@ -9657,6 +9969,7 @@
           </a:lstStyle>
           <a:p xmlns:a="http://schemas.openxmlformats.org/drawingml/2006/main">
             <a:pPr>
+              <a:buNone/>
               <a:defRPr sz="2400" b="1">
                 <a:solidFill>
                   <a:srgbClr val="243244"/>
@@ -9722,6 +10035,7 @@
               </a:defRPr>
             </a:defPPr>
             <a:lvl1pPr>
+              <a:buNone/>
               <a:defRPr sz="1275" b="0">
                 <a:solidFill>
                   <a:srgbClr val="596678"/>
@@ -9732,6 +10046,7 @@
               </a:defRPr>
             </a:lvl1pPr>
             <a:lvl2pPr>
+              <a:buNone/>
               <a:defRPr sz="1275" b="0">
                 <a:solidFill>
                   <a:srgbClr val="596678"/>
@@ -9742,6 +10057,7 @@
               </a:defRPr>
             </a:lvl2pPr>
             <a:lvl3pPr>
+              <a:buNone/>
               <a:defRPr sz="1275" b="0">
                 <a:solidFill>
                   <a:srgbClr val="596678"/>
@@ -9752,6 +10068,7 @@
               </a:defRPr>
             </a:lvl3pPr>
             <a:lvl4pPr>
+              <a:buNone/>
               <a:defRPr sz="1275" b="0">
                 <a:solidFill>
                   <a:srgbClr val="596678"/>
@@ -9762,6 +10079,7 @@
               </a:defRPr>
             </a:lvl4pPr>
             <a:lvl5pPr>
+              <a:buNone/>
               <a:defRPr sz="1275" b="0">
                 <a:solidFill>
                   <a:srgbClr val="596678"/>
@@ -9772,6 +10090,7 @@
               </a:defRPr>
             </a:lvl5pPr>
             <a:lvl6pPr>
+              <a:buNone/>
               <a:defRPr sz="1275" b="0">
                 <a:solidFill>
                   <a:srgbClr val="596678"/>
@@ -9782,6 +10101,7 @@
               </a:defRPr>
             </a:lvl6pPr>
             <a:lvl7pPr>
+              <a:buNone/>
               <a:defRPr sz="1275" b="0">
                 <a:solidFill>
                   <a:srgbClr val="596678"/>
@@ -9792,6 +10112,7 @@
               </a:defRPr>
             </a:lvl7pPr>
             <a:lvl8pPr>
+              <a:buNone/>
               <a:defRPr sz="1275" b="0">
                 <a:solidFill>
                   <a:srgbClr val="596678"/>
@@ -9802,6 +10123,7 @@
               </a:defRPr>
             </a:lvl8pPr>
             <a:lvl9pPr>
+              <a:buNone/>
               <a:defRPr sz="1275" b="0">
                 <a:solidFill>
                   <a:srgbClr val="596678"/>
@@ -9814,6 +10136,7 @@
           </a:lstStyle>
           <a:p xmlns:a="http://schemas.openxmlformats.org/drawingml/2006/main">
             <a:pPr>
+              <a:buNone/>
               <a:defRPr sz="1275" b="0">
                 <a:solidFill>
                   <a:srgbClr val="596678"/>
@@ -9879,6 +10202,7 @@
               </a:defRPr>
             </a:defPPr>
             <a:lvl1pPr>
+              <a:buNone/>
               <a:defRPr sz="825" b="0">
                 <a:solidFill>
                   <a:srgbClr val="596678"/>
@@ -9889,6 +10213,7 @@
               </a:defRPr>
             </a:lvl1pPr>
             <a:lvl2pPr>
+              <a:buNone/>
               <a:defRPr sz="825" b="0">
                 <a:solidFill>
                   <a:srgbClr val="596678"/>
@@ -9899,6 +10224,7 @@
               </a:defRPr>
             </a:lvl2pPr>
             <a:lvl3pPr>
+              <a:buNone/>
               <a:defRPr sz="825" b="0">
                 <a:solidFill>
                   <a:srgbClr val="596678"/>
@@ -9909,6 +10235,7 @@
               </a:defRPr>
             </a:lvl3pPr>
             <a:lvl4pPr>
+              <a:buNone/>
               <a:defRPr sz="825" b="0">
                 <a:solidFill>
                   <a:srgbClr val="596678"/>
@@ -9919,6 +10246,7 @@
               </a:defRPr>
             </a:lvl4pPr>
             <a:lvl5pPr>
+              <a:buNone/>
               <a:defRPr sz="825" b="0">
                 <a:solidFill>
                   <a:srgbClr val="596678"/>
@@ -9929,6 +10257,7 @@
               </a:defRPr>
             </a:lvl5pPr>
             <a:lvl6pPr>
+              <a:buNone/>
               <a:defRPr sz="825" b="0">
                 <a:solidFill>
                   <a:srgbClr val="596678"/>
@@ -9939,6 +10268,7 @@
               </a:defRPr>
             </a:lvl6pPr>
             <a:lvl7pPr>
+              <a:buNone/>
               <a:defRPr sz="825" b="0">
                 <a:solidFill>
                   <a:srgbClr val="596678"/>
@@ -9949,6 +10279,7 @@
               </a:defRPr>
             </a:lvl7pPr>
             <a:lvl8pPr>
+              <a:buNone/>
               <a:defRPr sz="825" b="0">
                 <a:solidFill>
                   <a:srgbClr val="596678"/>
@@ -9959,6 +10290,7 @@
               </a:defRPr>
             </a:lvl8pPr>
             <a:lvl9pPr>
+              <a:buNone/>
               <a:defRPr sz="825" b="0">
                 <a:solidFill>
                   <a:srgbClr val="596678"/>
@@ -9971,6 +10303,7 @@
           </a:lstStyle>
           <a:p xmlns:a="http://schemas.openxmlformats.org/drawingml/2006/main">
             <a:pPr>
+              <a:buNone/>
               <a:defRPr sz="825" b="0">
                 <a:solidFill>
                   <a:srgbClr val="596678"/>
@@ -10036,6 +10369,7 @@
               </a:defRPr>
             </a:defPPr>
             <a:lvl1pPr>
+              <a:buNone/>
               <a:defRPr sz="825" b="1">
                 <a:solidFill>
                   <a:srgbClr val="802D42"/>
@@ -10046,6 +10380,7 @@
               </a:defRPr>
             </a:lvl1pPr>
             <a:lvl2pPr>
+              <a:buNone/>
               <a:defRPr sz="825" b="1">
                 <a:solidFill>
                   <a:srgbClr val="802D42"/>
@@ -10056,6 +10391,7 @@
               </a:defRPr>
             </a:lvl2pPr>
             <a:lvl3pPr>
+              <a:buNone/>
               <a:defRPr sz="825" b="1">
                 <a:solidFill>
                   <a:srgbClr val="802D42"/>
@@ -10066,6 +10402,7 @@
               </a:defRPr>
             </a:lvl3pPr>
             <a:lvl4pPr>
+              <a:buNone/>
               <a:defRPr sz="825" b="1">
                 <a:solidFill>
                   <a:srgbClr val="802D42"/>
@@ -10076,6 +10413,7 @@
               </a:defRPr>
             </a:lvl4pPr>
             <a:lvl5pPr>
+              <a:buNone/>
               <a:defRPr sz="825" b="1">
                 <a:solidFill>
                   <a:srgbClr val="802D42"/>
@@ -10086,6 +10424,7 @@
               </a:defRPr>
             </a:lvl5pPr>
             <a:lvl6pPr>
+              <a:buNone/>
               <a:defRPr sz="825" b="1">
                 <a:solidFill>
                   <a:srgbClr val="802D42"/>
@@ -10096,6 +10435,7 @@
               </a:defRPr>
             </a:lvl6pPr>
             <a:lvl7pPr>
+              <a:buNone/>
               <a:defRPr sz="825" b="1">
                 <a:solidFill>
                   <a:srgbClr val="802D42"/>
@@ -10106,6 +10446,7 @@
               </a:defRPr>
             </a:lvl7pPr>
             <a:lvl8pPr>
+              <a:buNone/>
               <a:defRPr sz="825" b="1">
                 <a:solidFill>
                   <a:srgbClr val="802D42"/>
@@ -10116,6 +10457,7 @@
               </a:defRPr>
             </a:lvl8pPr>
             <a:lvl9pPr>
+              <a:buNone/>
               <a:defRPr sz="825" b="1">
                 <a:solidFill>
                   <a:srgbClr val="802D42"/>
@@ -10128,6 +10470,7 @@
           </a:lstStyle>
           <a:p xmlns:a="http://schemas.openxmlformats.org/drawingml/2006/main">
             <a:pPr>
+              <a:buNone/>
               <a:defRPr sz="825" b="1">
                 <a:solidFill>
                   <a:srgbClr val="802D42"/>
@@ -10193,6 +10536,7 @@
               </a:defRPr>
             </a:defPPr>
             <a:lvl1pPr>
+              <a:buNone/>
               <a:defRPr sz="1725" b="0">
                 <a:solidFill>
                   <a:srgbClr val="243244"/>
@@ -10203,6 +10547,7 @@
               </a:defRPr>
             </a:lvl1pPr>
             <a:lvl2pPr>
+              <a:buNone/>
               <a:defRPr sz="1725" b="0">
                 <a:solidFill>
                   <a:srgbClr val="243244"/>
@@ -10213,6 +10558,7 @@
               </a:defRPr>
             </a:lvl2pPr>
             <a:lvl3pPr>
+              <a:buNone/>
               <a:defRPr sz="1725" b="0">
                 <a:solidFill>
                   <a:srgbClr val="243244"/>
@@ -10223,6 +10569,7 @@
               </a:defRPr>
             </a:lvl3pPr>
             <a:lvl4pPr>
+              <a:buNone/>
               <a:defRPr sz="1725" b="0">
                 <a:solidFill>
                   <a:srgbClr val="243244"/>
@@ -10233,6 +10580,7 @@
               </a:defRPr>
             </a:lvl4pPr>
             <a:lvl5pPr>
+              <a:buNone/>
               <a:defRPr sz="1725" b="0">
                 <a:solidFill>
                   <a:srgbClr val="243244"/>
@@ -10243,6 +10591,7 @@
               </a:defRPr>
             </a:lvl5pPr>
             <a:lvl6pPr>
+              <a:buNone/>
               <a:defRPr sz="1725" b="0">
                 <a:solidFill>
                   <a:srgbClr val="243244"/>
@@ -10253,6 +10602,7 @@
               </a:defRPr>
             </a:lvl6pPr>
             <a:lvl7pPr>
+              <a:buNone/>
               <a:defRPr sz="1725" b="0">
                 <a:solidFill>
                   <a:srgbClr val="243244"/>
@@ -10263,6 +10613,7 @@
               </a:defRPr>
             </a:lvl7pPr>
             <a:lvl8pPr>
+              <a:buNone/>
               <a:defRPr sz="1725" b="0">
                 <a:solidFill>
                   <a:srgbClr val="243244"/>
@@ -10273,6 +10624,7 @@
               </a:defRPr>
             </a:lvl8pPr>
             <a:lvl9pPr>
+              <a:buNone/>
               <a:defRPr sz="1725" b="0">
                 <a:solidFill>
                   <a:srgbClr val="243244"/>
@@ -10285,6 +10637,7 @@
           </a:lstStyle>
           <a:p xmlns:a="http://schemas.openxmlformats.org/drawingml/2006/main">
             <a:pPr>
+              <a:buNone/>
               <a:defRPr sz="1725" b="0">
                 <a:solidFill>
                   <a:srgbClr val="243244"/>
@@ -10350,6 +10703,7 @@
               </a:defRPr>
             </a:defPPr>
             <a:lvl1pPr>
+              <a:buNone/>
               <a:defRPr sz="1725" b="0">
                 <a:solidFill>
                   <a:srgbClr val="243244"/>
@@ -10360,6 +10714,7 @@
               </a:defRPr>
             </a:lvl1pPr>
             <a:lvl2pPr>
+              <a:buNone/>
               <a:defRPr sz="1725" b="0">
                 <a:solidFill>
                   <a:srgbClr val="243244"/>
@@ -10370,6 +10725,7 @@
               </a:defRPr>
             </a:lvl2pPr>
             <a:lvl3pPr>
+              <a:buNone/>
               <a:defRPr sz="1725" b="0">
                 <a:solidFill>
                   <a:srgbClr val="243244"/>
@@ -10380,6 +10736,7 @@
               </a:defRPr>
             </a:lvl3pPr>
             <a:lvl4pPr>
+              <a:buNone/>
               <a:defRPr sz="1725" b="0">
                 <a:solidFill>
                   <a:srgbClr val="243244"/>
@@ -10390,6 +10747,7 @@
               </a:defRPr>
             </a:lvl4pPr>
             <a:lvl5pPr>
+              <a:buNone/>
               <a:defRPr sz="1725" b="0">
                 <a:solidFill>
                   <a:srgbClr val="243244"/>
@@ -10400,6 +10758,7 @@
               </a:defRPr>
             </a:lvl5pPr>
             <a:lvl6pPr>
+              <a:buNone/>
               <a:defRPr sz="1725" b="0">
                 <a:solidFill>
                   <a:srgbClr val="243244"/>
@@ -10410,6 +10769,7 @@
               </a:defRPr>
             </a:lvl6pPr>
             <a:lvl7pPr>
+              <a:buNone/>
               <a:defRPr sz="1725" b="0">
                 <a:solidFill>
                   <a:srgbClr val="243244"/>
@@ -10420,6 +10780,7 @@
               </a:defRPr>
             </a:lvl7pPr>
             <a:lvl8pPr>
+              <a:buNone/>
               <a:defRPr sz="1725" b="0">
                 <a:solidFill>
                   <a:srgbClr val="243244"/>
@@ -10430,6 +10791,7 @@
               </a:defRPr>
             </a:lvl8pPr>
             <a:lvl9pPr>
+              <a:buNone/>
               <a:defRPr sz="1725" b="0">
                 <a:solidFill>
                   <a:srgbClr val="243244"/>
@@ -10442,6 +10804,7 @@
           </a:lstStyle>
           <a:p xmlns:a="http://schemas.openxmlformats.org/drawingml/2006/main">
             <a:pPr>
+              <a:buNone/>
               <a:defRPr sz="1725" b="0">
                 <a:solidFill>
                   <a:srgbClr val="243244"/>
@@ -10507,6 +10870,7 @@
               </a:defRPr>
             </a:defPPr>
             <a:lvl1pPr>
+              <a:buNone/>
               <a:defRPr sz="1725" b="0">
                 <a:solidFill>
                   <a:srgbClr val="243244"/>
@@ -10517,6 +10881,7 @@
               </a:defRPr>
             </a:lvl1pPr>
             <a:lvl2pPr>
+              <a:buNone/>
               <a:defRPr sz="1725" b="0">
                 <a:solidFill>
                   <a:srgbClr val="243244"/>
@@ -10527,6 +10892,7 @@
               </a:defRPr>
             </a:lvl2pPr>
             <a:lvl3pPr>
+              <a:buNone/>
               <a:defRPr sz="1725" b="0">
                 <a:solidFill>
                   <a:srgbClr val="243244"/>
@@ -10537,6 +10903,7 @@
               </a:defRPr>
             </a:lvl3pPr>
             <a:lvl4pPr>
+              <a:buNone/>
               <a:defRPr sz="1725" b="0">
                 <a:solidFill>
                   <a:srgbClr val="243244"/>
@@ -10547,6 +10914,7 @@
               </a:defRPr>
             </a:lvl4pPr>
             <a:lvl5pPr>
+              <a:buNone/>
               <a:defRPr sz="1725" b="0">
                 <a:solidFill>
                   <a:srgbClr val="243244"/>
@@ -10557,6 +10925,7 @@
               </a:defRPr>
             </a:lvl5pPr>
             <a:lvl6pPr>
+              <a:buNone/>
               <a:defRPr sz="1725" b="0">
                 <a:solidFill>
                   <a:srgbClr val="243244"/>
@@ -10567,6 +10936,7 @@
               </a:defRPr>
             </a:lvl6pPr>
             <a:lvl7pPr>
+              <a:buNone/>
               <a:defRPr sz="1725" b="0">
                 <a:solidFill>
                   <a:srgbClr val="243244"/>
@@ -10577,6 +10947,7 @@
               </a:defRPr>
             </a:lvl7pPr>
             <a:lvl8pPr>
+              <a:buNone/>
               <a:defRPr sz="1725" b="0">
                 <a:solidFill>
                   <a:srgbClr val="243244"/>
@@ -10587,6 +10958,7 @@
               </a:defRPr>
             </a:lvl8pPr>
             <a:lvl9pPr>
+              <a:buNone/>
               <a:defRPr sz="1725" b="0">
                 <a:solidFill>
                   <a:srgbClr val="243244"/>
@@ -10599,6 +10971,7 @@
           </a:lstStyle>
           <a:p xmlns:a="http://schemas.openxmlformats.org/drawingml/2006/main">
             <a:pPr>
+              <a:buNone/>
               <a:defRPr sz="1725" b="0">
                 <a:solidFill>
                   <a:srgbClr val="243244"/>
@@ -10693,6 +11066,7 @@
               </a:defRPr>
             </a:defPPr>
             <a:lvl1pPr>
+              <a:buNone/>
               <a:defRPr sz="900" b="1">
                 <a:solidFill>
                   <a:srgbClr val="802D42"/>
@@ -10703,6 +11077,7 @@
               </a:defRPr>
             </a:lvl1pPr>
             <a:lvl2pPr>
+              <a:buNone/>
               <a:defRPr sz="900" b="1">
                 <a:solidFill>
                   <a:srgbClr val="802D42"/>
@@ -10713,6 +11088,7 @@
               </a:defRPr>
             </a:lvl2pPr>
             <a:lvl3pPr>
+              <a:buNone/>
               <a:defRPr sz="900" b="1">
                 <a:solidFill>
                   <a:srgbClr val="802D42"/>
@@ -10723,6 +11099,7 @@
               </a:defRPr>
             </a:lvl3pPr>
             <a:lvl4pPr>
+              <a:buNone/>
               <a:defRPr sz="900" b="1">
                 <a:solidFill>
                   <a:srgbClr val="802D42"/>
@@ -10733,6 +11110,7 @@
               </a:defRPr>
             </a:lvl4pPr>
             <a:lvl5pPr>
+              <a:buNone/>
               <a:defRPr sz="900" b="1">
                 <a:solidFill>
                   <a:srgbClr val="802D42"/>
@@ -10743,6 +11121,7 @@
               </a:defRPr>
             </a:lvl5pPr>
             <a:lvl6pPr>
+              <a:buNone/>
               <a:defRPr sz="900" b="1">
                 <a:solidFill>
                   <a:srgbClr val="802D42"/>
@@ -10753,6 +11132,7 @@
               </a:defRPr>
             </a:lvl6pPr>
             <a:lvl7pPr>
+              <a:buNone/>
               <a:defRPr sz="900" b="1">
                 <a:solidFill>
                   <a:srgbClr val="802D42"/>
@@ -10763,6 +11143,7 @@
               </a:defRPr>
             </a:lvl7pPr>
             <a:lvl8pPr>
+              <a:buNone/>
               <a:defRPr sz="900" b="1">
                 <a:solidFill>
                   <a:srgbClr val="802D42"/>
@@ -10773,6 +11154,7 @@
               </a:defRPr>
             </a:lvl8pPr>
             <a:lvl9pPr>
+              <a:buNone/>
               <a:defRPr sz="900" b="1">
                 <a:solidFill>
                   <a:srgbClr val="802D42"/>
@@ -10785,6 +11167,7 @@
           </a:lstStyle>
           <a:p xmlns:a="http://schemas.openxmlformats.org/drawingml/2006/main">
             <a:pPr>
+              <a:buNone/>
               <a:defRPr sz="900" b="1">
                 <a:solidFill>
                   <a:srgbClr val="802D42"/>
@@ -10850,6 +11233,7 @@
               </a:defRPr>
             </a:defPPr>
             <a:lvl1pPr>
+              <a:buNone/>
               <a:defRPr sz="2400" b="1">
                 <a:solidFill>
                   <a:srgbClr val="243244"/>
@@ -10860,6 +11244,7 @@
               </a:defRPr>
             </a:lvl1pPr>
             <a:lvl2pPr>
+              <a:buNone/>
               <a:defRPr sz="2400" b="1">
                 <a:solidFill>
                   <a:srgbClr val="243244"/>
@@ -10870,6 +11255,7 @@
               </a:defRPr>
             </a:lvl2pPr>
             <a:lvl3pPr>
+              <a:buNone/>
               <a:defRPr sz="2400" b="1">
                 <a:solidFill>
                   <a:srgbClr val="243244"/>
@@ -10880,6 +11266,7 @@
               </a:defRPr>
             </a:lvl3pPr>
             <a:lvl4pPr>
+              <a:buNone/>
               <a:defRPr sz="2400" b="1">
                 <a:solidFill>
                   <a:srgbClr val="243244"/>
@@ -10890,6 +11277,7 @@
               </a:defRPr>
             </a:lvl4pPr>
             <a:lvl5pPr>
+              <a:buNone/>
               <a:defRPr sz="2400" b="1">
                 <a:solidFill>
                   <a:srgbClr val="243244"/>
@@ -10900,6 +11288,7 @@
               </a:defRPr>
             </a:lvl5pPr>
             <a:lvl6pPr>
+              <a:buNone/>
               <a:defRPr sz="2400" b="1">
                 <a:solidFill>
                   <a:srgbClr val="243244"/>
@@ -10910,6 +11299,7 @@
               </a:defRPr>
             </a:lvl6pPr>
             <a:lvl7pPr>
+              <a:buNone/>
               <a:defRPr sz="2400" b="1">
                 <a:solidFill>
                   <a:srgbClr val="243244"/>
@@ -10920,6 +11310,7 @@
               </a:defRPr>
             </a:lvl7pPr>
             <a:lvl8pPr>
+              <a:buNone/>
               <a:defRPr sz="2400" b="1">
                 <a:solidFill>
                   <a:srgbClr val="243244"/>
@@ -10930,6 +11321,7 @@
               </a:defRPr>
             </a:lvl8pPr>
             <a:lvl9pPr>
+              <a:buNone/>
               <a:defRPr sz="2400" b="1">
                 <a:solidFill>
                   <a:srgbClr val="243244"/>
@@ -10942,6 +11334,7 @@
           </a:lstStyle>
           <a:p xmlns:a="http://schemas.openxmlformats.org/drawingml/2006/main">
             <a:pPr>
+              <a:buNone/>
               <a:defRPr sz="2400" b="1">
                 <a:solidFill>
                   <a:srgbClr val="243244"/>
@@ -11007,6 +11400,7 @@
               </a:defRPr>
             </a:defPPr>
             <a:lvl1pPr>
+              <a:buNone/>
               <a:defRPr sz="1275" b="0">
                 <a:solidFill>
                   <a:srgbClr val="596678"/>
@@ -11017,6 +11411,7 @@
               </a:defRPr>
             </a:lvl1pPr>
             <a:lvl2pPr>
+              <a:buNone/>
               <a:defRPr sz="1275" b="0">
                 <a:solidFill>
                   <a:srgbClr val="596678"/>
@@ -11027,6 +11422,7 @@
               </a:defRPr>
             </a:lvl2pPr>
             <a:lvl3pPr>
+              <a:buNone/>
               <a:defRPr sz="1275" b="0">
                 <a:solidFill>
                   <a:srgbClr val="596678"/>
@@ -11037,6 +11433,7 @@
               </a:defRPr>
             </a:lvl3pPr>
             <a:lvl4pPr>
+              <a:buNone/>
               <a:defRPr sz="1275" b="0">
                 <a:solidFill>
                   <a:srgbClr val="596678"/>
@@ -11047,6 +11444,7 @@
               </a:defRPr>
             </a:lvl4pPr>
             <a:lvl5pPr>
+              <a:buNone/>
               <a:defRPr sz="1275" b="0">
                 <a:solidFill>
                   <a:srgbClr val="596678"/>
@@ -11057,6 +11455,7 @@
               </a:defRPr>
             </a:lvl5pPr>
             <a:lvl6pPr>
+              <a:buNone/>
               <a:defRPr sz="1275" b="0">
                 <a:solidFill>
                   <a:srgbClr val="596678"/>
@@ -11067,6 +11466,7 @@
               </a:defRPr>
             </a:lvl6pPr>
             <a:lvl7pPr>
+              <a:buNone/>
               <a:defRPr sz="1275" b="0">
                 <a:solidFill>
                   <a:srgbClr val="596678"/>
@@ -11077,6 +11477,7 @@
               </a:defRPr>
             </a:lvl7pPr>
             <a:lvl8pPr>
+              <a:buNone/>
               <a:defRPr sz="1275" b="0">
                 <a:solidFill>
                   <a:srgbClr val="596678"/>
@@ -11087,6 +11488,7 @@
               </a:defRPr>
             </a:lvl8pPr>
             <a:lvl9pPr>
+              <a:buNone/>
               <a:defRPr sz="1275" b="0">
                 <a:solidFill>
                   <a:srgbClr val="596678"/>
@@ -11099,6 +11501,7 @@
           </a:lstStyle>
           <a:p xmlns:a="http://schemas.openxmlformats.org/drawingml/2006/main">
             <a:pPr>
+              <a:buNone/>
               <a:defRPr sz="1275" b="0">
                 <a:solidFill>
                   <a:srgbClr val="596678"/>
@@ -11164,6 +11567,7 @@
               </a:defRPr>
             </a:defPPr>
             <a:lvl1pPr>
+              <a:buNone/>
               <a:defRPr sz="825" b="0">
                 <a:solidFill>
                   <a:srgbClr val="596678"/>
@@ -11174,6 +11578,7 @@
               </a:defRPr>
             </a:lvl1pPr>
             <a:lvl2pPr>
+              <a:buNone/>
               <a:defRPr sz="825" b="0">
                 <a:solidFill>
                   <a:srgbClr val="596678"/>
@@ -11184,6 +11589,7 @@
               </a:defRPr>
             </a:lvl2pPr>
             <a:lvl3pPr>
+              <a:buNone/>
               <a:defRPr sz="825" b="0">
                 <a:solidFill>
                   <a:srgbClr val="596678"/>
@@ -11194,6 +11600,7 @@
               </a:defRPr>
             </a:lvl3pPr>
             <a:lvl4pPr>
+              <a:buNone/>
               <a:defRPr sz="825" b="0">
                 <a:solidFill>
                   <a:srgbClr val="596678"/>
@@ -11204,6 +11611,7 @@
               </a:defRPr>
             </a:lvl4pPr>
             <a:lvl5pPr>
+              <a:buNone/>
               <a:defRPr sz="825" b="0">
                 <a:solidFill>
                   <a:srgbClr val="596678"/>
@@ -11214,6 +11622,7 @@
               </a:defRPr>
             </a:lvl5pPr>
             <a:lvl6pPr>
+              <a:buNone/>
               <a:defRPr sz="825" b="0">
                 <a:solidFill>
                   <a:srgbClr val="596678"/>
@@ -11224,6 +11633,7 @@
               </a:defRPr>
             </a:lvl6pPr>
             <a:lvl7pPr>
+              <a:buNone/>
               <a:defRPr sz="825" b="0">
                 <a:solidFill>
                   <a:srgbClr val="596678"/>
@@ -11234,6 +11644,7 @@
               </a:defRPr>
             </a:lvl7pPr>
             <a:lvl8pPr>
+              <a:buNone/>
               <a:defRPr sz="825" b="0">
                 <a:solidFill>
                   <a:srgbClr val="596678"/>
@@ -11244,6 +11655,7 @@
               </a:defRPr>
             </a:lvl8pPr>
             <a:lvl9pPr>
+              <a:buNone/>
               <a:defRPr sz="825" b="0">
                 <a:solidFill>
                   <a:srgbClr val="596678"/>
@@ -11256,6 +11668,7 @@
           </a:lstStyle>
           <a:p xmlns:a="http://schemas.openxmlformats.org/drawingml/2006/main">
             <a:pPr>
+              <a:buNone/>
               <a:defRPr sz="825" b="0">
                 <a:solidFill>
                   <a:srgbClr val="596678"/>
@@ -11321,6 +11734,7 @@
               </a:defRPr>
             </a:defPPr>
             <a:lvl1pPr>
+              <a:buNone/>
               <a:defRPr sz="825" b="1">
                 <a:solidFill>
                   <a:srgbClr val="802D42"/>
@@ -11331,6 +11745,7 @@
               </a:defRPr>
             </a:lvl1pPr>
             <a:lvl2pPr>
+              <a:buNone/>
               <a:defRPr sz="825" b="1">
                 <a:solidFill>
                   <a:srgbClr val="802D42"/>
@@ -11341,6 +11756,7 @@
               </a:defRPr>
             </a:lvl2pPr>
             <a:lvl3pPr>
+              <a:buNone/>
               <a:defRPr sz="825" b="1">
                 <a:solidFill>
                   <a:srgbClr val="802D42"/>
@@ -11351,6 +11767,7 @@
               </a:defRPr>
             </a:lvl3pPr>
             <a:lvl4pPr>
+              <a:buNone/>
               <a:defRPr sz="825" b="1">
                 <a:solidFill>
                   <a:srgbClr val="802D42"/>
@@ -11361,6 +11778,7 @@
               </a:defRPr>
             </a:lvl4pPr>
             <a:lvl5pPr>
+              <a:buNone/>
               <a:defRPr sz="825" b="1">
                 <a:solidFill>
                   <a:srgbClr val="802D42"/>
@@ -11371,6 +11789,7 @@
               </a:defRPr>
             </a:lvl5pPr>
             <a:lvl6pPr>
+              <a:buNone/>
               <a:defRPr sz="825" b="1">
                 <a:solidFill>
                   <a:srgbClr val="802D42"/>
@@ -11381,6 +11800,7 @@
               </a:defRPr>
             </a:lvl6pPr>
             <a:lvl7pPr>
+              <a:buNone/>
               <a:defRPr sz="825" b="1">
                 <a:solidFill>
                   <a:srgbClr val="802D42"/>
@@ -11391,6 +11811,7 @@
               </a:defRPr>
             </a:lvl7pPr>
             <a:lvl8pPr>
+              <a:buNone/>
               <a:defRPr sz="825" b="1">
                 <a:solidFill>
                   <a:srgbClr val="802D42"/>
@@ -11401,6 +11822,7 @@
               </a:defRPr>
             </a:lvl8pPr>
             <a:lvl9pPr>
+              <a:buNone/>
               <a:defRPr sz="825" b="1">
                 <a:solidFill>
                   <a:srgbClr val="802D42"/>
@@ -11413,6 +11835,7 @@
           </a:lstStyle>
           <a:p xmlns:a="http://schemas.openxmlformats.org/drawingml/2006/main">
             <a:pPr>
+              <a:buNone/>
               <a:defRPr sz="825" b="1">
                 <a:solidFill>
                   <a:srgbClr val="802D42"/>
@@ -11478,6 +11901,7 @@
               </a:defRPr>
             </a:defPPr>
             <a:lvl1pPr>
+              <a:buNone/>
               <a:defRPr sz="1725" b="0">
                 <a:solidFill>
                   <a:srgbClr val="243244"/>
@@ -11488,6 +11912,7 @@
               </a:defRPr>
             </a:lvl1pPr>
             <a:lvl2pPr>
+              <a:buNone/>
               <a:defRPr sz="1725" b="0">
                 <a:solidFill>
                   <a:srgbClr val="243244"/>
@@ -11498,6 +11923,7 @@
               </a:defRPr>
             </a:lvl2pPr>
             <a:lvl3pPr>
+              <a:buNone/>
               <a:defRPr sz="1725" b="0">
                 <a:solidFill>
                   <a:srgbClr val="243244"/>
@@ -11508,6 +11934,7 @@
               </a:defRPr>
             </a:lvl3pPr>
             <a:lvl4pPr>
+              <a:buNone/>
               <a:defRPr sz="1725" b="0">
                 <a:solidFill>
                   <a:srgbClr val="243244"/>
@@ -11518,6 +11945,7 @@
               </a:defRPr>
             </a:lvl4pPr>
             <a:lvl5pPr>
+              <a:buNone/>
               <a:defRPr sz="1725" b="0">
                 <a:solidFill>
                   <a:srgbClr val="243244"/>
@@ -11528,6 +11956,7 @@
               </a:defRPr>
             </a:lvl5pPr>
             <a:lvl6pPr>
+              <a:buNone/>
               <a:defRPr sz="1725" b="0">
                 <a:solidFill>
                   <a:srgbClr val="243244"/>
@@ -11538,6 +11967,7 @@
               </a:defRPr>
             </a:lvl6pPr>
             <a:lvl7pPr>
+              <a:buNone/>
               <a:defRPr sz="1725" b="0">
                 <a:solidFill>
                   <a:srgbClr val="243244"/>
@@ -11548,6 +11978,7 @@
               </a:defRPr>
             </a:lvl7pPr>
             <a:lvl8pPr>
+              <a:buNone/>
               <a:defRPr sz="1725" b="0">
                 <a:solidFill>
                   <a:srgbClr val="243244"/>
@@ -11558,6 +11989,7 @@
               </a:defRPr>
             </a:lvl8pPr>
             <a:lvl9pPr>
+              <a:buNone/>
               <a:defRPr sz="1725" b="0">
                 <a:solidFill>
                   <a:srgbClr val="243244"/>
@@ -11570,6 +12002,7 @@
           </a:lstStyle>
           <a:p xmlns:a="http://schemas.openxmlformats.org/drawingml/2006/main">
             <a:pPr>
+              <a:buNone/>
               <a:defRPr sz="1725" b="0">
                 <a:solidFill>
                   <a:srgbClr val="243244"/>
@@ -11635,6 +12068,7 @@
               </a:defRPr>
             </a:defPPr>
             <a:lvl1pPr>
+              <a:buNone/>
               <a:defRPr sz="1725" b="0">
                 <a:solidFill>
                   <a:srgbClr val="243244"/>
@@ -11645,6 +12079,7 @@
               </a:defRPr>
             </a:lvl1pPr>
             <a:lvl2pPr>
+              <a:buNone/>
               <a:defRPr sz="1725" b="0">
                 <a:solidFill>
                   <a:srgbClr val="243244"/>
@@ -11655,6 +12090,7 @@
               </a:defRPr>
             </a:lvl2pPr>
             <a:lvl3pPr>
+              <a:buNone/>
               <a:defRPr sz="1725" b="0">
                 <a:solidFill>
                   <a:srgbClr val="243244"/>
@@ -11665,6 +12101,7 @@
               </a:defRPr>
             </a:lvl3pPr>
             <a:lvl4pPr>
+              <a:buNone/>
               <a:defRPr sz="1725" b="0">
                 <a:solidFill>
                   <a:srgbClr val="243244"/>
@@ -11675,6 +12112,7 @@
               </a:defRPr>
             </a:lvl4pPr>
             <a:lvl5pPr>
+              <a:buNone/>
               <a:defRPr sz="1725" b="0">
                 <a:solidFill>
                   <a:srgbClr val="243244"/>
@@ -11685,6 +12123,7 @@
               </a:defRPr>
             </a:lvl5pPr>
             <a:lvl6pPr>
+              <a:buNone/>
               <a:defRPr sz="1725" b="0">
                 <a:solidFill>
                   <a:srgbClr val="243244"/>
@@ -11695,6 +12134,7 @@
               </a:defRPr>
             </a:lvl6pPr>
             <a:lvl7pPr>
+              <a:buNone/>
               <a:defRPr sz="1725" b="0">
                 <a:solidFill>
                   <a:srgbClr val="243244"/>
@@ -11705,6 +12145,7 @@
               </a:defRPr>
             </a:lvl7pPr>
             <a:lvl8pPr>
+              <a:buNone/>
               <a:defRPr sz="1725" b="0">
                 <a:solidFill>
                   <a:srgbClr val="243244"/>
@@ -11715,6 +12156,7 @@
               </a:defRPr>
             </a:lvl8pPr>
             <a:lvl9pPr>
+              <a:buNone/>
               <a:defRPr sz="1725" b="0">
                 <a:solidFill>
                   <a:srgbClr val="243244"/>
@@ -11727,6 +12169,7 @@
           </a:lstStyle>
           <a:p xmlns:a="http://schemas.openxmlformats.org/drawingml/2006/main">
             <a:pPr>
+              <a:buNone/>
               <a:defRPr sz="1725" b="0">
                 <a:solidFill>
                   <a:srgbClr val="243244"/>
@@ -11792,6 +12235,7 @@
               </a:defRPr>
             </a:defPPr>
             <a:lvl1pPr>
+              <a:buNone/>
               <a:defRPr sz="1725" b="0">
                 <a:solidFill>
                   <a:srgbClr val="243244"/>
@@ -11802,6 +12246,7 @@
               </a:defRPr>
             </a:lvl1pPr>
             <a:lvl2pPr>
+              <a:buNone/>
               <a:defRPr sz="1725" b="0">
                 <a:solidFill>
                   <a:srgbClr val="243244"/>
@@ -11812,6 +12257,7 @@
               </a:defRPr>
             </a:lvl2pPr>
             <a:lvl3pPr>
+              <a:buNone/>
               <a:defRPr sz="1725" b="0">
                 <a:solidFill>
                   <a:srgbClr val="243244"/>
@@ -11822,6 +12268,7 @@
               </a:defRPr>
             </a:lvl3pPr>
             <a:lvl4pPr>
+              <a:buNone/>
               <a:defRPr sz="1725" b="0">
                 <a:solidFill>
                   <a:srgbClr val="243244"/>
@@ -11832,6 +12279,7 @@
               </a:defRPr>
             </a:lvl4pPr>
             <a:lvl5pPr>
+              <a:buNone/>
               <a:defRPr sz="1725" b="0">
                 <a:solidFill>
                   <a:srgbClr val="243244"/>
@@ -11842,6 +12290,7 @@
               </a:defRPr>
             </a:lvl5pPr>
             <a:lvl6pPr>
+              <a:buNone/>
               <a:defRPr sz="1725" b="0">
                 <a:solidFill>
                   <a:srgbClr val="243244"/>
@@ -11852,6 +12301,7 @@
               </a:defRPr>
             </a:lvl6pPr>
             <a:lvl7pPr>
+              <a:buNone/>
               <a:defRPr sz="1725" b="0">
                 <a:solidFill>
                   <a:srgbClr val="243244"/>
@@ -11862,6 +12312,7 @@
               </a:defRPr>
             </a:lvl7pPr>
             <a:lvl8pPr>
+              <a:buNone/>
               <a:defRPr sz="1725" b="0">
                 <a:solidFill>
                   <a:srgbClr val="243244"/>
@@ -11872,6 +12323,7 @@
               </a:defRPr>
             </a:lvl8pPr>
             <a:lvl9pPr>
+              <a:buNone/>
               <a:defRPr sz="1725" b="0">
                 <a:solidFill>
                   <a:srgbClr val="243244"/>
@@ -11884,6 +12336,7 @@
           </a:lstStyle>
           <a:p xmlns:a="http://schemas.openxmlformats.org/drawingml/2006/main">
             <a:pPr>
+              <a:buNone/>
               <a:defRPr sz="1725" b="0">
                 <a:solidFill>
                   <a:srgbClr val="243244"/>
@@ -11978,6 +12431,7 @@
               </a:defRPr>
             </a:defPPr>
             <a:lvl1pPr>
+              <a:buNone/>
               <a:defRPr sz="900" b="1">
                 <a:solidFill>
                   <a:srgbClr val="802D42"/>
@@ -11988,6 +12442,7 @@
               </a:defRPr>
             </a:lvl1pPr>
             <a:lvl2pPr>
+              <a:buNone/>
               <a:defRPr sz="900" b="1">
                 <a:solidFill>
                   <a:srgbClr val="802D42"/>
@@ -11998,6 +12453,7 @@
               </a:defRPr>
             </a:lvl2pPr>
             <a:lvl3pPr>
+              <a:buNone/>
               <a:defRPr sz="900" b="1">
                 <a:solidFill>
                   <a:srgbClr val="802D42"/>
@@ -12008,6 +12464,7 @@
               </a:defRPr>
             </a:lvl3pPr>
             <a:lvl4pPr>
+              <a:buNone/>
               <a:defRPr sz="900" b="1">
                 <a:solidFill>
                   <a:srgbClr val="802D42"/>
@@ -12018,6 +12475,7 @@
               </a:defRPr>
             </a:lvl4pPr>
             <a:lvl5pPr>
+              <a:buNone/>
               <a:defRPr sz="900" b="1">
                 <a:solidFill>
                   <a:srgbClr val="802D42"/>
@@ -12028,6 +12486,7 @@
               </a:defRPr>
             </a:lvl5pPr>
             <a:lvl6pPr>
+              <a:buNone/>
               <a:defRPr sz="900" b="1">
                 <a:solidFill>
                   <a:srgbClr val="802D42"/>
@@ -12038,6 +12497,7 @@
               </a:defRPr>
             </a:lvl6pPr>
             <a:lvl7pPr>
+              <a:buNone/>
               <a:defRPr sz="900" b="1">
                 <a:solidFill>
                   <a:srgbClr val="802D42"/>
@@ -12048,6 +12508,7 @@
               </a:defRPr>
             </a:lvl7pPr>
             <a:lvl8pPr>
+              <a:buNone/>
               <a:defRPr sz="900" b="1">
                 <a:solidFill>
                   <a:srgbClr val="802D42"/>
@@ -12058,6 +12519,7 @@
               </a:defRPr>
             </a:lvl8pPr>
             <a:lvl9pPr>
+              <a:buNone/>
               <a:defRPr sz="900" b="1">
                 <a:solidFill>
                   <a:srgbClr val="802D42"/>
@@ -12070,6 +12532,7 @@
           </a:lstStyle>
           <a:p xmlns:a="http://schemas.openxmlformats.org/drawingml/2006/main">
             <a:pPr>
+              <a:buNone/>
               <a:defRPr sz="900" b="1">
                 <a:solidFill>
                   <a:srgbClr val="802D42"/>
@@ -12135,6 +12598,7 @@
               </a:defRPr>
             </a:defPPr>
             <a:lvl1pPr>
+              <a:buNone/>
               <a:defRPr sz="2400" b="1">
                 <a:solidFill>
                   <a:srgbClr val="243244"/>
@@ -12145,6 +12609,7 @@
               </a:defRPr>
             </a:lvl1pPr>
             <a:lvl2pPr>
+              <a:buNone/>
               <a:defRPr sz="2400" b="1">
                 <a:solidFill>
                   <a:srgbClr val="243244"/>
@@ -12155,6 +12620,7 @@
               </a:defRPr>
             </a:lvl2pPr>
             <a:lvl3pPr>
+              <a:buNone/>
               <a:defRPr sz="2400" b="1">
                 <a:solidFill>
                   <a:srgbClr val="243244"/>
@@ -12165,6 +12631,7 @@
               </a:defRPr>
             </a:lvl3pPr>
             <a:lvl4pPr>
+              <a:buNone/>
               <a:defRPr sz="2400" b="1">
                 <a:solidFill>
                   <a:srgbClr val="243244"/>
@@ -12175,6 +12642,7 @@
               </a:defRPr>
             </a:lvl4pPr>
             <a:lvl5pPr>
+              <a:buNone/>
               <a:defRPr sz="2400" b="1">
                 <a:solidFill>
                   <a:srgbClr val="243244"/>
@@ -12185,6 +12653,7 @@
               </a:defRPr>
             </a:lvl5pPr>
             <a:lvl6pPr>
+              <a:buNone/>
               <a:defRPr sz="2400" b="1">
                 <a:solidFill>
                   <a:srgbClr val="243244"/>
@@ -12195,6 +12664,7 @@
               </a:defRPr>
             </a:lvl6pPr>
             <a:lvl7pPr>
+              <a:buNone/>
               <a:defRPr sz="2400" b="1">
                 <a:solidFill>
                   <a:srgbClr val="243244"/>
@@ -12205,6 +12675,7 @@
               </a:defRPr>
             </a:lvl7pPr>
             <a:lvl8pPr>
+              <a:buNone/>
               <a:defRPr sz="2400" b="1">
                 <a:solidFill>
                   <a:srgbClr val="243244"/>
@@ -12215,6 +12686,7 @@
               </a:defRPr>
             </a:lvl8pPr>
             <a:lvl9pPr>
+              <a:buNone/>
               <a:defRPr sz="2400" b="1">
                 <a:solidFill>
                   <a:srgbClr val="243244"/>
@@ -12227,6 +12699,7 @@
           </a:lstStyle>
           <a:p xmlns:a="http://schemas.openxmlformats.org/drawingml/2006/main">
             <a:pPr>
+              <a:buNone/>
               <a:defRPr sz="2400" b="1">
                 <a:solidFill>
                   <a:srgbClr val="243244"/>
@@ -12292,6 +12765,7 @@
               </a:defRPr>
             </a:defPPr>
             <a:lvl1pPr>
+              <a:buNone/>
               <a:defRPr sz="1275" b="0">
                 <a:solidFill>
                   <a:srgbClr val="596678"/>
@@ -12302,6 +12776,7 @@
               </a:defRPr>
             </a:lvl1pPr>
             <a:lvl2pPr>
+              <a:buNone/>
               <a:defRPr sz="1275" b="0">
                 <a:solidFill>
                   <a:srgbClr val="596678"/>
@@ -12312,6 +12787,7 @@
               </a:defRPr>
             </a:lvl2pPr>
             <a:lvl3pPr>
+              <a:buNone/>
               <a:defRPr sz="1275" b="0">
                 <a:solidFill>
                   <a:srgbClr val="596678"/>
@@ -12322,6 +12798,7 @@
               </a:defRPr>
             </a:lvl3pPr>
             <a:lvl4pPr>
+              <a:buNone/>
               <a:defRPr sz="1275" b="0">
                 <a:solidFill>
                   <a:srgbClr val="596678"/>
@@ -12332,6 +12809,7 @@
               </a:defRPr>
             </a:lvl4pPr>
             <a:lvl5pPr>
+              <a:buNone/>
               <a:defRPr sz="1275" b="0">
                 <a:solidFill>
                   <a:srgbClr val="596678"/>
@@ -12342,6 +12820,7 @@
               </a:defRPr>
             </a:lvl5pPr>
             <a:lvl6pPr>
+              <a:buNone/>
               <a:defRPr sz="1275" b="0">
                 <a:solidFill>
                   <a:srgbClr val="596678"/>
@@ -12352,6 +12831,7 @@
               </a:defRPr>
             </a:lvl6pPr>
             <a:lvl7pPr>
+              <a:buNone/>
               <a:defRPr sz="1275" b="0">
                 <a:solidFill>
                   <a:srgbClr val="596678"/>
@@ -12362,6 +12842,7 @@
               </a:defRPr>
             </a:lvl7pPr>
             <a:lvl8pPr>
+              <a:buNone/>
               <a:defRPr sz="1275" b="0">
                 <a:solidFill>
                   <a:srgbClr val="596678"/>
@@ -12372,6 +12853,7 @@
               </a:defRPr>
             </a:lvl8pPr>
             <a:lvl9pPr>
+              <a:buNone/>
               <a:defRPr sz="1275" b="0">
                 <a:solidFill>
                   <a:srgbClr val="596678"/>
@@ -12384,6 +12866,7 @@
           </a:lstStyle>
           <a:p xmlns:a="http://schemas.openxmlformats.org/drawingml/2006/main">
             <a:pPr>
+              <a:buNone/>
               <a:defRPr sz="1275" b="0">
                 <a:solidFill>
                   <a:srgbClr val="596678"/>
@@ -12449,6 +12932,7 @@
               </a:defRPr>
             </a:defPPr>
             <a:lvl1pPr>
+              <a:buNone/>
               <a:defRPr sz="825" b="0">
                 <a:solidFill>
                   <a:srgbClr val="596678"/>
@@ -12459,6 +12943,7 @@
               </a:defRPr>
             </a:lvl1pPr>
             <a:lvl2pPr>
+              <a:buNone/>
               <a:defRPr sz="825" b="0">
                 <a:solidFill>
                   <a:srgbClr val="596678"/>
@@ -12469,6 +12954,7 @@
               </a:defRPr>
             </a:lvl2pPr>
             <a:lvl3pPr>
+              <a:buNone/>
               <a:defRPr sz="825" b="0">
                 <a:solidFill>
                   <a:srgbClr val="596678"/>
@@ -12479,6 +12965,7 @@
               </a:defRPr>
             </a:lvl3pPr>
             <a:lvl4pPr>
+              <a:buNone/>
               <a:defRPr sz="825" b="0">
                 <a:solidFill>
                   <a:srgbClr val="596678"/>
@@ -12489,6 +12976,7 @@
               </a:defRPr>
             </a:lvl4pPr>
             <a:lvl5pPr>
+              <a:buNone/>
               <a:defRPr sz="825" b="0">
                 <a:solidFill>
                   <a:srgbClr val="596678"/>
@@ -12499,6 +12987,7 @@
               </a:defRPr>
             </a:lvl5pPr>
             <a:lvl6pPr>
+              <a:buNone/>
               <a:defRPr sz="825" b="0">
                 <a:solidFill>
                   <a:srgbClr val="596678"/>
@@ -12509,6 +12998,7 @@
               </a:defRPr>
             </a:lvl6pPr>
             <a:lvl7pPr>
+              <a:buNone/>
               <a:defRPr sz="825" b="0">
                 <a:solidFill>
                   <a:srgbClr val="596678"/>
@@ -12519,6 +13009,7 @@
               </a:defRPr>
             </a:lvl7pPr>
             <a:lvl8pPr>
+              <a:buNone/>
               <a:defRPr sz="825" b="0">
                 <a:solidFill>
                   <a:srgbClr val="596678"/>
@@ -12529,6 +13020,7 @@
               </a:defRPr>
             </a:lvl8pPr>
             <a:lvl9pPr>
+              <a:buNone/>
               <a:defRPr sz="825" b="0">
                 <a:solidFill>
                   <a:srgbClr val="596678"/>
@@ -12541,6 +13033,7 @@
           </a:lstStyle>
           <a:p xmlns:a="http://schemas.openxmlformats.org/drawingml/2006/main">
             <a:pPr>
+              <a:buNone/>
               <a:defRPr sz="825" b="0">
                 <a:solidFill>
                   <a:srgbClr val="596678"/>
@@ -12606,6 +13099,7 @@
               </a:defRPr>
             </a:defPPr>
             <a:lvl1pPr>
+              <a:buNone/>
               <a:defRPr sz="825" b="1">
                 <a:solidFill>
                   <a:srgbClr val="802D42"/>
@@ -12616,6 +13110,7 @@
               </a:defRPr>
             </a:lvl1pPr>
             <a:lvl2pPr>
+              <a:buNone/>
               <a:defRPr sz="825" b="1">
                 <a:solidFill>
                   <a:srgbClr val="802D42"/>
@@ -12626,6 +13121,7 @@
               </a:defRPr>
             </a:lvl2pPr>
             <a:lvl3pPr>
+              <a:buNone/>
               <a:defRPr sz="825" b="1">
                 <a:solidFill>
                   <a:srgbClr val="802D42"/>
@@ -12636,6 +13132,7 @@
               </a:defRPr>
             </a:lvl3pPr>
             <a:lvl4pPr>
+              <a:buNone/>
               <a:defRPr sz="825" b="1">
                 <a:solidFill>
                   <a:srgbClr val="802D42"/>
@@ -12646,6 +13143,7 @@
               </a:defRPr>
             </a:lvl4pPr>
             <a:lvl5pPr>
+              <a:buNone/>
               <a:defRPr sz="825" b="1">
                 <a:solidFill>
                   <a:srgbClr val="802D42"/>
@@ -12656,6 +13154,7 @@
               </a:defRPr>
             </a:lvl5pPr>
             <a:lvl6pPr>
+              <a:buNone/>
               <a:defRPr sz="825" b="1">
                 <a:solidFill>
                   <a:srgbClr val="802D42"/>
@@ -12666,6 +13165,7 @@
               </a:defRPr>
             </a:lvl6pPr>
             <a:lvl7pPr>
+              <a:buNone/>
               <a:defRPr sz="825" b="1">
                 <a:solidFill>
                   <a:srgbClr val="802D42"/>
@@ -12676,6 +13176,7 @@
               </a:defRPr>
             </a:lvl7pPr>
             <a:lvl8pPr>
+              <a:buNone/>
               <a:defRPr sz="825" b="1">
                 <a:solidFill>
                   <a:srgbClr val="802D42"/>
@@ -12686,6 +13187,7 @@
               </a:defRPr>
             </a:lvl8pPr>
             <a:lvl9pPr>
+              <a:buNone/>
               <a:defRPr sz="825" b="1">
                 <a:solidFill>
                   <a:srgbClr val="802D42"/>
@@ -12698,6 +13200,7 @@
           </a:lstStyle>
           <a:p xmlns:a="http://schemas.openxmlformats.org/drawingml/2006/main">
             <a:pPr>
+              <a:buNone/>
               <a:defRPr sz="825" b="1">
                 <a:solidFill>
                   <a:srgbClr val="802D42"/>
@@ -12763,6 +13266,7 @@
               </a:defRPr>
             </a:defPPr>
             <a:lvl1pPr>
+              <a:buNone/>
               <a:defRPr sz="1725" b="0">
                 <a:solidFill>
                   <a:srgbClr val="243244"/>
@@ -12773,6 +13277,7 @@
               </a:defRPr>
             </a:lvl1pPr>
             <a:lvl2pPr>
+              <a:buNone/>
               <a:defRPr sz="1725" b="0">
                 <a:solidFill>
                   <a:srgbClr val="243244"/>
@@ -12783,6 +13288,7 @@
               </a:defRPr>
             </a:lvl2pPr>
             <a:lvl3pPr>
+              <a:buNone/>
               <a:defRPr sz="1725" b="0">
                 <a:solidFill>
                   <a:srgbClr val="243244"/>
@@ -12793,6 +13299,7 @@
               </a:defRPr>
             </a:lvl3pPr>
             <a:lvl4pPr>
+              <a:buNone/>
               <a:defRPr sz="1725" b="0">
                 <a:solidFill>
                   <a:srgbClr val="243244"/>
@@ -12803,6 +13310,7 @@
               </a:defRPr>
             </a:lvl4pPr>
             <a:lvl5pPr>
+              <a:buNone/>
               <a:defRPr sz="1725" b="0">
                 <a:solidFill>
                   <a:srgbClr val="243244"/>
@@ -12813,6 +13321,7 @@
               </a:defRPr>
             </a:lvl5pPr>
             <a:lvl6pPr>
+              <a:buNone/>
               <a:defRPr sz="1725" b="0">
                 <a:solidFill>
                   <a:srgbClr val="243244"/>
@@ -12823,6 +13332,7 @@
               </a:defRPr>
             </a:lvl6pPr>
             <a:lvl7pPr>
+              <a:buNone/>
               <a:defRPr sz="1725" b="0">
                 <a:solidFill>
                   <a:srgbClr val="243244"/>
@@ -12833,6 +13343,7 @@
               </a:defRPr>
             </a:lvl7pPr>
             <a:lvl8pPr>
+              <a:buNone/>
               <a:defRPr sz="1725" b="0">
                 <a:solidFill>
                   <a:srgbClr val="243244"/>
@@ -12843,6 +13354,7 @@
               </a:defRPr>
             </a:lvl8pPr>
             <a:lvl9pPr>
+              <a:buNone/>
               <a:defRPr sz="1725" b="0">
                 <a:solidFill>
                   <a:srgbClr val="243244"/>
@@ -12855,6 +13367,7 @@
           </a:lstStyle>
           <a:p xmlns:a="http://schemas.openxmlformats.org/drawingml/2006/main">
             <a:pPr>
+              <a:buNone/>
               <a:defRPr sz="1725" b="0">
                 <a:solidFill>
                   <a:srgbClr val="243244"/>
@@ -12920,6 +13433,7 @@
               </a:defRPr>
             </a:defPPr>
             <a:lvl1pPr>
+              <a:buNone/>
               <a:defRPr sz="1725" b="0">
                 <a:solidFill>
                   <a:srgbClr val="243244"/>
@@ -12930,6 +13444,7 @@
               </a:defRPr>
             </a:lvl1pPr>
             <a:lvl2pPr>
+              <a:buNone/>
               <a:defRPr sz="1725" b="0">
                 <a:solidFill>
                   <a:srgbClr val="243244"/>
@@ -12940,6 +13455,7 @@
               </a:defRPr>
             </a:lvl2pPr>
             <a:lvl3pPr>
+              <a:buNone/>
               <a:defRPr sz="1725" b="0">
                 <a:solidFill>
                   <a:srgbClr val="243244"/>
@@ -12950,6 +13466,7 @@
               </a:defRPr>
             </a:lvl3pPr>
             <a:lvl4pPr>
+              <a:buNone/>
               <a:defRPr sz="1725" b="0">
                 <a:solidFill>
                   <a:srgbClr val="243244"/>
@@ -12960,6 +13477,7 @@
               </a:defRPr>
             </a:lvl4pPr>
             <a:lvl5pPr>
+              <a:buNone/>
               <a:defRPr sz="1725" b="0">
                 <a:solidFill>
                   <a:srgbClr val="243244"/>
@@ -12970,6 +13488,7 @@
               </a:defRPr>
             </a:lvl5pPr>
             <a:lvl6pPr>
+              <a:buNone/>
               <a:defRPr sz="1725" b="0">
                 <a:solidFill>
                   <a:srgbClr val="243244"/>
@@ -12980,6 +13499,7 @@
               </a:defRPr>
             </a:lvl6pPr>
             <a:lvl7pPr>
+              <a:buNone/>
               <a:defRPr sz="1725" b="0">
                 <a:solidFill>
                   <a:srgbClr val="243244"/>
@@ -12990,6 +13510,7 @@
               </a:defRPr>
             </a:lvl7pPr>
             <a:lvl8pPr>
+              <a:buNone/>
               <a:defRPr sz="1725" b="0">
                 <a:solidFill>
                   <a:srgbClr val="243244"/>
@@ -13000,6 +13521,7 @@
               </a:defRPr>
             </a:lvl8pPr>
             <a:lvl9pPr>
+              <a:buNone/>
               <a:defRPr sz="1725" b="0">
                 <a:solidFill>
                   <a:srgbClr val="243244"/>
@@ -13012,6 +13534,7 @@
           </a:lstStyle>
           <a:p xmlns:a="http://schemas.openxmlformats.org/drawingml/2006/main">
             <a:pPr>
+              <a:buNone/>
               <a:defRPr sz="1725" b="0">
                 <a:solidFill>
                   <a:srgbClr val="243244"/>
@@ -13077,6 +13600,7 @@
               </a:defRPr>
             </a:defPPr>
             <a:lvl1pPr>
+              <a:buNone/>
               <a:defRPr sz="1725" b="0">
                 <a:solidFill>
                   <a:srgbClr val="243244"/>
@@ -13087,6 +13611,7 @@
               </a:defRPr>
             </a:lvl1pPr>
             <a:lvl2pPr>
+              <a:buNone/>
               <a:defRPr sz="1725" b="0">
                 <a:solidFill>
                   <a:srgbClr val="243244"/>
@@ -13097,6 +13622,7 @@
               </a:defRPr>
             </a:lvl2pPr>
             <a:lvl3pPr>
+              <a:buNone/>
               <a:defRPr sz="1725" b="0">
                 <a:solidFill>
                   <a:srgbClr val="243244"/>
@@ -13107,6 +13633,7 @@
               </a:defRPr>
             </a:lvl3pPr>
             <a:lvl4pPr>
+              <a:buNone/>
               <a:defRPr sz="1725" b="0">
                 <a:solidFill>
                   <a:srgbClr val="243244"/>
@@ -13117,6 +13644,7 @@
               </a:defRPr>
             </a:lvl4pPr>
             <a:lvl5pPr>
+              <a:buNone/>
               <a:defRPr sz="1725" b="0">
                 <a:solidFill>
                   <a:srgbClr val="243244"/>
@@ -13127,6 +13655,7 @@
               </a:defRPr>
             </a:lvl5pPr>
             <a:lvl6pPr>
+              <a:buNone/>
               <a:defRPr sz="1725" b="0">
                 <a:solidFill>
                   <a:srgbClr val="243244"/>
@@ -13137,6 +13666,7 @@
               </a:defRPr>
             </a:lvl6pPr>
             <a:lvl7pPr>
+              <a:buNone/>
               <a:defRPr sz="1725" b="0">
                 <a:solidFill>
                   <a:srgbClr val="243244"/>
@@ -13147,6 +13677,7 @@
               </a:defRPr>
             </a:lvl7pPr>
             <a:lvl8pPr>
+              <a:buNone/>
               <a:defRPr sz="1725" b="0">
                 <a:solidFill>
                   <a:srgbClr val="243244"/>
@@ -13157,6 +13688,7 @@
               </a:defRPr>
             </a:lvl8pPr>
             <a:lvl9pPr>
+              <a:buNone/>
               <a:defRPr sz="1725" b="0">
                 <a:solidFill>
                   <a:srgbClr val="243244"/>
@@ -13169,6 +13701,7 @@
           </a:lstStyle>
           <a:p xmlns:a="http://schemas.openxmlformats.org/drawingml/2006/main">
             <a:pPr>
+              <a:buNone/>
               <a:defRPr sz="1725" b="0">
                 <a:solidFill>
                   <a:srgbClr val="243244"/>
@@ -13263,6 +13796,7 @@
               </a:defRPr>
             </a:defPPr>
             <a:lvl1pPr>
+              <a:buNone/>
               <a:defRPr sz="900" b="1">
                 <a:solidFill>
                   <a:srgbClr val="802D42"/>
@@ -13273,6 +13807,7 @@
               </a:defRPr>
             </a:lvl1pPr>
             <a:lvl2pPr>
+              <a:buNone/>
               <a:defRPr sz="900" b="1">
                 <a:solidFill>
                   <a:srgbClr val="802D42"/>
@@ -13283,6 +13818,7 @@
               </a:defRPr>
             </a:lvl2pPr>
             <a:lvl3pPr>
+              <a:buNone/>
               <a:defRPr sz="900" b="1">
                 <a:solidFill>
                   <a:srgbClr val="802D42"/>
@@ -13293,6 +13829,7 @@
               </a:defRPr>
             </a:lvl3pPr>
             <a:lvl4pPr>
+              <a:buNone/>
               <a:defRPr sz="900" b="1">
                 <a:solidFill>
                   <a:srgbClr val="802D42"/>
@@ -13303,6 +13840,7 @@
               </a:defRPr>
             </a:lvl4pPr>
             <a:lvl5pPr>
+              <a:buNone/>
               <a:defRPr sz="900" b="1">
                 <a:solidFill>
                   <a:srgbClr val="802D42"/>
@@ -13313,6 +13851,7 @@
               </a:defRPr>
             </a:lvl5pPr>
             <a:lvl6pPr>
+              <a:buNone/>
               <a:defRPr sz="900" b="1">
                 <a:solidFill>
                   <a:srgbClr val="802D42"/>
@@ -13323,6 +13862,7 @@
               </a:defRPr>
             </a:lvl6pPr>
             <a:lvl7pPr>
+              <a:buNone/>
               <a:defRPr sz="900" b="1">
                 <a:solidFill>
                   <a:srgbClr val="802D42"/>
@@ -13333,6 +13873,7 @@
               </a:defRPr>
             </a:lvl7pPr>
             <a:lvl8pPr>
+              <a:buNone/>
               <a:defRPr sz="900" b="1">
                 <a:solidFill>
                   <a:srgbClr val="802D42"/>
@@ -13343,6 +13884,7 @@
               </a:defRPr>
             </a:lvl8pPr>
             <a:lvl9pPr>
+              <a:buNone/>
               <a:defRPr sz="900" b="1">
                 <a:solidFill>
                   <a:srgbClr val="802D42"/>
@@ -13355,6 +13897,7 @@
           </a:lstStyle>
           <a:p xmlns:a="http://schemas.openxmlformats.org/drawingml/2006/main">
             <a:pPr>
+              <a:buNone/>
               <a:defRPr sz="900" b="1">
                 <a:solidFill>
                   <a:srgbClr val="802D42"/>
@@ -13420,6 +13963,7 @@
               </a:defRPr>
             </a:defPPr>
             <a:lvl1pPr>
+              <a:buNone/>
               <a:defRPr sz="2400" b="1">
                 <a:solidFill>
                   <a:srgbClr val="243244"/>
@@ -13430,6 +13974,7 @@
               </a:defRPr>
             </a:lvl1pPr>
             <a:lvl2pPr>
+              <a:buNone/>
               <a:defRPr sz="2400" b="1">
                 <a:solidFill>
                   <a:srgbClr val="243244"/>
@@ -13440,6 +13985,7 @@
               </a:defRPr>
             </a:lvl2pPr>
             <a:lvl3pPr>
+              <a:buNone/>
               <a:defRPr sz="2400" b="1">
                 <a:solidFill>
                   <a:srgbClr val="243244"/>
@@ -13450,6 +13996,7 @@
               </a:defRPr>
             </a:lvl3pPr>
             <a:lvl4pPr>
+              <a:buNone/>
               <a:defRPr sz="2400" b="1">
                 <a:solidFill>
                   <a:srgbClr val="243244"/>
@@ -13460,6 +14007,7 @@
               </a:defRPr>
             </a:lvl4pPr>
             <a:lvl5pPr>
+              <a:buNone/>
               <a:defRPr sz="2400" b="1">
                 <a:solidFill>
                   <a:srgbClr val="243244"/>
@@ -13470,6 +14018,7 @@
               </a:defRPr>
             </a:lvl5pPr>
             <a:lvl6pPr>
+              <a:buNone/>
               <a:defRPr sz="2400" b="1">
                 <a:solidFill>
                   <a:srgbClr val="243244"/>
@@ -13480,6 +14029,7 @@
               </a:defRPr>
             </a:lvl6pPr>
             <a:lvl7pPr>
+              <a:buNone/>
               <a:defRPr sz="2400" b="1">
                 <a:solidFill>
                   <a:srgbClr val="243244"/>
@@ -13490,6 +14040,7 @@
               </a:defRPr>
             </a:lvl7pPr>
             <a:lvl8pPr>
+              <a:buNone/>
               <a:defRPr sz="2400" b="1">
                 <a:solidFill>
                   <a:srgbClr val="243244"/>
@@ -13500,6 +14051,7 @@
               </a:defRPr>
             </a:lvl8pPr>
             <a:lvl9pPr>
+              <a:buNone/>
               <a:defRPr sz="2400" b="1">
                 <a:solidFill>
                   <a:srgbClr val="243244"/>
@@ -13512,6 +14064,7 @@
           </a:lstStyle>
           <a:p xmlns:a="http://schemas.openxmlformats.org/drawingml/2006/main">
             <a:pPr>
+              <a:buNone/>
               <a:defRPr sz="2400" b="1">
                 <a:solidFill>
                   <a:srgbClr val="243244"/>
@@ -13577,6 +14130,7 @@
               </a:defRPr>
             </a:defPPr>
             <a:lvl1pPr>
+              <a:buNone/>
               <a:defRPr sz="1275" b="0">
                 <a:solidFill>
                   <a:srgbClr val="596678"/>
@@ -13587,6 +14141,7 @@
               </a:defRPr>
             </a:lvl1pPr>
             <a:lvl2pPr>
+              <a:buNone/>
               <a:defRPr sz="1275" b="0">
                 <a:solidFill>
                   <a:srgbClr val="596678"/>
@@ -13597,6 +14152,7 @@
               </a:defRPr>
             </a:lvl2pPr>
             <a:lvl3pPr>
+              <a:buNone/>
               <a:defRPr sz="1275" b="0">
                 <a:solidFill>
                   <a:srgbClr val="596678"/>
@@ -13607,6 +14163,7 @@
               </a:defRPr>
             </a:lvl3pPr>
             <a:lvl4pPr>
+              <a:buNone/>
               <a:defRPr sz="1275" b="0">
                 <a:solidFill>
                   <a:srgbClr val="596678"/>
@@ -13617,6 +14174,7 @@
               </a:defRPr>
             </a:lvl4pPr>
             <a:lvl5pPr>
+              <a:buNone/>
               <a:defRPr sz="1275" b="0">
                 <a:solidFill>
                   <a:srgbClr val="596678"/>
@@ -13627,6 +14185,7 @@
               </a:defRPr>
             </a:lvl5pPr>
             <a:lvl6pPr>
+              <a:buNone/>
               <a:defRPr sz="1275" b="0">
                 <a:solidFill>
                   <a:srgbClr val="596678"/>
@@ -13637,6 +14196,7 @@
               </a:defRPr>
             </a:lvl6pPr>
             <a:lvl7pPr>
+              <a:buNone/>
               <a:defRPr sz="1275" b="0">
                 <a:solidFill>
                   <a:srgbClr val="596678"/>
@@ -13647,6 +14207,7 @@
               </a:defRPr>
             </a:lvl7pPr>
             <a:lvl8pPr>
+              <a:buNone/>
               <a:defRPr sz="1275" b="0">
                 <a:solidFill>
                   <a:srgbClr val="596678"/>
@@ -13657,6 +14218,7 @@
               </a:defRPr>
             </a:lvl8pPr>
             <a:lvl9pPr>
+              <a:buNone/>
               <a:defRPr sz="1275" b="0">
                 <a:solidFill>
                   <a:srgbClr val="596678"/>
@@ -13669,6 +14231,7 @@
           </a:lstStyle>
           <a:p xmlns:a="http://schemas.openxmlformats.org/drawingml/2006/main">
             <a:pPr>
+              <a:buNone/>
               <a:defRPr sz="1275" b="0">
                 <a:solidFill>
                   <a:srgbClr val="596678"/>
@@ -13734,6 +14297,7 @@
               </a:defRPr>
             </a:defPPr>
             <a:lvl1pPr>
+              <a:buNone/>
               <a:defRPr sz="825" b="0">
                 <a:solidFill>
                   <a:srgbClr val="596678"/>
@@ -13744,6 +14308,7 @@
               </a:defRPr>
             </a:lvl1pPr>
             <a:lvl2pPr>
+              <a:buNone/>
               <a:defRPr sz="825" b="0">
                 <a:solidFill>
                   <a:srgbClr val="596678"/>
@@ -13754,6 +14319,7 @@
               </a:defRPr>
             </a:lvl2pPr>
             <a:lvl3pPr>
+              <a:buNone/>
               <a:defRPr sz="825" b="0">
                 <a:solidFill>
                   <a:srgbClr val="596678"/>
@@ -13764,6 +14330,7 @@
               </a:defRPr>
             </a:lvl3pPr>
             <a:lvl4pPr>
+              <a:buNone/>
               <a:defRPr sz="825" b="0">
                 <a:solidFill>
                   <a:srgbClr val="596678"/>
@@ -13774,6 +14341,7 @@
               </a:defRPr>
             </a:lvl4pPr>
             <a:lvl5pPr>
+              <a:buNone/>
               <a:defRPr sz="825" b="0">
                 <a:solidFill>
                   <a:srgbClr val="596678"/>
@@ -13784,6 +14352,7 @@
               </a:defRPr>
             </a:lvl5pPr>
             <a:lvl6pPr>
+              <a:buNone/>
               <a:defRPr sz="825" b="0">
                 <a:solidFill>
                   <a:srgbClr val="596678"/>
@@ -13794,6 +14363,7 @@
               </a:defRPr>
             </a:lvl6pPr>
             <a:lvl7pPr>
+              <a:buNone/>
               <a:defRPr sz="825" b="0">
                 <a:solidFill>
                   <a:srgbClr val="596678"/>
@@ -13804,6 +14374,7 @@
               </a:defRPr>
             </a:lvl7pPr>
             <a:lvl8pPr>
+              <a:buNone/>
               <a:defRPr sz="825" b="0">
                 <a:solidFill>
                   <a:srgbClr val="596678"/>
@@ -13814,6 +14385,7 @@
               </a:defRPr>
             </a:lvl8pPr>
             <a:lvl9pPr>
+              <a:buNone/>
               <a:defRPr sz="825" b="0">
                 <a:solidFill>
                   <a:srgbClr val="596678"/>
@@ -13826,6 +14398,7 @@
           </a:lstStyle>
           <a:p xmlns:a="http://schemas.openxmlformats.org/drawingml/2006/main">
             <a:pPr>
+              <a:buNone/>
               <a:defRPr sz="825" b="0">
                 <a:solidFill>
                   <a:srgbClr val="596678"/>
@@ -13891,6 +14464,7 @@
               </a:defRPr>
             </a:defPPr>
             <a:lvl1pPr>
+              <a:buNone/>
               <a:defRPr sz="825" b="1">
                 <a:solidFill>
                   <a:srgbClr val="802D42"/>
@@ -13901,6 +14475,7 @@
               </a:defRPr>
             </a:lvl1pPr>
             <a:lvl2pPr>
+              <a:buNone/>
               <a:defRPr sz="825" b="1">
                 <a:solidFill>
                   <a:srgbClr val="802D42"/>
@@ -13911,6 +14486,7 @@
               </a:defRPr>
             </a:lvl2pPr>
             <a:lvl3pPr>
+              <a:buNone/>
               <a:defRPr sz="825" b="1">
                 <a:solidFill>
                   <a:srgbClr val="802D42"/>
@@ -13921,6 +14497,7 @@
               </a:defRPr>
             </a:lvl3pPr>
             <a:lvl4pPr>
+              <a:buNone/>
               <a:defRPr sz="825" b="1">
                 <a:solidFill>
                   <a:srgbClr val="802D42"/>
@@ -13931,6 +14508,7 @@
               </a:defRPr>
             </a:lvl4pPr>
             <a:lvl5pPr>
+              <a:buNone/>
               <a:defRPr sz="825" b="1">
                 <a:solidFill>
                   <a:srgbClr val="802D42"/>
@@ -13941,6 +14519,7 @@
               </a:defRPr>
             </a:lvl5pPr>
             <a:lvl6pPr>
+              <a:buNone/>
               <a:defRPr sz="825" b="1">
                 <a:solidFill>
                   <a:srgbClr val="802D42"/>
@@ -13951,6 +14530,7 @@
               </a:defRPr>
             </a:lvl6pPr>
             <a:lvl7pPr>
+              <a:buNone/>
               <a:defRPr sz="825" b="1">
                 <a:solidFill>
                   <a:srgbClr val="802D42"/>
@@ -13961,6 +14541,7 @@
               </a:defRPr>
             </a:lvl7pPr>
             <a:lvl8pPr>
+              <a:buNone/>
               <a:defRPr sz="825" b="1">
                 <a:solidFill>
                   <a:srgbClr val="802D42"/>
@@ -13971,6 +14552,7 @@
               </a:defRPr>
             </a:lvl8pPr>
             <a:lvl9pPr>
+              <a:buNone/>
               <a:defRPr sz="825" b="1">
                 <a:solidFill>
                   <a:srgbClr val="802D42"/>
@@ -13983,6 +14565,7 @@
           </a:lstStyle>
           <a:p xmlns:a="http://schemas.openxmlformats.org/drawingml/2006/main">
             <a:pPr>
+              <a:buNone/>
               <a:defRPr sz="825" b="1">
                 <a:solidFill>
                   <a:srgbClr val="802D42"/>
@@ -14011,7 +14594,7 @@
           <p:cNvPr id="6" name="">
             <a:extLst xmlns:a="http://schemas.openxmlformats.org/drawingml/2006/main">
               <a:ext uri="{FF2B5EF4-FFF2-40B4-BE49-F238E27FC236}">
-                <a16:creationId xmlns:a16="http://schemas.microsoft.com/office/drawing/2014/main" id="{4E381760-D136-43A3-B86E-D9A4FAD00A3F}"/>
+                <a16:creationId xmlns:a16="http://schemas.microsoft.com/office/drawing/2014/main" id="{A6DECEE7-6796-412D-95AA-60BA21207D93}"/>
               </a:ext>
             </a:extLst>
           </p:cNvPr>
@@ -14021,7 +14604,7 @@
           <p:nvPr/>
         </p:nvPicPr>
         <p:blipFill>
-          <a:blip xmlns:r="http://schemas.openxmlformats.org/officeDocument/2006/relationships" xmlns:a="http://schemas.openxmlformats.org/drawingml/2006/main" r:embed="Rffb6bd711d404813"/>
+          <a:blip xmlns:r="http://schemas.openxmlformats.org/officeDocument/2006/relationships" xmlns:a="http://schemas.openxmlformats.org/drawingml/2006/main" r:embed="Ra61472582cb846fa"/>
           <a:stretch xmlns:a="http://schemas.openxmlformats.org/drawingml/2006/main"/>
         </p:blipFill>
         <p:spPr>
@@ -14105,6 +14688,7 @@
               </a:defRPr>
             </a:defPPr>
             <a:lvl1pPr>
+              <a:buNone/>
               <a:defRPr sz="900" b="1">
                 <a:solidFill>
                   <a:srgbClr val="802D42"/>
@@ -14115,6 +14699,7 @@
               </a:defRPr>
             </a:lvl1pPr>
             <a:lvl2pPr>
+              <a:buNone/>
               <a:defRPr sz="900" b="1">
                 <a:solidFill>
                   <a:srgbClr val="802D42"/>
@@ -14125,6 +14710,7 @@
               </a:defRPr>
             </a:lvl2pPr>
             <a:lvl3pPr>
+              <a:buNone/>
               <a:defRPr sz="900" b="1">
                 <a:solidFill>
                   <a:srgbClr val="802D42"/>
@@ -14135,6 +14721,7 @@
               </a:defRPr>
             </a:lvl3pPr>
             <a:lvl4pPr>
+              <a:buNone/>
               <a:defRPr sz="900" b="1">
                 <a:solidFill>
                   <a:srgbClr val="802D42"/>
@@ -14145,6 +14732,7 @@
               </a:defRPr>
             </a:lvl4pPr>
             <a:lvl5pPr>
+              <a:buNone/>
               <a:defRPr sz="900" b="1">
                 <a:solidFill>
                   <a:srgbClr val="802D42"/>
@@ -14155,6 +14743,7 @@
               </a:defRPr>
             </a:lvl5pPr>
             <a:lvl6pPr>
+              <a:buNone/>
               <a:defRPr sz="900" b="1">
                 <a:solidFill>
                   <a:srgbClr val="802D42"/>
@@ -14165,6 +14754,7 @@
               </a:defRPr>
             </a:lvl6pPr>
             <a:lvl7pPr>
+              <a:buNone/>
               <a:defRPr sz="900" b="1">
                 <a:solidFill>
                   <a:srgbClr val="802D42"/>
@@ -14175,6 +14765,7 @@
               </a:defRPr>
             </a:lvl7pPr>
             <a:lvl8pPr>
+              <a:buNone/>
               <a:defRPr sz="900" b="1">
                 <a:solidFill>
                   <a:srgbClr val="802D42"/>
@@ -14185,6 +14776,7 @@
               </a:defRPr>
             </a:lvl8pPr>
             <a:lvl9pPr>
+              <a:buNone/>
               <a:defRPr sz="900" b="1">
                 <a:solidFill>
                   <a:srgbClr val="802D42"/>
@@ -14197,6 +14789,7 @@
           </a:lstStyle>
           <a:p xmlns:a="http://schemas.openxmlformats.org/drawingml/2006/main">
             <a:pPr>
+              <a:buNone/>
               <a:defRPr sz="900" b="1">
                 <a:solidFill>
                   <a:srgbClr val="802D42"/>
@@ -14262,6 +14855,7 @@
               </a:defRPr>
             </a:defPPr>
             <a:lvl1pPr>
+              <a:buNone/>
               <a:defRPr sz="2400" b="1">
                 <a:solidFill>
                   <a:srgbClr val="243244"/>
@@ -14272,6 +14866,7 @@
               </a:defRPr>
             </a:lvl1pPr>
             <a:lvl2pPr>
+              <a:buNone/>
               <a:defRPr sz="2400" b="1">
                 <a:solidFill>
                   <a:srgbClr val="243244"/>
@@ -14282,6 +14877,7 @@
               </a:defRPr>
             </a:lvl2pPr>
             <a:lvl3pPr>
+              <a:buNone/>
               <a:defRPr sz="2400" b="1">
                 <a:solidFill>
                   <a:srgbClr val="243244"/>
@@ -14292,6 +14888,7 @@
               </a:defRPr>
             </a:lvl3pPr>
             <a:lvl4pPr>
+              <a:buNone/>
               <a:defRPr sz="2400" b="1">
                 <a:solidFill>
                   <a:srgbClr val="243244"/>
@@ -14302,6 +14899,7 @@
               </a:defRPr>
             </a:lvl4pPr>
             <a:lvl5pPr>
+              <a:buNone/>
               <a:defRPr sz="2400" b="1">
                 <a:solidFill>
                   <a:srgbClr val="243244"/>
@@ -14312,6 +14910,7 @@
               </a:defRPr>
             </a:lvl5pPr>
             <a:lvl6pPr>
+              <a:buNone/>
               <a:defRPr sz="2400" b="1">
                 <a:solidFill>
                   <a:srgbClr val="243244"/>
@@ -14322,6 +14921,7 @@
               </a:defRPr>
             </a:lvl6pPr>
             <a:lvl7pPr>
+              <a:buNone/>
               <a:defRPr sz="2400" b="1">
                 <a:solidFill>
                   <a:srgbClr val="243244"/>
@@ -14332,6 +14932,7 @@
               </a:defRPr>
             </a:lvl7pPr>
             <a:lvl8pPr>
+              <a:buNone/>
               <a:defRPr sz="2400" b="1">
                 <a:solidFill>
                   <a:srgbClr val="243244"/>
@@ -14342,6 +14943,7 @@
               </a:defRPr>
             </a:lvl8pPr>
             <a:lvl9pPr>
+              <a:buNone/>
               <a:defRPr sz="2400" b="1">
                 <a:solidFill>
                   <a:srgbClr val="243244"/>
@@ -14354,6 +14956,7 @@
           </a:lstStyle>
           <a:p xmlns:a="http://schemas.openxmlformats.org/drawingml/2006/main">
             <a:pPr>
+              <a:buNone/>
               <a:defRPr sz="2400" b="1">
                 <a:solidFill>
                   <a:srgbClr val="243244"/>
@@ -14419,6 +15022,7 @@
               </a:defRPr>
             </a:defPPr>
             <a:lvl1pPr>
+              <a:buNone/>
               <a:defRPr sz="1275" b="0">
                 <a:solidFill>
                   <a:srgbClr val="596678"/>
@@ -14429,6 +15033,7 @@
               </a:defRPr>
             </a:lvl1pPr>
             <a:lvl2pPr>
+              <a:buNone/>
               <a:defRPr sz="1275" b="0">
                 <a:solidFill>
                   <a:srgbClr val="596678"/>
@@ -14439,6 +15044,7 @@
               </a:defRPr>
             </a:lvl2pPr>
             <a:lvl3pPr>
+              <a:buNone/>
               <a:defRPr sz="1275" b="0">
                 <a:solidFill>
                   <a:srgbClr val="596678"/>
@@ -14449,6 +15055,7 @@
               </a:defRPr>
             </a:lvl3pPr>
             <a:lvl4pPr>
+              <a:buNone/>
               <a:defRPr sz="1275" b="0">
                 <a:solidFill>
                   <a:srgbClr val="596678"/>
@@ -14459,6 +15066,7 @@
               </a:defRPr>
             </a:lvl4pPr>
             <a:lvl5pPr>
+              <a:buNone/>
               <a:defRPr sz="1275" b="0">
                 <a:solidFill>
                   <a:srgbClr val="596678"/>
@@ -14469,6 +15077,7 @@
               </a:defRPr>
             </a:lvl5pPr>
             <a:lvl6pPr>
+              <a:buNone/>
               <a:defRPr sz="1275" b="0">
                 <a:solidFill>
                   <a:srgbClr val="596678"/>
@@ -14479,6 +15088,7 @@
               </a:defRPr>
             </a:lvl6pPr>
             <a:lvl7pPr>
+              <a:buNone/>
               <a:defRPr sz="1275" b="0">
                 <a:solidFill>
                   <a:srgbClr val="596678"/>
@@ -14489,6 +15099,7 @@
               </a:defRPr>
             </a:lvl7pPr>
             <a:lvl8pPr>
+              <a:buNone/>
               <a:defRPr sz="1275" b="0">
                 <a:solidFill>
                   <a:srgbClr val="596678"/>
@@ -14499,6 +15110,7 @@
               </a:defRPr>
             </a:lvl8pPr>
             <a:lvl9pPr>
+              <a:buNone/>
               <a:defRPr sz="1275" b="0">
                 <a:solidFill>
                   <a:srgbClr val="596678"/>
@@ -14511,6 +15123,7 @@
           </a:lstStyle>
           <a:p xmlns:a="http://schemas.openxmlformats.org/drawingml/2006/main">
             <a:pPr>
+              <a:buNone/>
               <a:defRPr sz="1275" b="0">
                 <a:solidFill>
                   <a:srgbClr val="596678"/>
@@ -14576,6 +15189,7 @@
               </a:defRPr>
             </a:defPPr>
             <a:lvl1pPr>
+              <a:buNone/>
               <a:defRPr sz="825" b="0">
                 <a:solidFill>
                   <a:srgbClr val="596678"/>
@@ -14586,6 +15200,7 @@
               </a:defRPr>
             </a:lvl1pPr>
             <a:lvl2pPr>
+              <a:buNone/>
               <a:defRPr sz="825" b="0">
                 <a:solidFill>
                   <a:srgbClr val="596678"/>
@@ -14596,6 +15211,7 @@
               </a:defRPr>
             </a:lvl2pPr>
             <a:lvl3pPr>
+              <a:buNone/>
               <a:defRPr sz="825" b="0">
                 <a:solidFill>
                   <a:srgbClr val="596678"/>
@@ -14606,6 +15222,7 @@
               </a:defRPr>
             </a:lvl3pPr>
             <a:lvl4pPr>
+              <a:buNone/>
               <a:defRPr sz="825" b="0">
                 <a:solidFill>
                   <a:srgbClr val="596678"/>
@@ -14616,6 +15233,7 @@
               </a:defRPr>
             </a:lvl4pPr>
             <a:lvl5pPr>
+              <a:buNone/>
               <a:defRPr sz="825" b="0">
                 <a:solidFill>
                   <a:srgbClr val="596678"/>
@@ -14626,6 +15244,7 @@
               </a:defRPr>
             </a:lvl5pPr>
             <a:lvl6pPr>
+              <a:buNone/>
               <a:defRPr sz="825" b="0">
                 <a:solidFill>
                   <a:srgbClr val="596678"/>
@@ -14636,6 +15255,7 @@
               </a:defRPr>
             </a:lvl6pPr>
             <a:lvl7pPr>
+              <a:buNone/>
               <a:defRPr sz="825" b="0">
                 <a:solidFill>
                   <a:srgbClr val="596678"/>
@@ -14646,6 +15266,7 @@
               </a:defRPr>
             </a:lvl7pPr>
             <a:lvl8pPr>
+              <a:buNone/>
               <a:defRPr sz="825" b="0">
                 <a:solidFill>
                   <a:srgbClr val="596678"/>
@@ -14656,6 +15277,7 @@
               </a:defRPr>
             </a:lvl8pPr>
             <a:lvl9pPr>
+              <a:buNone/>
               <a:defRPr sz="825" b="0">
                 <a:solidFill>
                   <a:srgbClr val="596678"/>
@@ -14668,6 +15290,7 @@
           </a:lstStyle>
           <a:p xmlns:a="http://schemas.openxmlformats.org/drawingml/2006/main">
             <a:pPr>
+              <a:buNone/>
               <a:defRPr sz="825" b="0">
                 <a:solidFill>
                   <a:srgbClr val="596678"/>
@@ -14733,6 +15356,7 @@
               </a:defRPr>
             </a:defPPr>
             <a:lvl1pPr>
+              <a:buNone/>
               <a:defRPr sz="825" b="1">
                 <a:solidFill>
                   <a:srgbClr val="802D42"/>
@@ -14743,6 +15367,7 @@
               </a:defRPr>
             </a:lvl1pPr>
             <a:lvl2pPr>
+              <a:buNone/>
               <a:defRPr sz="825" b="1">
                 <a:solidFill>
                   <a:srgbClr val="802D42"/>
@@ -14753,6 +15378,7 @@
               </a:defRPr>
             </a:lvl2pPr>
             <a:lvl3pPr>
+              <a:buNone/>
               <a:defRPr sz="825" b="1">
                 <a:solidFill>
                   <a:srgbClr val="802D42"/>
@@ -14763,6 +15389,7 @@
               </a:defRPr>
             </a:lvl3pPr>
             <a:lvl4pPr>
+              <a:buNone/>
               <a:defRPr sz="825" b="1">
                 <a:solidFill>
                   <a:srgbClr val="802D42"/>
@@ -14773,6 +15400,7 @@
               </a:defRPr>
             </a:lvl4pPr>
             <a:lvl5pPr>
+              <a:buNone/>
               <a:defRPr sz="825" b="1">
                 <a:solidFill>
                   <a:srgbClr val="802D42"/>
@@ -14783,6 +15411,7 @@
               </a:defRPr>
             </a:lvl5pPr>
             <a:lvl6pPr>
+              <a:buNone/>
               <a:defRPr sz="825" b="1">
                 <a:solidFill>
                   <a:srgbClr val="802D42"/>
@@ -14793,6 +15422,7 @@
               </a:defRPr>
             </a:lvl6pPr>
             <a:lvl7pPr>
+              <a:buNone/>
               <a:defRPr sz="825" b="1">
                 <a:solidFill>
                   <a:srgbClr val="802D42"/>
@@ -14803,6 +15433,7 @@
               </a:defRPr>
             </a:lvl7pPr>
             <a:lvl8pPr>
+              <a:buNone/>
               <a:defRPr sz="825" b="1">
                 <a:solidFill>
                   <a:srgbClr val="802D42"/>
@@ -14813,6 +15444,7 @@
               </a:defRPr>
             </a:lvl8pPr>
             <a:lvl9pPr>
+              <a:buNone/>
               <a:defRPr sz="825" b="1">
                 <a:solidFill>
                   <a:srgbClr val="802D42"/>
@@ -14825,6 +15457,7 @@
           </a:lstStyle>
           <a:p xmlns:a="http://schemas.openxmlformats.org/drawingml/2006/main">
             <a:pPr>
+              <a:buNone/>
               <a:defRPr sz="825" b="1">
                 <a:solidFill>
                   <a:srgbClr val="802D42"/>
@@ -14853,7 +15486,7 @@
           <p:cNvPr id="6" name="">
             <a:extLst xmlns:a="http://schemas.openxmlformats.org/drawingml/2006/main">
               <a:ext uri="{FF2B5EF4-FFF2-40B4-BE49-F238E27FC236}">
-                <a16:creationId xmlns:a16="http://schemas.microsoft.com/office/drawing/2014/main" id="{96DCE1A4-1379-4C47-9057-12E87E77202B}"/>
+                <a16:creationId xmlns:a16="http://schemas.microsoft.com/office/drawing/2014/main" id="{C199D50C-A69A-401A-8321-637E6C4F66B8}"/>
               </a:ext>
             </a:extLst>
           </p:cNvPr>
@@ -14863,7 +15496,7 @@
           <p:nvPr/>
         </p:nvPicPr>
         <p:blipFill>
-          <a:blip xmlns:r="http://schemas.openxmlformats.org/officeDocument/2006/relationships" xmlns:a="http://schemas.openxmlformats.org/drawingml/2006/main" r:embed="Ra5e41cc260854975"/>
+          <a:blip xmlns:r="http://schemas.openxmlformats.org/officeDocument/2006/relationships" xmlns:a="http://schemas.openxmlformats.org/drawingml/2006/main" r:embed="R64e1b246510d4f41"/>
           <a:stretch xmlns:a="http://schemas.openxmlformats.org/drawingml/2006/main"/>
         </p:blipFill>
         <p:spPr>
@@ -14947,6 +15580,7 @@
               </a:defRPr>
             </a:defPPr>
             <a:lvl1pPr>
+              <a:buNone/>
               <a:defRPr sz="900" b="1">
                 <a:solidFill>
                   <a:srgbClr val="802D42"/>
@@ -14957,6 +15591,7 @@
               </a:defRPr>
             </a:lvl1pPr>
             <a:lvl2pPr>
+              <a:buNone/>
               <a:defRPr sz="900" b="1">
                 <a:solidFill>
                   <a:srgbClr val="802D42"/>
@@ -14967,6 +15602,7 @@
               </a:defRPr>
             </a:lvl2pPr>
             <a:lvl3pPr>
+              <a:buNone/>
               <a:defRPr sz="900" b="1">
                 <a:solidFill>
                   <a:srgbClr val="802D42"/>
@@ -14977,6 +15613,7 @@
               </a:defRPr>
             </a:lvl3pPr>
             <a:lvl4pPr>
+              <a:buNone/>
               <a:defRPr sz="900" b="1">
                 <a:solidFill>
                   <a:srgbClr val="802D42"/>
@@ -14987,6 +15624,7 @@
               </a:defRPr>
             </a:lvl4pPr>
             <a:lvl5pPr>
+              <a:buNone/>
               <a:defRPr sz="900" b="1">
                 <a:solidFill>
                   <a:srgbClr val="802D42"/>
@@ -14997,6 +15635,7 @@
               </a:defRPr>
             </a:lvl5pPr>
             <a:lvl6pPr>
+              <a:buNone/>
               <a:defRPr sz="900" b="1">
                 <a:solidFill>
                   <a:srgbClr val="802D42"/>
@@ -15007,6 +15646,7 @@
               </a:defRPr>
             </a:lvl6pPr>
             <a:lvl7pPr>
+              <a:buNone/>
               <a:defRPr sz="900" b="1">
                 <a:solidFill>
                   <a:srgbClr val="802D42"/>
@@ -15017,6 +15657,7 @@
               </a:defRPr>
             </a:lvl7pPr>
             <a:lvl8pPr>
+              <a:buNone/>
               <a:defRPr sz="900" b="1">
                 <a:solidFill>
                   <a:srgbClr val="802D42"/>
@@ -15027,6 +15668,7 @@
               </a:defRPr>
             </a:lvl8pPr>
             <a:lvl9pPr>
+              <a:buNone/>
               <a:defRPr sz="900" b="1">
                 <a:solidFill>
                   <a:srgbClr val="802D42"/>
@@ -15039,6 +15681,7 @@
           </a:lstStyle>
           <a:p xmlns:a="http://schemas.openxmlformats.org/drawingml/2006/main">
             <a:pPr>
+              <a:buNone/>
               <a:defRPr sz="900" b="1">
                 <a:solidFill>
                   <a:srgbClr val="802D42"/>
@@ -15104,6 +15747,7 @@
               </a:defRPr>
             </a:defPPr>
             <a:lvl1pPr>
+              <a:buNone/>
               <a:defRPr sz="2400" b="1">
                 <a:solidFill>
                   <a:srgbClr val="243244"/>
@@ -15114,6 +15758,7 @@
               </a:defRPr>
             </a:lvl1pPr>
             <a:lvl2pPr>
+              <a:buNone/>
               <a:defRPr sz="2400" b="1">
                 <a:solidFill>
                   <a:srgbClr val="243244"/>
@@ -15124,6 +15769,7 @@
               </a:defRPr>
             </a:lvl2pPr>
             <a:lvl3pPr>
+              <a:buNone/>
               <a:defRPr sz="2400" b="1">
                 <a:solidFill>
                   <a:srgbClr val="243244"/>
@@ -15134,6 +15780,7 @@
               </a:defRPr>
             </a:lvl3pPr>
             <a:lvl4pPr>
+              <a:buNone/>
               <a:defRPr sz="2400" b="1">
                 <a:solidFill>
                   <a:srgbClr val="243244"/>
@@ -15144,6 +15791,7 @@
               </a:defRPr>
             </a:lvl4pPr>
             <a:lvl5pPr>
+              <a:buNone/>
               <a:defRPr sz="2400" b="1">
                 <a:solidFill>
                   <a:srgbClr val="243244"/>
@@ -15154,6 +15802,7 @@
               </a:defRPr>
             </a:lvl5pPr>
             <a:lvl6pPr>
+              <a:buNone/>
               <a:defRPr sz="2400" b="1">
                 <a:solidFill>
                   <a:srgbClr val="243244"/>
@@ -15164,6 +15813,7 @@
               </a:defRPr>
             </a:lvl6pPr>
             <a:lvl7pPr>
+              <a:buNone/>
               <a:defRPr sz="2400" b="1">
                 <a:solidFill>
                   <a:srgbClr val="243244"/>
@@ -15174,6 +15824,7 @@
               </a:defRPr>
             </a:lvl7pPr>
             <a:lvl8pPr>
+              <a:buNone/>
               <a:defRPr sz="2400" b="1">
                 <a:solidFill>
                   <a:srgbClr val="243244"/>
@@ -15184,6 +15835,7 @@
               </a:defRPr>
             </a:lvl8pPr>
             <a:lvl9pPr>
+              <a:buNone/>
               <a:defRPr sz="2400" b="1">
                 <a:solidFill>
                   <a:srgbClr val="243244"/>
@@ -15196,6 +15848,7 @@
           </a:lstStyle>
           <a:p xmlns:a="http://schemas.openxmlformats.org/drawingml/2006/main">
             <a:pPr>
+              <a:buNone/>
               <a:defRPr sz="2400" b="1">
                 <a:solidFill>
                   <a:srgbClr val="243244"/>
@@ -15261,6 +15914,7 @@
               </a:defRPr>
             </a:defPPr>
             <a:lvl1pPr>
+              <a:buNone/>
               <a:defRPr sz="1275" b="0">
                 <a:solidFill>
                   <a:srgbClr val="596678"/>
@@ -15271,6 +15925,7 @@
               </a:defRPr>
             </a:lvl1pPr>
             <a:lvl2pPr>
+              <a:buNone/>
               <a:defRPr sz="1275" b="0">
                 <a:solidFill>
                   <a:srgbClr val="596678"/>
@@ -15281,6 +15936,7 @@
               </a:defRPr>
             </a:lvl2pPr>
             <a:lvl3pPr>
+              <a:buNone/>
               <a:defRPr sz="1275" b="0">
                 <a:solidFill>
                   <a:srgbClr val="596678"/>
@@ -15291,6 +15947,7 @@
               </a:defRPr>
             </a:lvl3pPr>
             <a:lvl4pPr>
+              <a:buNone/>
               <a:defRPr sz="1275" b="0">
                 <a:solidFill>
                   <a:srgbClr val="596678"/>
@@ -15301,6 +15958,7 @@
               </a:defRPr>
             </a:lvl4pPr>
             <a:lvl5pPr>
+              <a:buNone/>
               <a:defRPr sz="1275" b="0">
                 <a:solidFill>
                   <a:srgbClr val="596678"/>
@@ -15311,6 +15969,7 @@
               </a:defRPr>
             </a:lvl5pPr>
             <a:lvl6pPr>
+              <a:buNone/>
               <a:defRPr sz="1275" b="0">
                 <a:solidFill>
                   <a:srgbClr val="596678"/>
@@ -15321,6 +15980,7 @@
               </a:defRPr>
             </a:lvl6pPr>
             <a:lvl7pPr>
+              <a:buNone/>
               <a:defRPr sz="1275" b="0">
                 <a:solidFill>
                   <a:srgbClr val="596678"/>
@@ -15331,6 +15991,7 @@
               </a:defRPr>
             </a:lvl7pPr>
             <a:lvl8pPr>
+              <a:buNone/>
               <a:defRPr sz="1275" b="0">
                 <a:solidFill>
                   <a:srgbClr val="596678"/>
@@ -15341,6 +16002,7 @@
               </a:defRPr>
             </a:lvl8pPr>
             <a:lvl9pPr>
+              <a:buNone/>
               <a:defRPr sz="1275" b="0">
                 <a:solidFill>
                   <a:srgbClr val="596678"/>
@@ -15353,6 +16015,7 @@
           </a:lstStyle>
           <a:p xmlns:a="http://schemas.openxmlformats.org/drawingml/2006/main">
             <a:pPr>
+              <a:buNone/>
               <a:defRPr sz="1275" b="0">
                 <a:solidFill>
                   <a:srgbClr val="596678"/>
@@ -15418,6 +16081,7 @@
               </a:defRPr>
             </a:defPPr>
             <a:lvl1pPr>
+              <a:buNone/>
               <a:defRPr sz="825" b="0">
                 <a:solidFill>
                   <a:srgbClr val="596678"/>
@@ -15428,6 +16092,7 @@
               </a:defRPr>
             </a:lvl1pPr>
             <a:lvl2pPr>
+              <a:buNone/>
               <a:defRPr sz="825" b="0">
                 <a:solidFill>
                   <a:srgbClr val="596678"/>
@@ -15438,6 +16103,7 @@
               </a:defRPr>
             </a:lvl2pPr>
             <a:lvl3pPr>
+              <a:buNone/>
               <a:defRPr sz="825" b="0">
                 <a:solidFill>
                   <a:srgbClr val="596678"/>
@@ -15448,6 +16114,7 @@
               </a:defRPr>
             </a:lvl3pPr>
             <a:lvl4pPr>
+              <a:buNone/>
               <a:defRPr sz="825" b="0">
                 <a:solidFill>
                   <a:srgbClr val="596678"/>
@@ -15458,6 +16125,7 @@
               </a:defRPr>
             </a:lvl4pPr>
             <a:lvl5pPr>
+              <a:buNone/>
               <a:defRPr sz="825" b="0">
                 <a:solidFill>
                   <a:srgbClr val="596678"/>
@@ -15468,6 +16136,7 @@
               </a:defRPr>
             </a:lvl5pPr>
             <a:lvl6pPr>
+              <a:buNone/>
               <a:defRPr sz="825" b="0">
                 <a:solidFill>
                   <a:srgbClr val="596678"/>
@@ -15478,6 +16147,7 @@
               </a:defRPr>
             </a:lvl6pPr>
             <a:lvl7pPr>
+              <a:buNone/>
               <a:defRPr sz="825" b="0">
                 <a:solidFill>
                   <a:srgbClr val="596678"/>
@@ -15488,6 +16158,7 @@
               </a:defRPr>
             </a:lvl7pPr>
             <a:lvl8pPr>
+              <a:buNone/>
               <a:defRPr sz="825" b="0">
                 <a:solidFill>
                   <a:srgbClr val="596678"/>
@@ -15498,6 +16169,7 @@
               </a:defRPr>
             </a:lvl8pPr>
             <a:lvl9pPr>
+              <a:buNone/>
               <a:defRPr sz="825" b="0">
                 <a:solidFill>
                   <a:srgbClr val="596678"/>
@@ -15510,6 +16182,7 @@
           </a:lstStyle>
           <a:p xmlns:a="http://schemas.openxmlformats.org/drawingml/2006/main">
             <a:pPr>
+              <a:buNone/>
               <a:defRPr sz="825" b="0">
                 <a:solidFill>
                   <a:srgbClr val="596678"/>
@@ -15575,6 +16248,7 @@
               </a:defRPr>
             </a:defPPr>
             <a:lvl1pPr>
+              <a:buNone/>
               <a:defRPr sz="825" b="1">
                 <a:solidFill>
                   <a:srgbClr val="802D42"/>
@@ -15585,6 +16259,7 @@
               </a:defRPr>
             </a:lvl1pPr>
             <a:lvl2pPr>
+              <a:buNone/>
               <a:defRPr sz="825" b="1">
                 <a:solidFill>
                   <a:srgbClr val="802D42"/>
@@ -15595,6 +16270,7 @@
               </a:defRPr>
             </a:lvl2pPr>
             <a:lvl3pPr>
+              <a:buNone/>
               <a:defRPr sz="825" b="1">
                 <a:solidFill>
                   <a:srgbClr val="802D42"/>
@@ -15605,6 +16281,7 @@
               </a:defRPr>
             </a:lvl3pPr>
             <a:lvl4pPr>
+              <a:buNone/>
               <a:defRPr sz="825" b="1">
                 <a:solidFill>
                   <a:srgbClr val="802D42"/>
@@ -15615,6 +16292,7 @@
               </a:defRPr>
             </a:lvl4pPr>
             <a:lvl5pPr>
+              <a:buNone/>
               <a:defRPr sz="825" b="1">
                 <a:solidFill>
                   <a:srgbClr val="802D42"/>
@@ -15625,6 +16303,7 @@
               </a:defRPr>
             </a:lvl5pPr>
             <a:lvl6pPr>
+              <a:buNone/>
               <a:defRPr sz="825" b="1">
                 <a:solidFill>
                   <a:srgbClr val="802D42"/>
@@ -15635,6 +16314,7 @@
               </a:defRPr>
             </a:lvl6pPr>
             <a:lvl7pPr>
+              <a:buNone/>
               <a:defRPr sz="825" b="1">
                 <a:solidFill>
                   <a:srgbClr val="802D42"/>
@@ -15645,6 +16325,7 @@
               </a:defRPr>
             </a:lvl7pPr>
             <a:lvl8pPr>
+              <a:buNone/>
               <a:defRPr sz="825" b="1">
                 <a:solidFill>
                   <a:srgbClr val="802D42"/>
@@ -15655,6 +16336,7 @@
               </a:defRPr>
             </a:lvl8pPr>
             <a:lvl9pPr>
+              <a:buNone/>
               <a:defRPr sz="825" b="1">
                 <a:solidFill>
                   <a:srgbClr val="802D42"/>
@@ -15667,6 +16349,7 @@
           </a:lstStyle>
           <a:p xmlns:a="http://schemas.openxmlformats.org/drawingml/2006/main">
             <a:pPr>
+              <a:buNone/>
               <a:defRPr sz="825" b="1">
                 <a:solidFill>
                   <a:srgbClr val="802D42"/>
@@ -15695,7 +16378,7 @@
           <p:cNvPr id="6" name="">
             <a:extLst xmlns:a="http://schemas.openxmlformats.org/drawingml/2006/main">
               <a:ext uri="{FF2B5EF4-FFF2-40B4-BE49-F238E27FC236}">
-                <a16:creationId xmlns:a16="http://schemas.microsoft.com/office/drawing/2014/main" id="{2E6C0CFA-A439-40E4-B133-A7BCE165348C}"/>
+                <a16:creationId xmlns:a16="http://schemas.microsoft.com/office/drawing/2014/main" id="{EE73F185-6110-4A69-ADB5-EDBF52BA9209}"/>
               </a:ext>
             </a:extLst>
           </p:cNvPr>
@@ -15705,7 +16388,7 @@
           <p:nvPr/>
         </p:nvPicPr>
         <p:blipFill>
-          <a:blip xmlns:r="http://schemas.openxmlformats.org/officeDocument/2006/relationships" xmlns:a="http://schemas.openxmlformats.org/drawingml/2006/main" r:embed="R818816aafeec4509"/>
+          <a:blip xmlns:r="http://schemas.openxmlformats.org/officeDocument/2006/relationships" xmlns:a="http://schemas.openxmlformats.org/drawingml/2006/main" r:embed="R941de592efb2403d"/>
           <a:stretch xmlns:a="http://schemas.openxmlformats.org/drawingml/2006/main"/>
         </p:blipFill>
         <p:spPr>
@@ -15789,6 +16472,7 @@
               </a:defRPr>
             </a:defPPr>
             <a:lvl1pPr>
+              <a:buNone/>
               <a:defRPr sz="900" b="1">
                 <a:solidFill>
                   <a:srgbClr val="802D42"/>
@@ -15799,6 +16483,7 @@
               </a:defRPr>
             </a:lvl1pPr>
             <a:lvl2pPr>
+              <a:buNone/>
               <a:defRPr sz="900" b="1">
                 <a:solidFill>
                   <a:srgbClr val="802D42"/>
@@ -15809,6 +16494,7 @@
               </a:defRPr>
             </a:lvl2pPr>
             <a:lvl3pPr>
+              <a:buNone/>
               <a:defRPr sz="900" b="1">
                 <a:solidFill>
                   <a:srgbClr val="802D42"/>
@@ -15819,6 +16505,7 @@
               </a:defRPr>
             </a:lvl3pPr>
             <a:lvl4pPr>
+              <a:buNone/>
               <a:defRPr sz="900" b="1">
                 <a:solidFill>
                   <a:srgbClr val="802D42"/>
@@ -15829,6 +16516,7 @@
               </a:defRPr>
             </a:lvl4pPr>
             <a:lvl5pPr>
+              <a:buNone/>
               <a:defRPr sz="900" b="1">
                 <a:solidFill>
                   <a:srgbClr val="802D42"/>
@@ -15839,6 +16527,7 @@
               </a:defRPr>
             </a:lvl5pPr>
             <a:lvl6pPr>
+              <a:buNone/>
               <a:defRPr sz="900" b="1">
                 <a:solidFill>
                   <a:srgbClr val="802D42"/>
@@ -15849,6 +16538,7 @@
               </a:defRPr>
             </a:lvl6pPr>
             <a:lvl7pPr>
+              <a:buNone/>
               <a:defRPr sz="900" b="1">
                 <a:solidFill>
                   <a:srgbClr val="802D42"/>
@@ -15859,6 +16549,7 @@
               </a:defRPr>
             </a:lvl7pPr>
             <a:lvl8pPr>
+              <a:buNone/>
               <a:defRPr sz="900" b="1">
                 <a:solidFill>
                   <a:srgbClr val="802D42"/>
@@ -15869,6 +16560,7 @@
               </a:defRPr>
             </a:lvl8pPr>
             <a:lvl9pPr>
+              <a:buNone/>
               <a:defRPr sz="900" b="1">
                 <a:solidFill>
                   <a:srgbClr val="802D42"/>
@@ -15881,6 +16573,7 @@
           </a:lstStyle>
           <a:p xmlns:a="http://schemas.openxmlformats.org/drawingml/2006/main">
             <a:pPr>
+              <a:buNone/>
               <a:defRPr sz="900" b="1">
                 <a:solidFill>
                   <a:srgbClr val="802D42"/>
@@ -15946,6 +16639,7 @@
               </a:defRPr>
             </a:defPPr>
             <a:lvl1pPr>
+              <a:buNone/>
               <a:defRPr sz="2400" b="1">
                 <a:solidFill>
                   <a:srgbClr val="243244"/>
@@ -15956,6 +16650,7 @@
               </a:defRPr>
             </a:lvl1pPr>
             <a:lvl2pPr>
+              <a:buNone/>
               <a:defRPr sz="2400" b="1">
                 <a:solidFill>
                   <a:srgbClr val="243244"/>
@@ -15966,6 +16661,7 @@
               </a:defRPr>
             </a:lvl2pPr>
             <a:lvl3pPr>
+              <a:buNone/>
               <a:defRPr sz="2400" b="1">
                 <a:solidFill>
                   <a:srgbClr val="243244"/>
@@ -15976,6 +16672,7 @@
               </a:defRPr>
             </a:lvl3pPr>
             <a:lvl4pPr>
+              <a:buNone/>
               <a:defRPr sz="2400" b="1">
                 <a:solidFill>
                   <a:srgbClr val="243244"/>
@@ -15986,6 +16683,7 @@
               </a:defRPr>
             </a:lvl4pPr>
             <a:lvl5pPr>
+              <a:buNone/>
               <a:defRPr sz="2400" b="1">
                 <a:solidFill>
                   <a:srgbClr val="243244"/>
@@ -15996,6 +16694,7 @@
               </a:defRPr>
             </a:lvl5pPr>
             <a:lvl6pPr>
+              <a:buNone/>
               <a:defRPr sz="2400" b="1">
                 <a:solidFill>
                   <a:srgbClr val="243244"/>
@@ -16006,6 +16705,7 @@
               </a:defRPr>
             </a:lvl6pPr>
             <a:lvl7pPr>
+              <a:buNone/>
               <a:defRPr sz="2400" b="1">
                 <a:solidFill>
                   <a:srgbClr val="243244"/>
@@ -16016,6 +16716,7 @@
               </a:defRPr>
             </a:lvl7pPr>
             <a:lvl8pPr>
+              <a:buNone/>
               <a:defRPr sz="2400" b="1">
                 <a:solidFill>
                   <a:srgbClr val="243244"/>
@@ -16026,6 +16727,7 @@
               </a:defRPr>
             </a:lvl8pPr>
             <a:lvl9pPr>
+              <a:buNone/>
               <a:defRPr sz="2400" b="1">
                 <a:solidFill>
                   <a:srgbClr val="243244"/>
@@ -16038,6 +16740,7 @@
           </a:lstStyle>
           <a:p xmlns:a="http://schemas.openxmlformats.org/drawingml/2006/main">
             <a:pPr>
+              <a:buNone/>
               <a:defRPr sz="2400" b="1">
                 <a:solidFill>
                   <a:srgbClr val="243244"/>
@@ -16103,6 +16806,7 @@
               </a:defRPr>
             </a:defPPr>
             <a:lvl1pPr>
+              <a:buNone/>
               <a:defRPr sz="1275" b="0">
                 <a:solidFill>
                   <a:srgbClr val="596678"/>
@@ -16113,6 +16817,7 @@
               </a:defRPr>
             </a:lvl1pPr>
             <a:lvl2pPr>
+              <a:buNone/>
               <a:defRPr sz="1275" b="0">
                 <a:solidFill>
                   <a:srgbClr val="596678"/>
@@ -16123,6 +16828,7 @@
               </a:defRPr>
             </a:lvl2pPr>
             <a:lvl3pPr>
+              <a:buNone/>
               <a:defRPr sz="1275" b="0">
                 <a:solidFill>
                   <a:srgbClr val="596678"/>
@@ -16133,6 +16839,7 @@
               </a:defRPr>
             </a:lvl3pPr>
             <a:lvl4pPr>
+              <a:buNone/>
               <a:defRPr sz="1275" b="0">
                 <a:solidFill>
                   <a:srgbClr val="596678"/>
@@ -16143,6 +16850,7 @@
               </a:defRPr>
             </a:lvl4pPr>
             <a:lvl5pPr>
+              <a:buNone/>
               <a:defRPr sz="1275" b="0">
                 <a:solidFill>
                   <a:srgbClr val="596678"/>
@@ -16153,6 +16861,7 @@
               </a:defRPr>
             </a:lvl5pPr>
             <a:lvl6pPr>
+              <a:buNone/>
               <a:defRPr sz="1275" b="0">
                 <a:solidFill>
                   <a:srgbClr val="596678"/>
@@ -16163,6 +16872,7 @@
               </a:defRPr>
             </a:lvl6pPr>
             <a:lvl7pPr>
+              <a:buNone/>
               <a:defRPr sz="1275" b="0">
                 <a:solidFill>
                   <a:srgbClr val="596678"/>
@@ -16173,6 +16883,7 @@
               </a:defRPr>
             </a:lvl7pPr>
             <a:lvl8pPr>
+              <a:buNone/>
               <a:defRPr sz="1275" b="0">
                 <a:solidFill>
                   <a:srgbClr val="596678"/>
@@ -16183,6 +16894,7 @@
               </a:defRPr>
             </a:lvl8pPr>
             <a:lvl9pPr>
+              <a:buNone/>
               <a:defRPr sz="1275" b="0">
                 <a:solidFill>
                   <a:srgbClr val="596678"/>
@@ -16195,6 +16907,7 @@
           </a:lstStyle>
           <a:p xmlns:a="http://schemas.openxmlformats.org/drawingml/2006/main">
             <a:pPr>
+              <a:buNone/>
               <a:defRPr sz="1275" b="0">
                 <a:solidFill>
                   <a:srgbClr val="596678"/>
@@ -16260,6 +16973,7 @@
               </a:defRPr>
             </a:defPPr>
             <a:lvl1pPr>
+              <a:buNone/>
               <a:defRPr sz="825" b="0">
                 <a:solidFill>
                   <a:srgbClr val="596678"/>
@@ -16270,6 +16984,7 @@
               </a:defRPr>
             </a:lvl1pPr>
             <a:lvl2pPr>
+              <a:buNone/>
               <a:defRPr sz="825" b="0">
                 <a:solidFill>
                   <a:srgbClr val="596678"/>
@@ -16280,6 +16995,7 @@
               </a:defRPr>
             </a:lvl2pPr>
             <a:lvl3pPr>
+              <a:buNone/>
               <a:defRPr sz="825" b="0">
                 <a:solidFill>
                   <a:srgbClr val="596678"/>
@@ -16290,6 +17006,7 @@
               </a:defRPr>
             </a:lvl3pPr>
             <a:lvl4pPr>
+              <a:buNone/>
               <a:defRPr sz="825" b="0">
                 <a:solidFill>
                   <a:srgbClr val="596678"/>
@@ -16300,6 +17017,7 @@
               </a:defRPr>
             </a:lvl4pPr>
             <a:lvl5pPr>
+              <a:buNone/>
               <a:defRPr sz="825" b="0">
                 <a:solidFill>
                   <a:srgbClr val="596678"/>
@@ -16310,6 +17028,7 @@
               </a:defRPr>
             </a:lvl5pPr>
             <a:lvl6pPr>
+              <a:buNone/>
               <a:defRPr sz="825" b="0">
                 <a:solidFill>
                   <a:srgbClr val="596678"/>
@@ -16320,6 +17039,7 @@
               </a:defRPr>
             </a:lvl6pPr>
             <a:lvl7pPr>
+              <a:buNone/>
               <a:defRPr sz="825" b="0">
                 <a:solidFill>
                   <a:srgbClr val="596678"/>
@@ -16330,6 +17050,7 @@
               </a:defRPr>
             </a:lvl7pPr>
             <a:lvl8pPr>
+              <a:buNone/>
               <a:defRPr sz="825" b="0">
                 <a:solidFill>
                   <a:srgbClr val="596678"/>
@@ -16340,6 +17061,7 @@
               </a:defRPr>
             </a:lvl8pPr>
             <a:lvl9pPr>
+              <a:buNone/>
               <a:defRPr sz="825" b="0">
                 <a:solidFill>
                   <a:srgbClr val="596678"/>
@@ -16352,6 +17074,7 @@
           </a:lstStyle>
           <a:p xmlns:a="http://schemas.openxmlformats.org/drawingml/2006/main">
             <a:pPr>
+              <a:buNone/>
               <a:defRPr sz="825" b="0">
                 <a:solidFill>
                   <a:srgbClr val="596678"/>
@@ -16417,6 +17140,7 @@
               </a:defRPr>
             </a:defPPr>
             <a:lvl1pPr>
+              <a:buNone/>
               <a:defRPr sz="825" b="1">
                 <a:solidFill>
                   <a:srgbClr val="802D42"/>
@@ -16427,6 +17151,7 @@
               </a:defRPr>
             </a:lvl1pPr>
             <a:lvl2pPr>
+              <a:buNone/>
               <a:defRPr sz="825" b="1">
                 <a:solidFill>
                   <a:srgbClr val="802D42"/>
@@ -16437,6 +17162,7 @@
               </a:defRPr>
             </a:lvl2pPr>
             <a:lvl3pPr>
+              <a:buNone/>
               <a:defRPr sz="825" b="1">
                 <a:solidFill>
                   <a:srgbClr val="802D42"/>
@@ -16447,6 +17173,7 @@
               </a:defRPr>
             </a:lvl3pPr>
             <a:lvl4pPr>
+              <a:buNone/>
               <a:defRPr sz="825" b="1">
                 <a:solidFill>
                   <a:srgbClr val="802D42"/>
@@ -16457,6 +17184,7 @@
               </a:defRPr>
             </a:lvl4pPr>
             <a:lvl5pPr>
+              <a:buNone/>
               <a:defRPr sz="825" b="1">
                 <a:solidFill>
                   <a:srgbClr val="802D42"/>
@@ -16467,6 +17195,7 @@
               </a:defRPr>
             </a:lvl5pPr>
             <a:lvl6pPr>
+              <a:buNone/>
               <a:defRPr sz="825" b="1">
                 <a:solidFill>
                   <a:srgbClr val="802D42"/>
@@ -16477,6 +17206,7 @@
               </a:defRPr>
             </a:lvl6pPr>
             <a:lvl7pPr>
+              <a:buNone/>
               <a:defRPr sz="825" b="1">
                 <a:solidFill>
                   <a:srgbClr val="802D42"/>
@@ -16487,6 +17217,7 @@
               </a:defRPr>
             </a:lvl7pPr>
             <a:lvl8pPr>
+              <a:buNone/>
               <a:defRPr sz="825" b="1">
                 <a:solidFill>
                   <a:srgbClr val="802D42"/>
@@ -16497,6 +17228,7 @@
               </a:defRPr>
             </a:lvl8pPr>
             <a:lvl9pPr>
+              <a:buNone/>
               <a:defRPr sz="825" b="1">
                 <a:solidFill>
                   <a:srgbClr val="802D42"/>
@@ -16509,6 +17241,7 @@
           </a:lstStyle>
           <a:p xmlns:a="http://schemas.openxmlformats.org/drawingml/2006/main">
             <a:pPr>
+              <a:buNone/>
               <a:defRPr sz="825" b="1">
                 <a:solidFill>
                   <a:srgbClr val="802D42"/>
@@ -16537,7 +17270,7 @@
           <p:cNvPr id="6" name="">
             <a:extLst xmlns:a="http://schemas.openxmlformats.org/drawingml/2006/main">
               <a:ext uri="{FF2B5EF4-FFF2-40B4-BE49-F238E27FC236}">
-                <a16:creationId xmlns:a16="http://schemas.microsoft.com/office/drawing/2014/main" id="{2553B7BB-B54F-4E64-9838-2B1F7E9F141C}"/>
+                <a16:creationId xmlns:a16="http://schemas.microsoft.com/office/drawing/2014/main" id="{03CE1073-8C33-4BB6-9703-94600073D395}"/>
               </a:ext>
             </a:extLst>
           </p:cNvPr>
@@ -17346,6 +18079,7 @@
               </a:defRPr>
             </a:defPPr>
             <a:lvl1pPr>
+              <a:buNone/>
               <a:defRPr sz="900" b="1">
                 <a:solidFill>
                   <a:srgbClr val="802D42"/>
@@ -17356,6 +18090,7 @@
               </a:defRPr>
             </a:lvl1pPr>
             <a:lvl2pPr>
+              <a:buNone/>
               <a:defRPr sz="900" b="1">
                 <a:solidFill>
                   <a:srgbClr val="802D42"/>
@@ -17366,6 +18101,7 @@
               </a:defRPr>
             </a:lvl2pPr>
             <a:lvl3pPr>
+              <a:buNone/>
               <a:defRPr sz="900" b="1">
                 <a:solidFill>
                   <a:srgbClr val="802D42"/>
@@ -17376,6 +18112,7 @@
               </a:defRPr>
             </a:lvl3pPr>
             <a:lvl4pPr>
+              <a:buNone/>
               <a:defRPr sz="900" b="1">
                 <a:solidFill>
                   <a:srgbClr val="802D42"/>
@@ -17386,6 +18123,7 @@
               </a:defRPr>
             </a:lvl4pPr>
             <a:lvl5pPr>
+              <a:buNone/>
               <a:defRPr sz="900" b="1">
                 <a:solidFill>
                   <a:srgbClr val="802D42"/>
@@ -17396,6 +18134,7 @@
               </a:defRPr>
             </a:lvl5pPr>
             <a:lvl6pPr>
+              <a:buNone/>
               <a:defRPr sz="900" b="1">
                 <a:solidFill>
                   <a:srgbClr val="802D42"/>
@@ -17406,6 +18145,7 @@
               </a:defRPr>
             </a:lvl6pPr>
             <a:lvl7pPr>
+              <a:buNone/>
               <a:defRPr sz="900" b="1">
                 <a:solidFill>
                   <a:srgbClr val="802D42"/>
@@ -17416,6 +18156,7 @@
               </a:defRPr>
             </a:lvl7pPr>
             <a:lvl8pPr>
+              <a:buNone/>
               <a:defRPr sz="900" b="1">
                 <a:solidFill>
                   <a:srgbClr val="802D42"/>
@@ -17426,6 +18167,7 @@
               </a:defRPr>
             </a:lvl8pPr>
             <a:lvl9pPr>
+              <a:buNone/>
               <a:defRPr sz="900" b="1">
                 <a:solidFill>
                   <a:srgbClr val="802D42"/>
@@ -17438,6 +18180,7 @@
           </a:lstStyle>
           <a:p xmlns:a="http://schemas.openxmlformats.org/drawingml/2006/main">
             <a:pPr>
+              <a:buNone/>
               <a:defRPr sz="900" b="1">
                 <a:solidFill>
                   <a:srgbClr val="802D42"/>
@@ -17503,6 +18246,7 @@
               </a:defRPr>
             </a:defPPr>
             <a:lvl1pPr>
+              <a:buNone/>
               <a:defRPr sz="2400" b="1">
                 <a:solidFill>
                   <a:srgbClr val="243244"/>
@@ -17513,6 +18257,7 @@
               </a:defRPr>
             </a:lvl1pPr>
             <a:lvl2pPr>
+              <a:buNone/>
               <a:defRPr sz="2400" b="1">
                 <a:solidFill>
                   <a:srgbClr val="243244"/>
@@ -17523,6 +18268,7 @@
               </a:defRPr>
             </a:lvl2pPr>
             <a:lvl3pPr>
+              <a:buNone/>
               <a:defRPr sz="2400" b="1">
                 <a:solidFill>
                   <a:srgbClr val="243244"/>
@@ -17533,6 +18279,7 @@
               </a:defRPr>
             </a:lvl3pPr>
             <a:lvl4pPr>
+              <a:buNone/>
               <a:defRPr sz="2400" b="1">
                 <a:solidFill>
                   <a:srgbClr val="243244"/>
@@ -17543,6 +18290,7 @@
               </a:defRPr>
             </a:lvl4pPr>
             <a:lvl5pPr>
+              <a:buNone/>
               <a:defRPr sz="2400" b="1">
                 <a:solidFill>
                   <a:srgbClr val="243244"/>
@@ -17553,6 +18301,7 @@
               </a:defRPr>
             </a:lvl5pPr>
             <a:lvl6pPr>
+              <a:buNone/>
               <a:defRPr sz="2400" b="1">
                 <a:solidFill>
                   <a:srgbClr val="243244"/>
@@ -17563,6 +18312,7 @@
               </a:defRPr>
             </a:lvl6pPr>
             <a:lvl7pPr>
+              <a:buNone/>
               <a:defRPr sz="2400" b="1">
                 <a:solidFill>
                   <a:srgbClr val="243244"/>
@@ -17573,6 +18323,7 @@
               </a:defRPr>
             </a:lvl7pPr>
             <a:lvl8pPr>
+              <a:buNone/>
               <a:defRPr sz="2400" b="1">
                 <a:solidFill>
                   <a:srgbClr val="243244"/>
@@ -17583,6 +18334,7 @@
               </a:defRPr>
             </a:lvl8pPr>
             <a:lvl9pPr>
+              <a:buNone/>
               <a:defRPr sz="2400" b="1">
                 <a:solidFill>
                   <a:srgbClr val="243244"/>
@@ -17595,6 +18347,7 @@
           </a:lstStyle>
           <a:p xmlns:a="http://schemas.openxmlformats.org/drawingml/2006/main">
             <a:pPr>
+              <a:buNone/>
               <a:defRPr sz="2400" b="1">
                 <a:solidFill>
                   <a:srgbClr val="243244"/>
@@ -17660,6 +18413,7 @@
               </a:defRPr>
             </a:defPPr>
             <a:lvl1pPr>
+              <a:buNone/>
               <a:defRPr sz="1275" b="0">
                 <a:solidFill>
                   <a:srgbClr val="596678"/>
@@ -17670,6 +18424,7 @@
               </a:defRPr>
             </a:lvl1pPr>
             <a:lvl2pPr>
+              <a:buNone/>
               <a:defRPr sz="1275" b="0">
                 <a:solidFill>
                   <a:srgbClr val="596678"/>
@@ -17680,6 +18435,7 @@
               </a:defRPr>
             </a:lvl2pPr>
             <a:lvl3pPr>
+              <a:buNone/>
               <a:defRPr sz="1275" b="0">
                 <a:solidFill>
                   <a:srgbClr val="596678"/>
@@ -17690,6 +18446,7 @@
               </a:defRPr>
             </a:lvl3pPr>
             <a:lvl4pPr>
+              <a:buNone/>
               <a:defRPr sz="1275" b="0">
                 <a:solidFill>
                   <a:srgbClr val="596678"/>
@@ -17700,6 +18457,7 @@
               </a:defRPr>
             </a:lvl4pPr>
             <a:lvl5pPr>
+              <a:buNone/>
               <a:defRPr sz="1275" b="0">
                 <a:solidFill>
                   <a:srgbClr val="596678"/>
@@ -17710,6 +18468,7 @@
               </a:defRPr>
             </a:lvl5pPr>
             <a:lvl6pPr>
+              <a:buNone/>
               <a:defRPr sz="1275" b="0">
                 <a:solidFill>
                   <a:srgbClr val="596678"/>
@@ -17720,6 +18479,7 @@
               </a:defRPr>
             </a:lvl6pPr>
             <a:lvl7pPr>
+              <a:buNone/>
               <a:defRPr sz="1275" b="0">
                 <a:solidFill>
                   <a:srgbClr val="596678"/>
@@ -17730,6 +18490,7 @@
               </a:defRPr>
             </a:lvl7pPr>
             <a:lvl8pPr>
+              <a:buNone/>
               <a:defRPr sz="1275" b="0">
                 <a:solidFill>
                   <a:srgbClr val="596678"/>
@@ -17740,6 +18501,7 @@
               </a:defRPr>
             </a:lvl8pPr>
             <a:lvl9pPr>
+              <a:buNone/>
               <a:defRPr sz="1275" b="0">
                 <a:solidFill>
                   <a:srgbClr val="596678"/>
@@ -17752,6 +18514,7 @@
           </a:lstStyle>
           <a:p xmlns:a="http://schemas.openxmlformats.org/drawingml/2006/main">
             <a:pPr>
+              <a:buNone/>
               <a:defRPr sz="1275" b="0">
                 <a:solidFill>
                   <a:srgbClr val="596678"/>
@@ -17817,6 +18580,7 @@
               </a:defRPr>
             </a:defPPr>
             <a:lvl1pPr>
+              <a:buNone/>
               <a:defRPr sz="825" b="0">
                 <a:solidFill>
                   <a:srgbClr val="596678"/>
@@ -17827,6 +18591,7 @@
               </a:defRPr>
             </a:lvl1pPr>
             <a:lvl2pPr>
+              <a:buNone/>
               <a:defRPr sz="825" b="0">
                 <a:solidFill>
                   <a:srgbClr val="596678"/>
@@ -17837,6 +18602,7 @@
               </a:defRPr>
             </a:lvl2pPr>
             <a:lvl3pPr>
+              <a:buNone/>
               <a:defRPr sz="825" b="0">
                 <a:solidFill>
                   <a:srgbClr val="596678"/>
@@ -17847,6 +18613,7 @@
               </a:defRPr>
             </a:lvl3pPr>
             <a:lvl4pPr>
+              <a:buNone/>
               <a:defRPr sz="825" b="0">
                 <a:solidFill>
                   <a:srgbClr val="596678"/>
@@ -17857,6 +18624,7 @@
               </a:defRPr>
             </a:lvl4pPr>
             <a:lvl5pPr>
+              <a:buNone/>
               <a:defRPr sz="825" b="0">
                 <a:solidFill>
                   <a:srgbClr val="596678"/>
@@ -17867,6 +18635,7 @@
               </a:defRPr>
             </a:lvl5pPr>
             <a:lvl6pPr>
+              <a:buNone/>
               <a:defRPr sz="825" b="0">
                 <a:solidFill>
                   <a:srgbClr val="596678"/>
@@ -17877,6 +18646,7 @@
               </a:defRPr>
             </a:lvl6pPr>
             <a:lvl7pPr>
+              <a:buNone/>
               <a:defRPr sz="825" b="0">
                 <a:solidFill>
                   <a:srgbClr val="596678"/>
@@ -17887,6 +18657,7 @@
               </a:defRPr>
             </a:lvl7pPr>
             <a:lvl8pPr>
+              <a:buNone/>
               <a:defRPr sz="825" b="0">
                 <a:solidFill>
                   <a:srgbClr val="596678"/>
@@ -17897,6 +18668,7 @@
               </a:defRPr>
             </a:lvl8pPr>
             <a:lvl9pPr>
+              <a:buNone/>
               <a:defRPr sz="825" b="0">
                 <a:solidFill>
                   <a:srgbClr val="596678"/>
@@ -17909,6 +18681,7 @@
           </a:lstStyle>
           <a:p xmlns:a="http://schemas.openxmlformats.org/drawingml/2006/main">
             <a:pPr>
+              <a:buNone/>
               <a:defRPr sz="825" b="0">
                 <a:solidFill>
                   <a:srgbClr val="596678"/>
@@ -17974,6 +18747,7 @@
               </a:defRPr>
             </a:defPPr>
             <a:lvl1pPr>
+              <a:buNone/>
               <a:defRPr sz="825" b="1">
                 <a:solidFill>
                   <a:srgbClr val="802D42"/>
@@ -17984,6 +18758,7 @@
               </a:defRPr>
             </a:lvl1pPr>
             <a:lvl2pPr>
+              <a:buNone/>
               <a:defRPr sz="825" b="1">
                 <a:solidFill>
                   <a:srgbClr val="802D42"/>
@@ -17994,6 +18769,7 @@
               </a:defRPr>
             </a:lvl2pPr>
             <a:lvl3pPr>
+              <a:buNone/>
               <a:defRPr sz="825" b="1">
                 <a:solidFill>
                   <a:srgbClr val="802D42"/>
@@ -18004,6 +18780,7 @@
               </a:defRPr>
             </a:lvl3pPr>
             <a:lvl4pPr>
+              <a:buNone/>
               <a:defRPr sz="825" b="1">
                 <a:solidFill>
                   <a:srgbClr val="802D42"/>
@@ -18014,6 +18791,7 @@
               </a:defRPr>
             </a:lvl4pPr>
             <a:lvl5pPr>
+              <a:buNone/>
               <a:defRPr sz="825" b="1">
                 <a:solidFill>
                   <a:srgbClr val="802D42"/>
@@ -18024,6 +18802,7 @@
               </a:defRPr>
             </a:lvl5pPr>
             <a:lvl6pPr>
+              <a:buNone/>
               <a:defRPr sz="825" b="1">
                 <a:solidFill>
                   <a:srgbClr val="802D42"/>
@@ -18034,6 +18813,7 @@
               </a:defRPr>
             </a:lvl6pPr>
             <a:lvl7pPr>
+              <a:buNone/>
               <a:defRPr sz="825" b="1">
                 <a:solidFill>
                   <a:srgbClr val="802D42"/>
@@ -18044,6 +18824,7 @@
               </a:defRPr>
             </a:lvl7pPr>
             <a:lvl8pPr>
+              <a:buNone/>
               <a:defRPr sz="825" b="1">
                 <a:solidFill>
                   <a:srgbClr val="802D42"/>
@@ -18054,6 +18835,7 @@
               </a:defRPr>
             </a:lvl8pPr>
             <a:lvl9pPr>
+              <a:buNone/>
               <a:defRPr sz="825" b="1">
                 <a:solidFill>
                   <a:srgbClr val="802D42"/>
@@ -18066,6 +18848,7 @@
           </a:lstStyle>
           <a:p xmlns:a="http://schemas.openxmlformats.org/drawingml/2006/main">
             <a:pPr>
+              <a:buNone/>
               <a:defRPr sz="825" b="1">
                 <a:solidFill>
                   <a:srgbClr val="802D42"/>
@@ -18131,6 +18914,7 @@
               </a:defRPr>
             </a:defPPr>
             <a:lvl1pPr>
+              <a:buNone/>
               <a:defRPr sz="1725" b="1">
                 <a:solidFill>
                   <a:srgbClr val="243244"/>
@@ -18141,6 +18925,7 @@
               </a:defRPr>
             </a:lvl1pPr>
             <a:lvl2pPr>
+              <a:buNone/>
               <a:defRPr sz="1725" b="1">
                 <a:solidFill>
                   <a:srgbClr val="243244"/>
@@ -18151,6 +18936,7 @@
               </a:defRPr>
             </a:lvl2pPr>
             <a:lvl3pPr>
+              <a:buNone/>
               <a:defRPr sz="1725" b="1">
                 <a:solidFill>
                   <a:srgbClr val="243244"/>
@@ -18161,6 +18947,7 @@
               </a:defRPr>
             </a:lvl3pPr>
             <a:lvl4pPr>
+              <a:buNone/>
               <a:defRPr sz="1725" b="1">
                 <a:solidFill>
                   <a:srgbClr val="243244"/>
@@ -18171,6 +18958,7 @@
               </a:defRPr>
             </a:lvl4pPr>
             <a:lvl5pPr>
+              <a:buNone/>
               <a:defRPr sz="1725" b="1">
                 <a:solidFill>
                   <a:srgbClr val="243244"/>
@@ -18181,6 +18969,7 @@
               </a:defRPr>
             </a:lvl5pPr>
             <a:lvl6pPr>
+              <a:buNone/>
               <a:defRPr sz="1725" b="1">
                 <a:solidFill>
                   <a:srgbClr val="243244"/>
@@ -18191,6 +18980,7 @@
               </a:defRPr>
             </a:lvl6pPr>
             <a:lvl7pPr>
+              <a:buNone/>
               <a:defRPr sz="1725" b="1">
                 <a:solidFill>
                   <a:srgbClr val="243244"/>
@@ -18201,6 +18991,7 @@
               </a:defRPr>
             </a:lvl7pPr>
             <a:lvl8pPr>
+              <a:buNone/>
               <a:defRPr sz="1725" b="1">
                 <a:solidFill>
                   <a:srgbClr val="243244"/>
@@ -18211,6 +19002,7 @@
               </a:defRPr>
             </a:lvl8pPr>
             <a:lvl9pPr>
+              <a:buNone/>
               <a:defRPr sz="1725" b="1">
                 <a:solidFill>
                   <a:srgbClr val="243244"/>
@@ -18223,6 +19015,7 @@
           </a:lstStyle>
           <a:p xmlns:a="http://schemas.openxmlformats.org/drawingml/2006/main">
             <a:pPr>
+              <a:buNone/>
               <a:defRPr sz="1725" b="1">
                 <a:solidFill>
                   <a:srgbClr val="243244"/>
@@ -18288,6 +19081,7 @@
               </a:defRPr>
             </a:defPPr>
             <a:lvl1pPr>
+              <a:buNone/>
               <a:defRPr sz="1275" b="0">
                 <a:solidFill>
                   <a:srgbClr val="596678"/>
@@ -18298,6 +19092,7 @@
               </a:defRPr>
             </a:lvl1pPr>
             <a:lvl2pPr>
+              <a:buNone/>
               <a:defRPr sz="1275" b="0">
                 <a:solidFill>
                   <a:srgbClr val="596678"/>
@@ -18308,6 +19103,7 @@
               </a:defRPr>
             </a:lvl2pPr>
             <a:lvl3pPr>
+              <a:buNone/>
               <a:defRPr sz="1275" b="0">
                 <a:solidFill>
                   <a:srgbClr val="596678"/>
@@ -18318,6 +19114,7 @@
               </a:defRPr>
             </a:lvl3pPr>
             <a:lvl4pPr>
+              <a:buNone/>
               <a:defRPr sz="1275" b="0">
                 <a:solidFill>
                   <a:srgbClr val="596678"/>
@@ -18328,6 +19125,7 @@
               </a:defRPr>
             </a:lvl4pPr>
             <a:lvl5pPr>
+              <a:buNone/>
               <a:defRPr sz="1275" b="0">
                 <a:solidFill>
                   <a:srgbClr val="596678"/>
@@ -18338,6 +19136,7 @@
               </a:defRPr>
             </a:lvl5pPr>
             <a:lvl6pPr>
+              <a:buNone/>
               <a:defRPr sz="1275" b="0">
                 <a:solidFill>
                   <a:srgbClr val="596678"/>
@@ -18348,6 +19147,7 @@
               </a:defRPr>
             </a:lvl6pPr>
             <a:lvl7pPr>
+              <a:buNone/>
               <a:defRPr sz="1275" b="0">
                 <a:solidFill>
                   <a:srgbClr val="596678"/>
@@ -18358,6 +19158,7 @@
               </a:defRPr>
             </a:lvl7pPr>
             <a:lvl8pPr>
+              <a:buNone/>
               <a:defRPr sz="1275" b="0">
                 <a:solidFill>
                   <a:srgbClr val="596678"/>
@@ -18368,6 +19169,7 @@
               </a:defRPr>
             </a:lvl8pPr>
             <a:lvl9pPr>
+              <a:buNone/>
               <a:defRPr sz="1275" b="0">
                 <a:solidFill>
                   <a:srgbClr val="596678"/>
@@ -18380,6 +19182,7 @@
           </a:lstStyle>
           <a:p xmlns:a="http://schemas.openxmlformats.org/drawingml/2006/main">
             <a:pPr>
+              <a:buNone/>
               <a:defRPr sz="1275" b="0">
                 <a:solidFill>
                   <a:srgbClr val="596678"/>
@@ -18445,6 +19248,7 @@
               </a:defRPr>
             </a:defPPr>
             <a:lvl1pPr>
+              <a:buNone/>
               <a:defRPr sz="1725" b="1">
                 <a:solidFill>
                   <a:srgbClr val="243244"/>
@@ -18455,6 +19259,7 @@
               </a:defRPr>
             </a:lvl1pPr>
             <a:lvl2pPr>
+              <a:buNone/>
               <a:defRPr sz="1725" b="1">
                 <a:solidFill>
                   <a:srgbClr val="243244"/>
@@ -18465,6 +19270,7 @@
               </a:defRPr>
             </a:lvl2pPr>
             <a:lvl3pPr>
+              <a:buNone/>
               <a:defRPr sz="1725" b="1">
                 <a:solidFill>
                   <a:srgbClr val="243244"/>
@@ -18475,6 +19281,7 @@
               </a:defRPr>
             </a:lvl3pPr>
             <a:lvl4pPr>
+              <a:buNone/>
               <a:defRPr sz="1725" b="1">
                 <a:solidFill>
                   <a:srgbClr val="243244"/>
@@ -18485,6 +19292,7 @@
               </a:defRPr>
             </a:lvl4pPr>
             <a:lvl5pPr>
+              <a:buNone/>
               <a:defRPr sz="1725" b="1">
                 <a:solidFill>
                   <a:srgbClr val="243244"/>
@@ -18495,6 +19303,7 @@
               </a:defRPr>
             </a:lvl5pPr>
             <a:lvl6pPr>
+              <a:buNone/>
               <a:defRPr sz="1725" b="1">
                 <a:solidFill>
                   <a:srgbClr val="243244"/>
@@ -18505,6 +19314,7 @@
               </a:defRPr>
             </a:lvl6pPr>
             <a:lvl7pPr>
+              <a:buNone/>
               <a:defRPr sz="1725" b="1">
                 <a:solidFill>
                   <a:srgbClr val="243244"/>
@@ -18515,6 +19325,7 @@
               </a:defRPr>
             </a:lvl7pPr>
             <a:lvl8pPr>
+              <a:buNone/>
               <a:defRPr sz="1725" b="1">
                 <a:solidFill>
                   <a:srgbClr val="243244"/>
@@ -18525,6 +19336,7 @@
               </a:defRPr>
             </a:lvl8pPr>
             <a:lvl9pPr>
+              <a:buNone/>
               <a:defRPr sz="1725" b="1">
                 <a:solidFill>
                   <a:srgbClr val="243244"/>
@@ -18537,6 +19349,7 @@
           </a:lstStyle>
           <a:p xmlns:a="http://schemas.openxmlformats.org/drawingml/2006/main">
             <a:pPr>
+              <a:buNone/>
               <a:defRPr sz="1725" b="1">
                 <a:solidFill>
                   <a:srgbClr val="243244"/>
@@ -18602,6 +19415,7 @@
               </a:defRPr>
             </a:defPPr>
             <a:lvl1pPr>
+              <a:buNone/>
               <a:defRPr sz="1275" b="0">
                 <a:solidFill>
                   <a:srgbClr val="596678"/>
@@ -18612,6 +19426,7 @@
               </a:defRPr>
             </a:lvl1pPr>
             <a:lvl2pPr>
+              <a:buNone/>
               <a:defRPr sz="1275" b="0">
                 <a:solidFill>
                   <a:srgbClr val="596678"/>
@@ -18622,6 +19437,7 @@
               </a:defRPr>
             </a:lvl2pPr>
             <a:lvl3pPr>
+              <a:buNone/>
               <a:defRPr sz="1275" b="0">
                 <a:solidFill>
                   <a:srgbClr val="596678"/>
@@ -18632,6 +19448,7 @@
               </a:defRPr>
             </a:lvl3pPr>
             <a:lvl4pPr>
+              <a:buNone/>
               <a:defRPr sz="1275" b="0">
                 <a:solidFill>
                   <a:srgbClr val="596678"/>
@@ -18642,6 +19459,7 @@
               </a:defRPr>
             </a:lvl4pPr>
             <a:lvl5pPr>
+              <a:buNone/>
               <a:defRPr sz="1275" b="0">
                 <a:solidFill>
                   <a:srgbClr val="596678"/>
@@ -18652,6 +19470,7 @@
               </a:defRPr>
             </a:lvl5pPr>
             <a:lvl6pPr>
+              <a:buNone/>
               <a:defRPr sz="1275" b="0">
                 <a:solidFill>
                   <a:srgbClr val="596678"/>
@@ -18662,6 +19481,7 @@
               </a:defRPr>
             </a:lvl6pPr>
             <a:lvl7pPr>
+              <a:buNone/>
               <a:defRPr sz="1275" b="0">
                 <a:solidFill>
                   <a:srgbClr val="596678"/>
@@ -18672,6 +19492,7 @@
               </a:defRPr>
             </a:lvl7pPr>
             <a:lvl8pPr>
+              <a:buNone/>
               <a:defRPr sz="1275" b="0">
                 <a:solidFill>
                   <a:srgbClr val="596678"/>
@@ -18682,6 +19503,7 @@
               </a:defRPr>
             </a:lvl8pPr>
             <a:lvl9pPr>
+              <a:buNone/>
               <a:defRPr sz="1275" b="0">
                 <a:solidFill>
                   <a:srgbClr val="596678"/>
@@ -18694,6 +19516,7 @@
           </a:lstStyle>
           <a:p xmlns:a="http://schemas.openxmlformats.org/drawingml/2006/main">
             <a:pPr>
+              <a:buNone/>
               <a:defRPr sz="1275" b="0">
                 <a:solidFill>
                   <a:srgbClr val="596678"/>
@@ -18759,6 +19582,7 @@
               </a:defRPr>
             </a:defPPr>
             <a:lvl1pPr>
+              <a:buNone/>
               <a:defRPr sz="1725" b="1">
                 <a:solidFill>
                   <a:srgbClr val="243244"/>
@@ -18769,6 +19593,7 @@
               </a:defRPr>
             </a:lvl1pPr>
             <a:lvl2pPr>
+              <a:buNone/>
               <a:defRPr sz="1725" b="1">
                 <a:solidFill>
                   <a:srgbClr val="243244"/>
@@ -18779,6 +19604,7 @@
               </a:defRPr>
             </a:lvl2pPr>
             <a:lvl3pPr>
+              <a:buNone/>
               <a:defRPr sz="1725" b="1">
                 <a:solidFill>
                   <a:srgbClr val="243244"/>
@@ -18789,6 +19615,7 @@
               </a:defRPr>
             </a:lvl3pPr>
             <a:lvl4pPr>
+              <a:buNone/>
               <a:defRPr sz="1725" b="1">
                 <a:solidFill>
                   <a:srgbClr val="243244"/>
@@ -18799,6 +19626,7 @@
               </a:defRPr>
             </a:lvl4pPr>
             <a:lvl5pPr>
+              <a:buNone/>
               <a:defRPr sz="1725" b="1">
                 <a:solidFill>
                   <a:srgbClr val="243244"/>
@@ -18809,6 +19637,7 @@
               </a:defRPr>
             </a:lvl5pPr>
             <a:lvl6pPr>
+              <a:buNone/>
               <a:defRPr sz="1725" b="1">
                 <a:solidFill>
                   <a:srgbClr val="243244"/>
@@ -18819,6 +19648,7 @@
               </a:defRPr>
             </a:lvl6pPr>
             <a:lvl7pPr>
+              <a:buNone/>
               <a:defRPr sz="1725" b="1">
                 <a:solidFill>
                   <a:srgbClr val="243244"/>
@@ -18829,6 +19659,7 @@
               </a:defRPr>
             </a:lvl7pPr>
             <a:lvl8pPr>
+              <a:buNone/>
               <a:defRPr sz="1725" b="1">
                 <a:solidFill>
                   <a:srgbClr val="243244"/>
@@ -18839,6 +19670,7 @@
               </a:defRPr>
             </a:lvl8pPr>
             <a:lvl9pPr>
+              <a:buNone/>
               <a:defRPr sz="1725" b="1">
                 <a:solidFill>
                   <a:srgbClr val="243244"/>
@@ -18851,6 +19683,7 @@
           </a:lstStyle>
           <a:p xmlns:a="http://schemas.openxmlformats.org/drawingml/2006/main">
             <a:pPr>
+              <a:buNone/>
               <a:defRPr sz="1725" b="1">
                 <a:solidFill>
                   <a:srgbClr val="243244"/>
@@ -18916,6 +19749,7 @@
               </a:defRPr>
             </a:defPPr>
             <a:lvl1pPr>
+              <a:buNone/>
               <a:defRPr sz="1275" b="0">
                 <a:solidFill>
                   <a:srgbClr val="596678"/>
@@ -18926,6 +19760,7 @@
               </a:defRPr>
             </a:lvl1pPr>
             <a:lvl2pPr>
+              <a:buNone/>
               <a:defRPr sz="1275" b="0">
                 <a:solidFill>
                   <a:srgbClr val="596678"/>
@@ -18936,6 +19771,7 @@
               </a:defRPr>
             </a:lvl2pPr>
             <a:lvl3pPr>
+              <a:buNone/>
               <a:defRPr sz="1275" b="0">
                 <a:solidFill>
                   <a:srgbClr val="596678"/>
@@ -18946,6 +19782,7 @@
               </a:defRPr>
             </a:lvl3pPr>
             <a:lvl4pPr>
+              <a:buNone/>
               <a:defRPr sz="1275" b="0">
                 <a:solidFill>
                   <a:srgbClr val="596678"/>
@@ -18956,6 +19793,7 @@
               </a:defRPr>
             </a:lvl4pPr>
             <a:lvl5pPr>
+              <a:buNone/>
               <a:defRPr sz="1275" b="0">
                 <a:solidFill>
                   <a:srgbClr val="596678"/>
@@ -18966,6 +19804,7 @@
               </a:defRPr>
             </a:lvl5pPr>
             <a:lvl6pPr>
+              <a:buNone/>
               <a:defRPr sz="1275" b="0">
                 <a:solidFill>
                   <a:srgbClr val="596678"/>
@@ -18976,6 +19815,7 @@
               </a:defRPr>
             </a:lvl6pPr>
             <a:lvl7pPr>
+              <a:buNone/>
               <a:defRPr sz="1275" b="0">
                 <a:solidFill>
                   <a:srgbClr val="596678"/>
@@ -18986,6 +19826,7 @@
               </a:defRPr>
             </a:lvl7pPr>
             <a:lvl8pPr>
+              <a:buNone/>
               <a:defRPr sz="1275" b="0">
                 <a:solidFill>
                   <a:srgbClr val="596678"/>
@@ -18996,6 +19837,7 @@
               </a:defRPr>
             </a:lvl8pPr>
             <a:lvl9pPr>
+              <a:buNone/>
               <a:defRPr sz="1275" b="0">
                 <a:solidFill>
                   <a:srgbClr val="596678"/>
@@ -19008,6 +19850,7 @@
           </a:lstStyle>
           <a:p xmlns:a="http://schemas.openxmlformats.org/drawingml/2006/main">
             <a:pPr>
+              <a:buNone/>
               <a:defRPr sz="1275" b="0">
                 <a:solidFill>
                   <a:srgbClr val="596678"/>
@@ -19102,6 +19945,7 @@
               </a:defRPr>
             </a:defPPr>
             <a:lvl1pPr>
+              <a:buNone/>
               <a:defRPr sz="900" b="1">
                 <a:solidFill>
                   <a:srgbClr val="802D42"/>
@@ -19112,6 +19956,7 @@
               </a:defRPr>
             </a:lvl1pPr>
             <a:lvl2pPr>
+              <a:buNone/>
               <a:defRPr sz="900" b="1">
                 <a:solidFill>
                   <a:srgbClr val="802D42"/>
@@ -19122,6 +19967,7 @@
               </a:defRPr>
             </a:lvl2pPr>
             <a:lvl3pPr>
+              <a:buNone/>
               <a:defRPr sz="900" b="1">
                 <a:solidFill>
                   <a:srgbClr val="802D42"/>
@@ -19132,6 +19978,7 @@
               </a:defRPr>
             </a:lvl3pPr>
             <a:lvl4pPr>
+              <a:buNone/>
               <a:defRPr sz="900" b="1">
                 <a:solidFill>
                   <a:srgbClr val="802D42"/>
@@ -19142,6 +19989,7 @@
               </a:defRPr>
             </a:lvl4pPr>
             <a:lvl5pPr>
+              <a:buNone/>
               <a:defRPr sz="900" b="1">
                 <a:solidFill>
                   <a:srgbClr val="802D42"/>
@@ -19152,6 +20000,7 @@
               </a:defRPr>
             </a:lvl5pPr>
             <a:lvl6pPr>
+              <a:buNone/>
               <a:defRPr sz="900" b="1">
                 <a:solidFill>
                   <a:srgbClr val="802D42"/>
@@ -19162,6 +20011,7 @@
               </a:defRPr>
             </a:lvl6pPr>
             <a:lvl7pPr>
+              <a:buNone/>
               <a:defRPr sz="900" b="1">
                 <a:solidFill>
                   <a:srgbClr val="802D42"/>
@@ -19172,6 +20022,7 @@
               </a:defRPr>
             </a:lvl7pPr>
             <a:lvl8pPr>
+              <a:buNone/>
               <a:defRPr sz="900" b="1">
                 <a:solidFill>
                   <a:srgbClr val="802D42"/>
@@ -19182,6 +20033,7 @@
               </a:defRPr>
             </a:lvl8pPr>
             <a:lvl9pPr>
+              <a:buNone/>
               <a:defRPr sz="900" b="1">
                 <a:solidFill>
                   <a:srgbClr val="802D42"/>
@@ -19194,6 +20046,7 @@
           </a:lstStyle>
           <a:p xmlns:a="http://schemas.openxmlformats.org/drawingml/2006/main">
             <a:pPr>
+              <a:buNone/>
               <a:defRPr sz="900" b="1">
                 <a:solidFill>
                   <a:srgbClr val="802D42"/>
@@ -19259,6 +20112,7 @@
               </a:defRPr>
             </a:defPPr>
             <a:lvl1pPr>
+              <a:buNone/>
               <a:defRPr sz="2400" b="1">
                 <a:solidFill>
                   <a:srgbClr val="243244"/>
@@ -19269,6 +20123,7 @@
               </a:defRPr>
             </a:lvl1pPr>
             <a:lvl2pPr>
+              <a:buNone/>
               <a:defRPr sz="2400" b="1">
                 <a:solidFill>
                   <a:srgbClr val="243244"/>
@@ -19279,6 +20134,7 @@
               </a:defRPr>
             </a:lvl2pPr>
             <a:lvl3pPr>
+              <a:buNone/>
               <a:defRPr sz="2400" b="1">
                 <a:solidFill>
                   <a:srgbClr val="243244"/>
@@ -19289,6 +20145,7 @@
               </a:defRPr>
             </a:lvl3pPr>
             <a:lvl4pPr>
+              <a:buNone/>
               <a:defRPr sz="2400" b="1">
                 <a:solidFill>
                   <a:srgbClr val="243244"/>
@@ -19299,6 +20156,7 @@
               </a:defRPr>
             </a:lvl4pPr>
             <a:lvl5pPr>
+              <a:buNone/>
               <a:defRPr sz="2400" b="1">
                 <a:solidFill>
                   <a:srgbClr val="243244"/>
@@ -19309,6 +20167,7 @@
               </a:defRPr>
             </a:lvl5pPr>
             <a:lvl6pPr>
+              <a:buNone/>
               <a:defRPr sz="2400" b="1">
                 <a:solidFill>
                   <a:srgbClr val="243244"/>
@@ -19319,6 +20178,7 @@
               </a:defRPr>
             </a:lvl6pPr>
             <a:lvl7pPr>
+              <a:buNone/>
               <a:defRPr sz="2400" b="1">
                 <a:solidFill>
                   <a:srgbClr val="243244"/>
@@ -19329,6 +20189,7 @@
               </a:defRPr>
             </a:lvl7pPr>
             <a:lvl8pPr>
+              <a:buNone/>
               <a:defRPr sz="2400" b="1">
                 <a:solidFill>
                   <a:srgbClr val="243244"/>
@@ -19339,6 +20200,7 @@
               </a:defRPr>
             </a:lvl8pPr>
             <a:lvl9pPr>
+              <a:buNone/>
               <a:defRPr sz="2400" b="1">
                 <a:solidFill>
                   <a:srgbClr val="243244"/>
@@ -19351,6 +20213,7 @@
           </a:lstStyle>
           <a:p xmlns:a="http://schemas.openxmlformats.org/drawingml/2006/main">
             <a:pPr>
+              <a:buNone/>
               <a:defRPr sz="2400" b="1">
                 <a:solidFill>
                   <a:srgbClr val="243244"/>
@@ -19416,6 +20279,7 @@
               </a:defRPr>
             </a:defPPr>
             <a:lvl1pPr>
+              <a:buNone/>
               <a:defRPr sz="1275" b="0">
                 <a:solidFill>
                   <a:srgbClr val="596678"/>
@@ -19426,6 +20290,7 @@
               </a:defRPr>
             </a:lvl1pPr>
             <a:lvl2pPr>
+              <a:buNone/>
               <a:defRPr sz="1275" b="0">
                 <a:solidFill>
                   <a:srgbClr val="596678"/>
@@ -19436,6 +20301,7 @@
               </a:defRPr>
             </a:lvl2pPr>
             <a:lvl3pPr>
+              <a:buNone/>
               <a:defRPr sz="1275" b="0">
                 <a:solidFill>
                   <a:srgbClr val="596678"/>
@@ -19446,6 +20312,7 @@
               </a:defRPr>
             </a:lvl3pPr>
             <a:lvl4pPr>
+              <a:buNone/>
               <a:defRPr sz="1275" b="0">
                 <a:solidFill>
                   <a:srgbClr val="596678"/>
@@ -19456,6 +20323,7 @@
               </a:defRPr>
             </a:lvl4pPr>
             <a:lvl5pPr>
+              <a:buNone/>
               <a:defRPr sz="1275" b="0">
                 <a:solidFill>
                   <a:srgbClr val="596678"/>
@@ -19466,6 +20334,7 @@
               </a:defRPr>
             </a:lvl5pPr>
             <a:lvl6pPr>
+              <a:buNone/>
               <a:defRPr sz="1275" b="0">
                 <a:solidFill>
                   <a:srgbClr val="596678"/>
@@ -19476,6 +20345,7 @@
               </a:defRPr>
             </a:lvl6pPr>
             <a:lvl7pPr>
+              <a:buNone/>
               <a:defRPr sz="1275" b="0">
                 <a:solidFill>
                   <a:srgbClr val="596678"/>
@@ -19486,6 +20356,7 @@
               </a:defRPr>
             </a:lvl7pPr>
             <a:lvl8pPr>
+              <a:buNone/>
               <a:defRPr sz="1275" b="0">
                 <a:solidFill>
                   <a:srgbClr val="596678"/>
@@ -19496,6 +20367,7 @@
               </a:defRPr>
             </a:lvl8pPr>
             <a:lvl9pPr>
+              <a:buNone/>
               <a:defRPr sz="1275" b="0">
                 <a:solidFill>
                   <a:srgbClr val="596678"/>
@@ -19508,6 +20380,7 @@
           </a:lstStyle>
           <a:p xmlns:a="http://schemas.openxmlformats.org/drawingml/2006/main">
             <a:pPr>
+              <a:buNone/>
               <a:defRPr sz="1275" b="0">
                 <a:solidFill>
                   <a:srgbClr val="596678"/>
@@ -19573,6 +20446,7 @@
               </a:defRPr>
             </a:defPPr>
             <a:lvl1pPr>
+              <a:buNone/>
               <a:defRPr sz="825" b="0">
                 <a:solidFill>
                   <a:srgbClr val="596678"/>
@@ -19583,6 +20457,7 @@
               </a:defRPr>
             </a:lvl1pPr>
             <a:lvl2pPr>
+              <a:buNone/>
               <a:defRPr sz="825" b="0">
                 <a:solidFill>
                   <a:srgbClr val="596678"/>
@@ -19593,6 +20468,7 @@
               </a:defRPr>
             </a:lvl2pPr>
             <a:lvl3pPr>
+              <a:buNone/>
               <a:defRPr sz="825" b="0">
                 <a:solidFill>
                   <a:srgbClr val="596678"/>
@@ -19603,6 +20479,7 @@
               </a:defRPr>
             </a:lvl3pPr>
             <a:lvl4pPr>
+              <a:buNone/>
               <a:defRPr sz="825" b="0">
                 <a:solidFill>
                   <a:srgbClr val="596678"/>
@@ -19613,6 +20490,7 @@
               </a:defRPr>
             </a:lvl4pPr>
             <a:lvl5pPr>
+              <a:buNone/>
               <a:defRPr sz="825" b="0">
                 <a:solidFill>
                   <a:srgbClr val="596678"/>
@@ -19623,6 +20501,7 @@
               </a:defRPr>
             </a:lvl5pPr>
             <a:lvl6pPr>
+              <a:buNone/>
               <a:defRPr sz="825" b="0">
                 <a:solidFill>
                   <a:srgbClr val="596678"/>
@@ -19633,6 +20512,7 @@
               </a:defRPr>
             </a:lvl6pPr>
             <a:lvl7pPr>
+              <a:buNone/>
               <a:defRPr sz="825" b="0">
                 <a:solidFill>
                   <a:srgbClr val="596678"/>
@@ -19643,6 +20523,7 @@
               </a:defRPr>
             </a:lvl7pPr>
             <a:lvl8pPr>
+              <a:buNone/>
               <a:defRPr sz="825" b="0">
                 <a:solidFill>
                   <a:srgbClr val="596678"/>
@@ -19653,6 +20534,7 @@
               </a:defRPr>
             </a:lvl8pPr>
             <a:lvl9pPr>
+              <a:buNone/>
               <a:defRPr sz="825" b="0">
                 <a:solidFill>
                   <a:srgbClr val="596678"/>
@@ -19665,6 +20547,7 @@
           </a:lstStyle>
           <a:p xmlns:a="http://schemas.openxmlformats.org/drawingml/2006/main">
             <a:pPr>
+              <a:buNone/>
               <a:defRPr sz="825" b="0">
                 <a:solidFill>
                   <a:srgbClr val="596678"/>
@@ -19730,6 +20613,7 @@
               </a:defRPr>
             </a:defPPr>
             <a:lvl1pPr>
+              <a:buNone/>
               <a:defRPr sz="825" b="1">
                 <a:solidFill>
                   <a:srgbClr val="802D42"/>
@@ -19740,6 +20624,7 @@
               </a:defRPr>
             </a:lvl1pPr>
             <a:lvl2pPr>
+              <a:buNone/>
               <a:defRPr sz="825" b="1">
                 <a:solidFill>
                   <a:srgbClr val="802D42"/>
@@ -19750,6 +20635,7 @@
               </a:defRPr>
             </a:lvl2pPr>
             <a:lvl3pPr>
+              <a:buNone/>
               <a:defRPr sz="825" b="1">
                 <a:solidFill>
                   <a:srgbClr val="802D42"/>
@@ -19760,6 +20646,7 @@
               </a:defRPr>
             </a:lvl3pPr>
             <a:lvl4pPr>
+              <a:buNone/>
               <a:defRPr sz="825" b="1">
                 <a:solidFill>
                   <a:srgbClr val="802D42"/>
@@ -19770,6 +20657,7 @@
               </a:defRPr>
             </a:lvl4pPr>
             <a:lvl5pPr>
+              <a:buNone/>
               <a:defRPr sz="825" b="1">
                 <a:solidFill>
                   <a:srgbClr val="802D42"/>
@@ -19780,6 +20668,7 @@
               </a:defRPr>
             </a:lvl5pPr>
             <a:lvl6pPr>
+              <a:buNone/>
               <a:defRPr sz="825" b="1">
                 <a:solidFill>
                   <a:srgbClr val="802D42"/>
@@ -19790,6 +20679,7 @@
               </a:defRPr>
             </a:lvl6pPr>
             <a:lvl7pPr>
+              <a:buNone/>
               <a:defRPr sz="825" b="1">
                 <a:solidFill>
                   <a:srgbClr val="802D42"/>
@@ -19800,6 +20690,7 @@
               </a:defRPr>
             </a:lvl7pPr>
             <a:lvl8pPr>
+              <a:buNone/>
               <a:defRPr sz="825" b="1">
                 <a:solidFill>
                   <a:srgbClr val="802D42"/>
@@ -19810,6 +20701,7 @@
               </a:defRPr>
             </a:lvl8pPr>
             <a:lvl9pPr>
+              <a:buNone/>
               <a:defRPr sz="825" b="1">
                 <a:solidFill>
                   <a:srgbClr val="802D42"/>
@@ -19822,6 +20714,7 @@
           </a:lstStyle>
           <a:p xmlns:a="http://schemas.openxmlformats.org/drawingml/2006/main">
             <a:pPr>
+              <a:buNone/>
               <a:defRPr sz="825" b="1">
                 <a:solidFill>
                   <a:srgbClr val="802D42"/>
@@ -19887,6 +20780,7 @@
               </a:defRPr>
             </a:defPPr>
             <a:lvl1pPr>
+              <a:buNone/>
               <a:defRPr sz="1725" b="1">
                 <a:solidFill>
                   <a:srgbClr val="243244"/>
@@ -19897,6 +20791,7 @@
               </a:defRPr>
             </a:lvl1pPr>
             <a:lvl2pPr>
+              <a:buNone/>
               <a:defRPr sz="1725" b="1">
                 <a:solidFill>
                   <a:srgbClr val="243244"/>
@@ -19907,6 +20802,7 @@
               </a:defRPr>
             </a:lvl2pPr>
             <a:lvl3pPr>
+              <a:buNone/>
               <a:defRPr sz="1725" b="1">
                 <a:solidFill>
                   <a:srgbClr val="243244"/>
@@ -19917,6 +20813,7 @@
               </a:defRPr>
             </a:lvl3pPr>
             <a:lvl4pPr>
+              <a:buNone/>
               <a:defRPr sz="1725" b="1">
                 <a:solidFill>
                   <a:srgbClr val="243244"/>
@@ -19927,6 +20824,7 @@
               </a:defRPr>
             </a:lvl4pPr>
             <a:lvl5pPr>
+              <a:buNone/>
               <a:defRPr sz="1725" b="1">
                 <a:solidFill>
                   <a:srgbClr val="243244"/>
@@ -19937,6 +20835,7 @@
               </a:defRPr>
             </a:lvl5pPr>
             <a:lvl6pPr>
+              <a:buNone/>
               <a:defRPr sz="1725" b="1">
                 <a:solidFill>
                   <a:srgbClr val="243244"/>
@@ -19947,6 +20846,7 @@
               </a:defRPr>
             </a:lvl6pPr>
             <a:lvl7pPr>
+              <a:buNone/>
               <a:defRPr sz="1725" b="1">
                 <a:solidFill>
                   <a:srgbClr val="243244"/>
@@ -19957,6 +20857,7 @@
               </a:defRPr>
             </a:lvl7pPr>
             <a:lvl8pPr>
+              <a:buNone/>
               <a:defRPr sz="1725" b="1">
                 <a:solidFill>
                   <a:srgbClr val="243244"/>
@@ -19967,6 +20868,7 @@
               </a:defRPr>
             </a:lvl8pPr>
             <a:lvl9pPr>
+              <a:buNone/>
               <a:defRPr sz="1725" b="1">
                 <a:solidFill>
                   <a:srgbClr val="243244"/>
@@ -19979,6 +20881,7 @@
           </a:lstStyle>
           <a:p xmlns:a="http://schemas.openxmlformats.org/drawingml/2006/main">
             <a:pPr>
+              <a:buNone/>
               <a:defRPr sz="1725" b="1">
                 <a:solidFill>
                   <a:srgbClr val="243244"/>
@@ -20044,6 +20947,7 @@
               </a:defRPr>
             </a:defPPr>
             <a:lvl1pPr>
+              <a:buNone/>
               <a:defRPr sz="1275" b="0">
                 <a:solidFill>
                   <a:srgbClr val="596678"/>
@@ -20054,6 +20958,7 @@
               </a:defRPr>
             </a:lvl1pPr>
             <a:lvl2pPr>
+              <a:buNone/>
               <a:defRPr sz="1275" b="0">
                 <a:solidFill>
                   <a:srgbClr val="596678"/>
@@ -20064,6 +20969,7 @@
               </a:defRPr>
             </a:lvl2pPr>
             <a:lvl3pPr>
+              <a:buNone/>
               <a:defRPr sz="1275" b="0">
                 <a:solidFill>
                   <a:srgbClr val="596678"/>
@@ -20074,6 +20980,7 @@
               </a:defRPr>
             </a:lvl3pPr>
             <a:lvl4pPr>
+              <a:buNone/>
               <a:defRPr sz="1275" b="0">
                 <a:solidFill>
                   <a:srgbClr val="596678"/>
@@ -20084,6 +20991,7 @@
               </a:defRPr>
             </a:lvl4pPr>
             <a:lvl5pPr>
+              <a:buNone/>
               <a:defRPr sz="1275" b="0">
                 <a:solidFill>
                   <a:srgbClr val="596678"/>
@@ -20094,6 +21002,7 @@
               </a:defRPr>
             </a:lvl5pPr>
             <a:lvl6pPr>
+              <a:buNone/>
               <a:defRPr sz="1275" b="0">
                 <a:solidFill>
                   <a:srgbClr val="596678"/>
@@ -20104,6 +21013,7 @@
               </a:defRPr>
             </a:lvl6pPr>
             <a:lvl7pPr>
+              <a:buNone/>
               <a:defRPr sz="1275" b="0">
                 <a:solidFill>
                   <a:srgbClr val="596678"/>
@@ -20114,6 +21024,7 @@
               </a:defRPr>
             </a:lvl7pPr>
             <a:lvl8pPr>
+              <a:buNone/>
               <a:defRPr sz="1275" b="0">
                 <a:solidFill>
                   <a:srgbClr val="596678"/>
@@ -20124,6 +21035,7 @@
               </a:defRPr>
             </a:lvl8pPr>
             <a:lvl9pPr>
+              <a:buNone/>
               <a:defRPr sz="1275" b="0">
                 <a:solidFill>
                   <a:srgbClr val="596678"/>
@@ -20136,6 +21048,7 @@
           </a:lstStyle>
           <a:p xmlns:a="http://schemas.openxmlformats.org/drawingml/2006/main">
             <a:pPr>
+              <a:buNone/>
               <a:defRPr sz="1275" b="0">
                 <a:solidFill>
                   <a:srgbClr val="596678"/>
@@ -20201,6 +21114,7 @@
               </a:defRPr>
             </a:defPPr>
             <a:lvl1pPr>
+              <a:buNone/>
               <a:defRPr sz="1725" b="1">
                 <a:solidFill>
                   <a:srgbClr val="243244"/>
@@ -20211,6 +21125,7 @@
               </a:defRPr>
             </a:lvl1pPr>
             <a:lvl2pPr>
+              <a:buNone/>
               <a:defRPr sz="1725" b="1">
                 <a:solidFill>
                   <a:srgbClr val="243244"/>
@@ -20221,6 +21136,7 @@
               </a:defRPr>
             </a:lvl2pPr>
             <a:lvl3pPr>
+              <a:buNone/>
               <a:defRPr sz="1725" b="1">
                 <a:solidFill>
                   <a:srgbClr val="243244"/>
@@ -20231,6 +21147,7 @@
               </a:defRPr>
             </a:lvl3pPr>
             <a:lvl4pPr>
+              <a:buNone/>
               <a:defRPr sz="1725" b="1">
                 <a:solidFill>
                   <a:srgbClr val="243244"/>
@@ -20241,6 +21158,7 @@
               </a:defRPr>
             </a:lvl4pPr>
             <a:lvl5pPr>
+              <a:buNone/>
               <a:defRPr sz="1725" b="1">
                 <a:solidFill>
                   <a:srgbClr val="243244"/>
@@ -20251,6 +21169,7 @@
               </a:defRPr>
             </a:lvl5pPr>
             <a:lvl6pPr>
+              <a:buNone/>
               <a:defRPr sz="1725" b="1">
                 <a:solidFill>
                   <a:srgbClr val="243244"/>
@@ -20261,6 +21180,7 @@
               </a:defRPr>
             </a:lvl6pPr>
             <a:lvl7pPr>
+              <a:buNone/>
               <a:defRPr sz="1725" b="1">
                 <a:solidFill>
                   <a:srgbClr val="243244"/>
@@ -20271,6 +21191,7 @@
               </a:defRPr>
             </a:lvl7pPr>
             <a:lvl8pPr>
+              <a:buNone/>
               <a:defRPr sz="1725" b="1">
                 <a:solidFill>
                   <a:srgbClr val="243244"/>
@@ -20281,6 +21202,7 @@
               </a:defRPr>
             </a:lvl8pPr>
             <a:lvl9pPr>
+              <a:buNone/>
               <a:defRPr sz="1725" b="1">
                 <a:solidFill>
                   <a:srgbClr val="243244"/>
@@ -20293,6 +21215,7 @@
           </a:lstStyle>
           <a:p xmlns:a="http://schemas.openxmlformats.org/drawingml/2006/main">
             <a:pPr>
+              <a:buNone/>
               <a:defRPr sz="1725" b="1">
                 <a:solidFill>
                   <a:srgbClr val="243244"/>
@@ -20358,6 +21281,7 @@
               </a:defRPr>
             </a:defPPr>
             <a:lvl1pPr>
+              <a:buNone/>
               <a:defRPr sz="1275" b="0">
                 <a:solidFill>
                   <a:srgbClr val="596678"/>
@@ -20368,6 +21292,7 @@
               </a:defRPr>
             </a:lvl1pPr>
             <a:lvl2pPr>
+              <a:buNone/>
               <a:defRPr sz="1275" b="0">
                 <a:solidFill>
                   <a:srgbClr val="596678"/>
@@ -20378,6 +21303,7 @@
               </a:defRPr>
             </a:lvl2pPr>
             <a:lvl3pPr>
+              <a:buNone/>
               <a:defRPr sz="1275" b="0">
                 <a:solidFill>
                   <a:srgbClr val="596678"/>
@@ -20388,6 +21314,7 @@
               </a:defRPr>
             </a:lvl3pPr>
             <a:lvl4pPr>
+              <a:buNone/>
               <a:defRPr sz="1275" b="0">
                 <a:solidFill>
                   <a:srgbClr val="596678"/>
@@ -20398,6 +21325,7 @@
               </a:defRPr>
             </a:lvl4pPr>
             <a:lvl5pPr>
+              <a:buNone/>
               <a:defRPr sz="1275" b="0">
                 <a:solidFill>
                   <a:srgbClr val="596678"/>
@@ -20408,6 +21336,7 @@
               </a:defRPr>
             </a:lvl5pPr>
             <a:lvl6pPr>
+              <a:buNone/>
               <a:defRPr sz="1275" b="0">
                 <a:solidFill>
                   <a:srgbClr val="596678"/>
@@ -20418,6 +21347,7 @@
               </a:defRPr>
             </a:lvl6pPr>
             <a:lvl7pPr>
+              <a:buNone/>
               <a:defRPr sz="1275" b="0">
                 <a:solidFill>
                   <a:srgbClr val="596678"/>
@@ -20428,6 +21358,7 @@
               </a:defRPr>
             </a:lvl7pPr>
             <a:lvl8pPr>
+              <a:buNone/>
               <a:defRPr sz="1275" b="0">
                 <a:solidFill>
                   <a:srgbClr val="596678"/>
@@ -20438,6 +21369,7 @@
               </a:defRPr>
             </a:lvl8pPr>
             <a:lvl9pPr>
+              <a:buNone/>
               <a:defRPr sz="1275" b="0">
                 <a:solidFill>
                   <a:srgbClr val="596678"/>
@@ -20450,6 +21382,7 @@
           </a:lstStyle>
           <a:p xmlns:a="http://schemas.openxmlformats.org/drawingml/2006/main">
             <a:pPr>
+              <a:buNone/>
               <a:defRPr sz="1275" b="0">
                 <a:solidFill>
                   <a:srgbClr val="596678"/>
@@ -20515,6 +21448,7 @@
               </a:defRPr>
             </a:defPPr>
             <a:lvl1pPr>
+              <a:buNone/>
               <a:defRPr sz="1725" b="1">
                 <a:solidFill>
                   <a:srgbClr val="243244"/>
@@ -20525,6 +21459,7 @@
               </a:defRPr>
             </a:lvl1pPr>
             <a:lvl2pPr>
+              <a:buNone/>
               <a:defRPr sz="1725" b="1">
                 <a:solidFill>
                   <a:srgbClr val="243244"/>
@@ -20535,6 +21470,7 @@
               </a:defRPr>
             </a:lvl2pPr>
             <a:lvl3pPr>
+              <a:buNone/>
               <a:defRPr sz="1725" b="1">
                 <a:solidFill>
                   <a:srgbClr val="243244"/>
@@ -20545,6 +21481,7 @@
               </a:defRPr>
             </a:lvl3pPr>
             <a:lvl4pPr>
+              <a:buNone/>
               <a:defRPr sz="1725" b="1">
                 <a:solidFill>
                   <a:srgbClr val="243244"/>
@@ -20555,6 +21492,7 @@
               </a:defRPr>
             </a:lvl4pPr>
             <a:lvl5pPr>
+              <a:buNone/>
               <a:defRPr sz="1725" b="1">
                 <a:solidFill>
                   <a:srgbClr val="243244"/>
@@ -20565,6 +21503,7 @@
               </a:defRPr>
             </a:lvl5pPr>
             <a:lvl6pPr>
+              <a:buNone/>
               <a:defRPr sz="1725" b="1">
                 <a:solidFill>
                   <a:srgbClr val="243244"/>
@@ -20575,6 +21514,7 @@
               </a:defRPr>
             </a:lvl6pPr>
             <a:lvl7pPr>
+              <a:buNone/>
               <a:defRPr sz="1725" b="1">
                 <a:solidFill>
                   <a:srgbClr val="243244"/>
@@ -20585,6 +21525,7 @@
               </a:defRPr>
             </a:lvl7pPr>
             <a:lvl8pPr>
+              <a:buNone/>
               <a:defRPr sz="1725" b="1">
                 <a:solidFill>
                   <a:srgbClr val="243244"/>
@@ -20595,6 +21536,7 @@
               </a:defRPr>
             </a:lvl8pPr>
             <a:lvl9pPr>
+              <a:buNone/>
               <a:defRPr sz="1725" b="1">
                 <a:solidFill>
                   <a:srgbClr val="243244"/>
@@ -20607,6 +21549,7 @@
           </a:lstStyle>
           <a:p xmlns:a="http://schemas.openxmlformats.org/drawingml/2006/main">
             <a:pPr>
+              <a:buNone/>
               <a:defRPr sz="1725" b="1">
                 <a:solidFill>
                   <a:srgbClr val="243244"/>
@@ -20672,6 +21615,7 @@
               </a:defRPr>
             </a:defPPr>
             <a:lvl1pPr>
+              <a:buNone/>
               <a:defRPr sz="1275" b="0">
                 <a:solidFill>
                   <a:srgbClr val="596678"/>
@@ -20682,6 +21626,7 @@
               </a:defRPr>
             </a:lvl1pPr>
             <a:lvl2pPr>
+              <a:buNone/>
               <a:defRPr sz="1275" b="0">
                 <a:solidFill>
                   <a:srgbClr val="596678"/>
@@ -20692,6 +21637,7 @@
               </a:defRPr>
             </a:lvl2pPr>
             <a:lvl3pPr>
+              <a:buNone/>
               <a:defRPr sz="1275" b="0">
                 <a:solidFill>
                   <a:srgbClr val="596678"/>
@@ -20702,6 +21648,7 @@
               </a:defRPr>
             </a:lvl3pPr>
             <a:lvl4pPr>
+              <a:buNone/>
               <a:defRPr sz="1275" b="0">
                 <a:solidFill>
                   <a:srgbClr val="596678"/>
@@ -20712,6 +21659,7 @@
               </a:defRPr>
             </a:lvl4pPr>
             <a:lvl5pPr>
+              <a:buNone/>
               <a:defRPr sz="1275" b="0">
                 <a:solidFill>
                   <a:srgbClr val="596678"/>
@@ -20722,6 +21670,7 @@
               </a:defRPr>
             </a:lvl5pPr>
             <a:lvl6pPr>
+              <a:buNone/>
               <a:defRPr sz="1275" b="0">
                 <a:solidFill>
                   <a:srgbClr val="596678"/>
@@ -20732,6 +21681,7 @@
               </a:defRPr>
             </a:lvl6pPr>
             <a:lvl7pPr>
+              <a:buNone/>
               <a:defRPr sz="1275" b="0">
                 <a:solidFill>
                   <a:srgbClr val="596678"/>
@@ -20742,6 +21692,7 @@
               </a:defRPr>
             </a:lvl7pPr>
             <a:lvl8pPr>
+              <a:buNone/>
               <a:defRPr sz="1275" b="0">
                 <a:solidFill>
                   <a:srgbClr val="596678"/>
@@ -20752,6 +21703,7 @@
               </a:defRPr>
             </a:lvl8pPr>
             <a:lvl9pPr>
+              <a:buNone/>
               <a:defRPr sz="1275" b="0">
                 <a:solidFill>
                   <a:srgbClr val="596678"/>
@@ -20764,6 +21716,7 @@
           </a:lstStyle>
           <a:p xmlns:a="http://schemas.openxmlformats.org/drawingml/2006/main">
             <a:pPr>
+              <a:buNone/>
               <a:defRPr sz="1275" b="0">
                 <a:solidFill>
                   <a:srgbClr val="596678"/>

--- a/exposicion/presentacion.pptx
+++ b/exposicion/presentacion.pptx
@@ -2,24 +2,24 @@
 <file path=ppt/presentation.xml><?xml version="1.0" encoding="utf-8"?>
 <p:presentation xmlns:p="http://schemas.openxmlformats.org/presentationml/2006/main">
   <p:sldMasterIdLst>
-    <p:sldMasterId xmlns:r="http://schemas.openxmlformats.org/officeDocument/2006/relationships" id="2147483648" r:id="R54b9f44c9e804494"/>
+    <p:sldMasterId xmlns:r="http://schemas.openxmlformats.org/officeDocument/2006/relationships" id="2147483648" r:id="R6beb22bc2e294786"/>
   </p:sldMasterIdLst>
   <p:notesMasterIdLst>
-    <p:notesMasterId xmlns:r="http://schemas.openxmlformats.org/officeDocument/2006/relationships" r:id="R49287653c12f4265"/>
+    <p:notesMasterId xmlns:r="http://schemas.openxmlformats.org/officeDocument/2006/relationships" r:id="Ra87101cb85a64507"/>
   </p:notesMasterIdLst>
   <p:sldIdLst>
-    <p:sldId xmlns:r="http://schemas.openxmlformats.org/officeDocument/2006/relationships" id="256" r:id="R27a69285e97e4c3e"/>
-    <p:sldId xmlns:r="http://schemas.openxmlformats.org/officeDocument/2006/relationships" id="257" r:id="Rbcd88ee8473c4b7b"/>
-    <p:sldId xmlns:r="http://schemas.openxmlformats.org/officeDocument/2006/relationships" id="258" r:id="R19c7a2bf8ee74eba"/>
-    <p:sldId xmlns:r="http://schemas.openxmlformats.org/officeDocument/2006/relationships" id="259" r:id="R9f9be6555ef24ac0"/>
-    <p:sldId xmlns:r="http://schemas.openxmlformats.org/officeDocument/2006/relationships" id="260" r:id="R4b78c1763aa44209"/>
-    <p:sldId xmlns:r="http://schemas.openxmlformats.org/officeDocument/2006/relationships" id="261" r:id="R2962f82d5ba54f19"/>
-    <p:sldId xmlns:r="http://schemas.openxmlformats.org/officeDocument/2006/relationships" id="262" r:id="R354629d9d8584b36"/>
-    <p:sldId xmlns:r="http://schemas.openxmlformats.org/officeDocument/2006/relationships" id="263" r:id="R01019ea0744d432a"/>
-    <p:sldId xmlns:r="http://schemas.openxmlformats.org/officeDocument/2006/relationships" id="264" r:id="Rf835eafc0e984ed9"/>
-    <p:sldId xmlns:r="http://schemas.openxmlformats.org/officeDocument/2006/relationships" id="265" r:id="Rb675f01f4e664294"/>
-    <p:sldId xmlns:r="http://schemas.openxmlformats.org/officeDocument/2006/relationships" id="266" r:id="R16cf6ce1bd144695"/>
-    <p:sldId xmlns:r="http://schemas.openxmlformats.org/officeDocument/2006/relationships" id="267" r:id="Rce51b6edf0a64c96"/>
+    <p:sldId xmlns:r="http://schemas.openxmlformats.org/officeDocument/2006/relationships" id="256" r:id="Rac7713136c3546df"/>
+    <p:sldId xmlns:r="http://schemas.openxmlformats.org/officeDocument/2006/relationships" id="257" r:id="R9285a227e3d94258"/>
+    <p:sldId xmlns:r="http://schemas.openxmlformats.org/officeDocument/2006/relationships" id="258" r:id="R9420e4b215f14f71"/>
+    <p:sldId xmlns:r="http://schemas.openxmlformats.org/officeDocument/2006/relationships" id="259" r:id="Rb24ef35b68ca4b5e"/>
+    <p:sldId xmlns:r="http://schemas.openxmlformats.org/officeDocument/2006/relationships" id="260" r:id="R4d02bfe421534c42"/>
+    <p:sldId xmlns:r="http://schemas.openxmlformats.org/officeDocument/2006/relationships" id="261" r:id="R7c3d4459975f431c"/>
+    <p:sldId xmlns:r="http://schemas.openxmlformats.org/officeDocument/2006/relationships" id="262" r:id="Rf8112fa532774068"/>
+    <p:sldId xmlns:r="http://schemas.openxmlformats.org/officeDocument/2006/relationships" id="263" r:id="R42904302af664d30"/>
+    <p:sldId xmlns:r="http://schemas.openxmlformats.org/officeDocument/2006/relationships" id="264" r:id="Re1f8af7b4a734966"/>
+    <p:sldId xmlns:r="http://schemas.openxmlformats.org/officeDocument/2006/relationships" id="265" r:id="Rd7f3410899e44399"/>
+    <p:sldId xmlns:r="http://schemas.openxmlformats.org/officeDocument/2006/relationships" id="266" r:id="R6aab5ff744a942e9"/>
+    <p:sldId xmlns:r="http://schemas.openxmlformats.org/officeDocument/2006/relationships" id="267" r:id="R1c77bfb1abca4d90"/>
   </p:sldIdLst>
   <p:sldSz cx="9144000" cy="5143500"/>
   <p:notesSz cx="6858000" cy="9144000"/>
@@ -883,7 +883,7 @@
           <a:lstStyle xmlns:a="http://schemas.openxmlformats.org/drawingml/2006/main"/>
           <a:p xmlns:a="http://schemas.openxmlformats.org/drawingml/2006/main">
             <a:r>
-              <a:t>Fuentes: levantamiento.md, eer.png, correspondencia-con-el-esquema.pdf, propuestas/propuestas-de-mejora.pdf. Los issues #2–#4 pertenecen al repositorio anterior. No se atribuye validación de compañeros ni ejecución del cambio de Práctica 3.</a:t>
+              <a:t>Fuentes: levantamiento.md, eer.png, correspondencia-con-el-esquema.pdf, propuestas/propuestas-de-mejora.pdf. Los issues #1–#3 están en Proyecto-Asig-Sismos. No se atribuye validación de compañeros ni ejecución del cambio de Práctica 3.</a:t>
             </a:r>
           </a:p>
         </p:txBody>
@@ -1378,7 +1378,7 @@
           </a:p>
           <a:p xmlns:a="http://schemas.openxmlformats.org/drawingml/2006/main">
             <a:r>
-              <a:t>Estado: Registrada / issue #2</a:t>
+              <a:t>Estado: Registrada / issue #1</a:t>
             </a:r>
           </a:p>
           <a:p xmlns:a="http://schemas.openxmlformats.org/drawingml/2006/main">
@@ -1398,7 +1398,7 @@
           </a:p>
           <a:p xmlns:a="http://schemas.openxmlformats.org/drawingml/2006/main">
             <a:r>
-              <a:t>Sustento: Propuesta existente en el issue #2 y en el documento original. Atiende la necesidad identificada al contrastar los usos del artículo con el modelo.</a:t>
+              <a:t>Sustento: Propuesta existente en el issue #1 y en el documento original. Atiende la necesidad identificada al contrastar los usos del artículo con el modelo.</a:t>
             </a:r>
           </a:p>
           <a:p xmlns:a="http://schemas.openxmlformats.org/drawingml/2006/main">
@@ -1418,7 +1418,7 @@
           </a:p>
           <a:p xmlns:a="http://schemas.openxmlformats.org/drawingml/2006/main">
             <a:r>
-              <a:t>Estado: Registrada / issue #3</a:t>
+              <a:t>Estado: Registrada / issue #2</a:t>
             </a:r>
           </a:p>
           <a:p xmlns:a="http://schemas.openxmlformats.org/drawingml/2006/main">
@@ -1438,7 +1438,7 @@
           </a:p>
           <a:p xmlns:a="http://schemas.openxmlformats.org/drawingml/2006/main">
             <a:r>
-              <a:t>Sustento: Propuesta existente en el issue #3. La figura de placas del artículo y la necesidad de incorporar fuentes adicionales motivan la ampliación.</a:t>
+              <a:t>Sustento: Propuesta existente en el issue #2. La figura de placas del artículo y la necesidad de incorporar fuentes adicionales motivan la ampliación.</a:t>
             </a:r>
           </a:p>
           <a:p xmlns:a="http://schemas.openxmlformats.org/drawingml/2006/main">
@@ -1458,7 +1458,7 @@
           </a:p>
           <a:p xmlns:a="http://schemas.openxmlformats.org/drawingml/2006/main">
             <a:r>
-              <a:t>Estado: Registrada / issue #4</a:t>
+              <a:t>Estado: Registrada / issue #3</a:t>
             </a:r>
           </a:p>
           <a:p xmlns:a="http://schemas.openxmlformats.org/drawingml/2006/main">
@@ -1478,7 +1478,7 @@
           </a:p>
           <a:p xmlns:a="http://schemas.openxmlformats.org/drawingml/2006/main">
             <a:r>
-              <a:t>Sustento: Issue #4 y hallazgo comprobable en el DDL: dim_zonas solo contiene atributos de entidad y población agregada.</a:t>
+              <a:t>Sustento: Issue #3 y hallazgo comprobable en el DDL: dim_zonas solo contiene atributos de entidad y población agregada.</a:t>
             </a:r>
           </a:p>
           <a:p xmlns:a="http://schemas.openxmlformats.org/drawingml/2006/main">
@@ -1710,7 +1710,7 @@
           <p:cNvPr id="3" name="Title">
             <a:extLst xmlns:a="http://schemas.openxmlformats.org/drawingml/2006/main">
               <a:ext uri="{FF2B5EF4-FFF2-40B4-BE49-F238E27FC236}">
-                <a16:creationId xmlns:a16="http://schemas.microsoft.com/office/drawing/2014/main" id="{E98B710B-4BF0-4BDE-8259-E6FF830B4FA8}"/>
+                <a16:creationId xmlns:a16="http://schemas.microsoft.com/office/drawing/2014/main" id="{2F281403-FA55-495B-AE56-F3257FF2938C}"/>
               </a:ext>
             </a:extLst>
           </p:cNvPr>
@@ -1939,7 +1939,7 @@
           <p:cNvPr id="2" name="Subtitle">
             <a:extLst xmlns:a="http://schemas.openxmlformats.org/drawingml/2006/main">
               <a:ext uri="{FF2B5EF4-FFF2-40B4-BE49-F238E27FC236}">
-                <a16:creationId xmlns:a16="http://schemas.microsoft.com/office/drawing/2014/main" id="{9B219C17-5292-4DC6-8D77-88989FE3E0A1}"/>
+                <a16:creationId xmlns:a16="http://schemas.microsoft.com/office/drawing/2014/main" id="{FC5EE7E1-CF61-47A0-B2BD-B6BA21CE24A4}"/>
               </a:ext>
             </a:extLst>
           </p:cNvPr>
@@ -2185,7 +2185,7 @@
           <p:cNvPr id="2" name="Section title">
             <a:extLst xmlns:a="http://schemas.openxmlformats.org/drawingml/2006/main">
               <a:ext uri="{FF2B5EF4-FFF2-40B4-BE49-F238E27FC236}">
-                <a16:creationId xmlns:a16="http://schemas.microsoft.com/office/drawing/2014/main" id="{DC88B8A3-F9FF-4659-AC19-97260340BF1A}"/>
+                <a16:creationId xmlns:a16="http://schemas.microsoft.com/office/drawing/2014/main" id="{C481DECD-777C-4FA6-85A4-0AF7FD0D9B8D}"/>
               </a:ext>
             </a:extLst>
           </p:cNvPr>
@@ -2431,7 +2431,7 @@
           <p:cNvPr id="3" name="Title">
             <a:extLst xmlns:a="http://schemas.openxmlformats.org/drawingml/2006/main">
               <a:ext uri="{FF2B5EF4-FFF2-40B4-BE49-F238E27FC236}">
-                <a16:creationId xmlns:a16="http://schemas.microsoft.com/office/drawing/2014/main" id="{B5D98D23-C2C9-4C22-8154-D507DA100795}"/>
+                <a16:creationId xmlns:a16="http://schemas.microsoft.com/office/drawing/2014/main" id="{3CA8C214-B194-4A78-97C4-D844B3424AE6}"/>
               </a:ext>
             </a:extLst>
           </p:cNvPr>
@@ -2660,7 +2660,7 @@
           <p:cNvPr id="2" name="Body">
             <a:extLst xmlns:a="http://schemas.openxmlformats.org/drawingml/2006/main">
               <a:ext uri="{FF2B5EF4-FFF2-40B4-BE49-F238E27FC236}">
-                <a16:creationId xmlns:a16="http://schemas.microsoft.com/office/drawing/2014/main" id="{1C4D0F87-E392-438C-BBD8-27AC3649CBB4}"/>
+                <a16:creationId xmlns:a16="http://schemas.microsoft.com/office/drawing/2014/main" id="{6D02B2B4-F23E-409B-8A75-3A1B8FB2E88D}"/>
               </a:ext>
             </a:extLst>
           </p:cNvPr>
@@ -2906,7 +2906,7 @@
           <p:cNvPr id="4" name="Title">
             <a:extLst xmlns:a="http://schemas.openxmlformats.org/drawingml/2006/main">
               <a:ext uri="{FF2B5EF4-FFF2-40B4-BE49-F238E27FC236}">
-                <a16:creationId xmlns:a16="http://schemas.microsoft.com/office/drawing/2014/main" id="{276DA3F2-0A7A-4EB5-8BAE-447C0E502C52}"/>
+                <a16:creationId xmlns:a16="http://schemas.microsoft.com/office/drawing/2014/main" id="{69A60341-FBD1-4745-B2FC-2657C24FF71F}"/>
               </a:ext>
             </a:extLst>
           </p:cNvPr>
@@ -3135,7 +3135,7 @@
           <p:cNvPr id="2" name="Left column">
             <a:extLst xmlns:a="http://schemas.openxmlformats.org/drawingml/2006/main">
               <a:ext uri="{FF2B5EF4-FFF2-40B4-BE49-F238E27FC236}">
-                <a16:creationId xmlns:a16="http://schemas.microsoft.com/office/drawing/2014/main" id="{365AA3CC-F250-472B-B918-9B481BFE48F7}"/>
+                <a16:creationId xmlns:a16="http://schemas.microsoft.com/office/drawing/2014/main" id="{354A4EB5-4D37-431E-9BFF-E1C9EEFC82CF}"/>
               </a:ext>
             </a:extLst>
           </p:cNvPr>
@@ -3364,7 +3364,7 @@
           <p:cNvPr id="3" name="Right column">
             <a:extLst xmlns:a="http://schemas.openxmlformats.org/drawingml/2006/main">
               <a:ext uri="{FF2B5EF4-FFF2-40B4-BE49-F238E27FC236}">
-                <a16:creationId xmlns:a16="http://schemas.microsoft.com/office/drawing/2014/main" id="{4D84B090-338F-4EA1-85E5-16E113EE096D}"/>
+                <a16:creationId xmlns:a16="http://schemas.microsoft.com/office/drawing/2014/main" id="{26265904-A39C-42A4-AF4D-91C1654C6712}"/>
               </a:ext>
             </a:extLst>
           </p:cNvPr>
@@ -3610,7 +3610,7 @@
           <p:cNvPr id="3" name="Title">
             <a:extLst xmlns:a="http://schemas.openxmlformats.org/drawingml/2006/main">
               <a:ext uri="{FF2B5EF4-FFF2-40B4-BE49-F238E27FC236}">
-                <a16:creationId xmlns:a16="http://schemas.microsoft.com/office/drawing/2014/main" id="{818FED6A-DA7A-4B6A-A2AC-5CC4A5F4B37F}"/>
+                <a16:creationId xmlns:a16="http://schemas.microsoft.com/office/drawing/2014/main" id="{40C99027-2D36-43C6-89D9-16C62384B2E4}"/>
               </a:ext>
             </a:extLst>
           </p:cNvPr>
@@ -3839,7 +3839,7 @@
           <p:cNvPr id="2" name="Left column">
             <a:extLst xmlns:a="http://schemas.openxmlformats.org/drawingml/2006/main">
               <a:ext uri="{FF2B5EF4-FFF2-40B4-BE49-F238E27FC236}">
-                <a16:creationId xmlns:a16="http://schemas.microsoft.com/office/drawing/2014/main" id="{62153F67-EEF9-4CC0-8326-6CD80FE941B3}"/>
+                <a16:creationId xmlns:a16="http://schemas.microsoft.com/office/drawing/2014/main" id="{102C85C8-8E34-4EF2-A86E-996BCD929777}"/>
               </a:ext>
             </a:extLst>
           </p:cNvPr>
@@ -4106,12 +4106,12 @@
   </p:cSld>
   <p:clrMap bg1="lt1" tx1="dk1" bg2="lt2" tx2="dk2" accent1="accent1" accent2="accent2" accent3="accent3" accent4="accent4" accent5="accent5" accent6="accent6" hlink="hlink" folHlink="folHlink"/>
   <p:sldLayoutIdLst>
-    <p:sldLayoutId xmlns:r="http://schemas.openxmlformats.org/officeDocument/2006/relationships" id="2147483649" r:id="R39923a88985f42fa"/>
-    <p:sldLayoutId xmlns:r="http://schemas.openxmlformats.org/officeDocument/2006/relationships" id="2147483650" r:id="R8e6536e81a324407"/>
-    <p:sldLayoutId xmlns:r="http://schemas.openxmlformats.org/officeDocument/2006/relationships" id="2147483651" r:id="Re7b58f14f1974e4c"/>
-    <p:sldLayoutId xmlns:r="http://schemas.openxmlformats.org/officeDocument/2006/relationships" id="2147483652" r:id="R525e91182b7348ce"/>
-    <p:sldLayoutId xmlns:r="http://schemas.openxmlformats.org/officeDocument/2006/relationships" id="2147483653" r:id="Ra8c3bdd506c74378"/>
-    <p:sldLayoutId xmlns:r="http://schemas.openxmlformats.org/officeDocument/2006/relationships" id="2147483654" r:id="R5bb76b6b2f334396"/>
+    <p:sldLayoutId xmlns:r="http://schemas.openxmlformats.org/officeDocument/2006/relationships" id="2147483649" r:id="R90d4fad17d2a4f06"/>
+    <p:sldLayoutId xmlns:r="http://schemas.openxmlformats.org/officeDocument/2006/relationships" id="2147483650" r:id="Rbf8bab4571dd45d8"/>
+    <p:sldLayoutId xmlns:r="http://schemas.openxmlformats.org/officeDocument/2006/relationships" id="2147483651" r:id="R4bfd3fb293af4723"/>
+    <p:sldLayoutId xmlns:r="http://schemas.openxmlformats.org/officeDocument/2006/relationships" id="2147483652" r:id="R4176b56f38284f11"/>
+    <p:sldLayoutId xmlns:r="http://schemas.openxmlformats.org/officeDocument/2006/relationships" id="2147483653" r:id="Ra71c13d167774d12"/>
+    <p:sldLayoutId xmlns:r="http://schemas.openxmlformats.org/officeDocument/2006/relationships" id="2147483654" r:id="R9534847b6d8a4121"/>
   </p:sldLayoutIdLst>
   <p:txStyles>
     <p:titleStyle>
@@ -4662,7 +4662,7 @@
           <p:cNvPr id="8" name="">
             <a:extLst xmlns:a="http://schemas.openxmlformats.org/drawingml/2006/main">
               <a:ext uri="{FF2B5EF4-FFF2-40B4-BE49-F238E27FC236}">
-                <a16:creationId xmlns:a16="http://schemas.microsoft.com/office/drawing/2014/main" id="{C495A058-E25F-4772-B008-C12DEC05AF41}"/>
+                <a16:creationId xmlns:a16="http://schemas.microsoft.com/office/drawing/2014/main" id="{E8AB5BF9-7AB1-4844-A870-FEB3F9CB7CF7}"/>
               </a:ext>
             </a:extLst>
           </p:cNvPr>
@@ -4699,7 +4699,6 @@
               </a:defRPr>
             </a:defPPr>
             <a:lvl1pPr>
-              <a:buNone/>
               <a:defRPr sz="900" b="1">
                 <a:solidFill>
                   <a:srgbClr val="802D42"/>
@@ -4710,7 +4709,6 @@
               </a:defRPr>
             </a:lvl1pPr>
             <a:lvl2pPr>
-              <a:buNone/>
               <a:defRPr sz="900" b="1">
                 <a:solidFill>
                   <a:srgbClr val="802D42"/>
@@ -4721,7 +4719,6 @@
               </a:defRPr>
             </a:lvl2pPr>
             <a:lvl3pPr>
-              <a:buNone/>
               <a:defRPr sz="900" b="1">
                 <a:solidFill>
                   <a:srgbClr val="802D42"/>
@@ -4732,7 +4729,6 @@
               </a:defRPr>
             </a:lvl3pPr>
             <a:lvl4pPr>
-              <a:buNone/>
               <a:defRPr sz="900" b="1">
                 <a:solidFill>
                   <a:srgbClr val="802D42"/>
@@ -4743,7 +4739,6 @@
               </a:defRPr>
             </a:lvl4pPr>
             <a:lvl5pPr>
-              <a:buNone/>
               <a:defRPr sz="900" b="1">
                 <a:solidFill>
                   <a:srgbClr val="802D42"/>
@@ -4754,7 +4749,6 @@
               </a:defRPr>
             </a:lvl5pPr>
             <a:lvl6pPr>
-              <a:buNone/>
               <a:defRPr sz="900" b="1">
                 <a:solidFill>
                   <a:srgbClr val="802D42"/>
@@ -4765,7 +4759,6 @@
               </a:defRPr>
             </a:lvl6pPr>
             <a:lvl7pPr>
-              <a:buNone/>
               <a:defRPr sz="900" b="1">
                 <a:solidFill>
                   <a:srgbClr val="802D42"/>
@@ -4776,7 +4769,6 @@
               </a:defRPr>
             </a:lvl7pPr>
             <a:lvl8pPr>
-              <a:buNone/>
               <a:defRPr sz="900" b="1">
                 <a:solidFill>
                   <a:srgbClr val="802D42"/>
@@ -4787,7 +4779,6 @@
               </a:defRPr>
             </a:lvl8pPr>
             <a:lvl9pPr>
-              <a:buNone/>
               <a:defRPr sz="900" b="1">
                 <a:solidFill>
                   <a:srgbClr val="802D42"/>
@@ -4800,7 +4791,6 @@
           </a:lstStyle>
           <a:p xmlns:a="http://schemas.openxmlformats.org/drawingml/2006/main">
             <a:pPr>
-              <a:buNone/>
               <a:defRPr sz="900" b="1">
                 <a:solidFill>
                   <a:srgbClr val="802D42"/>
@@ -4829,7 +4819,7 @@
           <p:cNvPr id="2" name="">
             <a:extLst xmlns:a="http://schemas.openxmlformats.org/drawingml/2006/main">
               <a:ext uri="{FF2B5EF4-FFF2-40B4-BE49-F238E27FC236}">
-                <a16:creationId xmlns:a16="http://schemas.microsoft.com/office/drawing/2014/main" id="{AD9577C5-D1C9-41B4-84CD-DC327A1A790C}"/>
+                <a16:creationId xmlns:a16="http://schemas.microsoft.com/office/drawing/2014/main" id="{23AB265A-5529-4AFD-B41B-844C9DCEFA7B}"/>
               </a:ext>
             </a:extLst>
           </p:cNvPr>
@@ -4866,7 +4856,6 @@
               </a:defRPr>
             </a:defPPr>
             <a:lvl1pPr>
-              <a:buNone/>
               <a:defRPr sz="2400" b="1">
                 <a:solidFill>
                   <a:srgbClr val="243244"/>
@@ -4877,7 +4866,6 @@
               </a:defRPr>
             </a:lvl1pPr>
             <a:lvl2pPr>
-              <a:buNone/>
               <a:defRPr sz="2400" b="1">
                 <a:solidFill>
                   <a:srgbClr val="243244"/>
@@ -4888,7 +4876,6 @@
               </a:defRPr>
             </a:lvl2pPr>
             <a:lvl3pPr>
-              <a:buNone/>
               <a:defRPr sz="2400" b="1">
                 <a:solidFill>
                   <a:srgbClr val="243244"/>
@@ -4899,7 +4886,6 @@
               </a:defRPr>
             </a:lvl3pPr>
             <a:lvl4pPr>
-              <a:buNone/>
               <a:defRPr sz="2400" b="1">
                 <a:solidFill>
                   <a:srgbClr val="243244"/>
@@ -4910,7 +4896,6 @@
               </a:defRPr>
             </a:lvl4pPr>
             <a:lvl5pPr>
-              <a:buNone/>
               <a:defRPr sz="2400" b="1">
                 <a:solidFill>
                   <a:srgbClr val="243244"/>
@@ -4921,7 +4906,6 @@
               </a:defRPr>
             </a:lvl5pPr>
             <a:lvl6pPr>
-              <a:buNone/>
               <a:defRPr sz="2400" b="1">
                 <a:solidFill>
                   <a:srgbClr val="243244"/>
@@ -4932,7 +4916,6 @@
               </a:defRPr>
             </a:lvl6pPr>
             <a:lvl7pPr>
-              <a:buNone/>
               <a:defRPr sz="2400" b="1">
                 <a:solidFill>
                   <a:srgbClr val="243244"/>
@@ -4943,7 +4926,6 @@
               </a:defRPr>
             </a:lvl7pPr>
             <a:lvl8pPr>
-              <a:buNone/>
               <a:defRPr sz="2400" b="1">
                 <a:solidFill>
                   <a:srgbClr val="243244"/>
@@ -4954,7 +4936,6 @@
               </a:defRPr>
             </a:lvl8pPr>
             <a:lvl9pPr>
-              <a:buNone/>
               <a:defRPr sz="2400" b="1">
                 <a:solidFill>
                   <a:srgbClr val="243244"/>
@@ -4967,7 +4948,6 @@
           </a:lstStyle>
           <a:p xmlns:a="http://schemas.openxmlformats.org/drawingml/2006/main">
             <a:pPr>
-              <a:buNone/>
               <a:defRPr sz="2400" b="1">
                 <a:solidFill>
                   <a:srgbClr val="243244"/>
@@ -4996,7 +4976,7 @@
           <p:cNvPr id="3" name="">
             <a:extLst xmlns:a="http://schemas.openxmlformats.org/drawingml/2006/main">
               <a:ext uri="{FF2B5EF4-FFF2-40B4-BE49-F238E27FC236}">
-                <a16:creationId xmlns:a16="http://schemas.microsoft.com/office/drawing/2014/main" id="{96ED006F-9890-4480-A819-F755A7E34783}"/>
+                <a16:creationId xmlns:a16="http://schemas.microsoft.com/office/drawing/2014/main" id="{A1FA52B8-C500-46FA-87D3-255C233969AE}"/>
               </a:ext>
             </a:extLst>
           </p:cNvPr>
@@ -5033,7 +5013,6 @@
               </a:defRPr>
             </a:defPPr>
             <a:lvl1pPr>
-              <a:buNone/>
               <a:defRPr sz="1275" b="0">
                 <a:solidFill>
                   <a:srgbClr val="596678"/>
@@ -5044,7 +5023,6 @@
               </a:defRPr>
             </a:lvl1pPr>
             <a:lvl2pPr>
-              <a:buNone/>
               <a:defRPr sz="1275" b="0">
                 <a:solidFill>
                   <a:srgbClr val="596678"/>
@@ -5055,7 +5033,6 @@
               </a:defRPr>
             </a:lvl2pPr>
             <a:lvl3pPr>
-              <a:buNone/>
               <a:defRPr sz="1275" b="0">
                 <a:solidFill>
                   <a:srgbClr val="596678"/>
@@ -5066,7 +5043,6 @@
               </a:defRPr>
             </a:lvl3pPr>
             <a:lvl4pPr>
-              <a:buNone/>
               <a:defRPr sz="1275" b="0">
                 <a:solidFill>
                   <a:srgbClr val="596678"/>
@@ -5077,7 +5053,6 @@
               </a:defRPr>
             </a:lvl4pPr>
             <a:lvl5pPr>
-              <a:buNone/>
               <a:defRPr sz="1275" b="0">
                 <a:solidFill>
                   <a:srgbClr val="596678"/>
@@ -5088,7 +5063,6 @@
               </a:defRPr>
             </a:lvl5pPr>
             <a:lvl6pPr>
-              <a:buNone/>
               <a:defRPr sz="1275" b="0">
                 <a:solidFill>
                   <a:srgbClr val="596678"/>
@@ -5099,7 +5073,6 @@
               </a:defRPr>
             </a:lvl6pPr>
             <a:lvl7pPr>
-              <a:buNone/>
               <a:defRPr sz="1275" b="0">
                 <a:solidFill>
                   <a:srgbClr val="596678"/>
@@ -5110,7 +5083,6 @@
               </a:defRPr>
             </a:lvl7pPr>
             <a:lvl8pPr>
-              <a:buNone/>
               <a:defRPr sz="1275" b="0">
                 <a:solidFill>
                   <a:srgbClr val="596678"/>
@@ -5121,7 +5093,6 @@
               </a:defRPr>
             </a:lvl8pPr>
             <a:lvl9pPr>
-              <a:buNone/>
               <a:defRPr sz="1275" b="0">
                 <a:solidFill>
                   <a:srgbClr val="596678"/>
@@ -5134,7 +5105,6 @@
           </a:lstStyle>
           <a:p xmlns:a="http://schemas.openxmlformats.org/drawingml/2006/main">
             <a:pPr>
-              <a:buNone/>
               <a:defRPr sz="1275" b="0">
                 <a:solidFill>
                   <a:srgbClr val="596678"/>
@@ -5163,7 +5133,7 @@
           <p:cNvPr id="4" name="">
             <a:extLst xmlns:a="http://schemas.openxmlformats.org/drawingml/2006/main">
               <a:ext uri="{FF2B5EF4-FFF2-40B4-BE49-F238E27FC236}">
-                <a16:creationId xmlns:a16="http://schemas.microsoft.com/office/drawing/2014/main" id="{DD1FB051-A3B9-493B-BB36-8885C0FD6F7D}"/>
+                <a16:creationId xmlns:a16="http://schemas.microsoft.com/office/drawing/2014/main" id="{07534371-17FB-45E7-8D4B-077EDF3D5B9E}"/>
               </a:ext>
             </a:extLst>
           </p:cNvPr>
@@ -5200,7 +5170,6 @@
               </a:defRPr>
             </a:defPPr>
             <a:lvl1pPr>
-              <a:buNone/>
               <a:defRPr sz="825" b="0">
                 <a:solidFill>
                   <a:srgbClr val="596678"/>
@@ -5211,7 +5180,6 @@
               </a:defRPr>
             </a:lvl1pPr>
             <a:lvl2pPr>
-              <a:buNone/>
               <a:defRPr sz="825" b="0">
                 <a:solidFill>
                   <a:srgbClr val="596678"/>
@@ -5222,7 +5190,6 @@
               </a:defRPr>
             </a:lvl2pPr>
             <a:lvl3pPr>
-              <a:buNone/>
               <a:defRPr sz="825" b="0">
                 <a:solidFill>
                   <a:srgbClr val="596678"/>
@@ -5233,7 +5200,6 @@
               </a:defRPr>
             </a:lvl3pPr>
             <a:lvl4pPr>
-              <a:buNone/>
               <a:defRPr sz="825" b="0">
                 <a:solidFill>
                   <a:srgbClr val="596678"/>
@@ -5244,7 +5210,6 @@
               </a:defRPr>
             </a:lvl4pPr>
             <a:lvl5pPr>
-              <a:buNone/>
               <a:defRPr sz="825" b="0">
                 <a:solidFill>
                   <a:srgbClr val="596678"/>
@@ -5255,7 +5220,6 @@
               </a:defRPr>
             </a:lvl5pPr>
             <a:lvl6pPr>
-              <a:buNone/>
               <a:defRPr sz="825" b="0">
                 <a:solidFill>
                   <a:srgbClr val="596678"/>
@@ -5266,7 +5230,6 @@
               </a:defRPr>
             </a:lvl6pPr>
             <a:lvl7pPr>
-              <a:buNone/>
               <a:defRPr sz="825" b="0">
                 <a:solidFill>
                   <a:srgbClr val="596678"/>
@@ -5277,7 +5240,6 @@
               </a:defRPr>
             </a:lvl7pPr>
             <a:lvl8pPr>
-              <a:buNone/>
               <a:defRPr sz="825" b="0">
                 <a:solidFill>
                   <a:srgbClr val="596678"/>
@@ -5288,7 +5250,6 @@
               </a:defRPr>
             </a:lvl8pPr>
             <a:lvl9pPr>
-              <a:buNone/>
               <a:defRPr sz="825" b="0">
                 <a:solidFill>
                   <a:srgbClr val="596678"/>
@@ -5301,7 +5262,6 @@
           </a:lstStyle>
           <a:p xmlns:a="http://schemas.openxmlformats.org/drawingml/2006/main">
             <a:pPr>
-              <a:buNone/>
               <a:defRPr sz="825" b="0">
                 <a:solidFill>
                   <a:srgbClr val="596678"/>
@@ -5330,7 +5290,7 @@
           <p:cNvPr id="5" name="">
             <a:extLst xmlns:a="http://schemas.openxmlformats.org/drawingml/2006/main">
               <a:ext uri="{FF2B5EF4-FFF2-40B4-BE49-F238E27FC236}">
-                <a16:creationId xmlns:a16="http://schemas.microsoft.com/office/drawing/2014/main" id="{01442605-1FFA-48C8-8726-B613732D306C}"/>
+                <a16:creationId xmlns:a16="http://schemas.microsoft.com/office/drawing/2014/main" id="{D77CA480-102D-4B84-8B48-B55627AF3B2F}"/>
               </a:ext>
             </a:extLst>
           </p:cNvPr>
@@ -5367,7 +5327,6 @@
               </a:defRPr>
             </a:defPPr>
             <a:lvl1pPr>
-              <a:buNone/>
               <a:defRPr sz="825" b="1">
                 <a:solidFill>
                   <a:srgbClr val="802D42"/>
@@ -5378,7 +5337,6 @@
               </a:defRPr>
             </a:lvl1pPr>
             <a:lvl2pPr>
-              <a:buNone/>
               <a:defRPr sz="825" b="1">
                 <a:solidFill>
                   <a:srgbClr val="802D42"/>
@@ -5389,7 +5347,6 @@
               </a:defRPr>
             </a:lvl2pPr>
             <a:lvl3pPr>
-              <a:buNone/>
               <a:defRPr sz="825" b="1">
                 <a:solidFill>
                   <a:srgbClr val="802D42"/>
@@ -5400,7 +5357,6 @@
               </a:defRPr>
             </a:lvl3pPr>
             <a:lvl4pPr>
-              <a:buNone/>
               <a:defRPr sz="825" b="1">
                 <a:solidFill>
                   <a:srgbClr val="802D42"/>
@@ -5411,7 +5367,6 @@
               </a:defRPr>
             </a:lvl4pPr>
             <a:lvl5pPr>
-              <a:buNone/>
               <a:defRPr sz="825" b="1">
                 <a:solidFill>
                   <a:srgbClr val="802D42"/>
@@ -5422,7 +5377,6 @@
               </a:defRPr>
             </a:lvl5pPr>
             <a:lvl6pPr>
-              <a:buNone/>
               <a:defRPr sz="825" b="1">
                 <a:solidFill>
                   <a:srgbClr val="802D42"/>
@@ -5433,7 +5387,6 @@
               </a:defRPr>
             </a:lvl6pPr>
             <a:lvl7pPr>
-              <a:buNone/>
               <a:defRPr sz="825" b="1">
                 <a:solidFill>
                   <a:srgbClr val="802D42"/>
@@ -5444,7 +5397,6 @@
               </a:defRPr>
             </a:lvl7pPr>
             <a:lvl8pPr>
-              <a:buNone/>
               <a:defRPr sz="825" b="1">
                 <a:solidFill>
                   <a:srgbClr val="802D42"/>
@@ -5455,7 +5407,6 @@
               </a:defRPr>
             </a:lvl8pPr>
             <a:lvl9pPr>
-              <a:buNone/>
               <a:defRPr sz="825" b="1">
                 <a:solidFill>
                   <a:srgbClr val="802D42"/>
@@ -5468,7 +5419,6 @@
           </a:lstStyle>
           <a:p xmlns:a="http://schemas.openxmlformats.org/drawingml/2006/main">
             <a:pPr>
-              <a:buNone/>
               <a:defRPr sz="825" b="1">
                 <a:solidFill>
                   <a:srgbClr val="802D42"/>
@@ -5497,7 +5447,7 @@
           <p:cNvPr id="6" name="">
             <a:extLst xmlns:a="http://schemas.openxmlformats.org/drawingml/2006/main">
               <a:ext uri="{FF2B5EF4-FFF2-40B4-BE49-F238E27FC236}">
-                <a16:creationId xmlns:a16="http://schemas.microsoft.com/office/drawing/2014/main" id="{0374486D-4CE9-452B-A135-F127A8FBFED8}"/>
+                <a16:creationId xmlns:a16="http://schemas.microsoft.com/office/drawing/2014/main" id="{1D97BC74-291C-40CE-AFD0-057886452428}"/>
               </a:ext>
             </a:extLst>
           </p:cNvPr>
@@ -5534,7 +5484,6 @@
               </a:defRPr>
             </a:defPPr>
             <a:lvl1pPr>
-              <a:buNone/>
               <a:defRPr sz="1725" b="0">
                 <a:solidFill>
                   <a:srgbClr val="243244"/>
@@ -5545,7 +5494,6 @@
               </a:defRPr>
             </a:lvl1pPr>
             <a:lvl2pPr>
-              <a:buNone/>
               <a:defRPr sz="1725" b="0">
                 <a:solidFill>
                   <a:srgbClr val="243244"/>
@@ -5556,7 +5504,6 @@
               </a:defRPr>
             </a:lvl2pPr>
             <a:lvl3pPr>
-              <a:buNone/>
               <a:defRPr sz="1725" b="0">
                 <a:solidFill>
                   <a:srgbClr val="243244"/>
@@ -5567,7 +5514,6 @@
               </a:defRPr>
             </a:lvl3pPr>
             <a:lvl4pPr>
-              <a:buNone/>
               <a:defRPr sz="1725" b="0">
                 <a:solidFill>
                   <a:srgbClr val="243244"/>
@@ -5578,7 +5524,6 @@
               </a:defRPr>
             </a:lvl4pPr>
             <a:lvl5pPr>
-              <a:buNone/>
               <a:defRPr sz="1725" b="0">
                 <a:solidFill>
                   <a:srgbClr val="243244"/>
@@ -5589,7 +5534,6 @@
               </a:defRPr>
             </a:lvl5pPr>
             <a:lvl6pPr>
-              <a:buNone/>
               <a:defRPr sz="1725" b="0">
                 <a:solidFill>
                   <a:srgbClr val="243244"/>
@@ -5600,7 +5544,6 @@
               </a:defRPr>
             </a:lvl6pPr>
             <a:lvl7pPr>
-              <a:buNone/>
               <a:defRPr sz="1725" b="0">
                 <a:solidFill>
                   <a:srgbClr val="243244"/>
@@ -5611,7 +5554,6 @@
               </a:defRPr>
             </a:lvl7pPr>
             <a:lvl8pPr>
-              <a:buNone/>
               <a:defRPr sz="1725" b="0">
                 <a:solidFill>
                   <a:srgbClr val="243244"/>
@@ -5622,7 +5564,6 @@
               </a:defRPr>
             </a:lvl8pPr>
             <a:lvl9pPr>
-              <a:buNone/>
               <a:defRPr sz="1725" b="0">
                 <a:solidFill>
                   <a:srgbClr val="243244"/>
@@ -5635,7 +5576,6 @@
           </a:lstStyle>
           <a:p xmlns:a="http://schemas.openxmlformats.org/drawingml/2006/main">
             <a:pPr>
-              <a:buNone/>
               <a:defRPr sz="1725" b="0">
                 <a:solidFill>
                   <a:srgbClr val="243244"/>
@@ -5659,7 +5599,6 @@
           </a:p>
           <a:p xmlns:a="http://schemas.openxmlformats.org/drawingml/2006/main">
             <a:pPr>
-              <a:buNone/>
               <a:defRPr sz="1725" b="0">
                 <a:solidFill>
                   <a:srgbClr val="243244"/>
@@ -5683,7 +5622,6 @@
           </a:p>
           <a:p xmlns:a="http://schemas.openxmlformats.org/drawingml/2006/main">
             <a:pPr>
-              <a:buNone/>
               <a:defRPr sz="1725" b="0">
                 <a:solidFill>
                   <a:srgbClr val="243244"/>
@@ -5707,7 +5645,6 @@
           </a:p>
           <a:p xmlns:a="http://schemas.openxmlformats.org/drawingml/2006/main">
             <a:pPr>
-              <a:buNone/>
               <a:defRPr sz="1725" b="0">
                 <a:solidFill>
                   <a:srgbClr val="243244"/>
@@ -5736,7 +5673,7 @@
           <p:cNvPr id="7" name="">
             <a:extLst xmlns:a="http://schemas.openxmlformats.org/drawingml/2006/main">
               <a:ext uri="{FF2B5EF4-FFF2-40B4-BE49-F238E27FC236}">
-                <a16:creationId xmlns:a16="http://schemas.microsoft.com/office/drawing/2014/main" id="{C4D13319-2433-49BF-9648-2C3C26741F1E}"/>
+                <a16:creationId xmlns:a16="http://schemas.microsoft.com/office/drawing/2014/main" id="{CBB7CF41-0681-4223-BD81-BDA647D61B19}"/>
               </a:ext>
             </a:extLst>
           </p:cNvPr>
@@ -5773,7 +5710,6 @@
               </a:defRPr>
             </a:defPPr>
             <a:lvl1pPr>
-              <a:buNone/>
               <a:defRPr sz="1200" b="0">
                 <a:solidFill>
                   <a:srgbClr val="596678"/>
@@ -5784,7 +5720,6 @@
               </a:defRPr>
             </a:lvl1pPr>
             <a:lvl2pPr>
-              <a:buNone/>
               <a:defRPr sz="1200" b="0">
                 <a:solidFill>
                   <a:srgbClr val="596678"/>
@@ -5795,7 +5730,6 @@
               </a:defRPr>
             </a:lvl2pPr>
             <a:lvl3pPr>
-              <a:buNone/>
               <a:defRPr sz="1200" b="0">
                 <a:solidFill>
                   <a:srgbClr val="596678"/>
@@ -5806,7 +5740,6 @@
               </a:defRPr>
             </a:lvl3pPr>
             <a:lvl4pPr>
-              <a:buNone/>
               <a:defRPr sz="1200" b="0">
                 <a:solidFill>
                   <a:srgbClr val="596678"/>
@@ -5817,7 +5750,6 @@
               </a:defRPr>
             </a:lvl4pPr>
             <a:lvl5pPr>
-              <a:buNone/>
               <a:defRPr sz="1200" b="0">
                 <a:solidFill>
                   <a:srgbClr val="596678"/>
@@ -5828,7 +5760,6 @@
               </a:defRPr>
             </a:lvl5pPr>
             <a:lvl6pPr>
-              <a:buNone/>
               <a:defRPr sz="1200" b="0">
                 <a:solidFill>
                   <a:srgbClr val="596678"/>
@@ -5839,7 +5770,6 @@
               </a:defRPr>
             </a:lvl6pPr>
             <a:lvl7pPr>
-              <a:buNone/>
               <a:defRPr sz="1200" b="0">
                 <a:solidFill>
                   <a:srgbClr val="596678"/>
@@ -5850,7 +5780,6 @@
               </a:defRPr>
             </a:lvl7pPr>
             <a:lvl8pPr>
-              <a:buNone/>
               <a:defRPr sz="1200" b="0">
                 <a:solidFill>
                   <a:srgbClr val="596678"/>
@@ -5861,7 +5790,6 @@
               </a:defRPr>
             </a:lvl8pPr>
             <a:lvl9pPr>
-              <a:buNone/>
               <a:defRPr sz="1200" b="0">
                 <a:solidFill>
                   <a:srgbClr val="596678"/>
@@ -5874,7 +5802,6 @@
           </a:lstStyle>
           <a:p xmlns:a="http://schemas.openxmlformats.org/drawingml/2006/main">
             <a:pPr>
-              <a:buNone/>
               <a:defRPr sz="1200" b="0">
                 <a:solidFill>
                   <a:srgbClr val="596678"/>
@@ -5901,7 +5828,7 @@
     </p:spTree>
     <p:extLst>
       <p:ext uri="{BB962C8B-B14F-4D97-AF65-F5344CB8AC3E}">
-        <p14:creationId xmlns:p14="http://schemas.microsoft.com/office/powerpoint/2010/main" val="1968914889"/>
+        <p14:creationId xmlns:p14="http://schemas.microsoft.com/office/powerpoint/2010/main" val="1658412144"/>
       </p:ext>
     </p:extLst>
   </p:cSld>
@@ -5932,7 +5859,7 @@
           <p:cNvPr id="12" name="">
             <a:extLst xmlns:a="http://schemas.openxmlformats.org/drawingml/2006/main">
               <a:ext uri="{FF2B5EF4-FFF2-40B4-BE49-F238E27FC236}">
-                <a16:creationId xmlns:a16="http://schemas.microsoft.com/office/drawing/2014/main" id="{9463E2F6-300B-4A70-9509-2C5B2AD54063}"/>
+                <a16:creationId xmlns:a16="http://schemas.microsoft.com/office/drawing/2014/main" id="{38EAD472-9E5F-4D09-9E5B-E323D9AF238D}"/>
               </a:ext>
             </a:extLst>
           </p:cNvPr>
@@ -5969,7 +5896,6 @@
               </a:defRPr>
             </a:defPPr>
             <a:lvl1pPr>
-              <a:buNone/>
               <a:defRPr sz="900" b="1">
                 <a:solidFill>
                   <a:srgbClr val="802D42"/>
@@ -5980,7 +5906,6 @@
               </a:defRPr>
             </a:lvl1pPr>
             <a:lvl2pPr>
-              <a:buNone/>
               <a:defRPr sz="900" b="1">
                 <a:solidFill>
                   <a:srgbClr val="802D42"/>
@@ -5991,7 +5916,6 @@
               </a:defRPr>
             </a:lvl2pPr>
             <a:lvl3pPr>
-              <a:buNone/>
               <a:defRPr sz="900" b="1">
                 <a:solidFill>
                   <a:srgbClr val="802D42"/>
@@ -6002,7 +5926,6 @@
               </a:defRPr>
             </a:lvl3pPr>
             <a:lvl4pPr>
-              <a:buNone/>
               <a:defRPr sz="900" b="1">
                 <a:solidFill>
                   <a:srgbClr val="802D42"/>
@@ -6013,7 +5936,6 @@
               </a:defRPr>
             </a:lvl4pPr>
             <a:lvl5pPr>
-              <a:buNone/>
               <a:defRPr sz="900" b="1">
                 <a:solidFill>
                   <a:srgbClr val="802D42"/>
@@ -6024,7 +5946,6 @@
               </a:defRPr>
             </a:lvl5pPr>
             <a:lvl6pPr>
-              <a:buNone/>
               <a:defRPr sz="900" b="1">
                 <a:solidFill>
                   <a:srgbClr val="802D42"/>
@@ -6035,7 +5956,6 @@
               </a:defRPr>
             </a:lvl6pPr>
             <a:lvl7pPr>
-              <a:buNone/>
               <a:defRPr sz="900" b="1">
                 <a:solidFill>
                   <a:srgbClr val="802D42"/>
@@ -6046,7 +5966,6 @@
               </a:defRPr>
             </a:lvl7pPr>
             <a:lvl8pPr>
-              <a:buNone/>
               <a:defRPr sz="900" b="1">
                 <a:solidFill>
                   <a:srgbClr val="802D42"/>
@@ -6057,7 +5976,6 @@
               </a:defRPr>
             </a:lvl8pPr>
             <a:lvl9pPr>
-              <a:buNone/>
               <a:defRPr sz="900" b="1">
                 <a:solidFill>
                   <a:srgbClr val="802D42"/>
@@ -6070,7 +5988,6 @@
           </a:lstStyle>
           <a:p xmlns:a="http://schemas.openxmlformats.org/drawingml/2006/main">
             <a:pPr>
-              <a:buNone/>
               <a:defRPr sz="900" b="1">
                 <a:solidFill>
                   <a:srgbClr val="802D42"/>
@@ -6099,7 +6016,7 @@
           <p:cNvPr id="2" name="">
             <a:extLst xmlns:a="http://schemas.openxmlformats.org/drawingml/2006/main">
               <a:ext uri="{FF2B5EF4-FFF2-40B4-BE49-F238E27FC236}">
-                <a16:creationId xmlns:a16="http://schemas.microsoft.com/office/drawing/2014/main" id="{89615B54-B2A8-4B74-8F55-8E5D65B608C6}"/>
+                <a16:creationId xmlns:a16="http://schemas.microsoft.com/office/drawing/2014/main" id="{96DAC909-916E-4327-AD82-8A6864E4C471}"/>
               </a:ext>
             </a:extLst>
           </p:cNvPr>
@@ -6136,7 +6053,6 @@
               </a:defRPr>
             </a:defPPr>
             <a:lvl1pPr>
-              <a:buNone/>
               <a:defRPr sz="2400" b="1">
                 <a:solidFill>
                   <a:srgbClr val="243244"/>
@@ -6147,7 +6063,6 @@
               </a:defRPr>
             </a:lvl1pPr>
             <a:lvl2pPr>
-              <a:buNone/>
               <a:defRPr sz="2400" b="1">
                 <a:solidFill>
                   <a:srgbClr val="243244"/>
@@ -6158,7 +6073,6 @@
               </a:defRPr>
             </a:lvl2pPr>
             <a:lvl3pPr>
-              <a:buNone/>
               <a:defRPr sz="2400" b="1">
                 <a:solidFill>
                   <a:srgbClr val="243244"/>
@@ -6169,7 +6083,6 @@
               </a:defRPr>
             </a:lvl3pPr>
             <a:lvl4pPr>
-              <a:buNone/>
               <a:defRPr sz="2400" b="1">
                 <a:solidFill>
                   <a:srgbClr val="243244"/>
@@ -6180,7 +6093,6 @@
               </a:defRPr>
             </a:lvl4pPr>
             <a:lvl5pPr>
-              <a:buNone/>
               <a:defRPr sz="2400" b="1">
                 <a:solidFill>
                   <a:srgbClr val="243244"/>
@@ -6191,7 +6103,6 @@
               </a:defRPr>
             </a:lvl5pPr>
             <a:lvl6pPr>
-              <a:buNone/>
               <a:defRPr sz="2400" b="1">
                 <a:solidFill>
                   <a:srgbClr val="243244"/>
@@ -6202,7 +6113,6 @@
               </a:defRPr>
             </a:lvl6pPr>
             <a:lvl7pPr>
-              <a:buNone/>
               <a:defRPr sz="2400" b="1">
                 <a:solidFill>
                   <a:srgbClr val="243244"/>
@@ -6213,7 +6123,6 @@
               </a:defRPr>
             </a:lvl7pPr>
             <a:lvl8pPr>
-              <a:buNone/>
               <a:defRPr sz="2400" b="1">
                 <a:solidFill>
                   <a:srgbClr val="243244"/>
@@ -6224,7 +6133,6 @@
               </a:defRPr>
             </a:lvl8pPr>
             <a:lvl9pPr>
-              <a:buNone/>
               <a:defRPr sz="2400" b="1">
                 <a:solidFill>
                   <a:srgbClr val="243244"/>
@@ -6237,7 +6145,6 @@
           </a:lstStyle>
           <a:p xmlns:a="http://schemas.openxmlformats.org/drawingml/2006/main">
             <a:pPr>
-              <a:buNone/>
               <a:defRPr sz="2400" b="1">
                 <a:solidFill>
                   <a:srgbClr val="243244"/>
@@ -6266,7 +6173,7 @@
           <p:cNvPr id="3" name="">
             <a:extLst xmlns:a="http://schemas.openxmlformats.org/drawingml/2006/main">
               <a:ext uri="{FF2B5EF4-FFF2-40B4-BE49-F238E27FC236}">
-                <a16:creationId xmlns:a16="http://schemas.microsoft.com/office/drawing/2014/main" id="{46272A6D-F420-4FF5-B6AF-676849EFE9E9}"/>
+                <a16:creationId xmlns:a16="http://schemas.microsoft.com/office/drawing/2014/main" id="{78294E09-81BB-4048-B2FD-AAFEC5E9F4CE}"/>
               </a:ext>
             </a:extLst>
           </p:cNvPr>
@@ -6303,7 +6210,6 @@
               </a:defRPr>
             </a:defPPr>
             <a:lvl1pPr>
-              <a:buNone/>
               <a:defRPr sz="1275" b="0">
                 <a:solidFill>
                   <a:srgbClr val="596678"/>
@@ -6314,7 +6220,6 @@
               </a:defRPr>
             </a:lvl1pPr>
             <a:lvl2pPr>
-              <a:buNone/>
               <a:defRPr sz="1275" b="0">
                 <a:solidFill>
                   <a:srgbClr val="596678"/>
@@ -6325,7 +6230,6 @@
               </a:defRPr>
             </a:lvl2pPr>
             <a:lvl3pPr>
-              <a:buNone/>
               <a:defRPr sz="1275" b="0">
                 <a:solidFill>
                   <a:srgbClr val="596678"/>
@@ -6336,7 +6240,6 @@
               </a:defRPr>
             </a:lvl3pPr>
             <a:lvl4pPr>
-              <a:buNone/>
               <a:defRPr sz="1275" b="0">
                 <a:solidFill>
                   <a:srgbClr val="596678"/>
@@ -6347,7 +6250,6 @@
               </a:defRPr>
             </a:lvl4pPr>
             <a:lvl5pPr>
-              <a:buNone/>
               <a:defRPr sz="1275" b="0">
                 <a:solidFill>
                   <a:srgbClr val="596678"/>
@@ -6358,7 +6260,6 @@
               </a:defRPr>
             </a:lvl5pPr>
             <a:lvl6pPr>
-              <a:buNone/>
               <a:defRPr sz="1275" b="0">
                 <a:solidFill>
                   <a:srgbClr val="596678"/>
@@ -6369,7 +6270,6 @@
               </a:defRPr>
             </a:lvl6pPr>
             <a:lvl7pPr>
-              <a:buNone/>
               <a:defRPr sz="1275" b="0">
                 <a:solidFill>
                   <a:srgbClr val="596678"/>
@@ -6380,7 +6280,6 @@
               </a:defRPr>
             </a:lvl7pPr>
             <a:lvl8pPr>
-              <a:buNone/>
               <a:defRPr sz="1275" b="0">
                 <a:solidFill>
                   <a:srgbClr val="596678"/>
@@ -6391,7 +6290,6 @@
               </a:defRPr>
             </a:lvl8pPr>
             <a:lvl9pPr>
-              <a:buNone/>
               <a:defRPr sz="1275" b="0">
                 <a:solidFill>
                   <a:srgbClr val="596678"/>
@@ -6404,7 +6302,6 @@
           </a:lstStyle>
           <a:p xmlns:a="http://schemas.openxmlformats.org/drawingml/2006/main">
             <a:pPr>
-              <a:buNone/>
               <a:defRPr sz="1275" b="0">
                 <a:solidFill>
                   <a:srgbClr val="596678"/>
@@ -6433,7 +6330,7 @@
           <p:cNvPr id="4" name="">
             <a:extLst xmlns:a="http://schemas.openxmlformats.org/drawingml/2006/main">
               <a:ext uri="{FF2B5EF4-FFF2-40B4-BE49-F238E27FC236}">
-                <a16:creationId xmlns:a16="http://schemas.microsoft.com/office/drawing/2014/main" id="{4A801FDF-8F50-43EA-9D58-D38D29A5A2C7}"/>
+                <a16:creationId xmlns:a16="http://schemas.microsoft.com/office/drawing/2014/main" id="{36E8E17F-85F9-43DC-9945-2EF1B5CB649D}"/>
               </a:ext>
             </a:extLst>
           </p:cNvPr>
@@ -6470,7 +6367,6 @@
               </a:defRPr>
             </a:defPPr>
             <a:lvl1pPr>
-              <a:buNone/>
               <a:defRPr sz="825" b="0">
                 <a:solidFill>
                   <a:srgbClr val="596678"/>
@@ -6481,7 +6377,6 @@
               </a:defRPr>
             </a:lvl1pPr>
             <a:lvl2pPr>
-              <a:buNone/>
               <a:defRPr sz="825" b="0">
                 <a:solidFill>
                   <a:srgbClr val="596678"/>
@@ -6492,7 +6387,6 @@
               </a:defRPr>
             </a:lvl2pPr>
             <a:lvl3pPr>
-              <a:buNone/>
               <a:defRPr sz="825" b="0">
                 <a:solidFill>
                   <a:srgbClr val="596678"/>
@@ -6503,7 +6397,6 @@
               </a:defRPr>
             </a:lvl3pPr>
             <a:lvl4pPr>
-              <a:buNone/>
               <a:defRPr sz="825" b="0">
                 <a:solidFill>
                   <a:srgbClr val="596678"/>
@@ -6514,7 +6407,6 @@
               </a:defRPr>
             </a:lvl4pPr>
             <a:lvl5pPr>
-              <a:buNone/>
               <a:defRPr sz="825" b="0">
                 <a:solidFill>
                   <a:srgbClr val="596678"/>
@@ -6525,7 +6417,6 @@
               </a:defRPr>
             </a:lvl5pPr>
             <a:lvl6pPr>
-              <a:buNone/>
               <a:defRPr sz="825" b="0">
                 <a:solidFill>
                   <a:srgbClr val="596678"/>
@@ -6536,7 +6427,6 @@
               </a:defRPr>
             </a:lvl6pPr>
             <a:lvl7pPr>
-              <a:buNone/>
               <a:defRPr sz="825" b="0">
                 <a:solidFill>
                   <a:srgbClr val="596678"/>
@@ -6547,7 +6437,6 @@
               </a:defRPr>
             </a:lvl7pPr>
             <a:lvl8pPr>
-              <a:buNone/>
               <a:defRPr sz="825" b="0">
                 <a:solidFill>
                   <a:srgbClr val="596678"/>
@@ -6558,7 +6447,6 @@
               </a:defRPr>
             </a:lvl8pPr>
             <a:lvl9pPr>
-              <a:buNone/>
               <a:defRPr sz="825" b="0">
                 <a:solidFill>
                   <a:srgbClr val="596678"/>
@@ -6571,7 +6459,6 @@
           </a:lstStyle>
           <a:p xmlns:a="http://schemas.openxmlformats.org/drawingml/2006/main">
             <a:pPr>
-              <a:buNone/>
               <a:defRPr sz="825" b="0">
                 <a:solidFill>
                   <a:srgbClr val="596678"/>
@@ -6600,7 +6487,7 @@
           <p:cNvPr id="5" name="">
             <a:extLst xmlns:a="http://schemas.openxmlformats.org/drawingml/2006/main">
               <a:ext uri="{FF2B5EF4-FFF2-40B4-BE49-F238E27FC236}">
-                <a16:creationId xmlns:a16="http://schemas.microsoft.com/office/drawing/2014/main" id="{F27FFED1-0C99-49D2-8A27-DCEB33802DF4}"/>
+                <a16:creationId xmlns:a16="http://schemas.microsoft.com/office/drawing/2014/main" id="{0581E15C-EE78-4E7B-A672-50D2C9D8D68F}"/>
               </a:ext>
             </a:extLst>
           </p:cNvPr>
@@ -6637,7 +6524,6 @@
               </a:defRPr>
             </a:defPPr>
             <a:lvl1pPr>
-              <a:buNone/>
               <a:defRPr sz="825" b="1">
                 <a:solidFill>
                   <a:srgbClr val="802D42"/>
@@ -6648,7 +6534,6 @@
               </a:defRPr>
             </a:lvl1pPr>
             <a:lvl2pPr>
-              <a:buNone/>
               <a:defRPr sz="825" b="1">
                 <a:solidFill>
                   <a:srgbClr val="802D42"/>
@@ -6659,7 +6544,6 @@
               </a:defRPr>
             </a:lvl2pPr>
             <a:lvl3pPr>
-              <a:buNone/>
               <a:defRPr sz="825" b="1">
                 <a:solidFill>
                   <a:srgbClr val="802D42"/>
@@ -6670,7 +6554,6 @@
               </a:defRPr>
             </a:lvl3pPr>
             <a:lvl4pPr>
-              <a:buNone/>
               <a:defRPr sz="825" b="1">
                 <a:solidFill>
                   <a:srgbClr val="802D42"/>
@@ -6681,7 +6564,6 @@
               </a:defRPr>
             </a:lvl4pPr>
             <a:lvl5pPr>
-              <a:buNone/>
               <a:defRPr sz="825" b="1">
                 <a:solidFill>
                   <a:srgbClr val="802D42"/>
@@ -6692,7 +6574,6 @@
               </a:defRPr>
             </a:lvl5pPr>
             <a:lvl6pPr>
-              <a:buNone/>
               <a:defRPr sz="825" b="1">
                 <a:solidFill>
                   <a:srgbClr val="802D42"/>
@@ -6703,7 +6584,6 @@
               </a:defRPr>
             </a:lvl6pPr>
             <a:lvl7pPr>
-              <a:buNone/>
               <a:defRPr sz="825" b="1">
                 <a:solidFill>
                   <a:srgbClr val="802D42"/>
@@ -6714,7 +6594,6 @@
               </a:defRPr>
             </a:lvl7pPr>
             <a:lvl8pPr>
-              <a:buNone/>
               <a:defRPr sz="825" b="1">
                 <a:solidFill>
                   <a:srgbClr val="802D42"/>
@@ -6725,7 +6604,6 @@
               </a:defRPr>
             </a:lvl8pPr>
             <a:lvl9pPr>
-              <a:buNone/>
               <a:defRPr sz="825" b="1">
                 <a:solidFill>
                   <a:srgbClr val="802D42"/>
@@ -6738,7 +6616,6 @@
           </a:lstStyle>
           <a:p xmlns:a="http://schemas.openxmlformats.org/drawingml/2006/main">
             <a:pPr>
-              <a:buNone/>
               <a:defRPr sz="825" b="1">
                 <a:solidFill>
                   <a:srgbClr val="802D42"/>
@@ -6767,7 +6644,7 @@
           <p:cNvPr id="6" name="">
             <a:extLst xmlns:a="http://schemas.openxmlformats.org/drawingml/2006/main">
               <a:ext uri="{FF2B5EF4-FFF2-40B4-BE49-F238E27FC236}">
-                <a16:creationId xmlns:a16="http://schemas.microsoft.com/office/drawing/2014/main" id="{29A3DFFC-8867-407B-8FA5-574F2E939D0C}"/>
+                <a16:creationId xmlns:a16="http://schemas.microsoft.com/office/drawing/2014/main" id="{9707187F-E195-47DD-B7C5-3E812428FE79}"/>
               </a:ext>
             </a:extLst>
           </p:cNvPr>
@@ -6804,7 +6681,6 @@
               </a:defRPr>
             </a:defPPr>
             <a:lvl1pPr>
-              <a:buNone/>
               <a:defRPr sz="1725" b="1">
                 <a:solidFill>
                   <a:srgbClr val="243244"/>
@@ -6815,7 +6691,6 @@
               </a:defRPr>
             </a:lvl1pPr>
             <a:lvl2pPr>
-              <a:buNone/>
               <a:defRPr sz="1725" b="1">
                 <a:solidFill>
                   <a:srgbClr val="243244"/>
@@ -6826,7 +6701,6 @@
               </a:defRPr>
             </a:lvl2pPr>
             <a:lvl3pPr>
-              <a:buNone/>
               <a:defRPr sz="1725" b="1">
                 <a:solidFill>
                   <a:srgbClr val="243244"/>
@@ -6837,7 +6711,6 @@
               </a:defRPr>
             </a:lvl3pPr>
             <a:lvl4pPr>
-              <a:buNone/>
               <a:defRPr sz="1725" b="1">
                 <a:solidFill>
                   <a:srgbClr val="243244"/>
@@ -6848,7 +6721,6 @@
               </a:defRPr>
             </a:lvl4pPr>
             <a:lvl5pPr>
-              <a:buNone/>
               <a:defRPr sz="1725" b="1">
                 <a:solidFill>
                   <a:srgbClr val="243244"/>
@@ -6859,7 +6731,6 @@
               </a:defRPr>
             </a:lvl5pPr>
             <a:lvl6pPr>
-              <a:buNone/>
               <a:defRPr sz="1725" b="1">
                 <a:solidFill>
                   <a:srgbClr val="243244"/>
@@ -6870,7 +6741,6 @@
               </a:defRPr>
             </a:lvl6pPr>
             <a:lvl7pPr>
-              <a:buNone/>
               <a:defRPr sz="1725" b="1">
                 <a:solidFill>
                   <a:srgbClr val="243244"/>
@@ -6881,7 +6751,6 @@
               </a:defRPr>
             </a:lvl7pPr>
             <a:lvl8pPr>
-              <a:buNone/>
               <a:defRPr sz="1725" b="1">
                 <a:solidFill>
                   <a:srgbClr val="243244"/>
@@ -6892,7 +6761,6 @@
               </a:defRPr>
             </a:lvl8pPr>
             <a:lvl9pPr>
-              <a:buNone/>
               <a:defRPr sz="1725" b="1">
                 <a:solidFill>
                   <a:srgbClr val="243244"/>
@@ -6905,7 +6773,6 @@
           </a:lstStyle>
           <a:p xmlns:a="http://schemas.openxmlformats.org/drawingml/2006/main">
             <a:pPr>
-              <a:buNone/>
               <a:defRPr sz="1725" b="1">
                 <a:solidFill>
                   <a:srgbClr val="243244"/>
@@ -6934,7 +6801,7 @@
           <p:cNvPr id="7" name="">
             <a:extLst xmlns:a="http://schemas.openxmlformats.org/drawingml/2006/main">
               <a:ext uri="{FF2B5EF4-FFF2-40B4-BE49-F238E27FC236}">
-                <a16:creationId xmlns:a16="http://schemas.microsoft.com/office/drawing/2014/main" id="{180666EF-6F7A-403F-8437-2F600853DCED}"/>
+                <a16:creationId xmlns:a16="http://schemas.microsoft.com/office/drawing/2014/main" id="{5F6BFBF3-467A-47C5-9970-DA79ACE84F1E}"/>
               </a:ext>
             </a:extLst>
           </p:cNvPr>
@@ -6971,7 +6838,6 @@
               </a:defRPr>
             </a:defPPr>
             <a:lvl1pPr>
-              <a:buNone/>
               <a:defRPr sz="1275" b="0">
                 <a:solidFill>
                   <a:srgbClr val="596678"/>
@@ -6982,7 +6848,6 @@
               </a:defRPr>
             </a:lvl1pPr>
             <a:lvl2pPr>
-              <a:buNone/>
               <a:defRPr sz="1275" b="0">
                 <a:solidFill>
                   <a:srgbClr val="596678"/>
@@ -6993,7 +6858,6 @@
               </a:defRPr>
             </a:lvl2pPr>
             <a:lvl3pPr>
-              <a:buNone/>
               <a:defRPr sz="1275" b="0">
                 <a:solidFill>
                   <a:srgbClr val="596678"/>
@@ -7004,7 +6868,6 @@
               </a:defRPr>
             </a:lvl3pPr>
             <a:lvl4pPr>
-              <a:buNone/>
               <a:defRPr sz="1275" b="0">
                 <a:solidFill>
                   <a:srgbClr val="596678"/>
@@ -7015,7 +6878,6 @@
               </a:defRPr>
             </a:lvl4pPr>
             <a:lvl5pPr>
-              <a:buNone/>
               <a:defRPr sz="1275" b="0">
                 <a:solidFill>
                   <a:srgbClr val="596678"/>
@@ -7026,7 +6888,6 @@
               </a:defRPr>
             </a:lvl5pPr>
             <a:lvl6pPr>
-              <a:buNone/>
               <a:defRPr sz="1275" b="0">
                 <a:solidFill>
                   <a:srgbClr val="596678"/>
@@ -7037,7 +6898,6 @@
               </a:defRPr>
             </a:lvl6pPr>
             <a:lvl7pPr>
-              <a:buNone/>
               <a:defRPr sz="1275" b="0">
                 <a:solidFill>
                   <a:srgbClr val="596678"/>
@@ -7048,7 +6908,6 @@
               </a:defRPr>
             </a:lvl7pPr>
             <a:lvl8pPr>
-              <a:buNone/>
               <a:defRPr sz="1275" b="0">
                 <a:solidFill>
                   <a:srgbClr val="596678"/>
@@ -7059,7 +6918,6 @@
               </a:defRPr>
             </a:lvl8pPr>
             <a:lvl9pPr>
-              <a:buNone/>
               <a:defRPr sz="1275" b="0">
                 <a:solidFill>
                   <a:srgbClr val="596678"/>
@@ -7072,7 +6930,6 @@
           </a:lstStyle>
           <a:p xmlns:a="http://schemas.openxmlformats.org/drawingml/2006/main">
             <a:pPr>
-              <a:buNone/>
               <a:defRPr sz="1275" b="0">
                 <a:solidFill>
                   <a:srgbClr val="596678"/>
@@ -7101,7 +6958,7 @@
           <p:cNvPr id="8" name="">
             <a:extLst xmlns:a="http://schemas.openxmlformats.org/drawingml/2006/main">
               <a:ext uri="{FF2B5EF4-FFF2-40B4-BE49-F238E27FC236}">
-                <a16:creationId xmlns:a16="http://schemas.microsoft.com/office/drawing/2014/main" id="{E352FFD8-5356-4EA6-81C9-1B6F65CCE6D3}"/>
+                <a16:creationId xmlns:a16="http://schemas.microsoft.com/office/drawing/2014/main" id="{02A21517-3EE0-492C-B837-BB4BA7827212}"/>
               </a:ext>
             </a:extLst>
           </p:cNvPr>
@@ -7138,7 +6995,6 @@
               </a:defRPr>
             </a:defPPr>
             <a:lvl1pPr>
-              <a:buNone/>
               <a:defRPr sz="1725" b="1">
                 <a:solidFill>
                   <a:srgbClr val="243244"/>
@@ -7149,7 +7005,6 @@
               </a:defRPr>
             </a:lvl1pPr>
             <a:lvl2pPr>
-              <a:buNone/>
               <a:defRPr sz="1725" b="1">
                 <a:solidFill>
                   <a:srgbClr val="243244"/>
@@ -7160,7 +7015,6 @@
               </a:defRPr>
             </a:lvl2pPr>
             <a:lvl3pPr>
-              <a:buNone/>
               <a:defRPr sz="1725" b="1">
                 <a:solidFill>
                   <a:srgbClr val="243244"/>
@@ -7171,7 +7025,6 @@
               </a:defRPr>
             </a:lvl3pPr>
             <a:lvl4pPr>
-              <a:buNone/>
               <a:defRPr sz="1725" b="1">
                 <a:solidFill>
                   <a:srgbClr val="243244"/>
@@ -7182,7 +7035,6 @@
               </a:defRPr>
             </a:lvl4pPr>
             <a:lvl5pPr>
-              <a:buNone/>
               <a:defRPr sz="1725" b="1">
                 <a:solidFill>
                   <a:srgbClr val="243244"/>
@@ -7193,7 +7045,6 @@
               </a:defRPr>
             </a:lvl5pPr>
             <a:lvl6pPr>
-              <a:buNone/>
               <a:defRPr sz="1725" b="1">
                 <a:solidFill>
                   <a:srgbClr val="243244"/>
@@ -7204,7 +7055,6 @@
               </a:defRPr>
             </a:lvl6pPr>
             <a:lvl7pPr>
-              <a:buNone/>
               <a:defRPr sz="1725" b="1">
                 <a:solidFill>
                   <a:srgbClr val="243244"/>
@@ -7215,7 +7065,6 @@
               </a:defRPr>
             </a:lvl7pPr>
             <a:lvl8pPr>
-              <a:buNone/>
               <a:defRPr sz="1725" b="1">
                 <a:solidFill>
                   <a:srgbClr val="243244"/>
@@ -7226,7 +7075,6 @@
               </a:defRPr>
             </a:lvl8pPr>
             <a:lvl9pPr>
-              <a:buNone/>
               <a:defRPr sz="1725" b="1">
                 <a:solidFill>
                   <a:srgbClr val="243244"/>
@@ -7239,7 +7087,6 @@
           </a:lstStyle>
           <a:p xmlns:a="http://schemas.openxmlformats.org/drawingml/2006/main">
             <a:pPr>
-              <a:buNone/>
               <a:defRPr sz="1725" b="1">
                 <a:solidFill>
                   <a:srgbClr val="243244"/>
@@ -7268,7 +7115,7 @@
           <p:cNvPr id="9" name="">
             <a:extLst xmlns:a="http://schemas.openxmlformats.org/drawingml/2006/main">
               <a:ext uri="{FF2B5EF4-FFF2-40B4-BE49-F238E27FC236}">
-                <a16:creationId xmlns:a16="http://schemas.microsoft.com/office/drawing/2014/main" id="{6436AFD3-2C63-4820-85D6-CB33A9E4990F}"/>
+                <a16:creationId xmlns:a16="http://schemas.microsoft.com/office/drawing/2014/main" id="{BD58285D-EEEA-4BBB-BD37-C9EA8EA29DFB}"/>
               </a:ext>
             </a:extLst>
           </p:cNvPr>
@@ -7305,7 +7152,6 @@
               </a:defRPr>
             </a:defPPr>
             <a:lvl1pPr>
-              <a:buNone/>
               <a:defRPr sz="1275" b="0">
                 <a:solidFill>
                   <a:srgbClr val="596678"/>
@@ -7316,7 +7162,6 @@
               </a:defRPr>
             </a:lvl1pPr>
             <a:lvl2pPr>
-              <a:buNone/>
               <a:defRPr sz="1275" b="0">
                 <a:solidFill>
                   <a:srgbClr val="596678"/>
@@ -7327,7 +7172,6 @@
               </a:defRPr>
             </a:lvl2pPr>
             <a:lvl3pPr>
-              <a:buNone/>
               <a:defRPr sz="1275" b="0">
                 <a:solidFill>
                   <a:srgbClr val="596678"/>
@@ -7338,7 +7182,6 @@
               </a:defRPr>
             </a:lvl3pPr>
             <a:lvl4pPr>
-              <a:buNone/>
               <a:defRPr sz="1275" b="0">
                 <a:solidFill>
                   <a:srgbClr val="596678"/>
@@ -7349,7 +7192,6 @@
               </a:defRPr>
             </a:lvl4pPr>
             <a:lvl5pPr>
-              <a:buNone/>
               <a:defRPr sz="1275" b="0">
                 <a:solidFill>
                   <a:srgbClr val="596678"/>
@@ -7360,7 +7202,6 @@
               </a:defRPr>
             </a:lvl5pPr>
             <a:lvl6pPr>
-              <a:buNone/>
               <a:defRPr sz="1275" b="0">
                 <a:solidFill>
                   <a:srgbClr val="596678"/>
@@ -7371,7 +7212,6 @@
               </a:defRPr>
             </a:lvl6pPr>
             <a:lvl7pPr>
-              <a:buNone/>
               <a:defRPr sz="1275" b="0">
                 <a:solidFill>
                   <a:srgbClr val="596678"/>
@@ -7382,7 +7222,6 @@
               </a:defRPr>
             </a:lvl7pPr>
             <a:lvl8pPr>
-              <a:buNone/>
               <a:defRPr sz="1275" b="0">
                 <a:solidFill>
                   <a:srgbClr val="596678"/>
@@ -7393,7 +7232,6 @@
               </a:defRPr>
             </a:lvl8pPr>
             <a:lvl9pPr>
-              <a:buNone/>
               <a:defRPr sz="1275" b="0">
                 <a:solidFill>
                   <a:srgbClr val="596678"/>
@@ -7406,7 +7244,6 @@
           </a:lstStyle>
           <a:p xmlns:a="http://schemas.openxmlformats.org/drawingml/2006/main">
             <a:pPr>
-              <a:buNone/>
               <a:defRPr sz="1275" b="0">
                 <a:solidFill>
                   <a:srgbClr val="596678"/>
@@ -7435,7 +7272,7 @@
           <p:cNvPr id="10" name="">
             <a:extLst xmlns:a="http://schemas.openxmlformats.org/drawingml/2006/main">
               <a:ext uri="{FF2B5EF4-FFF2-40B4-BE49-F238E27FC236}">
-                <a16:creationId xmlns:a16="http://schemas.microsoft.com/office/drawing/2014/main" id="{08864BAB-CEA8-4EE6-9255-1979FCE30E11}"/>
+                <a16:creationId xmlns:a16="http://schemas.microsoft.com/office/drawing/2014/main" id="{4E8EBB8F-CB61-49E7-B95C-C72AD5209035}"/>
               </a:ext>
             </a:extLst>
           </p:cNvPr>
@@ -7472,7 +7309,6 @@
               </a:defRPr>
             </a:defPPr>
             <a:lvl1pPr>
-              <a:buNone/>
               <a:defRPr sz="1725" b="1">
                 <a:solidFill>
                   <a:srgbClr val="243244"/>
@@ -7483,7 +7319,6 @@
               </a:defRPr>
             </a:lvl1pPr>
             <a:lvl2pPr>
-              <a:buNone/>
               <a:defRPr sz="1725" b="1">
                 <a:solidFill>
                   <a:srgbClr val="243244"/>
@@ -7494,7 +7329,6 @@
               </a:defRPr>
             </a:lvl2pPr>
             <a:lvl3pPr>
-              <a:buNone/>
               <a:defRPr sz="1725" b="1">
                 <a:solidFill>
                   <a:srgbClr val="243244"/>
@@ -7505,7 +7339,6 @@
               </a:defRPr>
             </a:lvl3pPr>
             <a:lvl4pPr>
-              <a:buNone/>
               <a:defRPr sz="1725" b="1">
                 <a:solidFill>
                   <a:srgbClr val="243244"/>
@@ -7516,7 +7349,6 @@
               </a:defRPr>
             </a:lvl4pPr>
             <a:lvl5pPr>
-              <a:buNone/>
               <a:defRPr sz="1725" b="1">
                 <a:solidFill>
                   <a:srgbClr val="243244"/>
@@ -7527,7 +7359,6 @@
               </a:defRPr>
             </a:lvl5pPr>
             <a:lvl6pPr>
-              <a:buNone/>
               <a:defRPr sz="1725" b="1">
                 <a:solidFill>
                   <a:srgbClr val="243244"/>
@@ -7538,7 +7369,6 @@
               </a:defRPr>
             </a:lvl6pPr>
             <a:lvl7pPr>
-              <a:buNone/>
               <a:defRPr sz="1725" b="1">
                 <a:solidFill>
                   <a:srgbClr val="243244"/>
@@ -7549,7 +7379,6 @@
               </a:defRPr>
             </a:lvl7pPr>
             <a:lvl8pPr>
-              <a:buNone/>
               <a:defRPr sz="1725" b="1">
                 <a:solidFill>
                   <a:srgbClr val="243244"/>
@@ -7560,7 +7389,6 @@
               </a:defRPr>
             </a:lvl8pPr>
             <a:lvl9pPr>
-              <a:buNone/>
               <a:defRPr sz="1725" b="1">
                 <a:solidFill>
                   <a:srgbClr val="243244"/>
@@ -7573,7 +7401,6 @@
           </a:lstStyle>
           <a:p xmlns:a="http://schemas.openxmlformats.org/drawingml/2006/main">
             <a:pPr>
-              <a:buNone/>
               <a:defRPr sz="1725" b="1">
                 <a:solidFill>
                   <a:srgbClr val="243244"/>
@@ -7602,7 +7429,7 @@
           <p:cNvPr id="11" name="">
             <a:extLst xmlns:a="http://schemas.openxmlformats.org/drawingml/2006/main">
               <a:ext uri="{FF2B5EF4-FFF2-40B4-BE49-F238E27FC236}">
-                <a16:creationId xmlns:a16="http://schemas.microsoft.com/office/drawing/2014/main" id="{5CFC0352-A562-4ED2-8E05-DDEFB3E223AE}"/>
+                <a16:creationId xmlns:a16="http://schemas.microsoft.com/office/drawing/2014/main" id="{732C61AE-1DF7-405C-BFAC-BE4CB50B3CFD}"/>
               </a:ext>
             </a:extLst>
           </p:cNvPr>
@@ -7639,7 +7466,6 @@
               </a:defRPr>
             </a:defPPr>
             <a:lvl1pPr>
-              <a:buNone/>
               <a:defRPr sz="1275" b="0">
                 <a:solidFill>
                   <a:srgbClr val="596678"/>
@@ -7650,7 +7476,6 @@
               </a:defRPr>
             </a:lvl1pPr>
             <a:lvl2pPr>
-              <a:buNone/>
               <a:defRPr sz="1275" b="0">
                 <a:solidFill>
                   <a:srgbClr val="596678"/>
@@ -7661,7 +7486,6 @@
               </a:defRPr>
             </a:lvl2pPr>
             <a:lvl3pPr>
-              <a:buNone/>
               <a:defRPr sz="1275" b="0">
                 <a:solidFill>
                   <a:srgbClr val="596678"/>
@@ -7672,7 +7496,6 @@
               </a:defRPr>
             </a:lvl3pPr>
             <a:lvl4pPr>
-              <a:buNone/>
               <a:defRPr sz="1275" b="0">
                 <a:solidFill>
                   <a:srgbClr val="596678"/>
@@ -7683,7 +7506,6 @@
               </a:defRPr>
             </a:lvl4pPr>
             <a:lvl5pPr>
-              <a:buNone/>
               <a:defRPr sz="1275" b="0">
                 <a:solidFill>
                   <a:srgbClr val="596678"/>
@@ -7694,7 +7516,6 @@
               </a:defRPr>
             </a:lvl5pPr>
             <a:lvl6pPr>
-              <a:buNone/>
               <a:defRPr sz="1275" b="0">
                 <a:solidFill>
                   <a:srgbClr val="596678"/>
@@ -7705,7 +7526,6 @@
               </a:defRPr>
             </a:lvl6pPr>
             <a:lvl7pPr>
-              <a:buNone/>
               <a:defRPr sz="1275" b="0">
                 <a:solidFill>
                   <a:srgbClr val="596678"/>
@@ -7716,7 +7536,6 @@
               </a:defRPr>
             </a:lvl7pPr>
             <a:lvl8pPr>
-              <a:buNone/>
               <a:defRPr sz="1275" b="0">
                 <a:solidFill>
                   <a:srgbClr val="596678"/>
@@ -7727,7 +7546,6 @@
               </a:defRPr>
             </a:lvl8pPr>
             <a:lvl9pPr>
-              <a:buNone/>
               <a:defRPr sz="1275" b="0">
                 <a:solidFill>
                   <a:srgbClr val="596678"/>
@@ -7740,7 +7558,6 @@
           </a:lstStyle>
           <a:p xmlns:a="http://schemas.openxmlformats.org/drawingml/2006/main">
             <a:pPr>
-              <a:buNone/>
               <a:defRPr sz="1275" b="0">
                 <a:solidFill>
                   <a:srgbClr val="596678"/>
@@ -7767,7 +7584,7 @@
     </p:spTree>
     <p:extLst>
       <p:ext uri="{BB962C8B-B14F-4D97-AF65-F5344CB8AC3E}">
-        <p14:creationId xmlns:p14="http://schemas.microsoft.com/office/powerpoint/2010/main" val="2105918364"/>
+        <p14:creationId xmlns:p14="http://schemas.microsoft.com/office/powerpoint/2010/main" val="598367774"/>
       </p:ext>
     </p:extLst>
   </p:cSld>
@@ -7798,7 +7615,7 @@
           <p:cNvPr id="12" name="">
             <a:extLst xmlns:a="http://schemas.openxmlformats.org/drawingml/2006/main">
               <a:ext uri="{FF2B5EF4-FFF2-40B4-BE49-F238E27FC236}">
-                <a16:creationId xmlns:a16="http://schemas.microsoft.com/office/drawing/2014/main" id="{DFCC7ACB-C206-4DC5-B93A-7F9640831AF5}"/>
+                <a16:creationId xmlns:a16="http://schemas.microsoft.com/office/drawing/2014/main" id="{6C075B76-217E-403E-B3E5-209563ADAB31}"/>
               </a:ext>
             </a:extLst>
           </p:cNvPr>
@@ -7835,7 +7652,6 @@
               </a:defRPr>
             </a:defPPr>
             <a:lvl1pPr>
-              <a:buNone/>
               <a:defRPr sz="900" b="1">
                 <a:solidFill>
                   <a:srgbClr val="802D42"/>
@@ -7846,7 +7662,6 @@
               </a:defRPr>
             </a:lvl1pPr>
             <a:lvl2pPr>
-              <a:buNone/>
               <a:defRPr sz="900" b="1">
                 <a:solidFill>
                   <a:srgbClr val="802D42"/>
@@ -7857,7 +7672,6 @@
               </a:defRPr>
             </a:lvl2pPr>
             <a:lvl3pPr>
-              <a:buNone/>
               <a:defRPr sz="900" b="1">
                 <a:solidFill>
                   <a:srgbClr val="802D42"/>
@@ -7868,7 +7682,6 @@
               </a:defRPr>
             </a:lvl3pPr>
             <a:lvl4pPr>
-              <a:buNone/>
               <a:defRPr sz="900" b="1">
                 <a:solidFill>
                   <a:srgbClr val="802D42"/>
@@ -7879,7 +7692,6 @@
               </a:defRPr>
             </a:lvl4pPr>
             <a:lvl5pPr>
-              <a:buNone/>
               <a:defRPr sz="900" b="1">
                 <a:solidFill>
                   <a:srgbClr val="802D42"/>
@@ -7890,7 +7702,6 @@
               </a:defRPr>
             </a:lvl5pPr>
             <a:lvl6pPr>
-              <a:buNone/>
               <a:defRPr sz="900" b="1">
                 <a:solidFill>
                   <a:srgbClr val="802D42"/>
@@ -7901,7 +7712,6 @@
               </a:defRPr>
             </a:lvl6pPr>
             <a:lvl7pPr>
-              <a:buNone/>
               <a:defRPr sz="900" b="1">
                 <a:solidFill>
                   <a:srgbClr val="802D42"/>
@@ -7912,7 +7722,6 @@
               </a:defRPr>
             </a:lvl7pPr>
             <a:lvl8pPr>
-              <a:buNone/>
               <a:defRPr sz="900" b="1">
                 <a:solidFill>
                   <a:srgbClr val="802D42"/>
@@ -7923,7 +7732,6 @@
               </a:defRPr>
             </a:lvl8pPr>
             <a:lvl9pPr>
-              <a:buNone/>
               <a:defRPr sz="900" b="1">
                 <a:solidFill>
                   <a:srgbClr val="802D42"/>
@@ -7936,7 +7744,6 @@
           </a:lstStyle>
           <a:p xmlns:a="http://schemas.openxmlformats.org/drawingml/2006/main">
             <a:pPr>
-              <a:buNone/>
               <a:defRPr sz="900" b="1">
                 <a:solidFill>
                   <a:srgbClr val="802D42"/>
@@ -7965,7 +7772,7 @@
           <p:cNvPr id="2" name="">
             <a:extLst xmlns:a="http://schemas.openxmlformats.org/drawingml/2006/main">
               <a:ext uri="{FF2B5EF4-FFF2-40B4-BE49-F238E27FC236}">
-                <a16:creationId xmlns:a16="http://schemas.microsoft.com/office/drawing/2014/main" id="{A0EF2E0C-D518-4218-9672-60586518E7A9}"/>
+                <a16:creationId xmlns:a16="http://schemas.microsoft.com/office/drawing/2014/main" id="{CF88C0CF-4163-4EFB-B147-11728BA134D2}"/>
               </a:ext>
             </a:extLst>
           </p:cNvPr>
@@ -8002,7 +7809,6 @@
               </a:defRPr>
             </a:defPPr>
             <a:lvl1pPr>
-              <a:buNone/>
               <a:defRPr sz="2400" b="1">
                 <a:solidFill>
                   <a:srgbClr val="243244"/>
@@ -8013,7 +7819,6 @@
               </a:defRPr>
             </a:lvl1pPr>
             <a:lvl2pPr>
-              <a:buNone/>
               <a:defRPr sz="2400" b="1">
                 <a:solidFill>
                   <a:srgbClr val="243244"/>
@@ -8024,7 +7829,6 @@
               </a:defRPr>
             </a:lvl2pPr>
             <a:lvl3pPr>
-              <a:buNone/>
               <a:defRPr sz="2400" b="1">
                 <a:solidFill>
                   <a:srgbClr val="243244"/>
@@ -8035,7 +7839,6 @@
               </a:defRPr>
             </a:lvl3pPr>
             <a:lvl4pPr>
-              <a:buNone/>
               <a:defRPr sz="2400" b="1">
                 <a:solidFill>
                   <a:srgbClr val="243244"/>
@@ -8046,7 +7849,6 @@
               </a:defRPr>
             </a:lvl4pPr>
             <a:lvl5pPr>
-              <a:buNone/>
               <a:defRPr sz="2400" b="1">
                 <a:solidFill>
                   <a:srgbClr val="243244"/>
@@ -8057,7 +7859,6 @@
               </a:defRPr>
             </a:lvl5pPr>
             <a:lvl6pPr>
-              <a:buNone/>
               <a:defRPr sz="2400" b="1">
                 <a:solidFill>
                   <a:srgbClr val="243244"/>
@@ -8068,7 +7869,6 @@
               </a:defRPr>
             </a:lvl6pPr>
             <a:lvl7pPr>
-              <a:buNone/>
               <a:defRPr sz="2400" b="1">
                 <a:solidFill>
                   <a:srgbClr val="243244"/>
@@ -8079,7 +7879,6 @@
               </a:defRPr>
             </a:lvl7pPr>
             <a:lvl8pPr>
-              <a:buNone/>
               <a:defRPr sz="2400" b="1">
                 <a:solidFill>
                   <a:srgbClr val="243244"/>
@@ -8090,7 +7889,6 @@
               </a:defRPr>
             </a:lvl8pPr>
             <a:lvl9pPr>
-              <a:buNone/>
               <a:defRPr sz="2400" b="1">
                 <a:solidFill>
                   <a:srgbClr val="243244"/>
@@ -8103,7 +7901,6 @@
           </a:lstStyle>
           <a:p xmlns:a="http://schemas.openxmlformats.org/drawingml/2006/main">
             <a:pPr>
-              <a:buNone/>
               <a:defRPr sz="2400" b="1">
                 <a:solidFill>
                   <a:srgbClr val="243244"/>
@@ -8132,7 +7929,7 @@
           <p:cNvPr id="3" name="">
             <a:extLst xmlns:a="http://schemas.openxmlformats.org/drawingml/2006/main">
               <a:ext uri="{FF2B5EF4-FFF2-40B4-BE49-F238E27FC236}">
-                <a16:creationId xmlns:a16="http://schemas.microsoft.com/office/drawing/2014/main" id="{AEB43D1C-AF09-41D1-BF13-0AD3386A5837}"/>
+                <a16:creationId xmlns:a16="http://schemas.microsoft.com/office/drawing/2014/main" id="{B1001DF8-6AC1-4E1A-AC9A-D494F695FCBA}"/>
               </a:ext>
             </a:extLst>
           </p:cNvPr>
@@ -8169,7 +7966,6 @@
               </a:defRPr>
             </a:defPPr>
             <a:lvl1pPr>
-              <a:buNone/>
               <a:defRPr sz="1275" b="0">
                 <a:solidFill>
                   <a:srgbClr val="596678"/>
@@ -8180,7 +7976,6 @@
               </a:defRPr>
             </a:lvl1pPr>
             <a:lvl2pPr>
-              <a:buNone/>
               <a:defRPr sz="1275" b="0">
                 <a:solidFill>
                   <a:srgbClr val="596678"/>
@@ -8191,7 +7986,6 @@
               </a:defRPr>
             </a:lvl2pPr>
             <a:lvl3pPr>
-              <a:buNone/>
               <a:defRPr sz="1275" b="0">
                 <a:solidFill>
                   <a:srgbClr val="596678"/>
@@ -8202,7 +7996,6 @@
               </a:defRPr>
             </a:lvl3pPr>
             <a:lvl4pPr>
-              <a:buNone/>
               <a:defRPr sz="1275" b="0">
                 <a:solidFill>
                   <a:srgbClr val="596678"/>
@@ -8213,7 +8006,6 @@
               </a:defRPr>
             </a:lvl4pPr>
             <a:lvl5pPr>
-              <a:buNone/>
               <a:defRPr sz="1275" b="0">
                 <a:solidFill>
                   <a:srgbClr val="596678"/>
@@ -8224,7 +8016,6 @@
               </a:defRPr>
             </a:lvl5pPr>
             <a:lvl6pPr>
-              <a:buNone/>
               <a:defRPr sz="1275" b="0">
                 <a:solidFill>
                   <a:srgbClr val="596678"/>
@@ -8235,7 +8026,6 @@
               </a:defRPr>
             </a:lvl6pPr>
             <a:lvl7pPr>
-              <a:buNone/>
               <a:defRPr sz="1275" b="0">
                 <a:solidFill>
                   <a:srgbClr val="596678"/>
@@ -8246,7 +8036,6 @@
               </a:defRPr>
             </a:lvl7pPr>
             <a:lvl8pPr>
-              <a:buNone/>
               <a:defRPr sz="1275" b="0">
                 <a:solidFill>
                   <a:srgbClr val="596678"/>
@@ -8257,7 +8046,6 @@
               </a:defRPr>
             </a:lvl8pPr>
             <a:lvl9pPr>
-              <a:buNone/>
               <a:defRPr sz="1275" b="0">
                 <a:solidFill>
                   <a:srgbClr val="596678"/>
@@ -8270,7 +8058,6 @@
           </a:lstStyle>
           <a:p xmlns:a="http://schemas.openxmlformats.org/drawingml/2006/main">
             <a:pPr>
-              <a:buNone/>
               <a:defRPr sz="1275" b="0">
                 <a:solidFill>
                   <a:srgbClr val="596678"/>
@@ -8299,7 +8086,7 @@
           <p:cNvPr id="4" name="">
             <a:extLst xmlns:a="http://schemas.openxmlformats.org/drawingml/2006/main">
               <a:ext uri="{FF2B5EF4-FFF2-40B4-BE49-F238E27FC236}">
-                <a16:creationId xmlns:a16="http://schemas.microsoft.com/office/drawing/2014/main" id="{CE1B1339-6B6E-4A4E-82B1-971809865549}"/>
+                <a16:creationId xmlns:a16="http://schemas.microsoft.com/office/drawing/2014/main" id="{7D45E2A2-A30D-4AE4-B3EE-F189DD51DF93}"/>
               </a:ext>
             </a:extLst>
           </p:cNvPr>
@@ -8336,7 +8123,6 @@
               </a:defRPr>
             </a:defPPr>
             <a:lvl1pPr>
-              <a:buNone/>
               <a:defRPr sz="825" b="0">
                 <a:solidFill>
                   <a:srgbClr val="596678"/>
@@ -8347,7 +8133,6 @@
               </a:defRPr>
             </a:lvl1pPr>
             <a:lvl2pPr>
-              <a:buNone/>
               <a:defRPr sz="825" b="0">
                 <a:solidFill>
                   <a:srgbClr val="596678"/>
@@ -8358,7 +8143,6 @@
               </a:defRPr>
             </a:lvl2pPr>
             <a:lvl3pPr>
-              <a:buNone/>
               <a:defRPr sz="825" b="0">
                 <a:solidFill>
                   <a:srgbClr val="596678"/>
@@ -8369,7 +8153,6 @@
               </a:defRPr>
             </a:lvl3pPr>
             <a:lvl4pPr>
-              <a:buNone/>
               <a:defRPr sz="825" b="0">
                 <a:solidFill>
                   <a:srgbClr val="596678"/>
@@ -8380,7 +8163,6 @@
               </a:defRPr>
             </a:lvl4pPr>
             <a:lvl5pPr>
-              <a:buNone/>
               <a:defRPr sz="825" b="0">
                 <a:solidFill>
                   <a:srgbClr val="596678"/>
@@ -8391,7 +8173,6 @@
               </a:defRPr>
             </a:lvl5pPr>
             <a:lvl6pPr>
-              <a:buNone/>
               <a:defRPr sz="825" b="0">
                 <a:solidFill>
                   <a:srgbClr val="596678"/>
@@ -8402,7 +8183,6 @@
               </a:defRPr>
             </a:lvl6pPr>
             <a:lvl7pPr>
-              <a:buNone/>
               <a:defRPr sz="825" b="0">
                 <a:solidFill>
                   <a:srgbClr val="596678"/>
@@ -8413,7 +8193,6 @@
               </a:defRPr>
             </a:lvl7pPr>
             <a:lvl8pPr>
-              <a:buNone/>
               <a:defRPr sz="825" b="0">
                 <a:solidFill>
                   <a:srgbClr val="596678"/>
@@ -8424,7 +8203,6 @@
               </a:defRPr>
             </a:lvl8pPr>
             <a:lvl9pPr>
-              <a:buNone/>
               <a:defRPr sz="825" b="0">
                 <a:solidFill>
                   <a:srgbClr val="596678"/>
@@ -8437,7 +8215,6 @@
           </a:lstStyle>
           <a:p xmlns:a="http://schemas.openxmlformats.org/drawingml/2006/main">
             <a:pPr>
-              <a:buNone/>
               <a:defRPr sz="825" b="0">
                 <a:solidFill>
                   <a:srgbClr val="596678"/>
@@ -8466,7 +8243,7 @@
           <p:cNvPr id="5" name="">
             <a:extLst xmlns:a="http://schemas.openxmlformats.org/drawingml/2006/main">
               <a:ext uri="{FF2B5EF4-FFF2-40B4-BE49-F238E27FC236}">
-                <a16:creationId xmlns:a16="http://schemas.microsoft.com/office/drawing/2014/main" id="{7CC123D9-2459-4E6C-BB85-820155BA167E}"/>
+                <a16:creationId xmlns:a16="http://schemas.microsoft.com/office/drawing/2014/main" id="{157D7EC3-BA5B-4714-9533-812F45071419}"/>
               </a:ext>
             </a:extLst>
           </p:cNvPr>
@@ -8503,7 +8280,6 @@
               </a:defRPr>
             </a:defPPr>
             <a:lvl1pPr>
-              <a:buNone/>
               <a:defRPr sz="825" b="1">
                 <a:solidFill>
                   <a:srgbClr val="802D42"/>
@@ -8514,7 +8290,6 @@
               </a:defRPr>
             </a:lvl1pPr>
             <a:lvl2pPr>
-              <a:buNone/>
               <a:defRPr sz="825" b="1">
                 <a:solidFill>
                   <a:srgbClr val="802D42"/>
@@ -8525,7 +8300,6 @@
               </a:defRPr>
             </a:lvl2pPr>
             <a:lvl3pPr>
-              <a:buNone/>
               <a:defRPr sz="825" b="1">
                 <a:solidFill>
                   <a:srgbClr val="802D42"/>
@@ -8536,7 +8310,6 @@
               </a:defRPr>
             </a:lvl3pPr>
             <a:lvl4pPr>
-              <a:buNone/>
               <a:defRPr sz="825" b="1">
                 <a:solidFill>
                   <a:srgbClr val="802D42"/>
@@ -8547,7 +8320,6 @@
               </a:defRPr>
             </a:lvl4pPr>
             <a:lvl5pPr>
-              <a:buNone/>
               <a:defRPr sz="825" b="1">
                 <a:solidFill>
                   <a:srgbClr val="802D42"/>
@@ -8558,7 +8330,6 @@
               </a:defRPr>
             </a:lvl5pPr>
             <a:lvl6pPr>
-              <a:buNone/>
               <a:defRPr sz="825" b="1">
                 <a:solidFill>
                   <a:srgbClr val="802D42"/>
@@ -8569,7 +8340,6 @@
               </a:defRPr>
             </a:lvl6pPr>
             <a:lvl7pPr>
-              <a:buNone/>
               <a:defRPr sz="825" b="1">
                 <a:solidFill>
                   <a:srgbClr val="802D42"/>
@@ -8580,7 +8350,6 @@
               </a:defRPr>
             </a:lvl7pPr>
             <a:lvl8pPr>
-              <a:buNone/>
               <a:defRPr sz="825" b="1">
                 <a:solidFill>
                   <a:srgbClr val="802D42"/>
@@ -8591,7 +8360,6 @@
               </a:defRPr>
             </a:lvl8pPr>
             <a:lvl9pPr>
-              <a:buNone/>
               <a:defRPr sz="825" b="1">
                 <a:solidFill>
                   <a:srgbClr val="802D42"/>
@@ -8604,7 +8372,6 @@
           </a:lstStyle>
           <a:p xmlns:a="http://schemas.openxmlformats.org/drawingml/2006/main">
             <a:pPr>
-              <a:buNone/>
               <a:defRPr sz="825" b="1">
                 <a:solidFill>
                   <a:srgbClr val="802D42"/>
@@ -8633,7 +8400,7 @@
           <p:cNvPr id="6" name="">
             <a:extLst xmlns:a="http://schemas.openxmlformats.org/drawingml/2006/main">
               <a:ext uri="{FF2B5EF4-FFF2-40B4-BE49-F238E27FC236}">
-                <a16:creationId xmlns:a16="http://schemas.microsoft.com/office/drawing/2014/main" id="{CE66C604-CA8A-4E51-8ED7-96A45CB10944}"/>
+                <a16:creationId xmlns:a16="http://schemas.microsoft.com/office/drawing/2014/main" id="{D7003FDA-4B0D-4CF9-8054-324222AA2B2C}"/>
               </a:ext>
             </a:extLst>
           </p:cNvPr>
@@ -8670,7 +8437,6 @@
               </a:defRPr>
             </a:defPPr>
             <a:lvl1pPr>
-              <a:buNone/>
               <a:defRPr sz="1725" b="1">
                 <a:solidFill>
                   <a:srgbClr val="243244"/>
@@ -8681,7 +8447,6 @@
               </a:defRPr>
             </a:lvl1pPr>
             <a:lvl2pPr>
-              <a:buNone/>
               <a:defRPr sz="1725" b="1">
                 <a:solidFill>
                   <a:srgbClr val="243244"/>
@@ -8692,7 +8457,6 @@
               </a:defRPr>
             </a:lvl2pPr>
             <a:lvl3pPr>
-              <a:buNone/>
               <a:defRPr sz="1725" b="1">
                 <a:solidFill>
                   <a:srgbClr val="243244"/>
@@ -8703,7 +8467,6 @@
               </a:defRPr>
             </a:lvl3pPr>
             <a:lvl4pPr>
-              <a:buNone/>
               <a:defRPr sz="1725" b="1">
                 <a:solidFill>
                   <a:srgbClr val="243244"/>
@@ -8714,7 +8477,6 @@
               </a:defRPr>
             </a:lvl4pPr>
             <a:lvl5pPr>
-              <a:buNone/>
               <a:defRPr sz="1725" b="1">
                 <a:solidFill>
                   <a:srgbClr val="243244"/>
@@ -8725,7 +8487,6 @@
               </a:defRPr>
             </a:lvl5pPr>
             <a:lvl6pPr>
-              <a:buNone/>
               <a:defRPr sz="1725" b="1">
                 <a:solidFill>
                   <a:srgbClr val="243244"/>
@@ -8736,7 +8497,6 @@
               </a:defRPr>
             </a:lvl6pPr>
             <a:lvl7pPr>
-              <a:buNone/>
               <a:defRPr sz="1725" b="1">
                 <a:solidFill>
                   <a:srgbClr val="243244"/>
@@ -8747,7 +8507,6 @@
               </a:defRPr>
             </a:lvl7pPr>
             <a:lvl8pPr>
-              <a:buNone/>
               <a:defRPr sz="1725" b="1">
                 <a:solidFill>
                   <a:srgbClr val="243244"/>
@@ -8758,7 +8517,6 @@
               </a:defRPr>
             </a:lvl8pPr>
             <a:lvl9pPr>
-              <a:buNone/>
               <a:defRPr sz="1725" b="1">
                 <a:solidFill>
                   <a:srgbClr val="243244"/>
@@ -8771,7 +8529,6 @@
           </a:lstStyle>
           <a:p xmlns:a="http://schemas.openxmlformats.org/drawingml/2006/main">
             <a:pPr>
-              <a:buNone/>
               <a:defRPr sz="1725" b="1">
                 <a:solidFill>
                   <a:srgbClr val="243244"/>
@@ -8800,7 +8557,7 @@
           <p:cNvPr id="7" name="">
             <a:extLst xmlns:a="http://schemas.openxmlformats.org/drawingml/2006/main">
               <a:ext uri="{FF2B5EF4-FFF2-40B4-BE49-F238E27FC236}">
-                <a16:creationId xmlns:a16="http://schemas.microsoft.com/office/drawing/2014/main" id="{4502CBE6-4DAE-44C3-BF23-EFC39667697C}"/>
+                <a16:creationId xmlns:a16="http://schemas.microsoft.com/office/drawing/2014/main" id="{725EDBC6-5B1E-41BD-9187-DAE74E1B6FA7}"/>
               </a:ext>
             </a:extLst>
           </p:cNvPr>
@@ -8837,7 +8594,6 @@
               </a:defRPr>
             </a:defPPr>
             <a:lvl1pPr>
-              <a:buNone/>
               <a:defRPr sz="1275" b="0">
                 <a:solidFill>
                   <a:srgbClr val="596678"/>
@@ -8848,7 +8604,6 @@
               </a:defRPr>
             </a:lvl1pPr>
             <a:lvl2pPr>
-              <a:buNone/>
               <a:defRPr sz="1275" b="0">
                 <a:solidFill>
                   <a:srgbClr val="596678"/>
@@ -8859,7 +8614,6 @@
               </a:defRPr>
             </a:lvl2pPr>
             <a:lvl3pPr>
-              <a:buNone/>
               <a:defRPr sz="1275" b="0">
                 <a:solidFill>
                   <a:srgbClr val="596678"/>
@@ -8870,7 +8624,6 @@
               </a:defRPr>
             </a:lvl3pPr>
             <a:lvl4pPr>
-              <a:buNone/>
               <a:defRPr sz="1275" b="0">
                 <a:solidFill>
                   <a:srgbClr val="596678"/>
@@ -8881,7 +8634,6 @@
               </a:defRPr>
             </a:lvl4pPr>
             <a:lvl5pPr>
-              <a:buNone/>
               <a:defRPr sz="1275" b="0">
                 <a:solidFill>
                   <a:srgbClr val="596678"/>
@@ -8892,7 +8644,6 @@
               </a:defRPr>
             </a:lvl5pPr>
             <a:lvl6pPr>
-              <a:buNone/>
               <a:defRPr sz="1275" b="0">
                 <a:solidFill>
                   <a:srgbClr val="596678"/>
@@ -8903,7 +8654,6 @@
               </a:defRPr>
             </a:lvl6pPr>
             <a:lvl7pPr>
-              <a:buNone/>
               <a:defRPr sz="1275" b="0">
                 <a:solidFill>
                   <a:srgbClr val="596678"/>
@@ -8914,7 +8664,6 @@
               </a:defRPr>
             </a:lvl7pPr>
             <a:lvl8pPr>
-              <a:buNone/>
               <a:defRPr sz="1275" b="0">
                 <a:solidFill>
                   <a:srgbClr val="596678"/>
@@ -8925,7 +8674,6 @@
               </a:defRPr>
             </a:lvl8pPr>
             <a:lvl9pPr>
-              <a:buNone/>
               <a:defRPr sz="1275" b="0">
                 <a:solidFill>
                   <a:srgbClr val="596678"/>
@@ -8938,7 +8686,6 @@
           </a:lstStyle>
           <a:p xmlns:a="http://schemas.openxmlformats.org/drawingml/2006/main">
             <a:pPr>
-              <a:buNone/>
               <a:defRPr sz="1275" b="0">
                 <a:solidFill>
                   <a:srgbClr val="596678"/>
@@ -8967,7 +8714,7 @@
           <p:cNvPr id="8" name="">
             <a:extLst xmlns:a="http://schemas.openxmlformats.org/drawingml/2006/main">
               <a:ext uri="{FF2B5EF4-FFF2-40B4-BE49-F238E27FC236}">
-                <a16:creationId xmlns:a16="http://schemas.microsoft.com/office/drawing/2014/main" id="{1F16AB1B-42F1-45A3-9D04-341325FCA543}"/>
+                <a16:creationId xmlns:a16="http://schemas.microsoft.com/office/drawing/2014/main" id="{E0C776F9-5577-4D37-97E5-0088CD21E8F6}"/>
               </a:ext>
             </a:extLst>
           </p:cNvPr>
@@ -9004,7 +8751,6 @@
               </a:defRPr>
             </a:defPPr>
             <a:lvl1pPr>
-              <a:buNone/>
               <a:defRPr sz="1725" b="1">
                 <a:solidFill>
                   <a:srgbClr val="243244"/>
@@ -9015,7 +8761,6 @@
               </a:defRPr>
             </a:lvl1pPr>
             <a:lvl2pPr>
-              <a:buNone/>
               <a:defRPr sz="1725" b="1">
                 <a:solidFill>
                   <a:srgbClr val="243244"/>
@@ -9026,7 +8771,6 @@
               </a:defRPr>
             </a:lvl2pPr>
             <a:lvl3pPr>
-              <a:buNone/>
               <a:defRPr sz="1725" b="1">
                 <a:solidFill>
                   <a:srgbClr val="243244"/>
@@ -9037,7 +8781,6 @@
               </a:defRPr>
             </a:lvl3pPr>
             <a:lvl4pPr>
-              <a:buNone/>
               <a:defRPr sz="1725" b="1">
                 <a:solidFill>
                   <a:srgbClr val="243244"/>
@@ -9048,7 +8791,6 @@
               </a:defRPr>
             </a:lvl4pPr>
             <a:lvl5pPr>
-              <a:buNone/>
               <a:defRPr sz="1725" b="1">
                 <a:solidFill>
                   <a:srgbClr val="243244"/>
@@ -9059,7 +8801,6 @@
               </a:defRPr>
             </a:lvl5pPr>
             <a:lvl6pPr>
-              <a:buNone/>
               <a:defRPr sz="1725" b="1">
                 <a:solidFill>
                   <a:srgbClr val="243244"/>
@@ -9070,7 +8811,6 @@
               </a:defRPr>
             </a:lvl6pPr>
             <a:lvl7pPr>
-              <a:buNone/>
               <a:defRPr sz="1725" b="1">
                 <a:solidFill>
                   <a:srgbClr val="243244"/>
@@ -9081,7 +8821,6 @@
               </a:defRPr>
             </a:lvl7pPr>
             <a:lvl8pPr>
-              <a:buNone/>
               <a:defRPr sz="1725" b="1">
                 <a:solidFill>
                   <a:srgbClr val="243244"/>
@@ -9092,7 +8831,6 @@
               </a:defRPr>
             </a:lvl8pPr>
             <a:lvl9pPr>
-              <a:buNone/>
               <a:defRPr sz="1725" b="1">
                 <a:solidFill>
                   <a:srgbClr val="243244"/>
@@ -9105,7 +8843,6 @@
           </a:lstStyle>
           <a:p xmlns:a="http://schemas.openxmlformats.org/drawingml/2006/main">
             <a:pPr>
-              <a:buNone/>
               <a:defRPr sz="1725" b="1">
                 <a:solidFill>
                   <a:srgbClr val="243244"/>
@@ -9134,7 +8871,7 @@
           <p:cNvPr id="9" name="">
             <a:extLst xmlns:a="http://schemas.openxmlformats.org/drawingml/2006/main">
               <a:ext uri="{FF2B5EF4-FFF2-40B4-BE49-F238E27FC236}">
-                <a16:creationId xmlns:a16="http://schemas.microsoft.com/office/drawing/2014/main" id="{60B0B76F-1EAF-4425-BADE-472253395165}"/>
+                <a16:creationId xmlns:a16="http://schemas.microsoft.com/office/drawing/2014/main" id="{39E5826D-5B12-4521-AA43-9992FF7B5740}"/>
               </a:ext>
             </a:extLst>
           </p:cNvPr>
@@ -9171,7 +8908,6 @@
               </a:defRPr>
             </a:defPPr>
             <a:lvl1pPr>
-              <a:buNone/>
               <a:defRPr sz="1275" b="0">
                 <a:solidFill>
                   <a:srgbClr val="596678"/>
@@ -9182,7 +8918,6 @@
               </a:defRPr>
             </a:lvl1pPr>
             <a:lvl2pPr>
-              <a:buNone/>
               <a:defRPr sz="1275" b="0">
                 <a:solidFill>
                   <a:srgbClr val="596678"/>
@@ -9193,7 +8928,6 @@
               </a:defRPr>
             </a:lvl2pPr>
             <a:lvl3pPr>
-              <a:buNone/>
               <a:defRPr sz="1275" b="0">
                 <a:solidFill>
                   <a:srgbClr val="596678"/>
@@ -9204,7 +8938,6 @@
               </a:defRPr>
             </a:lvl3pPr>
             <a:lvl4pPr>
-              <a:buNone/>
               <a:defRPr sz="1275" b="0">
                 <a:solidFill>
                   <a:srgbClr val="596678"/>
@@ -9215,7 +8948,6 @@
               </a:defRPr>
             </a:lvl4pPr>
             <a:lvl5pPr>
-              <a:buNone/>
               <a:defRPr sz="1275" b="0">
                 <a:solidFill>
                   <a:srgbClr val="596678"/>
@@ -9226,7 +8958,6 @@
               </a:defRPr>
             </a:lvl5pPr>
             <a:lvl6pPr>
-              <a:buNone/>
               <a:defRPr sz="1275" b="0">
                 <a:solidFill>
                   <a:srgbClr val="596678"/>
@@ -9237,7 +8968,6 @@
               </a:defRPr>
             </a:lvl6pPr>
             <a:lvl7pPr>
-              <a:buNone/>
               <a:defRPr sz="1275" b="0">
                 <a:solidFill>
                   <a:srgbClr val="596678"/>
@@ -9248,7 +8978,6 @@
               </a:defRPr>
             </a:lvl7pPr>
             <a:lvl8pPr>
-              <a:buNone/>
               <a:defRPr sz="1275" b="0">
                 <a:solidFill>
                   <a:srgbClr val="596678"/>
@@ -9259,7 +8988,6 @@
               </a:defRPr>
             </a:lvl8pPr>
             <a:lvl9pPr>
-              <a:buNone/>
               <a:defRPr sz="1275" b="0">
                 <a:solidFill>
                   <a:srgbClr val="596678"/>
@@ -9272,7 +9000,6 @@
           </a:lstStyle>
           <a:p xmlns:a="http://schemas.openxmlformats.org/drawingml/2006/main">
             <a:pPr>
-              <a:buNone/>
               <a:defRPr sz="1275" b="0">
                 <a:solidFill>
                   <a:srgbClr val="596678"/>
@@ -9301,7 +9028,7 @@
           <p:cNvPr id="10" name="">
             <a:extLst xmlns:a="http://schemas.openxmlformats.org/drawingml/2006/main">
               <a:ext uri="{FF2B5EF4-FFF2-40B4-BE49-F238E27FC236}">
-                <a16:creationId xmlns:a16="http://schemas.microsoft.com/office/drawing/2014/main" id="{EF886371-51FC-41D5-814E-805BD923C767}"/>
+                <a16:creationId xmlns:a16="http://schemas.microsoft.com/office/drawing/2014/main" id="{402473B4-7B4E-4A46-8C98-B15CAADF6E8D}"/>
               </a:ext>
             </a:extLst>
           </p:cNvPr>
@@ -9338,7 +9065,6 @@
               </a:defRPr>
             </a:defPPr>
             <a:lvl1pPr>
-              <a:buNone/>
               <a:defRPr sz="1725" b="1">
                 <a:solidFill>
                   <a:srgbClr val="243244"/>
@@ -9349,7 +9075,6 @@
               </a:defRPr>
             </a:lvl1pPr>
             <a:lvl2pPr>
-              <a:buNone/>
               <a:defRPr sz="1725" b="1">
                 <a:solidFill>
                   <a:srgbClr val="243244"/>
@@ -9360,7 +9085,6 @@
               </a:defRPr>
             </a:lvl2pPr>
             <a:lvl3pPr>
-              <a:buNone/>
               <a:defRPr sz="1725" b="1">
                 <a:solidFill>
                   <a:srgbClr val="243244"/>
@@ -9371,7 +9095,6 @@
               </a:defRPr>
             </a:lvl3pPr>
             <a:lvl4pPr>
-              <a:buNone/>
               <a:defRPr sz="1725" b="1">
                 <a:solidFill>
                   <a:srgbClr val="243244"/>
@@ -9382,7 +9105,6 @@
               </a:defRPr>
             </a:lvl4pPr>
             <a:lvl5pPr>
-              <a:buNone/>
               <a:defRPr sz="1725" b="1">
                 <a:solidFill>
                   <a:srgbClr val="243244"/>
@@ -9393,7 +9115,6 @@
               </a:defRPr>
             </a:lvl5pPr>
             <a:lvl6pPr>
-              <a:buNone/>
               <a:defRPr sz="1725" b="1">
                 <a:solidFill>
                   <a:srgbClr val="243244"/>
@@ -9404,7 +9125,6 @@
               </a:defRPr>
             </a:lvl6pPr>
             <a:lvl7pPr>
-              <a:buNone/>
               <a:defRPr sz="1725" b="1">
                 <a:solidFill>
                   <a:srgbClr val="243244"/>
@@ -9415,7 +9135,6 @@
               </a:defRPr>
             </a:lvl7pPr>
             <a:lvl8pPr>
-              <a:buNone/>
               <a:defRPr sz="1725" b="1">
                 <a:solidFill>
                   <a:srgbClr val="243244"/>
@@ -9426,7 +9145,6 @@
               </a:defRPr>
             </a:lvl8pPr>
             <a:lvl9pPr>
-              <a:buNone/>
               <a:defRPr sz="1725" b="1">
                 <a:solidFill>
                   <a:srgbClr val="243244"/>
@@ -9439,7 +9157,6 @@
           </a:lstStyle>
           <a:p xmlns:a="http://schemas.openxmlformats.org/drawingml/2006/main">
             <a:pPr>
-              <a:buNone/>
               <a:defRPr sz="1725" b="1">
                 <a:solidFill>
                   <a:srgbClr val="243244"/>
@@ -9468,7 +9185,7 @@
           <p:cNvPr id="11" name="">
             <a:extLst xmlns:a="http://schemas.openxmlformats.org/drawingml/2006/main">
               <a:ext uri="{FF2B5EF4-FFF2-40B4-BE49-F238E27FC236}">
-                <a16:creationId xmlns:a16="http://schemas.microsoft.com/office/drawing/2014/main" id="{96C3B187-F4FC-44DE-8286-3A59487FCFE8}"/>
+                <a16:creationId xmlns:a16="http://schemas.microsoft.com/office/drawing/2014/main" id="{507CAD9D-0D99-4DBB-BF76-258B97B9413B}"/>
               </a:ext>
             </a:extLst>
           </p:cNvPr>
@@ -9505,7 +9222,6 @@
               </a:defRPr>
             </a:defPPr>
             <a:lvl1pPr>
-              <a:buNone/>
               <a:defRPr sz="1275" b="0">
                 <a:solidFill>
                   <a:srgbClr val="596678"/>
@@ -9516,7 +9232,6 @@
               </a:defRPr>
             </a:lvl1pPr>
             <a:lvl2pPr>
-              <a:buNone/>
               <a:defRPr sz="1275" b="0">
                 <a:solidFill>
                   <a:srgbClr val="596678"/>
@@ -9527,7 +9242,6 @@
               </a:defRPr>
             </a:lvl2pPr>
             <a:lvl3pPr>
-              <a:buNone/>
               <a:defRPr sz="1275" b="0">
                 <a:solidFill>
                   <a:srgbClr val="596678"/>
@@ -9538,7 +9252,6 @@
               </a:defRPr>
             </a:lvl3pPr>
             <a:lvl4pPr>
-              <a:buNone/>
               <a:defRPr sz="1275" b="0">
                 <a:solidFill>
                   <a:srgbClr val="596678"/>
@@ -9549,7 +9262,6 @@
               </a:defRPr>
             </a:lvl4pPr>
             <a:lvl5pPr>
-              <a:buNone/>
               <a:defRPr sz="1275" b="0">
                 <a:solidFill>
                   <a:srgbClr val="596678"/>
@@ -9560,7 +9272,6 @@
               </a:defRPr>
             </a:lvl5pPr>
             <a:lvl6pPr>
-              <a:buNone/>
               <a:defRPr sz="1275" b="0">
                 <a:solidFill>
                   <a:srgbClr val="596678"/>
@@ -9571,7 +9282,6 @@
               </a:defRPr>
             </a:lvl6pPr>
             <a:lvl7pPr>
-              <a:buNone/>
               <a:defRPr sz="1275" b="0">
                 <a:solidFill>
                   <a:srgbClr val="596678"/>
@@ -9582,7 +9292,6 @@
               </a:defRPr>
             </a:lvl7pPr>
             <a:lvl8pPr>
-              <a:buNone/>
               <a:defRPr sz="1275" b="0">
                 <a:solidFill>
                   <a:srgbClr val="596678"/>
@@ -9593,7 +9302,6 @@
               </a:defRPr>
             </a:lvl8pPr>
             <a:lvl9pPr>
-              <a:buNone/>
               <a:defRPr sz="1275" b="0">
                 <a:solidFill>
                   <a:srgbClr val="596678"/>
@@ -9606,7 +9314,6 @@
           </a:lstStyle>
           <a:p xmlns:a="http://schemas.openxmlformats.org/drawingml/2006/main">
             <a:pPr>
-              <a:buNone/>
               <a:defRPr sz="1275" b="0">
                 <a:solidFill>
                   <a:srgbClr val="596678"/>
@@ -9633,7 +9340,7 @@
     </p:spTree>
     <p:extLst>
       <p:ext uri="{BB962C8B-B14F-4D97-AF65-F5344CB8AC3E}">
-        <p14:creationId xmlns:p14="http://schemas.microsoft.com/office/powerpoint/2010/main" val="648565203"/>
+        <p14:creationId xmlns:p14="http://schemas.microsoft.com/office/powerpoint/2010/main" val="193118346"/>
       </p:ext>
     </p:extLst>
   </p:cSld>
@@ -9664,7 +9371,7 @@
           <p:cNvPr id="9" name="">
             <a:extLst xmlns:a="http://schemas.openxmlformats.org/drawingml/2006/main">
               <a:ext uri="{FF2B5EF4-FFF2-40B4-BE49-F238E27FC236}">
-                <a16:creationId xmlns:a16="http://schemas.microsoft.com/office/drawing/2014/main" id="{07FAAE4B-828D-4303-AEE9-89ADBBFC8E60}"/>
+                <a16:creationId xmlns:a16="http://schemas.microsoft.com/office/drawing/2014/main" id="{8CA14577-847D-4C65-A6C9-4A64F6574F17}"/>
               </a:ext>
             </a:extLst>
           </p:cNvPr>
@@ -9701,7 +9408,6 @@
               </a:defRPr>
             </a:defPPr>
             <a:lvl1pPr>
-              <a:buNone/>
               <a:defRPr sz="900" b="1">
                 <a:solidFill>
                   <a:srgbClr val="802D42"/>
@@ -9712,7 +9418,6 @@
               </a:defRPr>
             </a:lvl1pPr>
             <a:lvl2pPr>
-              <a:buNone/>
               <a:defRPr sz="900" b="1">
                 <a:solidFill>
                   <a:srgbClr val="802D42"/>
@@ -9723,7 +9428,6 @@
               </a:defRPr>
             </a:lvl2pPr>
             <a:lvl3pPr>
-              <a:buNone/>
               <a:defRPr sz="900" b="1">
                 <a:solidFill>
                   <a:srgbClr val="802D42"/>
@@ -9734,7 +9438,6 @@
               </a:defRPr>
             </a:lvl3pPr>
             <a:lvl4pPr>
-              <a:buNone/>
               <a:defRPr sz="900" b="1">
                 <a:solidFill>
                   <a:srgbClr val="802D42"/>
@@ -9745,7 +9448,6 @@
               </a:defRPr>
             </a:lvl4pPr>
             <a:lvl5pPr>
-              <a:buNone/>
               <a:defRPr sz="900" b="1">
                 <a:solidFill>
                   <a:srgbClr val="802D42"/>
@@ -9756,7 +9458,6 @@
               </a:defRPr>
             </a:lvl5pPr>
             <a:lvl6pPr>
-              <a:buNone/>
               <a:defRPr sz="900" b="1">
                 <a:solidFill>
                   <a:srgbClr val="802D42"/>
@@ -9767,7 +9468,6 @@
               </a:defRPr>
             </a:lvl6pPr>
             <a:lvl7pPr>
-              <a:buNone/>
               <a:defRPr sz="900" b="1">
                 <a:solidFill>
                   <a:srgbClr val="802D42"/>
@@ -9778,7 +9478,6 @@
               </a:defRPr>
             </a:lvl7pPr>
             <a:lvl8pPr>
-              <a:buNone/>
               <a:defRPr sz="900" b="1">
                 <a:solidFill>
                   <a:srgbClr val="802D42"/>
@@ -9789,7 +9488,6 @@
               </a:defRPr>
             </a:lvl8pPr>
             <a:lvl9pPr>
-              <a:buNone/>
               <a:defRPr sz="900" b="1">
                 <a:solidFill>
                   <a:srgbClr val="802D42"/>
@@ -9802,7 +9500,6 @@
           </a:lstStyle>
           <a:p xmlns:a="http://schemas.openxmlformats.org/drawingml/2006/main">
             <a:pPr>
-              <a:buNone/>
               <a:defRPr sz="900" b="1">
                 <a:solidFill>
                   <a:srgbClr val="802D42"/>
@@ -9831,7 +9528,7 @@
           <p:cNvPr id="2" name="">
             <a:extLst xmlns:a="http://schemas.openxmlformats.org/drawingml/2006/main">
               <a:ext uri="{FF2B5EF4-FFF2-40B4-BE49-F238E27FC236}">
-                <a16:creationId xmlns:a16="http://schemas.microsoft.com/office/drawing/2014/main" id="{E5275417-C40F-47E1-BDC1-278A7C54A724}"/>
+                <a16:creationId xmlns:a16="http://schemas.microsoft.com/office/drawing/2014/main" id="{CB2C5697-8276-458F-9658-152B93BCAEE6}"/>
               </a:ext>
             </a:extLst>
           </p:cNvPr>
@@ -9868,7 +9565,6 @@
               </a:defRPr>
             </a:defPPr>
             <a:lvl1pPr>
-              <a:buNone/>
               <a:defRPr sz="2400" b="1">
                 <a:solidFill>
                   <a:srgbClr val="243244"/>
@@ -9879,7 +9575,6 @@
               </a:defRPr>
             </a:lvl1pPr>
             <a:lvl2pPr>
-              <a:buNone/>
               <a:defRPr sz="2400" b="1">
                 <a:solidFill>
                   <a:srgbClr val="243244"/>
@@ -9890,7 +9585,6 @@
               </a:defRPr>
             </a:lvl2pPr>
             <a:lvl3pPr>
-              <a:buNone/>
               <a:defRPr sz="2400" b="1">
                 <a:solidFill>
                   <a:srgbClr val="243244"/>
@@ -9901,7 +9595,6 @@
               </a:defRPr>
             </a:lvl3pPr>
             <a:lvl4pPr>
-              <a:buNone/>
               <a:defRPr sz="2400" b="1">
                 <a:solidFill>
                   <a:srgbClr val="243244"/>
@@ -9912,7 +9605,6 @@
               </a:defRPr>
             </a:lvl4pPr>
             <a:lvl5pPr>
-              <a:buNone/>
               <a:defRPr sz="2400" b="1">
                 <a:solidFill>
                   <a:srgbClr val="243244"/>
@@ -9923,7 +9615,6 @@
               </a:defRPr>
             </a:lvl5pPr>
             <a:lvl6pPr>
-              <a:buNone/>
               <a:defRPr sz="2400" b="1">
                 <a:solidFill>
                   <a:srgbClr val="243244"/>
@@ -9934,7 +9625,6 @@
               </a:defRPr>
             </a:lvl6pPr>
             <a:lvl7pPr>
-              <a:buNone/>
               <a:defRPr sz="2400" b="1">
                 <a:solidFill>
                   <a:srgbClr val="243244"/>
@@ -9945,7 +9635,6 @@
               </a:defRPr>
             </a:lvl7pPr>
             <a:lvl8pPr>
-              <a:buNone/>
               <a:defRPr sz="2400" b="1">
                 <a:solidFill>
                   <a:srgbClr val="243244"/>
@@ -9956,7 +9645,6 @@
               </a:defRPr>
             </a:lvl8pPr>
             <a:lvl9pPr>
-              <a:buNone/>
               <a:defRPr sz="2400" b="1">
                 <a:solidFill>
                   <a:srgbClr val="243244"/>
@@ -9969,7 +9657,6 @@
           </a:lstStyle>
           <a:p xmlns:a="http://schemas.openxmlformats.org/drawingml/2006/main">
             <a:pPr>
-              <a:buNone/>
               <a:defRPr sz="2400" b="1">
                 <a:solidFill>
                   <a:srgbClr val="243244"/>
@@ -9998,7 +9685,7 @@
           <p:cNvPr id="3" name="">
             <a:extLst xmlns:a="http://schemas.openxmlformats.org/drawingml/2006/main">
               <a:ext uri="{FF2B5EF4-FFF2-40B4-BE49-F238E27FC236}">
-                <a16:creationId xmlns:a16="http://schemas.microsoft.com/office/drawing/2014/main" id="{94EF41C4-1EB5-4BCF-9B60-C38761244BCD}"/>
+                <a16:creationId xmlns:a16="http://schemas.microsoft.com/office/drawing/2014/main" id="{2C3254C1-FA1E-4060-8096-6FA6FC186AE2}"/>
               </a:ext>
             </a:extLst>
           </p:cNvPr>
@@ -10035,7 +9722,6 @@
               </a:defRPr>
             </a:defPPr>
             <a:lvl1pPr>
-              <a:buNone/>
               <a:defRPr sz="1275" b="0">
                 <a:solidFill>
                   <a:srgbClr val="596678"/>
@@ -10046,7 +9732,6 @@
               </a:defRPr>
             </a:lvl1pPr>
             <a:lvl2pPr>
-              <a:buNone/>
               <a:defRPr sz="1275" b="0">
                 <a:solidFill>
                   <a:srgbClr val="596678"/>
@@ -10057,7 +9742,6 @@
               </a:defRPr>
             </a:lvl2pPr>
             <a:lvl3pPr>
-              <a:buNone/>
               <a:defRPr sz="1275" b="0">
                 <a:solidFill>
                   <a:srgbClr val="596678"/>
@@ -10068,7 +9752,6 @@
               </a:defRPr>
             </a:lvl3pPr>
             <a:lvl4pPr>
-              <a:buNone/>
               <a:defRPr sz="1275" b="0">
                 <a:solidFill>
                   <a:srgbClr val="596678"/>
@@ -10079,7 +9762,6 @@
               </a:defRPr>
             </a:lvl4pPr>
             <a:lvl5pPr>
-              <a:buNone/>
               <a:defRPr sz="1275" b="0">
                 <a:solidFill>
                   <a:srgbClr val="596678"/>
@@ -10090,7 +9772,6 @@
               </a:defRPr>
             </a:lvl5pPr>
             <a:lvl6pPr>
-              <a:buNone/>
               <a:defRPr sz="1275" b="0">
                 <a:solidFill>
                   <a:srgbClr val="596678"/>
@@ -10101,7 +9782,6 @@
               </a:defRPr>
             </a:lvl6pPr>
             <a:lvl7pPr>
-              <a:buNone/>
               <a:defRPr sz="1275" b="0">
                 <a:solidFill>
                   <a:srgbClr val="596678"/>
@@ -10112,7 +9792,6 @@
               </a:defRPr>
             </a:lvl7pPr>
             <a:lvl8pPr>
-              <a:buNone/>
               <a:defRPr sz="1275" b="0">
                 <a:solidFill>
                   <a:srgbClr val="596678"/>
@@ -10123,7 +9802,6 @@
               </a:defRPr>
             </a:lvl8pPr>
             <a:lvl9pPr>
-              <a:buNone/>
               <a:defRPr sz="1275" b="0">
                 <a:solidFill>
                   <a:srgbClr val="596678"/>
@@ -10136,7 +9814,6 @@
           </a:lstStyle>
           <a:p xmlns:a="http://schemas.openxmlformats.org/drawingml/2006/main">
             <a:pPr>
-              <a:buNone/>
               <a:defRPr sz="1275" b="0">
                 <a:solidFill>
                   <a:srgbClr val="596678"/>
@@ -10165,7 +9842,7 @@
           <p:cNvPr id="4" name="">
             <a:extLst xmlns:a="http://schemas.openxmlformats.org/drawingml/2006/main">
               <a:ext uri="{FF2B5EF4-FFF2-40B4-BE49-F238E27FC236}">
-                <a16:creationId xmlns:a16="http://schemas.microsoft.com/office/drawing/2014/main" id="{E9DB42FF-6A73-4420-BDF0-87C8A4151F6E}"/>
+                <a16:creationId xmlns:a16="http://schemas.microsoft.com/office/drawing/2014/main" id="{F70EBFAF-0674-4A01-8AC2-2843DEE13D3C}"/>
               </a:ext>
             </a:extLst>
           </p:cNvPr>
@@ -10202,7 +9879,6 @@
               </a:defRPr>
             </a:defPPr>
             <a:lvl1pPr>
-              <a:buNone/>
               <a:defRPr sz="825" b="0">
                 <a:solidFill>
                   <a:srgbClr val="596678"/>
@@ -10213,7 +9889,6 @@
               </a:defRPr>
             </a:lvl1pPr>
             <a:lvl2pPr>
-              <a:buNone/>
               <a:defRPr sz="825" b="0">
                 <a:solidFill>
                   <a:srgbClr val="596678"/>
@@ -10224,7 +9899,6 @@
               </a:defRPr>
             </a:lvl2pPr>
             <a:lvl3pPr>
-              <a:buNone/>
               <a:defRPr sz="825" b="0">
                 <a:solidFill>
                   <a:srgbClr val="596678"/>
@@ -10235,7 +9909,6 @@
               </a:defRPr>
             </a:lvl3pPr>
             <a:lvl4pPr>
-              <a:buNone/>
               <a:defRPr sz="825" b="0">
                 <a:solidFill>
                   <a:srgbClr val="596678"/>
@@ -10246,7 +9919,6 @@
               </a:defRPr>
             </a:lvl4pPr>
             <a:lvl5pPr>
-              <a:buNone/>
               <a:defRPr sz="825" b="0">
                 <a:solidFill>
                   <a:srgbClr val="596678"/>
@@ -10257,7 +9929,6 @@
               </a:defRPr>
             </a:lvl5pPr>
             <a:lvl6pPr>
-              <a:buNone/>
               <a:defRPr sz="825" b="0">
                 <a:solidFill>
                   <a:srgbClr val="596678"/>
@@ -10268,7 +9939,6 @@
               </a:defRPr>
             </a:lvl6pPr>
             <a:lvl7pPr>
-              <a:buNone/>
               <a:defRPr sz="825" b="0">
                 <a:solidFill>
                   <a:srgbClr val="596678"/>
@@ -10279,7 +9949,6 @@
               </a:defRPr>
             </a:lvl7pPr>
             <a:lvl8pPr>
-              <a:buNone/>
               <a:defRPr sz="825" b="0">
                 <a:solidFill>
                   <a:srgbClr val="596678"/>
@@ -10290,7 +9959,6 @@
               </a:defRPr>
             </a:lvl8pPr>
             <a:lvl9pPr>
-              <a:buNone/>
               <a:defRPr sz="825" b="0">
                 <a:solidFill>
                   <a:srgbClr val="596678"/>
@@ -10303,7 +9971,6 @@
           </a:lstStyle>
           <a:p xmlns:a="http://schemas.openxmlformats.org/drawingml/2006/main">
             <a:pPr>
-              <a:buNone/>
               <a:defRPr sz="825" b="0">
                 <a:solidFill>
                   <a:srgbClr val="596678"/>
@@ -10332,7 +9999,7 @@
           <p:cNvPr id="5" name="">
             <a:extLst xmlns:a="http://schemas.openxmlformats.org/drawingml/2006/main">
               <a:ext uri="{FF2B5EF4-FFF2-40B4-BE49-F238E27FC236}">
-                <a16:creationId xmlns:a16="http://schemas.microsoft.com/office/drawing/2014/main" id="{7997D047-7EFD-42A8-A166-B1D2317E7C81}"/>
+                <a16:creationId xmlns:a16="http://schemas.microsoft.com/office/drawing/2014/main" id="{755BBF5A-5136-4B99-B502-A93C49DB2B3B}"/>
               </a:ext>
             </a:extLst>
           </p:cNvPr>
@@ -10369,7 +10036,6 @@
               </a:defRPr>
             </a:defPPr>
             <a:lvl1pPr>
-              <a:buNone/>
               <a:defRPr sz="825" b="1">
                 <a:solidFill>
                   <a:srgbClr val="802D42"/>
@@ -10380,7 +10046,6 @@
               </a:defRPr>
             </a:lvl1pPr>
             <a:lvl2pPr>
-              <a:buNone/>
               <a:defRPr sz="825" b="1">
                 <a:solidFill>
                   <a:srgbClr val="802D42"/>
@@ -10391,7 +10056,6 @@
               </a:defRPr>
             </a:lvl2pPr>
             <a:lvl3pPr>
-              <a:buNone/>
               <a:defRPr sz="825" b="1">
                 <a:solidFill>
                   <a:srgbClr val="802D42"/>
@@ -10402,7 +10066,6 @@
               </a:defRPr>
             </a:lvl3pPr>
             <a:lvl4pPr>
-              <a:buNone/>
               <a:defRPr sz="825" b="1">
                 <a:solidFill>
                   <a:srgbClr val="802D42"/>
@@ -10413,7 +10076,6 @@
               </a:defRPr>
             </a:lvl4pPr>
             <a:lvl5pPr>
-              <a:buNone/>
               <a:defRPr sz="825" b="1">
                 <a:solidFill>
                   <a:srgbClr val="802D42"/>
@@ -10424,7 +10086,6 @@
               </a:defRPr>
             </a:lvl5pPr>
             <a:lvl6pPr>
-              <a:buNone/>
               <a:defRPr sz="825" b="1">
                 <a:solidFill>
                   <a:srgbClr val="802D42"/>
@@ -10435,7 +10096,6 @@
               </a:defRPr>
             </a:lvl6pPr>
             <a:lvl7pPr>
-              <a:buNone/>
               <a:defRPr sz="825" b="1">
                 <a:solidFill>
                   <a:srgbClr val="802D42"/>
@@ -10446,7 +10106,6 @@
               </a:defRPr>
             </a:lvl7pPr>
             <a:lvl8pPr>
-              <a:buNone/>
               <a:defRPr sz="825" b="1">
                 <a:solidFill>
                   <a:srgbClr val="802D42"/>
@@ -10457,7 +10116,6 @@
               </a:defRPr>
             </a:lvl8pPr>
             <a:lvl9pPr>
-              <a:buNone/>
               <a:defRPr sz="825" b="1">
                 <a:solidFill>
                   <a:srgbClr val="802D42"/>
@@ -10470,7 +10128,6 @@
           </a:lstStyle>
           <a:p xmlns:a="http://schemas.openxmlformats.org/drawingml/2006/main">
             <a:pPr>
-              <a:buNone/>
               <a:defRPr sz="825" b="1">
                 <a:solidFill>
                   <a:srgbClr val="802D42"/>
@@ -10499,7 +10156,7 @@
           <p:cNvPr id="6" name="">
             <a:extLst xmlns:a="http://schemas.openxmlformats.org/drawingml/2006/main">
               <a:ext uri="{FF2B5EF4-FFF2-40B4-BE49-F238E27FC236}">
-                <a16:creationId xmlns:a16="http://schemas.microsoft.com/office/drawing/2014/main" id="{224A4D93-BF4A-48ED-B70A-5B348D169989}"/>
+                <a16:creationId xmlns:a16="http://schemas.microsoft.com/office/drawing/2014/main" id="{1EE331B7-8E85-49F3-8ED1-96EC111A0C56}"/>
               </a:ext>
             </a:extLst>
           </p:cNvPr>
@@ -10536,7 +10193,6 @@
               </a:defRPr>
             </a:defPPr>
             <a:lvl1pPr>
-              <a:buNone/>
               <a:defRPr sz="1725" b="0">
                 <a:solidFill>
                   <a:srgbClr val="243244"/>
@@ -10547,7 +10203,6 @@
               </a:defRPr>
             </a:lvl1pPr>
             <a:lvl2pPr>
-              <a:buNone/>
               <a:defRPr sz="1725" b="0">
                 <a:solidFill>
                   <a:srgbClr val="243244"/>
@@ -10558,7 +10213,6 @@
               </a:defRPr>
             </a:lvl2pPr>
             <a:lvl3pPr>
-              <a:buNone/>
               <a:defRPr sz="1725" b="0">
                 <a:solidFill>
                   <a:srgbClr val="243244"/>
@@ -10569,7 +10223,6 @@
               </a:defRPr>
             </a:lvl3pPr>
             <a:lvl4pPr>
-              <a:buNone/>
               <a:defRPr sz="1725" b="0">
                 <a:solidFill>
                   <a:srgbClr val="243244"/>
@@ -10580,7 +10233,6 @@
               </a:defRPr>
             </a:lvl4pPr>
             <a:lvl5pPr>
-              <a:buNone/>
               <a:defRPr sz="1725" b="0">
                 <a:solidFill>
                   <a:srgbClr val="243244"/>
@@ -10591,7 +10243,6 @@
               </a:defRPr>
             </a:lvl5pPr>
             <a:lvl6pPr>
-              <a:buNone/>
               <a:defRPr sz="1725" b="0">
                 <a:solidFill>
                   <a:srgbClr val="243244"/>
@@ -10602,7 +10253,6 @@
               </a:defRPr>
             </a:lvl6pPr>
             <a:lvl7pPr>
-              <a:buNone/>
               <a:defRPr sz="1725" b="0">
                 <a:solidFill>
                   <a:srgbClr val="243244"/>
@@ -10613,7 +10263,6 @@
               </a:defRPr>
             </a:lvl7pPr>
             <a:lvl8pPr>
-              <a:buNone/>
               <a:defRPr sz="1725" b="0">
                 <a:solidFill>
                   <a:srgbClr val="243244"/>
@@ -10624,7 +10273,6 @@
               </a:defRPr>
             </a:lvl8pPr>
             <a:lvl9pPr>
-              <a:buNone/>
               <a:defRPr sz="1725" b="0">
                 <a:solidFill>
                   <a:srgbClr val="243244"/>
@@ -10637,7 +10285,6 @@
           </a:lstStyle>
           <a:p xmlns:a="http://schemas.openxmlformats.org/drawingml/2006/main">
             <a:pPr>
-              <a:buNone/>
               <a:defRPr sz="1725" b="0">
                 <a:solidFill>
                   <a:srgbClr val="243244"/>
@@ -10666,7 +10313,7 @@
           <p:cNvPr id="7" name="">
             <a:extLst xmlns:a="http://schemas.openxmlformats.org/drawingml/2006/main">
               <a:ext uri="{FF2B5EF4-FFF2-40B4-BE49-F238E27FC236}">
-                <a16:creationId xmlns:a16="http://schemas.microsoft.com/office/drawing/2014/main" id="{2F7CBE3D-1629-4C33-80D8-2A57ADBEB5F3}"/>
+                <a16:creationId xmlns:a16="http://schemas.microsoft.com/office/drawing/2014/main" id="{A155DA6E-50DE-485F-84A2-39AD16AC0648}"/>
               </a:ext>
             </a:extLst>
           </p:cNvPr>
@@ -10703,7 +10350,6 @@
               </a:defRPr>
             </a:defPPr>
             <a:lvl1pPr>
-              <a:buNone/>
               <a:defRPr sz="1725" b="0">
                 <a:solidFill>
                   <a:srgbClr val="243244"/>
@@ -10714,7 +10360,6 @@
               </a:defRPr>
             </a:lvl1pPr>
             <a:lvl2pPr>
-              <a:buNone/>
               <a:defRPr sz="1725" b="0">
                 <a:solidFill>
                   <a:srgbClr val="243244"/>
@@ -10725,7 +10370,6 @@
               </a:defRPr>
             </a:lvl2pPr>
             <a:lvl3pPr>
-              <a:buNone/>
               <a:defRPr sz="1725" b="0">
                 <a:solidFill>
                   <a:srgbClr val="243244"/>
@@ -10736,7 +10380,6 @@
               </a:defRPr>
             </a:lvl3pPr>
             <a:lvl4pPr>
-              <a:buNone/>
               <a:defRPr sz="1725" b="0">
                 <a:solidFill>
                   <a:srgbClr val="243244"/>
@@ -10747,7 +10390,6 @@
               </a:defRPr>
             </a:lvl4pPr>
             <a:lvl5pPr>
-              <a:buNone/>
               <a:defRPr sz="1725" b="0">
                 <a:solidFill>
                   <a:srgbClr val="243244"/>
@@ -10758,7 +10400,6 @@
               </a:defRPr>
             </a:lvl5pPr>
             <a:lvl6pPr>
-              <a:buNone/>
               <a:defRPr sz="1725" b="0">
                 <a:solidFill>
                   <a:srgbClr val="243244"/>
@@ -10769,7 +10410,6 @@
               </a:defRPr>
             </a:lvl6pPr>
             <a:lvl7pPr>
-              <a:buNone/>
               <a:defRPr sz="1725" b="0">
                 <a:solidFill>
                   <a:srgbClr val="243244"/>
@@ -10780,7 +10420,6 @@
               </a:defRPr>
             </a:lvl7pPr>
             <a:lvl8pPr>
-              <a:buNone/>
               <a:defRPr sz="1725" b="0">
                 <a:solidFill>
                   <a:srgbClr val="243244"/>
@@ -10791,7 +10430,6 @@
               </a:defRPr>
             </a:lvl8pPr>
             <a:lvl9pPr>
-              <a:buNone/>
               <a:defRPr sz="1725" b="0">
                 <a:solidFill>
                   <a:srgbClr val="243244"/>
@@ -10804,7 +10442,6 @@
           </a:lstStyle>
           <a:p xmlns:a="http://schemas.openxmlformats.org/drawingml/2006/main">
             <a:pPr>
-              <a:buNone/>
               <a:defRPr sz="1725" b="0">
                 <a:solidFill>
                   <a:srgbClr val="243244"/>
@@ -10833,7 +10470,7 @@
           <p:cNvPr id="8" name="">
             <a:extLst xmlns:a="http://schemas.openxmlformats.org/drawingml/2006/main">
               <a:ext uri="{FF2B5EF4-FFF2-40B4-BE49-F238E27FC236}">
-                <a16:creationId xmlns:a16="http://schemas.microsoft.com/office/drawing/2014/main" id="{2F930F35-C6F8-4DD2-82D7-EFBCBC0445FB}"/>
+                <a16:creationId xmlns:a16="http://schemas.microsoft.com/office/drawing/2014/main" id="{ADEA1986-B050-4800-A71F-8502355E4E77}"/>
               </a:ext>
             </a:extLst>
           </p:cNvPr>
@@ -10870,7 +10507,6 @@
               </a:defRPr>
             </a:defPPr>
             <a:lvl1pPr>
-              <a:buNone/>
               <a:defRPr sz="1725" b="0">
                 <a:solidFill>
                   <a:srgbClr val="243244"/>
@@ -10881,7 +10517,6 @@
               </a:defRPr>
             </a:lvl1pPr>
             <a:lvl2pPr>
-              <a:buNone/>
               <a:defRPr sz="1725" b="0">
                 <a:solidFill>
                   <a:srgbClr val="243244"/>
@@ -10892,7 +10527,6 @@
               </a:defRPr>
             </a:lvl2pPr>
             <a:lvl3pPr>
-              <a:buNone/>
               <a:defRPr sz="1725" b="0">
                 <a:solidFill>
                   <a:srgbClr val="243244"/>
@@ -10903,7 +10537,6 @@
               </a:defRPr>
             </a:lvl3pPr>
             <a:lvl4pPr>
-              <a:buNone/>
               <a:defRPr sz="1725" b="0">
                 <a:solidFill>
                   <a:srgbClr val="243244"/>
@@ -10914,7 +10547,6 @@
               </a:defRPr>
             </a:lvl4pPr>
             <a:lvl5pPr>
-              <a:buNone/>
               <a:defRPr sz="1725" b="0">
                 <a:solidFill>
                   <a:srgbClr val="243244"/>
@@ -10925,7 +10557,6 @@
               </a:defRPr>
             </a:lvl5pPr>
             <a:lvl6pPr>
-              <a:buNone/>
               <a:defRPr sz="1725" b="0">
                 <a:solidFill>
                   <a:srgbClr val="243244"/>
@@ -10936,7 +10567,6 @@
               </a:defRPr>
             </a:lvl6pPr>
             <a:lvl7pPr>
-              <a:buNone/>
               <a:defRPr sz="1725" b="0">
                 <a:solidFill>
                   <a:srgbClr val="243244"/>
@@ -10947,7 +10577,6 @@
               </a:defRPr>
             </a:lvl7pPr>
             <a:lvl8pPr>
-              <a:buNone/>
               <a:defRPr sz="1725" b="0">
                 <a:solidFill>
                   <a:srgbClr val="243244"/>
@@ -10958,7 +10587,6 @@
               </a:defRPr>
             </a:lvl8pPr>
             <a:lvl9pPr>
-              <a:buNone/>
               <a:defRPr sz="1725" b="0">
                 <a:solidFill>
                   <a:srgbClr val="243244"/>
@@ -10971,7 +10599,6 @@
           </a:lstStyle>
           <a:p xmlns:a="http://schemas.openxmlformats.org/drawingml/2006/main">
             <a:pPr>
-              <a:buNone/>
               <a:defRPr sz="1725" b="0">
                 <a:solidFill>
                   <a:srgbClr val="243244"/>
@@ -10998,7 +10625,7 @@
     </p:spTree>
     <p:extLst>
       <p:ext uri="{BB962C8B-B14F-4D97-AF65-F5344CB8AC3E}">
-        <p14:creationId xmlns:p14="http://schemas.microsoft.com/office/powerpoint/2010/main" val="1433227291"/>
+        <p14:creationId xmlns:p14="http://schemas.microsoft.com/office/powerpoint/2010/main" val="488646761"/>
       </p:ext>
     </p:extLst>
   </p:cSld>
@@ -11029,7 +10656,7 @@
           <p:cNvPr id="9" name="">
             <a:extLst xmlns:a="http://schemas.openxmlformats.org/drawingml/2006/main">
               <a:ext uri="{FF2B5EF4-FFF2-40B4-BE49-F238E27FC236}">
-                <a16:creationId xmlns:a16="http://schemas.microsoft.com/office/drawing/2014/main" id="{5C147891-CFF2-4D34-B0B1-CD0C4D165541}"/>
+                <a16:creationId xmlns:a16="http://schemas.microsoft.com/office/drawing/2014/main" id="{A79524FC-42D3-40FE-A843-605BF82F4509}"/>
               </a:ext>
             </a:extLst>
           </p:cNvPr>
@@ -11066,7 +10693,6 @@
               </a:defRPr>
             </a:defPPr>
             <a:lvl1pPr>
-              <a:buNone/>
               <a:defRPr sz="900" b="1">
                 <a:solidFill>
                   <a:srgbClr val="802D42"/>
@@ -11077,7 +10703,6 @@
               </a:defRPr>
             </a:lvl1pPr>
             <a:lvl2pPr>
-              <a:buNone/>
               <a:defRPr sz="900" b="1">
                 <a:solidFill>
                   <a:srgbClr val="802D42"/>
@@ -11088,7 +10713,6 @@
               </a:defRPr>
             </a:lvl2pPr>
             <a:lvl3pPr>
-              <a:buNone/>
               <a:defRPr sz="900" b="1">
                 <a:solidFill>
                   <a:srgbClr val="802D42"/>
@@ -11099,7 +10723,6 @@
               </a:defRPr>
             </a:lvl3pPr>
             <a:lvl4pPr>
-              <a:buNone/>
               <a:defRPr sz="900" b="1">
                 <a:solidFill>
                   <a:srgbClr val="802D42"/>
@@ -11110,7 +10733,6 @@
               </a:defRPr>
             </a:lvl4pPr>
             <a:lvl5pPr>
-              <a:buNone/>
               <a:defRPr sz="900" b="1">
                 <a:solidFill>
                   <a:srgbClr val="802D42"/>
@@ -11121,7 +10743,6 @@
               </a:defRPr>
             </a:lvl5pPr>
             <a:lvl6pPr>
-              <a:buNone/>
               <a:defRPr sz="900" b="1">
                 <a:solidFill>
                   <a:srgbClr val="802D42"/>
@@ -11132,7 +10753,6 @@
               </a:defRPr>
             </a:lvl6pPr>
             <a:lvl7pPr>
-              <a:buNone/>
               <a:defRPr sz="900" b="1">
                 <a:solidFill>
                   <a:srgbClr val="802D42"/>
@@ -11143,7 +10763,6 @@
               </a:defRPr>
             </a:lvl7pPr>
             <a:lvl8pPr>
-              <a:buNone/>
               <a:defRPr sz="900" b="1">
                 <a:solidFill>
                   <a:srgbClr val="802D42"/>
@@ -11154,7 +10773,6 @@
               </a:defRPr>
             </a:lvl8pPr>
             <a:lvl9pPr>
-              <a:buNone/>
               <a:defRPr sz="900" b="1">
                 <a:solidFill>
                   <a:srgbClr val="802D42"/>
@@ -11167,7 +10785,6 @@
           </a:lstStyle>
           <a:p xmlns:a="http://schemas.openxmlformats.org/drawingml/2006/main">
             <a:pPr>
-              <a:buNone/>
               <a:defRPr sz="900" b="1">
                 <a:solidFill>
                   <a:srgbClr val="802D42"/>
@@ -11196,7 +10813,7 @@
           <p:cNvPr id="2" name="">
             <a:extLst xmlns:a="http://schemas.openxmlformats.org/drawingml/2006/main">
               <a:ext uri="{FF2B5EF4-FFF2-40B4-BE49-F238E27FC236}">
-                <a16:creationId xmlns:a16="http://schemas.microsoft.com/office/drawing/2014/main" id="{53D900B5-5658-4B94-A146-A01D56C4BA52}"/>
+                <a16:creationId xmlns:a16="http://schemas.microsoft.com/office/drawing/2014/main" id="{C2B397BA-DD24-4EA7-A31E-4FCE31A7CFEC}"/>
               </a:ext>
             </a:extLst>
           </p:cNvPr>
@@ -11233,7 +10850,6 @@
               </a:defRPr>
             </a:defPPr>
             <a:lvl1pPr>
-              <a:buNone/>
               <a:defRPr sz="2400" b="1">
                 <a:solidFill>
                   <a:srgbClr val="243244"/>
@@ -11244,7 +10860,6 @@
               </a:defRPr>
             </a:lvl1pPr>
             <a:lvl2pPr>
-              <a:buNone/>
               <a:defRPr sz="2400" b="1">
                 <a:solidFill>
                   <a:srgbClr val="243244"/>
@@ -11255,7 +10870,6 @@
               </a:defRPr>
             </a:lvl2pPr>
             <a:lvl3pPr>
-              <a:buNone/>
               <a:defRPr sz="2400" b="1">
                 <a:solidFill>
                   <a:srgbClr val="243244"/>
@@ -11266,7 +10880,6 @@
               </a:defRPr>
             </a:lvl3pPr>
             <a:lvl4pPr>
-              <a:buNone/>
               <a:defRPr sz="2400" b="1">
                 <a:solidFill>
                   <a:srgbClr val="243244"/>
@@ -11277,7 +10890,6 @@
               </a:defRPr>
             </a:lvl4pPr>
             <a:lvl5pPr>
-              <a:buNone/>
               <a:defRPr sz="2400" b="1">
                 <a:solidFill>
                   <a:srgbClr val="243244"/>
@@ -11288,7 +10900,6 @@
               </a:defRPr>
             </a:lvl5pPr>
             <a:lvl6pPr>
-              <a:buNone/>
               <a:defRPr sz="2400" b="1">
                 <a:solidFill>
                   <a:srgbClr val="243244"/>
@@ -11299,7 +10910,6 @@
               </a:defRPr>
             </a:lvl6pPr>
             <a:lvl7pPr>
-              <a:buNone/>
               <a:defRPr sz="2400" b="1">
                 <a:solidFill>
                   <a:srgbClr val="243244"/>
@@ -11310,7 +10920,6 @@
               </a:defRPr>
             </a:lvl7pPr>
             <a:lvl8pPr>
-              <a:buNone/>
               <a:defRPr sz="2400" b="1">
                 <a:solidFill>
                   <a:srgbClr val="243244"/>
@@ -11321,7 +10930,6 @@
               </a:defRPr>
             </a:lvl8pPr>
             <a:lvl9pPr>
-              <a:buNone/>
               <a:defRPr sz="2400" b="1">
                 <a:solidFill>
                   <a:srgbClr val="243244"/>
@@ -11334,7 +10942,6 @@
           </a:lstStyle>
           <a:p xmlns:a="http://schemas.openxmlformats.org/drawingml/2006/main">
             <a:pPr>
-              <a:buNone/>
               <a:defRPr sz="2400" b="1">
                 <a:solidFill>
                   <a:srgbClr val="243244"/>
@@ -11363,7 +10970,7 @@
           <p:cNvPr id="3" name="">
             <a:extLst xmlns:a="http://schemas.openxmlformats.org/drawingml/2006/main">
               <a:ext uri="{FF2B5EF4-FFF2-40B4-BE49-F238E27FC236}">
-                <a16:creationId xmlns:a16="http://schemas.microsoft.com/office/drawing/2014/main" id="{8C622C71-D10F-4A48-9994-251AA607DC84}"/>
+                <a16:creationId xmlns:a16="http://schemas.microsoft.com/office/drawing/2014/main" id="{EF1CCEAF-8D01-414D-953B-06A7421468C9}"/>
               </a:ext>
             </a:extLst>
           </p:cNvPr>
@@ -11400,7 +11007,6 @@
               </a:defRPr>
             </a:defPPr>
             <a:lvl1pPr>
-              <a:buNone/>
               <a:defRPr sz="1275" b="0">
                 <a:solidFill>
                   <a:srgbClr val="596678"/>
@@ -11411,7 +11017,6 @@
               </a:defRPr>
             </a:lvl1pPr>
             <a:lvl2pPr>
-              <a:buNone/>
               <a:defRPr sz="1275" b="0">
                 <a:solidFill>
                   <a:srgbClr val="596678"/>
@@ -11422,7 +11027,6 @@
               </a:defRPr>
             </a:lvl2pPr>
             <a:lvl3pPr>
-              <a:buNone/>
               <a:defRPr sz="1275" b="0">
                 <a:solidFill>
                   <a:srgbClr val="596678"/>
@@ -11433,7 +11037,6 @@
               </a:defRPr>
             </a:lvl3pPr>
             <a:lvl4pPr>
-              <a:buNone/>
               <a:defRPr sz="1275" b="0">
                 <a:solidFill>
                   <a:srgbClr val="596678"/>
@@ -11444,7 +11047,6 @@
               </a:defRPr>
             </a:lvl4pPr>
             <a:lvl5pPr>
-              <a:buNone/>
               <a:defRPr sz="1275" b="0">
                 <a:solidFill>
                   <a:srgbClr val="596678"/>
@@ -11455,7 +11057,6 @@
               </a:defRPr>
             </a:lvl5pPr>
             <a:lvl6pPr>
-              <a:buNone/>
               <a:defRPr sz="1275" b="0">
                 <a:solidFill>
                   <a:srgbClr val="596678"/>
@@ -11466,7 +11067,6 @@
               </a:defRPr>
             </a:lvl6pPr>
             <a:lvl7pPr>
-              <a:buNone/>
               <a:defRPr sz="1275" b="0">
                 <a:solidFill>
                   <a:srgbClr val="596678"/>
@@ -11477,7 +11077,6 @@
               </a:defRPr>
             </a:lvl7pPr>
             <a:lvl8pPr>
-              <a:buNone/>
               <a:defRPr sz="1275" b="0">
                 <a:solidFill>
                   <a:srgbClr val="596678"/>
@@ -11488,7 +11087,6 @@
               </a:defRPr>
             </a:lvl8pPr>
             <a:lvl9pPr>
-              <a:buNone/>
               <a:defRPr sz="1275" b="0">
                 <a:solidFill>
                   <a:srgbClr val="596678"/>
@@ -11501,7 +11099,6 @@
           </a:lstStyle>
           <a:p xmlns:a="http://schemas.openxmlformats.org/drawingml/2006/main">
             <a:pPr>
-              <a:buNone/>
               <a:defRPr sz="1275" b="0">
                 <a:solidFill>
                   <a:srgbClr val="596678"/>
@@ -11530,7 +11127,7 @@
           <p:cNvPr id="4" name="">
             <a:extLst xmlns:a="http://schemas.openxmlformats.org/drawingml/2006/main">
               <a:ext uri="{FF2B5EF4-FFF2-40B4-BE49-F238E27FC236}">
-                <a16:creationId xmlns:a16="http://schemas.microsoft.com/office/drawing/2014/main" id="{4B147534-5C0B-4317-8F85-530FC4C37834}"/>
+                <a16:creationId xmlns:a16="http://schemas.microsoft.com/office/drawing/2014/main" id="{2C97BA74-B99A-4FAF-AA88-16C39C77D7F8}"/>
               </a:ext>
             </a:extLst>
           </p:cNvPr>
@@ -11567,7 +11164,6 @@
               </a:defRPr>
             </a:defPPr>
             <a:lvl1pPr>
-              <a:buNone/>
               <a:defRPr sz="825" b="0">
                 <a:solidFill>
                   <a:srgbClr val="596678"/>
@@ -11578,7 +11174,6 @@
               </a:defRPr>
             </a:lvl1pPr>
             <a:lvl2pPr>
-              <a:buNone/>
               <a:defRPr sz="825" b="0">
                 <a:solidFill>
                   <a:srgbClr val="596678"/>
@@ -11589,7 +11184,6 @@
               </a:defRPr>
             </a:lvl2pPr>
             <a:lvl3pPr>
-              <a:buNone/>
               <a:defRPr sz="825" b="0">
                 <a:solidFill>
                   <a:srgbClr val="596678"/>
@@ -11600,7 +11194,6 @@
               </a:defRPr>
             </a:lvl3pPr>
             <a:lvl4pPr>
-              <a:buNone/>
               <a:defRPr sz="825" b="0">
                 <a:solidFill>
                   <a:srgbClr val="596678"/>
@@ -11611,7 +11204,6 @@
               </a:defRPr>
             </a:lvl4pPr>
             <a:lvl5pPr>
-              <a:buNone/>
               <a:defRPr sz="825" b="0">
                 <a:solidFill>
                   <a:srgbClr val="596678"/>
@@ -11622,7 +11214,6 @@
               </a:defRPr>
             </a:lvl5pPr>
             <a:lvl6pPr>
-              <a:buNone/>
               <a:defRPr sz="825" b="0">
                 <a:solidFill>
                   <a:srgbClr val="596678"/>
@@ -11633,7 +11224,6 @@
               </a:defRPr>
             </a:lvl6pPr>
             <a:lvl7pPr>
-              <a:buNone/>
               <a:defRPr sz="825" b="0">
                 <a:solidFill>
                   <a:srgbClr val="596678"/>
@@ -11644,7 +11234,6 @@
               </a:defRPr>
             </a:lvl7pPr>
             <a:lvl8pPr>
-              <a:buNone/>
               <a:defRPr sz="825" b="0">
                 <a:solidFill>
                   <a:srgbClr val="596678"/>
@@ -11655,7 +11244,6 @@
               </a:defRPr>
             </a:lvl8pPr>
             <a:lvl9pPr>
-              <a:buNone/>
               <a:defRPr sz="825" b="0">
                 <a:solidFill>
                   <a:srgbClr val="596678"/>
@@ -11668,7 +11256,6 @@
           </a:lstStyle>
           <a:p xmlns:a="http://schemas.openxmlformats.org/drawingml/2006/main">
             <a:pPr>
-              <a:buNone/>
               <a:defRPr sz="825" b="0">
                 <a:solidFill>
                   <a:srgbClr val="596678"/>
@@ -11697,7 +11284,7 @@
           <p:cNvPr id="5" name="">
             <a:extLst xmlns:a="http://schemas.openxmlformats.org/drawingml/2006/main">
               <a:ext uri="{FF2B5EF4-FFF2-40B4-BE49-F238E27FC236}">
-                <a16:creationId xmlns:a16="http://schemas.microsoft.com/office/drawing/2014/main" id="{BC257563-DF99-4584-9796-BBC43C5AC884}"/>
+                <a16:creationId xmlns:a16="http://schemas.microsoft.com/office/drawing/2014/main" id="{062E600D-68D9-40F7-9479-6C996B68BF7E}"/>
               </a:ext>
             </a:extLst>
           </p:cNvPr>
@@ -11734,7 +11321,6 @@
               </a:defRPr>
             </a:defPPr>
             <a:lvl1pPr>
-              <a:buNone/>
               <a:defRPr sz="825" b="1">
                 <a:solidFill>
                   <a:srgbClr val="802D42"/>
@@ -11745,7 +11331,6 @@
               </a:defRPr>
             </a:lvl1pPr>
             <a:lvl2pPr>
-              <a:buNone/>
               <a:defRPr sz="825" b="1">
                 <a:solidFill>
                   <a:srgbClr val="802D42"/>
@@ -11756,7 +11341,6 @@
               </a:defRPr>
             </a:lvl2pPr>
             <a:lvl3pPr>
-              <a:buNone/>
               <a:defRPr sz="825" b="1">
                 <a:solidFill>
                   <a:srgbClr val="802D42"/>
@@ -11767,7 +11351,6 @@
               </a:defRPr>
             </a:lvl3pPr>
             <a:lvl4pPr>
-              <a:buNone/>
               <a:defRPr sz="825" b="1">
                 <a:solidFill>
                   <a:srgbClr val="802D42"/>
@@ -11778,7 +11361,6 @@
               </a:defRPr>
             </a:lvl4pPr>
             <a:lvl5pPr>
-              <a:buNone/>
               <a:defRPr sz="825" b="1">
                 <a:solidFill>
                   <a:srgbClr val="802D42"/>
@@ -11789,7 +11371,6 @@
               </a:defRPr>
             </a:lvl5pPr>
             <a:lvl6pPr>
-              <a:buNone/>
               <a:defRPr sz="825" b="1">
                 <a:solidFill>
                   <a:srgbClr val="802D42"/>
@@ -11800,7 +11381,6 @@
               </a:defRPr>
             </a:lvl6pPr>
             <a:lvl7pPr>
-              <a:buNone/>
               <a:defRPr sz="825" b="1">
                 <a:solidFill>
                   <a:srgbClr val="802D42"/>
@@ -11811,7 +11391,6 @@
               </a:defRPr>
             </a:lvl7pPr>
             <a:lvl8pPr>
-              <a:buNone/>
               <a:defRPr sz="825" b="1">
                 <a:solidFill>
                   <a:srgbClr val="802D42"/>
@@ -11822,7 +11401,6 @@
               </a:defRPr>
             </a:lvl8pPr>
             <a:lvl9pPr>
-              <a:buNone/>
               <a:defRPr sz="825" b="1">
                 <a:solidFill>
                   <a:srgbClr val="802D42"/>
@@ -11835,7 +11413,6 @@
           </a:lstStyle>
           <a:p xmlns:a="http://schemas.openxmlformats.org/drawingml/2006/main">
             <a:pPr>
-              <a:buNone/>
               <a:defRPr sz="825" b="1">
                 <a:solidFill>
                   <a:srgbClr val="802D42"/>
@@ -11864,7 +11441,7 @@
           <p:cNvPr id="6" name="">
             <a:extLst xmlns:a="http://schemas.openxmlformats.org/drawingml/2006/main">
               <a:ext uri="{FF2B5EF4-FFF2-40B4-BE49-F238E27FC236}">
-                <a16:creationId xmlns:a16="http://schemas.microsoft.com/office/drawing/2014/main" id="{1C0380AB-12B1-4052-B2C4-B4E02CD36C92}"/>
+                <a16:creationId xmlns:a16="http://schemas.microsoft.com/office/drawing/2014/main" id="{87CA5327-4959-444B-AF63-1F08B8E6B96E}"/>
               </a:ext>
             </a:extLst>
           </p:cNvPr>
@@ -11901,7 +11478,6 @@
               </a:defRPr>
             </a:defPPr>
             <a:lvl1pPr>
-              <a:buNone/>
               <a:defRPr sz="1725" b="0">
                 <a:solidFill>
                   <a:srgbClr val="243244"/>
@@ -11912,7 +11488,6 @@
               </a:defRPr>
             </a:lvl1pPr>
             <a:lvl2pPr>
-              <a:buNone/>
               <a:defRPr sz="1725" b="0">
                 <a:solidFill>
                   <a:srgbClr val="243244"/>
@@ -11923,7 +11498,6 @@
               </a:defRPr>
             </a:lvl2pPr>
             <a:lvl3pPr>
-              <a:buNone/>
               <a:defRPr sz="1725" b="0">
                 <a:solidFill>
                   <a:srgbClr val="243244"/>
@@ -11934,7 +11508,6 @@
               </a:defRPr>
             </a:lvl3pPr>
             <a:lvl4pPr>
-              <a:buNone/>
               <a:defRPr sz="1725" b="0">
                 <a:solidFill>
                   <a:srgbClr val="243244"/>
@@ -11945,7 +11518,6 @@
               </a:defRPr>
             </a:lvl4pPr>
             <a:lvl5pPr>
-              <a:buNone/>
               <a:defRPr sz="1725" b="0">
                 <a:solidFill>
                   <a:srgbClr val="243244"/>
@@ -11956,7 +11528,6 @@
               </a:defRPr>
             </a:lvl5pPr>
             <a:lvl6pPr>
-              <a:buNone/>
               <a:defRPr sz="1725" b="0">
                 <a:solidFill>
                   <a:srgbClr val="243244"/>
@@ -11967,7 +11538,6 @@
               </a:defRPr>
             </a:lvl6pPr>
             <a:lvl7pPr>
-              <a:buNone/>
               <a:defRPr sz="1725" b="0">
                 <a:solidFill>
                   <a:srgbClr val="243244"/>
@@ -11978,7 +11548,6 @@
               </a:defRPr>
             </a:lvl7pPr>
             <a:lvl8pPr>
-              <a:buNone/>
               <a:defRPr sz="1725" b="0">
                 <a:solidFill>
                   <a:srgbClr val="243244"/>
@@ -11989,7 +11558,6 @@
               </a:defRPr>
             </a:lvl8pPr>
             <a:lvl9pPr>
-              <a:buNone/>
               <a:defRPr sz="1725" b="0">
                 <a:solidFill>
                   <a:srgbClr val="243244"/>
@@ -12002,7 +11570,6 @@
           </a:lstStyle>
           <a:p xmlns:a="http://schemas.openxmlformats.org/drawingml/2006/main">
             <a:pPr>
-              <a:buNone/>
               <a:defRPr sz="1725" b="0">
                 <a:solidFill>
                   <a:srgbClr val="243244"/>
@@ -12031,7 +11598,7 @@
           <p:cNvPr id="7" name="">
             <a:extLst xmlns:a="http://schemas.openxmlformats.org/drawingml/2006/main">
               <a:ext uri="{FF2B5EF4-FFF2-40B4-BE49-F238E27FC236}">
-                <a16:creationId xmlns:a16="http://schemas.microsoft.com/office/drawing/2014/main" id="{6CF0238C-D917-43A6-A452-DFD45CA05848}"/>
+                <a16:creationId xmlns:a16="http://schemas.microsoft.com/office/drawing/2014/main" id="{4EB72FFD-36FA-42BF-B910-3FF6AD28E962}"/>
               </a:ext>
             </a:extLst>
           </p:cNvPr>
@@ -12068,7 +11635,6 @@
               </a:defRPr>
             </a:defPPr>
             <a:lvl1pPr>
-              <a:buNone/>
               <a:defRPr sz="1725" b="0">
                 <a:solidFill>
                   <a:srgbClr val="243244"/>
@@ -12079,7 +11645,6 @@
               </a:defRPr>
             </a:lvl1pPr>
             <a:lvl2pPr>
-              <a:buNone/>
               <a:defRPr sz="1725" b="0">
                 <a:solidFill>
                   <a:srgbClr val="243244"/>
@@ -12090,7 +11655,6 @@
               </a:defRPr>
             </a:lvl2pPr>
             <a:lvl3pPr>
-              <a:buNone/>
               <a:defRPr sz="1725" b="0">
                 <a:solidFill>
                   <a:srgbClr val="243244"/>
@@ -12101,7 +11665,6 @@
               </a:defRPr>
             </a:lvl3pPr>
             <a:lvl4pPr>
-              <a:buNone/>
               <a:defRPr sz="1725" b="0">
                 <a:solidFill>
                   <a:srgbClr val="243244"/>
@@ -12112,7 +11675,6 @@
               </a:defRPr>
             </a:lvl4pPr>
             <a:lvl5pPr>
-              <a:buNone/>
               <a:defRPr sz="1725" b="0">
                 <a:solidFill>
                   <a:srgbClr val="243244"/>
@@ -12123,7 +11685,6 @@
               </a:defRPr>
             </a:lvl5pPr>
             <a:lvl6pPr>
-              <a:buNone/>
               <a:defRPr sz="1725" b="0">
                 <a:solidFill>
                   <a:srgbClr val="243244"/>
@@ -12134,7 +11695,6 @@
               </a:defRPr>
             </a:lvl6pPr>
             <a:lvl7pPr>
-              <a:buNone/>
               <a:defRPr sz="1725" b="0">
                 <a:solidFill>
                   <a:srgbClr val="243244"/>
@@ -12145,7 +11705,6 @@
               </a:defRPr>
             </a:lvl7pPr>
             <a:lvl8pPr>
-              <a:buNone/>
               <a:defRPr sz="1725" b="0">
                 <a:solidFill>
                   <a:srgbClr val="243244"/>
@@ -12156,7 +11715,6 @@
               </a:defRPr>
             </a:lvl8pPr>
             <a:lvl9pPr>
-              <a:buNone/>
               <a:defRPr sz="1725" b="0">
                 <a:solidFill>
                   <a:srgbClr val="243244"/>
@@ -12169,7 +11727,6 @@
           </a:lstStyle>
           <a:p xmlns:a="http://schemas.openxmlformats.org/drawingml/2006/main">
             <a:pPr>
-              <a:buNone/>
               <a:defRPr sz="1725" b="0">
                 <a:solidFill>
                   <a:srgbClr val="243244"/>
@@ -12198,7 +11755,7 @@
           <p:cNvPr id="8" name="">
             <a:extLst xmlns:a="http://schemas.openxmlformats.org/drawingml/2006/main">
               <a:ext uri="{FF2B5EF4-FFF2-40B4-BE49-F238E27FC236}">
-                <a16:creationId xmlns:a16="http://schemas.microsoft.com/office/drawing/2014/main" id="{08E787CC-7B06-4B7A-B734-3B49630F22B2}"/>
+                <a16:creationId xmlns:a16="http://schemas.microsoft.com/office/drawing/2014/main" id="{8F28C3F7-8F1F-40BF-A9F4-9758448B9CA7}"/>
               </a:ext>
             </a:extLst>
           </p:cNvPr>
@@ -12235,7 +11792,6 @@
               </a:defRPr>
             </a:defPPr>
             <a:lvl1pPr>
-              <a:buNone/>
               <a:defRPr sz="1725" b="0">
                 <a:solidFill>
                   <a:srgbClr val="243244"/>
@@ -12246,7 +11802,6 @@
               </a:defRPr>
             </a:lvl1pPr>
             <a:lvl2pPr>
-              <a:buNone/>
               <a:defRPr sz="1725" b="0">
                 <a:solidFill>
                   <a:srgbClr val="243244"/>
@@ -12257,7 +11812,6 @@
               </a:defRPr>
             </a:lvl2pPr>
             <a:lvl3pPr>
-              <a:buNone/>
               <a:defRPr sz="1725" b="0">
                 <a:solidFill>
                   <a:srgbClr val="243244"/>
@@ -12268,7 +11822,6 @@
               </a:defRPr>
             </a:lvl3pPr>
             <a:lvl4pPr>
-              <a:buNone/>
               <a:defRPr sz="1725" b="0">
                 <a:solidFill>
                   <a:srgbClr val="243244"/>
@@ -12279,7 +11832,6 @@
               </a:defRPr>
             </a:lvl4pPr>
             <a:lvl5pPr>
-              <a:buNone/>
               <a:defRPr sz="1725" b="0">
                 <a:solidFill>
                   <a:srgbClr val="243244"/>
@@ -12290,7 +11842,6 @@
               </a:defRPr>
             </a:lvl5pPr>
             <a:lvl6pPr>
-              <a:buNone/>
               <a:defRPr sz="1725" b="0">
                 <a:solidFill>
                   <a:srgbClr val="243244"/>
@@ -12301,7 +11852,6 @@
               </a:defRPr>
             </a:lvl6pPr>
             <a:lvl7pPr>
-              <a:buNone/>
               <a:defRPr sz="1725" b="0">
                 <a:solidFill>
                   <a:srgbClr val="243244"/>
@@ -12312,7 +11862,6 @@
               </a:defRPr>
             </a:lvl7pPr>
             <a:lvl8pPr>
-              <a:buNone/>
               <a:defRPr sz="1725" b="0">
                 <a:solidFill>
                   <a:srgbClr val="243244"/>
@@ -12323,7 +11872,6 @@
               </a:defRPr>
             </a:lvl8pPr>
             <a:lvl9pPr>
-              <a:buNone/>
               <a:defRPr sz="1725" b="0">
                 <a:solidFill>
                   <a:srgbClr val="243244"/>
@@ -12336,7 +11884,6 @@
           </a:lstStyle>
           <a:p xmlns:a="http://schemas.openxmlformats.org/drawingml/2006/main">
             <a:pPr>
-              <a:buNone/>
               <a:defRPr sz="1725" b="0">
                 <a:solidFill>
                   <a:srgbClr val="243244"/>
@@ -12363,7 +11910,7 @@
     </p:spTree>
     <p:extLst>
       <p:ext uri="{BB962C8B-B14F-4D97-AF65-F5344CB8AC3E}">
-        <p14:creationId xmlns:p14="http://schemas.microsoft.com/office/powerpoint/2010/main" val="798188206"/>
+        <p14:creationId xmlns:p14="http://schemas.microsoft.com/office/powerpoint/2010/main" val="1761873006"/>
       </p:ext>
     </p:extLst>
   </p:cSld>
@@ -12394,7 +11941,7 @@
           <p:cNvPr id="9" name="">
             <a:extLst xmlns:a="http://schemas.openxmlformats.org/drawingml/2006/main">
               <a:ext uri="{FF2B5EF4-FFF2-40B4-BE49-F238E27FC236}">
-                <a16:creationId xmlns:a16="http://schemas.microsoft.com/office/drawing/2014/main" id="{85A54C82-C92C-48EB-BD9F-8A4F335293F3}"/>
+                <a16:creationId xmlns:a16="http://schemas.microsoft.com/office/drawing/2014/main" id="{BA1A5331-8B46-42CF-81CF-FD6FE22709F4}"/>
               </a:ext>
             </a:extLst>
           </p:cNvPr>
@@ -12431,7 +11978,6 @@
               </a:defRPr>
             </a:defPPr>
             <a:lvl1pPr>
-              <a:buNone/>
               <a:defRPr sz="900" b="1">
                 <a:solidFill>
                   <a:srgbClr val="802D42"/>
@@ -12442,7 +11988,6 @@
               </a:defRPr>
             </a:lvl1pPr>
             <a:lvl2pPr>
-              <a:buNone/>
               <a:defRPr sz="900" b="1">
                 <a:solidFill>
                   <a:srgbClr val="802D42"/>
@@ -12453,7 +11998,6 @@
               </a:defRPr>
             </a:lvl2pPr>
             <a:lvl3pPr>
-              <a:buNone/>
               <a:defRPr sz="900" b="1">
                 <a:solidFill>
                   <a:srgbClr val="802D42"/>
@@ -12464,7 +12008,6 @@
               </a:defRPr>
             </a:lvl3pPr>
             <a:lvl4pPr>
-              <a:buNone/>
               <a:defRPr sz="900" b="1">
                 <a:solidFill>
                   <a:srgbClr val="802D42"/>
@@ -12475,7 +12018,6 @@
               </a:defRPr>
             </a:lvl4pPr>
             <a:lvl5pPr>
-              <a:buNone/>
               <a:defRPr sz="900" b="1">
                 <a:solidFill>
                   <a:srgbClr val="802D42"/>
@@ -12486,7 +12028,6 @@
               </a:defRPr>
             </a:lvl5pPr>
             <a:lvl6pPr>
-              <a:buNone/>
               <a:defRPr sz="900" b="1">
                 <a:solidFill>
                   <a:srgbClr val="802D42"/>
@@ -12497,7 +12038,6 @@
               </a:defRPr>
             </a:lvl6pPr>
             <a:lvl7pPr>
-              <a:buNone/>
               <a:defRPr sz="900" b="1">
                 <a:solidFill>
                   <a:srgbClr val="802D42"/>
@@ -12508,7 +12048,6 @@
               </a:defRPr>
             </a:lvl7pPr>
             <a:lvl8pPr>
-              <a:buNone/>
               <a:defRPr sz="900" b="1">
                 <a:solidFill>
                   <a:srgbClr val="802D42"/>
@@ -12519,7 +12058,6 @@
               </a:defRPr>
             </a:lvl8pPr>
             <a:lvl9pPr>
-              <a:buNone/>
               <a:defRPr sz="900" b="1">
                 <a:solidFill>
                   <a:srgbClr val="802D42"/>
@@ -12532,7 +12070,6 @@
           </a:lstStyle>
           <a:p xmlns:a="http://schemas.openxmlformats.org/drawingml/2006/main">
             <a:pPr>
-              <a:buNone/>
               <a:defRPr sz="900" b="1">
                 <a:solidFill>
                   <a:srgbClr val="802D42"/>
@@ -12561,7 +12098,7 @@
           <p:cNvPr id="2" name="">
             <a:extLst xmlns:a="http://schemas.openxmlformats.org/drawingml/2006/main">
               <a:ext uri="{FF2B5EF4-FFF2-40B4-BE49-F238E27FC236}">
-                <a16:creationId xmlns:a16="http://schemas.microsoft.com/office/drawing/2014/main" id="{C8195685-DC4B-4625-9AEF-1DD5C8FA763C}"/>
+                <a16:creationId xmlns:a16="http://schemas.microsoft.com/office/drawing/2014/main" id="{A63B3A3E-B0AA-45E8-95DE-7843288FB235}"/>
               </a:ext>
             </a:extLst>
           </p:cNvPr>
@@ -12598,7 +12135,6 @@
               </a:defRPr>
             </a:defPPr>
             <a:lvl1pPr>
-              <a:buNone/>
               <a:defRPr sz="2400" b="1">
                 <a:solidFill>
                   <a:srgbClr val="243244"/>
@@ -12609,7 +12145,6 @@
               </a:defRPr>
             </a:lvl1pPr>
             <a:lvl2pPr>
-              <a:buNone/>
               <a:defRPr sz="2400" b="1">
                 <a:solidFill>
                   <a:srgbClr val="243244"/>
@@ -12620,7 +12155,6 @@
               </a:defRPr>
             </a:lvl2pPr>
             <a:lvl3pPr>
-              <a:buNone/>
               <a:defRPr sz="2400" b="1">
                 <a:solidFill>
                   <a:srgbClr val="243244"/>
@@ -12631,7 +12165,6 @@
               </a:defRPr>
             </a:lvl3pPr>
             <a:lvl4pPr>
-              <a:buNone/>
               <a:defRPr sz="2400" b="1">
                 <a:solidFill>
                   <a:srgbClr val="243244"/>
@@ -12642,7 +12175,6 @@
               </a:defRPr>
             </a:lvl4pPr>
             <a:lvl5pPr>
-              <a:buNone/>
               <a:defRPr sz="2400" b="1">
                 <a:solidFill>
                   <a:srgbClr val="243244"/>
@@ -12653,7 +12185,6 @@
               </a:defRPr>
             </a:lvl5pPr>
             <a:lvl6pPr>
-              <a:buNone/>
               <a:defRPr sz="2400" b="1">
                 <a:solidFill>
                   <a:srgbClr val="243244"/>
@@ -12664,7 +12195,6 @@
               </a:defRPr>
             </a:lvl6pPr>
             <a:lvl7pPr>
-              <a:buNone/>
               <a:defRPr sz="2400" b="1">
                 <a:solidFill>
                   <a:srgbClr val="243244"/>
@@ -12675,7 +12205,6 @@
               </a:defRPr>
             </a:lvl7pPr>
             <a:lvl8pPr>
-              <a:buNone/>
               <a:defRPr sz="2400" b="1">
                 <a:solidFill>
                   <a:srgbClr val="243244"/>
@@ -12686,7 +12215,6 @@
               </a:defRPr>
             </a:lvl8pPr>
             <a:lvl9pPr>
-              <a:buNone/>
               <a:defRPr sz="2400" b="1">
                 <a:solidFill>
                   <a:srgbClr val="243244"/>
@@ -12699,7 +12227,6 @@
           </a:lstStyle>
           <a:p xmlns:a="http://schemas.openxmlformats.org/drawingml/2006/main">
             <a:pPr>
-              <a:buNone/>
               <a:defRPr sz="2400" b="1">
                 <a:solidFill>
                   <a:srgbClr val="243244"/>
@@ -12728,7 +12255,7 @@
           <p:cNvPr id="3" name="">
             <a:extLst xmlns:a="http://schemas.openxmlformats.org/drawingml/2006/main">
               <a:ext uri="{FF2B5EF4-FFF2-40B4-BE49-F238E27FC236}">
-                <a16:creationId xmlns:a16="http://schemas.microsoft.com/office/drawing/2014/main" id="{BCA8E231-D017-434D-A7E5-09BE14B80FEE}"/>
+                <a16:creationId xmlns:a16="http://schemas.microsoft.com/office/drawing/2014/main" id="{5BAFAC5D-F432-4D5D-9E30-F335D1A743EA}"/>
               </a:ext>
             </a:extLst>
           </p:cNvPr>
@@ -12765,7 +12292,6 @@
               </a:defRPr>
             </a:defPPr>
             <a:lvl1pPr>
-              <a:buNone/>
               <a:defRPr sz="1275" b="0">
                 <a:solidFill>
                   <a:srgbClr val="596678"/>
@@ -12776,7 +12302,6 @@
               </a:defRPr>
             </a:lvl1pPr>
             <a:lvl2pPr>
-              <a:buNone/>
               <a:defRPr sz="1275" b="0">
                 <a:solidFill>
                   <a:srgbClr val="596678"/>
@@ -12787,7 +12312,6 @@
               </a:defRPr>
             </a:lvl2pPr>
             <a:lvl3pPr>
-              <a:buNone/>
               <a:defRPr sz="1275" b="0">
                 <a:solidFill>
                   <a:srgbClr val="596678"/>
@@ -12798,7 +12322,6 @@
               </a:defRPr>
             </a:lvl3pPr>
             <a:lvl4pPr>
-              <a:buNone/>
               <a:defRPr sz="1275" b="0">
                 <a:solidFill>
                   <a:srgbClr val="596678"/>
@@ -12809,7 +12332,6 @@
               </a:defRPr>
             </a:lvl4pPr>
             <a:lvl5pPr>
-              <a:buNone/>
               <a:defRPr sz="1275" b="0">
                 <a:solidFill>
                   <a:srgbClr val="596678"/>
@@ -12820,7 +12342,6 @@
               </a:defRPr>
             </a:lvl5pPr>
             <a:lvl6pPr>
-              <a:buNone/>
               <a:defRPr sz="1275" b="0">
                 <a:solidFill>
                   <a:srgbClr val="596678"/>
@@ -12831,7 +12352,6 @@
               </a:defRPr>
             </a:lvl6pPr>
             <a:lvl7pPr>
-              <a:buNone/>
               <a:defRPr sz="1275" b="0">
                 <a:solidFill>
                   <a:srgbClr val="596678"/>
@@ -12842,7 +12362,6 @@
               </a:defRPr>
             </a:lvl7pPr>
             <a:lvl8pPr>
-              <a:buNone/>
               <a:defRPr sz="1275" b="0">
                 <a:solidFill>
                   <a:srgbClr val="596678"/>
@@ -12853,7 +12372,6 @@
               </a:defRPr>
             </a:lvl8pPr>
             <a:lvl9pPr>
-              <a:buNone/>
               <a:defRPr sz="1275" b="0">
                 <a:solidFill>
                   <a:srgbClr val="596678"/>
@@ -12866,7 +12384,6 @@
           </a:lstStyle>
           <a:p xmlns:a="http://schemas.openxmlformats.org/drawingml/2006/main">
             <a:pPr>
-              <a:buNone/>
               <a:defRPr sz="1275" b="0">
                 <a:solidFill>
                   <a:srgbClr val="596678"/>
@@ -12895,7 +12412,7 @@
           <p:cNvPr id="4" name="">
             <a:extLst xmlns:a="http://schemas.openxmlformats.org/drawingml/2006/main">
               <a:ext uri="{FF2B5EF4-FFF2-40B4-BE49-F238E27FC236}">
-                <a16:creationId xmlns:a16="http://schemas.microsoft.com/office/drawing/2014/main" id="{4F3831C1-4EED-417C-BBD7-E51863522935}"/>
+                <a16:creationId xmlns:a16="http://schemas.microsoft.com/office/drawing/2014/main" id="{F6A2D188-0DB6-4754-A0A3-D83589F669D6}"/>
               </a:ext>
             </a:extLst>
           </p:cNvPr>
@@ -12932,7 +12449,6 @@
               </a:defRPr>
             </a:defPPr>
             <a:lvl1pPr>
-              <a:buNone/>
               <a:defRPr sz="825" b="0">
                 <a:solidFill>
                   <a:srgbClr val="596678"/>
@@ -12943,7 +12459,6 @@
               </a:defRPr>
             </a:lvl1pPr>
             <a:lvl2pPr>
-              <a:buNone/>
               <a:defRPr sz="825" b="0">
                 <a:solidFill>
                   <a:srgbClr val="596678"/>
@@ -12954,7 +12469,6 @@
               </a:defRPr>
             </a:lvl2pPr>
             <a:lvl3pPr>
-              <a:buNone/>
               <a:defRPr sz="825" b="0">
                 <a:solidFill>
                   <a:srgbClr val="596678"/>
@@ -12965,7 +12479,6 @@
               </a:defRPr>
             </a:lvl3pPr>
             <a:lvl4pPr>
-              <a:buNone/>
               <a:defRPr sz="825" b="0">
                 <a:solidFill>
                   <a:srgbClr val="596678"/>
@@ -12976,7 +12489,6 @@
               </a:defRPr>
             </a:lvl4pPr>
             <a:lvl5pPr>
-              <a:buNone/>
               <a:defRPr sz="825" b="0">
                 <a:solidFill>
                   <a:srgbClr val="596678"/>
@@ -12987,7 +12499,6 @@
               </a:defRPr>
             </a:lvl5pPr>
             <a:lvl6pPr>
-              <a:buNone/>
               <a:defRPr sz="825" b="0">
                 <a:solidFill>
                   <a:srgbClr val="596678"/>
@@ -12998,7 +12509,6 @@
               </a:defRPr>
             </a:lvl6pPr>
             <a:lvl7pPr>
-              <a:buNone/>
               <a:defRPr sz="825" b="0">
                 <a:solidFill>
                   <a:srgbClr val="596678"/>
@@ -13009,7 +12519,6 @@
               </a:defRPr>
             </a:lvl7pPr>
             <a:lvl8pPr>
-              <a:buNone/>
               <a:defRPr sz="825" b="0">
                 <a:solidFill>
                   <a:srgbClr val="596678"/>
@@ -13020,7 +12529,6 @@
               </a:defRPr>
             </a:lvl8pPr>
             <a:lvl9pPr>
-              <a:buNone/>
               <a:defRPr sz="825" b="0">
                 <a:solidFill>
                   <a:srgbClr val="596678"/>
@@ -13033,7 +12541,6 @@
           </a:lstStyle>
           <a:p xmlns:a="http://schemas.openxmlformats.org/drawingml/2006/main">
             <a:pPr>
-              <a:buNone/>
               <a:defRPr sz="825" b="0">
                 <a:solidFill>
                   <a:srgbClr val="596678"/>
@@ -13062,7 +12569,7 @@
           <p:cNvPr id="5" name="">
             <a:extLst xmlns:a="http://schemas.openxmlformats.org/drawingml/2006/main">
               <a:ext uri="{FF2B5EF4-FFF2-40B4-BE49-F238E27FC236}">
-                <a16:creationId xmlns:a16="http://schemas.microsoft.com/office/drawing/2014/main" id="{CBCDD928-0453-4D1B-9859-BE6A9B43D970}"/>
+                <a16:creationId xmlns:a16="http://schemas.microsoft.com/office/drawing/2014/main" id="{BAECA54D-0CC7-4EE1-AE2C-D03BEFA37923}"/>
               </a:ext>
             </a:extLst>
           </p:cNvPr>
@@ -13099,7 +12606,6 @@
               </a:defRPr>
             </a:defPPr>
             <a:lvl1pPr>
-              <a:buNone/>
               <a:defRPr sz="825" b="1">
                 <a:solidFill>
                   <a:srgbClr val="802D42"/>
@@ -13110,7 +12616,6 @@
               </a:defRPr>
             </a:lvl1pPr>
             <a:lvl2pPr>
-              <a:buNone/>
               <a:defRPr sz="825" b="1">
                 <a:solidFill>
                   <a:srgbClr val="802D42"/>
@@ -13121,7 +12626,6 @@
               </a:defRPr>
             </a:lvl2pPr>
             <a:lvl3pPr>
-              <a:buNone/>
               <a:defRPr sz="825" b="1">
                 <a:solidFill>
                   <a:srgbClr val="802D42"/>
@@ -13132,7 +12636,6 @@
               </a:defRPr>
             </a:lvl3pPr>
             <a:lvl4pPr>
-              <a:buNone/>
               <a:defRPr sz="825" b="1">
                 <a:solidFill>
                   <a:srgbClr val="802D42"/>
@@ -13143,7 +12646,6 @@
               </a:defRPr>
             </a:lvl4pPr>
             <a:lvl5pPr>
-              <a:buNone/>
               <a:defRPr sz="825" b="1">
                 <a:solidFill>
                   <a:srgbClr val="802D42"/>
@@ -13154,7 +12656,6 @@
               </a:defRPr>
             </a:lvl5pPr>
             <a:lvl6pPr>
-              <a:buNone/>
               <a:defRPr sz="825" b="1">
                 <a:solidFill>
                   <a:srgbClr val="802D42"/>
@@ -13165,7 +12666,6 @@
               </a:defRPr>
             </a:lvl6pPr>
             <a:lvl7pPr>
-              <a:buNone/>
               <a:defRPr sz="825" b="1">
                 <a:solidFill>
                   <a:srgbClr val="802D42"/>
@@ -13176,7 +12676,6 @@
               </a:defRPr>
             </a:lvl7pPr>
             <a:lvl8pPr>
-              <a:buNone/>
               <a:defRPr sz="825" b="1">
                 <a:solidFill>
                   <a:srgbClr val="802D42"/>
@@ -13187,7 +12686,6 @@
               </a:defRPr>
             </a:lvl8pPr>
             <a:lvl9pPr>
-              <a:buNone/>
               <a:defRPr sz="825" b="1">
                 <a:solidFill>
                   <a:srgbClr val="802D42"/>
@@ -13200,7 +12698,6 @@
           </a:lstStyle>
           <a:p xmlns:a="http://schemas.openxmlformats.org/drawingml/2006/main">
             <a:pPr>
-              <a:buNone/>
               <a:defRPr sz="825" b="1">
                 <a:solidFill>
                   <a:srgbClr val="802D42"/>
@@ -13229,7 +12726,7 @@
           <p:cNvPr id="6" name="">
             <a:extLst xmlns:a="http://schemas.openxmlformats.org/drawingml/2006/main">
               <a:ext uri="{FF2B5EF4-FFF2-40B4-BE49-F238E27FC236}">
-                <a16:creationId xmlns:a16="http://schemas.microsoft.com/office/drawing/2014/main" id="{B35CE73A-B6DA-432F-B0D3-D7F07221FB89}"/>
+                <a16:creationId xmlns:a16="http://schemas.microsoft.com/office/drawing/2014/main" id="{49419D94-B6F3-4057-BDBF-D4A9E7436225}"/>
               </a:ext>
             </a:extLst>
           </p:cNvPr>
@@ -13266,7 +12763,6 @@
               </a:defRPr>
             </a:defPPr>
             <a:lvl1pPr>
-              <a:buNone/>
               <a:defRPr sz="1725" b="0">
                 <a:solidFill>
                   <a:srgbClr val="243244"/>
@@ -13277,7 +12773,6 @@
               </a:defRPr>
             </a:lvl1pPr>
             <a:lvl2pPr>
-              <a:buNone/>
               <a:defRPr sz="1725" b="0">
                 <a:solidFill>
                   <a:srgbClr val="243244"/>
@@ -13288,7 +12783,6 @@
               </a:defRPr>
             </a:lvl2pPr>
             <a:lvl3pPr>
-              <a:buNone/>
               <a:defRPr sz="1725" b="0">
                 <a:solidFill>
                   <a:srgbClr val="243244"/>
@@ -13299,7 +12793,6 @@
               </a:defRPr>
             </a:lvl3pPr>
             <a:lvl4pPr>
-              <a:buNone/>
               <a:defRPr sz="1725" b="0">
                 <a:solidFill>
                   <a:srgbClr val="243244"/>
@@ -13310,7 +12803,6 @@
               </a:defRPr>
             </a:lvl4pPr>
             <a:lvl5pPr>
-              <a:buNone/>
               <a:defRPr sz="1725" b="0">
                 <a:solidFill>
                   <a:srgbClr val="243244"/>
@@ -13321,7 +12813,6 @@
               </a:defRPr>
             </a:lvl5pPr>
             <a:lvl6pPr>
-              <a:buNone/>
               <a:defRPr sz="1725" b="0">
                 <a:solidFill>
                   <a:srgbClr val="243244"/>
@@ -13332,7 +12823,6 @@
               </a:defRPr>
             </a:lvl6pPr>
             <a:lvl7pPr>
-              <a:buNone/>
               <a:defRPr sz="1725" b="0">
                 <a:solidFill>
                   <a:srgbClr val="243244"/>
@@ -13343,7 +12833,6 @@
               </a:defRPr>
             </a:lvl7pPr>
             <a:lvl8pPr>
-              <a:buNone/>
               <a:defRPr sz="1725" b="0">
                 <a:solidFill>
                   <a:srgbClr val="243244"/>
@@ -13354,7 +12843,6 @@
               </a:defRPr>
             </a:lvl8pPr>
             <a:lvl9pPr>
-              <a:buNone/>
               <a:defRPr sz="1725" b="0">
                 <a:solidFill>
                   <a:srgbClr val="243244"/>
@@ -13367,7 +12855,6 @@
           </a:lstStyle>
           <a:p xmlns:a="http://schemas.openxmlformats.org/drawingml/2006/main">
             <a:pPr>
-              <a:buNone/>
               <a:defRPr sz="1725" b="0">
                 <a:solidFill>
                   <a:srgbClr val="243244"/>
@@ -13396,7 +12883,7 @@
           <p:cNvPr id="7" name="">
             <a:extLst xmlns:a="http://schemas.openxmlformats.org/drawingml/2006/main">
               <a:ext uri="{FF2B5EF4-FFF2-40B4-BE49-F238E27FC236}">
-                <a16:creationId xmlns:a16="http://schemas.microsoft.com/office/drawing/2014/main" id="{89B4E139-5E64-40CA-9D5C-2B750B900AB4}"/>
+                <a16:creationId xmlns:a16="http://schemas.microsoft.com/office/drawing/2014/main" id="{B3928A9A-9151-4A9F-8EC6-A62F907EBAB3}"/>
               </a:ext>
             </a:extLst>
           </p:cNvPr>
@@ -13433,7 +12920,6 @@
               </a:defRPr>
             </a:defPPr>
             <a:lvl1pPr>
-              <a:buNone/>
               <a:defRPr sz="1725" b="0">
                 <a:solidFill>
                   <a:srgbClr val="243244"/>
@@ -13444,7 +12930,6 @@
               </a:defRPr>
             </a:lvl1pPr>
             <a:lvl2pPr>
-              <a:buNone/>
               <a:defRPr sz="1725" b="0">
                 <a:solidFill>
                   <a:srgbClr val="243244"/>
@@ -13455,7 +12940,6 @@
               </a:defRPr>
             </a:lvl2pPr>
             <a:lvl3pPr>
-              <a:buNone/>
               <a:defRPr sz="1725" b="0">
                 <a:solidFill>
                   <a:srgbClr val="243244"/>
@@ -13466,7 +12950,6 @@
               </a:defRPr>
             </a:lvl3pPr>
             <a:lvl4pPr>
-              <a:buNone/>
               <a:defRPr sz="1725" b="0">
                 <a:solidFill>
                   <a:srgbClr val="243244"/>
@@ -13477,7 +12960,6 @@
               </a:defRPr>
             </a:lvl4pPr>
             <a:lvl5pPr>
-              <a:buNone/>
               <a:defRPr sz="1725" b="0">
                 <a:solidFill>
                   <a:srgbClr val="243244"/>
@@ -13488,7 +12970,6 @@
               </a:defRPr>
             </a:lvl5pPr>
             <a:lvl6pPr>
-              <a:buNone/>
               <a:defRPr sz="1725" b="0">
                 <a:solidFill>
                   <a:srgbClr val="243244"/>
@@ -13499,7 +12980,6 @@
               </a:defRPr>
             </a:lvl6pPr>
             <a:lvl7pPr>
-              <a:buNone/>
               <a:defRPr sz="1725" b="0">
                 <a:solidFill>
                   <a:srgbClr val="243244"/>
@@ -13510,7 +12990,6 @@
               </a:defRPr>
             </a:lvl7pPr>
             <a:lvl8pPr>
-              <a:buNone/>
               <a:defRPr sz="1725" b="0">
                 <a:solidFill>
                   <a:srgbClr val="243244"/>
@@ -13521,7 +13000,6 @@
               </a:defRPr>
             </a:lvl8pPr>
             <a:lvl9pPr>
-              <a:buNone/>
               <a:defRPr sz="1725" b="0">
                 <a:solidFill>
                   <a:srgbClr val="243244"/>
@@ -13534,7 +13012,6 @@
           </a:lstStyle>
           <a:p xmlns:a="http://schemas.openxmlformats.org/drawingml/2006/main">
             <a:pPr>
-              <a:buNone/>
               <a:defRPr sz="1725" b="0">
                 <a:solidFill>
                   <a:srgbClr val="243244"/>
@@ -13563,7 +13040,7 @@
           <p:cNvPr id="8" name="">
             <a:extLst xmlns:a="http://schemas.openxmlformats.org/drawingml/2006/main">
               <a:ext uri="{FF2B5EF4-FFF2-40B4-BE49-F238E27FC236}">
-                <a16:creationId xmlns:a16="http://schemas.microsoft.com/office/drawing/2014/main" id="{2230ACAC-ECD7-47C6-974B-A0FFED61CB4E}"/>
+                <a16:creationId xmlns:a16="http://schemas.microsoft.com/office/drawing/2014/main" id="{F7AB073A-A9AB-4E24-9747-1F654E4BE435}"/>
               </a:ext>
             </a:extLst>
           </p:cNvPr>
@@ -13600,7 +13077,6 @@
               </a:defRPr>
             </a:defPPr>
             <a:lvl1pPr>
-              <a:buNone/>
               <a:defRPr sz="1725" b="0">
                 <a:solidFill>
                   <a:srgbClr val="243244"/>
@@ -13611,7 +13087,6 @@
               </a:defRPr>
             </a:lvl1pPr>
             <a:lvl2pPr>
-              <a:buNone/>
               <a:defRPr sz="1725" b="0">
                 <a:solidFill>
                   <a:srgbClr val="243244"/>
@@ -13622,7 +13097,6 @@
               </a:defRPr>
             </a:lvl2pPr>
             <a:lvl3pPr>
-              <a:buNone/>
               <a:defRPr sz="1725" b="0">
                 <a:solidFill>
                   <a:srgbClr val="243244"/>
@@ -13633,7 +13107,6 @@
               </a:defRPr>
             </a:lvl3pPr>
             <a:lvl4pPr>
-              <a:buNone/>
               <a:defRPr sz="1725" b="0">
                 <a:solidFill>
                   <a:srgbClr val="243244"/>
@@ -13644,7 +13117,6 @@
               </a:defRPr>
             </a:lvl4pPr>
             <a:lvl5pPr>
-              <a:buNone/>
               <a:defRPr sz="1725" b="0">
                 <a:solidFill>
                   <a:srgbClr val="243244"/>
@@ -13655,7 +13127,6 @@
               </a:defRPr>
             </a:lvl5pPr>
             <a:lvl6pPr>
-              <a:buNone/>
               <a:defRPr sz="1725" b="0">
                 <a:solidFill>
                   <a:srgbClr val="243244"/>
@@ -13666,7 +13137,6 @@
               </a:defRPr>
             </a:lvl6pPr>
             <a:lvl7pPr>
-              <a:buNone/>
               <a:defRPr sz="1725" b="0">
                 <a:solidFill>
                   <a:srgbClr val="243244"/>
@@ -13677,7 +13147,6 @@
               </a:defRPr>
             </a:lvl7pPr>
             <a:lvl8pPr>
-              <a:buNone/>
               <a:defRPr sz="1725" b="0">
                 <a:solidFill>
                   <a:srgbClr val="243244"/>
@@ -13688,7 +13157,6 @@
               </a:defRPr>
             </a:lvl8pPr>
             <a:lvl9pPr>
-              <a:buNone/>
               <a:defRPr sz="1725" b="0">
                 <a:solidFill>
                   <a:srgbClr val="243244"/>
@@ -13701,7 +13169,6 @@
           </a:lstStyle>
           <a:p xmlns:a="http://schemas.openxmlformats.org/drawingml/2006/main">
             <a:pPr>
-              <a:buNone/>
               <a:defRPr sz="1725" b="0">
                 <a:solidFill>
                   <a:srgbClr val="243244"/>
@@ -13728,7 +13195,7 @@
     </p:spTree>
     <p:extLst>
       <p:ext uri="{BB962C8B-B14F-4D97-AF65-F5344CB8AC3E}">
-        <p14:creationId xmlns:p14="http://schemas.microsoft.com/office/powerpoint/2010/main" val="309241745"/>
+        <p14:creationId xmlns:p14="http://schemas.microsoft.com/office/powerpoint/2010/main" val="437329699"/>
       </p:ext>
     </p:extLst>
   </p:cSld>
@@ -13759,7 +13226,7 @@
           <p:cNvPr id="7" name="">
             <a:extLst xmlns:a="http://schemas.openxmlformats.org/drawingml/2006/main">
               <a:ext uri="{FF2B5EF4-FFF2-40B4-BE49-F238E27FC236}">
-                <a16:creationId xmlns:a16="http://schemas.microsoft.com/office/drawing/2014/main" id="{840A7CC9-EA51-46E5-8EF5-0528FC1E5C24}"/>
+                <a16:creationId xmlns:a16="http://schemas.microsoft.com/office/drawing/2014/main" id="{026F518B-469C-4A30-B025-8BD0132F0B60}"/>
               </a:ext>
             </a:extLst>
           </p:cNvPr>
@@ -13796,7 +13263,6 @@
               </a:defRPr>
             </a:defPPr>
             <a:lvl1pPr>
-              <a:buNone/>
               <a:defRPr sz="900" b="1">
                 <a:solidFill>
                   <a:srgbClr val="802D42"/>
@@ -13807,7 +13273,6 @@
               </a:defRPr>
             </a:lvl1pPr>
             <a:lvl2pPr>
-              <a:buNone/>
               <a:defRPr sz="900" b="1">
                 <a:solidFill>
                   <a:srgbClr val="802D42"/>
@@ -13818,7 +13283,6 @@
               </a:defRPr>
             </a:lvl2pPr>
             <a:lvl3pPr>
-              <a:buNone/>
               <a:defRPr sz="900" b="1">
                 <a:solidFill>
                   <a:srgbClr val="802D42"/>
@@ -13829,7 +13293,6 @@
               </a:defRPr>
             </a:lvl3pPr>
             <a:lvl4pPr>
-              <a:buNone/>
               <a:defRPr sz="900" b="1">
                 <a:solidFill>
                   <a:srgbClr val="802D42"/>
@@ -13840,7 +13303,6 @@
               </a:defRPr>
             </a:lvl4pPr>
             <a:lvl5pPr>
-              <a:buNone/>
               <a:defRPr sz="900" b="1">
                 <a:solidFill>
                   <a:srgbClr val="802D42"/>
@@ -13851,7 +13313,6 @@
               </a:defRPr>
             </a:lvl5pPr>
             <a:lvl6pPr>
-              <a:buNone/>
               <a:defRPr sz="900" b="1">
                 <a:solidFill>
                   <a:srgbClr val="802D42"/>
@@ -13862,7 +13323,6 @@
               </a:defRPr>
             </a:lvl6pPr>
             <a:lvl7pPr>
-              <a:buNone/>
               <a:defRPr sz="900" b="1">
                 <a:solidFill>
                   <a:srgbClr val="802D42"/>
@@ -13873,7 +13333,6 @@
               </a:defRPr>
             </a:lvl7pPr>
             <a:lvl8pPr>
-              <a:buNone/>
               <a:defRPr sz="900" b="1">
                 <a:solidFill>
                   <a:srgbClr val="802D42"/>
@@ -13884,7 +13343,6 @@
               </a:defRPr>
             </a:lvl8pPr>
             <a:lvl9pPr>
-              <a:buNone/>
               <a:defRPr sz="900" b="1">
                 <a:solidFill>
                   <a:srgbClr val="802D42"/>
@@ -13897,7 +13355,6 @@
           </a:lstStyle>
           <a:p xmlns:a="http://schemas.openxmlformats.org/drawingml/2006/main">
             <a:pPr>
-              <a:buNone/>
               <a:defRPr sz="900" b="1">
                 <a:solidFill>
                   <a:srgbClr val="802D42"/>
@@ -13926,7 +13383,7 @@
           <p:cNvPr id="2" name="">
             <a:extLst xmlns:a="http://schemas.openxmlformats.org/drawingml/2006/main">
               <a:ext uri="{FF2B5EF4-FFF2-40B4-BE49-F238E27FC236}">
-                <a16:creationId xmlns:a16="http://schemas.microsoft.com/office/drawing/2014/main" id="{8B9A063C-5F30-4020-8A25-150D14B7CA74}"/>
+                <a16:creationId xmlns:a16="http://schemas.microsoft.com/office/drawing/2014/main" id="{1D9D507E-C0B0-453E-B884-F2A358645358}"/>
               </a:ext>
             </a:extLst>
           </p:cNvPr>
@@ -13963,7 +13420,6 @@
               </a:defRPr>
             </a:defPPr>
             <a:lvl1pPr>
-              <a:buNone/>
               <a:defRPr sz="2400" b="1">
                 <a:solidFill>
                   <a:srgbClr val="243244"/>
@@ -13974,7 +13430,6 @@
               </a:defRPr>
             </a:lvl1pPr>
             <a:lvl2pPr>
-              <a:buNone/>
               <a:defRPr sz="2400" b="1">
                 <a:solidFill>
                   <a:srgbClr val="243244"/>
@@ -13985,7 +13440,6 @@
               </a:defRPr>
             </a:lvl2pPr>
             <a:lvl3pPr>
-              <a:buNone/>
               <a:defRPr sz="2400" b="1">
                 <a:solidFill>
                   <a:srgbClr val="243244"/>
@@ -13996,7 +13450,6 @@
               </a:defRPr>
             </a:lvl3pPr>
             <a:lvl4pPr>
-              <a:buNone/>
               <a:defRPr sz="2400" b="1">
                 <a:solidFill>
                   <a:srgbClr val="243244"/>
@@ -14007,7 +13460,6 @@
               </a:defRPr>
             </a:lvl4pPr>
             <a:lvl5pPr>
-              <a:buNone/>
               <a:defRPr sz="2400" b="1">
                 <a:solidFill>
                   <a:srgbClr val="243244"/>
@@ -14018,7 +13470,6 @@
               </a:defRPr>
             </a:lvl5pPr>
             <a:lvl6pPr>
-              <a:buNone/>
               <a:defRPr sz="2400" b="1">
                 <a:solidFill>
                   <a:srgbClr val="243244"/>
@@ -14029,7 +13480,6 @@
               </a:defRPr>
             </a:lvl6pPr>
             <a:lvl7pPr>
-              <a:buNone/>
               <a:defRPr sz="2400" b="1">
                 <a:solidFill>
                   <a:srgbClr val="243244"/>
@@ -14040,7 +13490,6 @@
               </a:defRPr>
             </a:lvl7pPr>
             <a:lvl8pPr>
-              <a:buNone/>
               <a:defRPr sz="2400" b="1">
                 <a:solidFill>
                   <a:srgbClr val="243244"/>
@@ -14051,7 +13500,6 @@
               </a:defRPr>
             </a:lvl8pPr>
             <a:lvl9pPr>
-              <a:buNone/>
               <a:defRPr sz="2400" b="1">
                 <a:solidFill>
                   <a:srgbClr val="243244"/>
@@ -14064,7 +13512,6 @@
           </a:lstStyle>
           <a:p xmlns:a="http://schemas.openxmlformats.org/drawingml/2006/main">
             <a:pPr>
-              <a:buNone/>
               <a:defRPr sz="2400" b="1">
                 <a:solidFill>
                   <a:srgbClr val="243244"/>
@@ -14093,7 +13540,7 @@
           <p:cNvPr id="3" name="">
             <a:extLst xmlns:a="http://schemas.openxmlformats.org/drawingml/2006/main">
               <a:ext uri="{FF2B5EF4-FFF2-40B4-BE49-F238E27FC236}">
-                <a16:creationId xmlns:a16="http://schemas.microsoft.com/office/drawing/2014/main" id="{5808D03D-4896-44F2-AE99-5AF0D79264C5}"/>
+                <a16:creationId xmlns:a16="http://schemas.microsoft.com/office/drawing/2014/main" id="{6BC26CBA-C909-4977-AFEF-CB849412BD13}"/>
               </a:ext>
             </a:extLst>
           </p:cNvPr>
@@ -14130,7 +13577,6 @@
               </a:defRPr>
             </a:defPPr>
             <a:lvl1pPr>
-              <a:buNone/>
               <a:defRPr sz="1275" b="0">
                 <a:solidFill>
                   <a:srgbClr val="596678"/>
@@ -14141,7 +13587,6 @@
               </a:defRPr>
             </a:lvl1pPr>
             <a:lvl2pPr>
-              <a:buNone/>
               <a:defRPr sz="1275" b="0">
                 <a:solidFill>
                   <a:srgbClr val="596678"/>
@@ -14152,7 +13597,6 @@
               </a:defRPr>
             </a:lvl2pPr>
             <a:lvl3pPr>
-              <a:buNone/>
               <a:defRPr sz="1275" b="0">
                 <a:solidFill>
                   <a:srgbClr val="596678"/>
@@ -14163,7 +13607,6 @@
               </a:defRPr>
             </a:lvl3pPr>
             <a:lvl4pPr>
-              <a:buNone/>
               <a:defRPr sz="1275" b="0">
                 <a:solidFill>
                   <a:srgbClr val="596678"/>
@@ -14174,7 +13617,6 @@
               </a:defRPr>
             </a:lvl4pPr>
             <a:lvl5pPr>
-              <a:buNone/>
               <a:defRPr sz="1275" b="0">
                 <a:solidFill>
                   <a:srgbClr val="596678"/>
@@ -14185,7 +13627,6 @@
               </a:defRPr>
             </a:lvl5pPr>
             <a:lvl6pPr>
-              <a:buNone/>
               <a:defRPr sz="1275" b="0">
                 <a:solidFill>
                   <a:srgbClr val="596678"/>
@@ -14196,7 +13637,6 @@
               </a:defRPr>
             </a:lvl6pPr>
             <a:lvl7pPr>
-              <a:buNone/>
               <a:defRPr sz="1275" b="0">
                 <a:solidFill>
                   <a:srgbClr val="596678"/>
@@ -14207,7 +13647,6 @@
               </a:defRPr>
             </a:lvl7pPr>
             <a:lvl8pPr>
-              <a:buNone/>
               <a:defRPr sz="1275" b="0">
                 <a:solidFill>
                   <a:srgbClr val="596678"/>
@@ -14218,7 +13657,6 @@
               </a:defRPr>
             </a:lvl8pPr>
             <a:lvl9pPr>
-              <a:buNone/>
               <a:defRPr sz="1275" b="0">
                 <a:solidFill>
                   <a:srgbClr val="596678"/>
@@ -14231,7 +13669,6 @@
           </a:lstStyle>
           <a:p xmlns:a="http://schemas.openxmlformats.org/drawingml/2006/main">
             <a:pPr>
-              <a:buNone/>
               <a:defRPr sz="1275" b="0">
                 <a:solidFill>
                   <a:srgbClr val="596678"/>
@@ -14260,7 +13697,7 @@
           <p:cNvPr id="4" name="">
             <a:extLst xmlns:a="http://schemas.openxmlformats.org/drawingml/2006/main">
               <a:ext uri="{FF2B5EF4-FFF2-40B4-BE49-F238E27FC236}">
-                <a16:creationId xmlns:a16="http://schemas.microsoft.com/office/drawing/2014/main" id="{7E5A0269-737D-4AB7-9080-CC2C86749845}"/>
+                <a16:creationId xmlns:a16="http://schemas.microsoft.com/office/drawing/2014/main" id="{1C2C49FF-56ED-480D-9E63-B62911EC4468}"/>
               </a:ext>
             </a:extLst>
           </p:cNvPr>
@@ -14297,7 +13734,6 @@
               </a:defRPr>
             </a:defPPr>
             <a:lvl1pPr>
-              <a:buNone/>
               <a:defRPr sz="825" b="0">
                 <a:solidFill>
                   <a:srgbClr val="596678"/>
@@ -14308,7 +13744,6 @@
               </a:defRPr>
             </a:lvl1pPr>
             <a:lvl2pPr>
-              <a:buNone/>
               <a:defRPr sz="825" b="0">
                 <a:solidFill>
                   <a:srgbClr val="596678"/>
@@ -14319,7 +13754,6 @@
               </a:defRPr>
             </a:lvl2pPr>
             <a:lvl3pPr>
-              <a:buNone/>
               <a:defRPr sz="825" b="0">
                 <a:solidFill>
                   <a:srgbClr val="596678"/>
@@ -14330,7 +13764,6 @@
               </a:defRPr>
             </a:lvl3pPr>
             <a:lvl4pPr>
-              <a:buNone/>
               <a:defRPr sz="825" b="0">
                 <a:solidFill>
                   <a:srgbClr val="596678"/>
@@ -14341,7 +13774,6 @@
               </a:defRPr>
             </a:lvl4pPr>
             <a:lvl5pPr>
-              <a:buNone/>
               <a:defRPr sz="825" b="0">
                 <a:solidFill>
                   <a:srgbClr val="596678"/>
@@ -14352,7 +13784,6 @@
               </a:defRPr>
             </a:lvl5pPr>
             <a:lvl6pPr>
-              <a:buNone/>
               <a:defRPr sz="825" b="0">
                 <a:solidFill>
                   <a:srgbClr val="596678"/>
@@ -14363,7 +13794,6 @@
               </a:defRPr>
             </a:lvl6pPr>
             <a:lvl7pPr>
-              <a:buNone/>
               <a:defRPr sz="825" b="0">
                 <a:solidFill>
                   <a:srgbClr val="596678"/>
@@ -14374,7 +13804,6 @@
               </a:defRPr>
             </a:lvl7pPr>
             <a:lvl8pPr>
-              <a:buNone/>
               <a:defRPr sz="825" b="0">
                 <a:solidFill>
                   <a:srgbClr val="596678"/>
@@ -14385,7 +13814,6 @@
               </a:defRPr>
             </a:lvl8pPr>
             <a:lvl9pPr>
-              <a:buNone/>
               <a:defRPr sz="825" b="0">
                 <a:solidFill>
                   <a:srgbClr val="596678"/>
@@ -14398,7 +13826,6 @@
           </a:lstStyle>
           <a:p xmlns:a="http://schemas.openxmlformats.org/drawingml/2006/main">
             <a:pPr>
-              <a:buNone/>
               <a:defRPr sz="825" b="0">
                 <a:solidFill>
                   <a:srgbClr val="596678"/>
@@ -14427,7 +13854,7 @@
           <p:cNvPr id="5" name="">
             <a:extLst xmlns:a="http://schemas.openxmlformats.org/drawingml/2006/main">
               <a:ext uri="{FF2B5EF4-FFF2-40B4-BE49-F238E27FC236}">
-                <a16:creationId xmlns:a16="http://schemas.microsoft.com/office/drawing/2014/main" id="{C772905F-4DF3-4299-B896-77759F92387B}"/>
+                <a16:creationId xmlns:a16="http://schemas.microsoft.com/office/drawing/2014/main" id="{B137B431-FFC9-4C6C-A15D-47B0A64CB9E1}"/>
               </a:ext>
             </a:extLst>
           </p:cNvPr>
@@ -14464,7 +13891,6 @@
               </a:defRPr>
             </a:defPPr>
             <a:lvl1pPr>
-              <a:buNone/>
               <a:defRPr sz="825" b="1">
                 <a:solidFill>
                   <a:srgbClr val="802D42"/>
@@ -14475,7 +13901,6 @@
               </a:defRPr>
             </a:lvl1pPr>
             <a:lvl2pPr>
-              <a:buNone/>
               <a:defRPr sz="825" b="1">
                 <a:solidFill>
                   <a:srgbClr val="802D42"/>
@@ -14486,7 +13911,6 @@
               </a:defRPr>
             </a:lvl2pPr>
             <a:lvl3pPr>
-              <a:buNone/>
               <a:defRPr sz="825" b="1">
                 <a:solidFill>
                   <a:srgbClr val="802D42"/>
@@ -14497,7 +13921,6 @@
               </a:defRPr>
             </a:lvl3pPr>
             <a:lvl4pPr>
-              <a:buNone/>
               <a:defRPr sz="825" b="1">
                 <a:solidFill>
                   <a:srgbClr val="802D42"/>
@@ -14508,7 +13931,6 @@
               </a:defRPr>
             </a:lvl4pPr>
             <a:lvl5pPr>
-              <a:buNone/>
               <a:defRPr sz="825" b="1">
                 <a:solidFill>
                   <a:srgbClr val="802D42"/>
@@ -14519,7 +13941,6 @@
               </a:defRPr>
             </a:lvl5pPr>
             <a:lvl6pPr>
-              <a:buNone/>
               <a:defRPr sz="825" b="1">
                 <a:solidFill>
                   <a:srgbClr val="802D42"/>
@@ -14530,7 +13951,6 @@
               </a:defRPr>
             </a:lvl6pPr>
             <a:lvl7pPr>
-              <a:buNone/>
               <a:defRPr sz="825" b="1">
                 <a:solidFill>
                   <a:srgbClr val="802D42"/>
@@ -14541,7 +13961,6 @@
               </a:defRPr>
             </a:lvl7pPr>
             <a:lvl8pPr>
-              <a:buNone/>
               <a:defRPr sz="825" b="1">
                 <a:solidFill>
                   <a:srgbClr val="802D42"/>
@@ -14552,7 +13971,6 @@
               </a:defRPr>
             </a:lvl8pPr>
             <a:lvl9pPr>
-              <a:buNone/>
               <a:defRPr sz="825" b="1">
                 <a:solidFill>
                   <a:srgbClr val="802D42"/>
@@ -14565,7 +13983,6 @@
           </a:lstStyle>
           <a:p xmlns:a="http://schemas.openxmlformats.org/drawingml/2006/main">
             <a:pPr>
-              <a:buNone/>
               <a:defRPr sz="825" b="1">
                 <a:solidFill>
                   <a:srgbClr val="802D42"/>
@@ -14594,7 +14011,7 @@
           <p:cNvPr id="6" name="">
             <a:extLst xmlns:a="http://schemas.openxmlformats.org/drawingml/2006/main">
               <a:ext uri="{FF2B5EF4-FFF2-40B4-BE49-F238E27FC236}">
-                <a16:creationId xmlns:a16="http://schemas.microsoft.com/office/drawing/2014/main" id="{A6DECEE7-6796-412D-95AA-60BA21207D93}"/>
+                <a16:creationId xmlns:a16="http://schemas.microsoft.com/office/drawing/2014/main" id="{A7D4F58F-68B6-46C2-98E9-EDFC39181BFA}"/>
               </a:ext>
             </a:extLst>
           </p:cNvPr>
@@ -14604,7 +14021,7 @@
           <p:nvPr/>
         </p:nvPicPr>
         <p:blipFill>
-          <a:blip xmlns:r="http://schemas.openxmlformats.org/officeDocument/2006/relationships" xmlns:a="http://schemas.openxmlformats.org/drawingml/2006/main" r:embed="Ra61472582cb846fa"/>
+          <a:blip xmlns:r="http://schemas.openxmlformats.org/officeDocument/2006/relationships" xmlns:a="http://schemas.openxmlformats.org/drawingml/2006/main" r:embed="R5a24866ceb1943a6"/>
           <a:stretch xmlns:a="http://schemas.openxmlformats.org/drawingml/2006/main"/>
         </p:blipFill>
         <p:spPr>
@@ -14620,7 +14037,7 @@
     </p:spTree>
     <p:extLst>
       <p:ext uri="{BB962C8B-B14F-4D97-AF65-F5344CB8AC3E}">
-        <p14:creationId xmlns:p14="http://schemas.microsoft.com/office/powerpoint/2010/main" val="583416894"/>
+        <p14:creationId xmlns:p14="http://schemas.microsoft.com/office/powerpoint/2010/main" val="2082113821"/>
       </p:ext>
     </p:extLst>
   </p:cSld>
@@ -14651,7 +14068,7 @@
           <p:cNvPr id="7" name="">
             <a:extLst xmlns:a="http://schemas.openxmlformats.org/drawingml/2006/main">
               <a:ext uri="{FF2B5EF4-FFF2-40B4-BE49-F238E27FC236}">
-                <a16:creationId xmlns:a16="http://schemas.microsoft.com/office/drawing/2014/main" id="{15085B44-7EA4-4D09-B2ED-1ED7B50A7D25}"/>
+                <a16:creationId xmlns:a16="http://schemas.microsoft.com/office/drawing/2014/main" id="{64AC9C25-30B1-4B5E-8E39-BBADB7C91319}"/>
               </a:ext>
             </a:extLst>
           </p:cNvPr>
@@ -14688,7 +14105,6 @@
               </a:defRPr>
             </a:defPPr>
             <a:lvl1pPr>
-              <a:buNone/>
               <a:defRPr sz="900" b="1">
                 <a:solidFill>
                   <a:srgbClr val="802D42"/>
@@ -14699,7 +14115,6 @@
               </a:defRPr>
             </a:lvl1pPr>
             <a:lvl2pPr>
-              <a:buNone/>
               <a:defRPr sz="900" b="1">
                 <a:solidFill>
                   <a:srgbClr val="802D42"/>
@@ -14710,7 +14125,6 @@
               </a:defRPr>
             </a:lvl2pPr>
             <a:lvl3pPr>
-              <a:buNone/>
               <a:defRPr sz="900" b="1">
                 <a:solidFill>
                   <a:srgbClr val="802D42"/>
@@ -14721,7 +14135,6 @@
               </a:defRPr>
             </a:lvl3pPr>
             <a:lvl4pPr>
-              <a:buNone/>
               <a:defRPr sz="900" b="1">
                 <a:solidFill>
                   <a:srgbClr val="802D42"/>
@@ -14732,7 +14145,6 @@
               </a:defRPr>
             </a:lvl4pPr>
             <a:lvl5pPr>
-              <a:buNone/>
               <a:defRPr sz="900" b="1">
                 <a:solidFill>
                   <a:srgbClr val="802D42"/>
@@ -14743,7 +14155,6 @@
               </a:defRPr>
             </a:lvl5pPr>
             <a:lvl6pPr>
-              <a:buNone/>
               <a:defRPr sz="900" b="1">
                 <a:solidFill>
                   <a:srgbClr val="802D42"/>
@@ -14754,7 +14165,6 @@
               </a:defRPr>
             </a:lvl6pPr>
             <a:lvl7pPr>
-              <a:buNone/>
               <a:defRPr sz="900" b="1">
                 <a:solidFill>
                   <a:srgbClr val="802D42"/>
@@ -14765,7 +14175,6 @@
               </a:defRPr>
             </a:lvl7pPr>
             <a:lvl8pPr>
-              <a:buNone/>
               <a:defRPr sz="900" b="1">
                 <a:solidFill>
                   <a:srgbClr val="802D42"/>
@@ -14776,7 +14185,6 @@
               </a:defRPr>
             </a:lvl8pPr>
             <a:lvl9pPr>
-              <a:buNone/>
               <a:defRPr sz="900" b="1">
                 <a:solidFill>
                   <a:srgbClr val="802D42"/>
@@ -14789,7 +14197,6 @@
           </a:lstStyle>
           <a:p xmlns:a="http://schemas.openxmlformats.org/drawingml/2006/main">
             <a:pPr>
-              <a:buNone/>
               <a:defRPr sz="900" b="1">
                 <a:solidFill>
                   <a:srgbClr val="802D42"/>
@@ -14818,7 +14225,7 @@
           <p:cNvPr id="2" name="">
             <a:extLst xmlns:a="http://schemas.openxmlformats.org/drawingml/2006/main">
               <a:ext uri="{FF2B5EF4-FFF2-40B4-BE49-F238E27FC236}">
-                <a16:creationId xmlns:a16="http://schemas.microsoft.com/office/drawing/2014/main" id="{F5ECDFC4-9ECE-49B0-A481-275C9A0E09EE}"/>
+                <a16:creationId xmlns:a16="http://schemas.microsoft.com/office/drawing/2014/main" id="{71D745F0-83FE-49D0-910B-8DF8E0310AEC}"/>
               </a:ext>
             </a:extLst>
           </p:cNvPr>
@@ -14855,7 +14262,6 @@
               </a:defRPr>
             </a:defPPr>
             <a:lvl1pPr>
-              <a:buNone/>
               <a:defRPr sz="2400" b="1">
                 <a:solidFill>
                   <a:srgbClr val="243244"/>
@@ -14866,7 +14272,6 @@
               </a:defRPr>
             </a:lvl1pPr>
             <a:lvl2pPr>
-              <a:buNone/>
               <a:defRPr sz="2400" b="1">
                 <a:solidFill>
                   <a:srgbClr val="243244"/>
@@ -14877,7 +14282,6 @@
               </a:defRPr>
             </a:lvl2pPr>
             <a:lvl3pPr>
-              <a:buNone/>
               <a:defRPr sz="2400" b="1">
                 <a:solidFill>
                   <a:srgbClr val="243244"/>
@@ -14888,7 +14292,6 @@
               </a:defRPr>
             </a:lvl3pPr>
             <a:lvl4pPr>
-              <a:buNone/>
               <a:defRPr sz="2400" b="1">
                 <a:solidFill>
                   <a:srgbClr val="243244"/>
@@ -14899,7 +14302,6 @@
               </a:defRPr>
             </a:lvl4pPr>
             <a:lvl5pPr>
-              <a:buNone/>
               <a:defRPr sz="2400" b="1">
                 <a:solidFill>
                   <a:srgbClr val="243244"/>
@@ -14910,7 +14312,6 @@
               </a:defRPr>
             </a:lvl5pPr>
             <a:lvl6pPr>
-              <a:buNone/>
               <a:defRPr sz="2400" b="1">
                 <a:solidFill>
                   <a:srgbClr val="243244"/>
@@ -14921,7 +14322,6 @@
               </a:defRPr>
             </a:lvl6pPr>
             <a:lvl7pPr>
-              <a:buNone/>
               <a:defRPr sz="2400" b="1">
                 <a:solidFill>
                   <a:srgbClr val="243244"/>
@@ -14932,7 +14332,6 @@
               </a:defRPr>
             </a:lvl7pPr>
             <a:lvl8pPr>
-              <a:buNone/>
               <a:defRPr sz="2400" b="1">
                 <a:solidFill>
                   <a:srgbClr val="243244"/>
@@ -14943,7 +14342,6 @@
               </a:defRPr>
             </a:lvl8pPr>
             <a:lvl9pPr>
-              <a:buNone/>
               <a:defRPr sz="2400" b="1">
                 <a:solidFill>
                   <a:srgbClr val="243244"/>
@@ -14956,7 +14354,6 @@
           </a:lstStyle>
           <a:p xmlns:a="http://schemas.openxmlformats.org/drawingml/2006/main">
             <a:pPr>
-              <a:buNone/>
               <a:defRPr sz="2400" b="1">
                 <a:solidFill>
                   <a:srgbClr val="243244"/>
@@ -14985,7 +14382,7 @@
           <p:cNvPr id="3" name="">
             <a:extLst xmlns:a="http://schemas.openxmlformats.org/drawingml/2006/main">
               <a:ext uri="{FF2B5EF4-FFF2-40B4-BE49-F238E27FC236}">
-                <a16:creationId xmlns:a16="http://schemas.microsoft.com/office/drawing/2014/main" id="{A685C134-EB35-4749-8A95-500050666BCB}"/>
+                <a16:creationId xmlns:a16="http://schemas.microsoft.com/office/drawing/2014/main" id="{1A5CBBF1-E1B0-417B-8D01-9323ACD8E1E3}"/>
               </a:ext>
             </a:extLst>
           </p:cNvPr>
@@ -15022,7 +14419,6 @@
               </a:defRPr>
             </a:defPPr>
             <a:lvl1pPr>
-              <a:buNone/>
               <a:defRPr sz="1275" b="0">
                 <a:solidFill>
                   <a:srgbClr val="596678"/>
@@ -15033,7 +14429,6 @@
               </a:defRPr>
             </a:lvl1pPr>
             <a:lvl2pPr>
-              <a:buNone/>
               <a:defRPr sz="1275" b="0">
                 <a:solidFill>
                   <a:srgbClr val="596678"/>
@@ -15044,7 +14439,6 @@
               </a:defRPr>
             </a:lvl2pPr>
             <a:lvl3pPr>
-              <a:buNone/>
               <a:defRPr sz="1275" b="0">
                 <a:solidFill>
                   <a:srgbClr val="596678"/>
@@ -15055,7 +14449,6 @@
               </a:defRPr>
             </a:lvl3pPr>
             <a:lvl4pPr>
-              <a:buNone/>
               <a:defRPr sz="1275" b="0">
                 <a:solidFill>
                   <a:srgbClr val="596678"/>
@@ -15066,7 +14459,6 @@
               </a:defRPr>
             </a:lvl4pPr>
             <a:lvl5pPr>
-              <a:buNone/>
               <a:defRPr sz="1275" b="0">
                 <a:solidFill>
                   <a:srgbClr val="596678"/>
@@ -15077,7 +14469,6 @@
               </a:defRPr>
             </a:lvl5pPr>
             <a:lvl6pPr>
-              <a:buNone/>
               <a:defRPr sz="1275" b="0">
                 <a:solidFill>
                   <a:srgbClr val="596678"/>
@@ -15088,7 +14479,6 @@
               </a:defRPr>
             </a:lvl6pPr>
             <a:lvl7pPr>
-              <a:buNone/>
               <a:defRPr sz="1275" b="0">
                 <a:solidFill>
                   <a:srgbClr val="596678"/>
@@ -15099,7 +14489,6 @@
               </a:defRPr>
             </a:lvl7pPr>
             <a:lvl8pPr>
-              <a:buNone/>
               <a:defRPr sz="1275" b="0">
                 <a:solidFill>
                   <a:srgbClr val="596678"/>
@@ -15110,7 +14499,6 @@
               </a:defRPr>
             </a:lvl8pPr>
             <a:lvl9pPr>
-              <a:buNone/>
               <a:defRPr sz="1275" b="0">
                 <a:solidFill>
                   <a:srgbClr val="596678"/>
@@ -15123,7 +14511,6 @@
           </a:lstStyle>
           <a:p xmlns:a="http://schemas.openxmlformats.org/drawingml/2006/main">
             <a:pPr>
-              <a:buNone/>
               <a:defRPr sz="1275" b="0">
                 <a:solidFill>
                   <a:srgbClr val="596678"/>
@@ -15152,7 +14539,7 @@
           <p:cNvPr id="4" name="">
             <a:extLst xmlns:a="http://schemas.openxmlformats.org/drawingml/2006/main">
               <a:ext uri="{FF2B5EF4-FFF2-40B4-BE49-F238E27FC236}">
-                <a16:creationId xmlns:a16="http://schemas.microsoft.com/office/drawing/2014/main" id="{0D42DAE2-F641-411F-B797-85516030D8B9}"/>
+                <a16:creationId xmlns:a16="http://schemas.microsoft.com/office/drawing/2014/main" id="{8908D3D5-583D-40B1-879B-2C9899C329C2}"/>
               </a:ext>
             </a:extLst>
           </p:cNvPr>
@@ -15189,7 +14576,6 @@
               </a:defRPr>
             </a:defPPr>
             <a:lvl1pPr>
-              <a:buNone/>
               <a:defRPr sz="825" b="0">
                 <a:solidFill>
                   <a:srgbClr val="596678"/>
@@ -15200,7 +14586,6 @@
               </a:defRPr>
             </a:lvl1pPr>
             <a:lvl2pPr>
-              <a:buNone/>
               <a:defRPr sz="825" b="0">
                 <a:solidFill>
                   <a:srgbClr val="596678"/>
@@ -15211,7 +14596,6 @@
               </a:defRPr>
             </a:lvl2pPr>
             <a:lvl3pPr>
-              <a:buNone/>
               <a:defRPr sz="825" b="0">
                 <a:solidFill>
                   <a:srgbClr val="596678"/>
@@ -15222,7 +14606,6 @@
               </a:defRPr>
             </a:lvl3pPr>
             <a:lvl4pPr>
-              <a:buNone/>
               <a:defRPr sz="825" b="0">
                 <a:solidFill>
                   <a:srgbClr val="596678"/>
@@ -15233,7 +14616,6 @@
               </a:defRPr>
             </a:lvl4pPr>
             <a:lvl5pPr>
-              <a:buNone/>
               <a:defRPr sz="825" b="0">
                 <a:solidFill>
                   <a:srgbClr val="596678"/>
@@ -15244,7 +14626,6 @@
               </a:defRPr>
             </a:lvl5pPr>
             <a:lvl6pPr>
-              <a:buNone/>
               <a:defRPr sz="825" b="0">
                 <a:solidFill>
                   <a:srgbClr val="596678"/>
@@ -15255,7 +14636,6 @@
               </a:defRPr>
             </a:lvl6pPr>
             <a:lvl7pPr>
-              <a:buNone/>
               <a:defRPr sz="825" b="0">
                 <a:solidFill>
                   <a:srgbClr val="596678"/>
@@ -15266,7 +14646,6 @@
               </a:defRPr>
             </a:lvl7pPr>
             <a:lvl8pPr>
-              <a:buNone/>
               <a:defRPr sz="825" b="0">
                 <a:solidFill>
                   <a:srgbClr val="596678"/>
@@ -15277,7 +14656,6 @@
               </a:defRPr>
             </a:lvl8pPr>
             <a:lvl9pPr>
-              <a:buNone/>
               <a:defRPr sz="825" b="0">
                 <a:solidFill>
                   <a:srgbClr val="596678"/>
@@ -15290,7 +14668,6 @@
           </a:lstStyle>
           <a:p xmlns:a="http://schemas.openxmlformats.org/drawingml/2006/main">
             <a:pPr>
-              <a:buNone/>
               <a:defRPr sz="825" b="0">
                 <a:solidFill>
                   <a:srgbClr val="596678"/>
@@ -15319,7 +14696,7 @@
           <p:cNvPr id="5" name="">
             <a:extLst xmlns:a="http://schemas.openxmlformats.org/drawingml/2006/main">
               <a:ext uri="{FF2B5EF4-FFF2-40B4-BE49-F238E27FC236}">
-                <a16:creationId xmlns:a16="http://schemas.microsoft.com/office/drawing/2014/main" id="{7DC34A37-13EE-4FEB-8E0C-557163754DF4}"/>
+                <a16:creationId xmlns:a16="http://schemas.microsoft.com/office/drawing/2014/main" id="{2E9E79B0-6F36-49DE-B2A1-E145FC7F2008}"/>
               </a:ext>
             </a:extLst>
           </p:cNvPr>
@@ -15356,7 +14733,6 @@
               </a:defRPr>
             </a:defPPr>
             <a:lvl1pPr>
-              <a:buNone/>
               <a:defRPr sz="825" b="1">
                 <a:solidFill>
                   <a:srgbClr val="802D42"/>
@@ -15367,7 +14743,6 @@
               </a:defRPr>
             </a:lvl1pPr>
             <a:lvl2pPr>
-              <a:buNone/>
               <a:defRPr sz="825" b="1">
                 <a:solidFill>
                   <a:srgbClr val="802D42"/>
@@ -15378,7 +14753,6 @@
               </a:defRPr>
             </a:lvl2pPr>
             <a:lvl3pPr>
-              <a:buNone/>
               <a:defRPr sz="825" b="1">
                 <a:solidFill>
                   <a:srgbClr val="802D42"/>
@@ -15389,7 +14763,6 @@
               </a:defRPr>
             </a:lvl3pPr>
             <a:lvl4pPr>
-              <a:buNone/>
               <a:defRPr sz="825" b="1">
                 <a:solidFill>
                   <a:srgbClr val="802D42"/>
@@ -15400,7 +14773,6 @@
               </a:defRPr>
             </a:lvl4pPr>
             <a:lvl5pPr>
-              <a:buNone/>
               <a:defRPr sz="825" b="1">
                 <a:solidFill>
                   <a:srgbClr val="802D42"/>
@@ -15411,7 +14783,6 @@
               </a:defRPr>
             </a:lvl5pPr>
             <a:lvl6pPr>
-              <a:buNone/>
               <a:defRPr sz="825" b="1">
                 <a:solidFill>
                   <a:srgbClr val="802D42"/>
@@ -15422,7 +14793,6 @@
               </a:defRPr>
             </a:lvl6pPr>
             <a:lvl7pPr>
-              <a:buNone/>
               <a:defRPr sz="825" b="1">
                 <a:solidFill>
                   <a:srgbClr val="802D42"/>
@@ -15433,7 +14803,6 @@
               </a:defRPr>
             </a:lvl7pPr>
             <a:lvl8pPr>
-              <a:buNone/>
               <a:defRPr sz="825" b="1">
                 <a:solidFill>
                   <a:srgbClr val="802D42"/>
@@ -15444,7 +14813,6 @@
               </a:defRPr>
             </a:lvl8pPr>
             <a:lvl9pPr>
-              <a:buNone/>
               <a:defRPr sz="825" b="1">
                 <a:solidFill>
                   <a:srgbClr val="802D42"/>
@@ -15457,7 +14825,6 @@
           </a:lstStyle>
           <a:p xmlns:a="http://schemas.openxmlformats.org/drawingml/2006/main">
             <a:pPr>
-              <a:buNone/>
               <a:defRPr sz="825" b="1">
                 <a:solidFill>
                   <a:srgbClr val="802D42"/>
@@ -15486,7 +14853,7 @@
           <p:cNvPr id="6" name="">
             <a:extLst xmlns:a="http://schemas.openxmlformats.org/drawingml/2006/main">
               <a:ext uri="{FF2B5EF4-FFF2-40B4-BE49-F238E27FC236}">
-                <a16:creationId xmlns:a16="http://schemas.microsoft.com/office/drawing/2014/main" id="{C199D50C-A69A-401A-8321-637E6C4F66B8}"/>
+                <a16:creationId xmlns:a16="http://schemas.microsoft.com/office/drawing/2014/main" id="{282B5DA6-9B74-47C2-9DCF-DC4F253FB2E2}"/>
               </a:ext>
             </a:extLst>
           </p:cNvPr>
@@ -15496,7 +14863,7 @@
           <p:nvPr/>
         </p:nvPicPr>
         <p:blipFill>
-          <a:blip xmlns:r="http://schemas.openxmlformats.org/officeDocument/2006/relationships" xmlns:a="http://schemas.openxmlformats.org/drawingml/2006/main" r:embed="R64e1b246510d4f41"/>
+          <a:blip xmlns:r="http://schemas.openxmlformats.org/officeDocument/2006/relationships" xmlns:a="http://schemas.openxmlformats.org/drawingml/2006/main" r:embed="R2574242b18b446a0"/>
           <a:stretch xmlns:a="http://schemas.openxmlformats.org/drawingml/2006/main"/>
         </p:blipFill>
         <p:spPr>
@@ -15512,7 +14879,7 @@
     </p:spTree>
     <p:extLst>
       <p:ext uri="{BB962C8B-B14F-4D97-AF65-F5344CB8AC3E}">
-        <p14:creationId xmlns:p14="http://schemas.microsoft.com/office/powerpoint/2010/main" val="1129674471"/>
+        <p14:creationId xmlns:p14="http://schemas.microsoft.com/office/powerpoint/2010/main" val="93500615"/>
       </p:ext>
     </p:extLst>
   </p:cSld>
@@ -15543,7 +14910,7 @@
           <p:cNvPr id="7" name="">
             <a:extLst xmlns:a="http://schemas.openxmlformats.org/drawingml/2006/main">
               <a:ext uri="{FF2B5EF4-FFF2-40B4-BE49-F238E27FC236}">
-                <a16:creationId xmlns:a16="http://schemas.microsoft.com/office/drawing/2014/main" id="{68955A82-CF51-4D85-83B6-72F11FF182BC}"/>
+                <a16:creationId xmlns:a16="http://schemas.microsoft.com/office/drawing/2014/main" id="{DF296F56-A3BA-48FA-B4AB-7D6E5EE0F3ED}"/>
               </a:ext>
             </a:extLst>
           </p:cNvPr>
@@ -15580,7 +14947,6 @@
               </a:defRPr>
             </a:defPPr>
             <a:lvl1pPr>
-              <a:buNone/>
               <a:defRPr sz="900" b="1">
                 <a:solidFill>
                   <a:srgbClr val="802D42"/>
@@ -15591,7 +14957,6 @@
               </a:defRPr>
             </a:lvl1pPr>
             <a:lvl2pPr>
-              <a:buNone/>
               <a:defRPr sz="900" b="1">
                 <a:solidFill>
                   <a:srgbClr val="802D42"/>
@@ -15602,7 +14967,6 @@
               </a:defRPr>
             </a:lvl2pPr>
             <a:lvl3pPr>
-              <a:buNone/>
               <a:defRPr sz="900" b="1">
                 <a:solidFill>
                   <a:srgbClr val="802D42"/>
@@ -15613,7 +14977,6 @@
               </a:defRPr>
             </a:lvl3pPr>
             <a:lvl4pPr>
-              <a:buNone/>
               <a:defRPr sz="900" b="1">
                 <a:solidFill>
                   <a:srgbClr val="802D42"/>
@@ -15624,7 +14987,6 @@
               </a:defRPr>
             </a:lvl4pPr>
             <a:lvl5pPr>
-              <a:buNone/>
               <a:defRPr sz="900" b="1">
                 <a:solidFill>
                   <a:srgbClr val="802D42"/>
@@ -15635,7 +14997,6 @@
               </a:defRPr>
             </a:lvl5pPr>
             <a:lvl6pPr>
-              <a:buNone/>
               <a:defRPr sz="900" b="1">
                 <a:solidFill>
                   <a:srgbClr val="802D42"/>
@@ -15646,7 +15007,6 @@
               </a:defRPr>
             </a:lvl6pPr>
             <a:lvl7pPr>
-              <a:buNone/>
               <a:defRPr sz="900" b="1">
                 <a:solidFill>
                   <a:srgbClr val="802D42"/>
@@ -15657,7 +15017,6 @@
               </a:defRPr>
             </a:lvl7pPr>
             <a:lvl8pPr>
-              <a:buNone/>
               <a:defRPr sz="900" b="1">
                 <a:solidFill>
                   <a:srgbClr val="802D42"/>
@@ -15668,7 +15027,6 @@
               </a:defRPr>
             </a:lvl8pPr>
             <a:lvl9pPr>
-              <a:buNone/>
               <a:defRPr sz="900" b="1">
                 <a:solidFill>
                   <a:srgbClr val="802D42"/>
@@ -15681,7 +15039,6 @@
           </a:lstStyle>
           <a:p xmlns:a="http://schemas.openxmlformats.org/drawingml/2006/main">
             <a:pPr>
-              <a:buNone/>
               <a:defRPr sz="900" b="1">
                 <a:solidFill>
                   <a:srgbClr val="802D42"/>
@@ -15710,7 +15067,7 @@
           <p:cNvPr id="2" name="">
             <a:extLst xmlns:a="http://schemas.openxmlformats.org/drawingml/2006/main">
               <a:ext uri="{FF2B5EF4-FFF2-40B4-BE49-F238E27FC236}">
-                <a16:creationId xmlns:a16="http://schemas.microsoft.com/office/drawing/2014/main" id="{A638A17E-7216-4012-9C91-DADDE76A0DAC}"/>
+                <a16:creationId xmlns:a16="http://schemas.microsoft.com/office/drawing/2014/main" id="{096D19B4-744E-4FA6-834C-3DAD10236A88}"/>
               </a:ext>
             </a:extLst>
           </p:cNvPr>
@@ -15747,7 +15104,6 @@
               </a:defRPr>
             </a:defPPr>
             <a:lvl1pPr>
-              <a:buNone/>
               <a:defRPr sz="2400" b="1">
                 <a:solidFill>
                   <a:srgbClr val="243244"/>
@@ -15758,7 +15114,6 @@
               </a:defRPr>
             </a:lvl1pPr>
             <a:lvl2pPr>
-              <a:buNone/>
               <a:defRPr sz="2400" b="1">
                 <a:solidFill>
                   <a:srgbClr val="243244"/>
@@ -15769,7 +15124,6 @@
               </a:defRPr>
             </a:lvl2pPr>
             <a:lvl3pPr>
-              <a:buNone/>
               <a:defRPr sz="2400" b="1">
                 <a:solidFill>
                   <a:srgbClr val="243244"/>
@@ -15780,7 +15134,6 @@
               </a:defRPr>
             </a:lvl3pPr>
             <a:lvl4pPr>
-              <a:buNone/>
               <a:defRPr sz="2400" b="1">
                 <a:solidFill>
                   <a:srgbClr val="243244"/>
@@ -15791,7 +15144,6 @@
               </a:defRPr>
             </a:lvl4pPr>
             <a:lvl5pPr>
-              <a:buNone/>
               <a:defRPr sz="2400" b="1">
                 <a:solidFill>
                   <a:srgbClr val="243244"/>
@@ -15802,7 +15154,6 @@
               </a:defRPr>
             </a:lvl5pPr>
             <a:lvl6pPr>
-              <a:buNone/>
               <a:defRPr sz="2400" b="1">
                 <a:solidFill>
                   <a:srgbClr val="243244"/>
@@ -15813,7 +15164,6 @@
               </a:defRPr>
             </a:lvl6pPr>
             <a:lvl7pPr>
-              <a:buNone/>
               <a:defRPr sz="2400" b="1">
                 <a:solidFill>
                   <a:srgbClr val="243244"/>
@@ -15824,7 +15174,6 @@
               </a:defRPr>
             </a:lvl7pPr>
             <a:lvl8pPr>
-              <a:buNone/>
               <a:defRPr sz="2400" b="1">
                 <a:solidFill>
                   <a:srgbClr val="243244"/>
@@ -15835,7 +15184,6 @@
               </a:defRPr>
             </a:lvl8pPr>
             <a:lvl9pPr>
-              <a:buNone/>
               <a:defRPr sz="2400" b="1">
                 <a:solidFill>
                   <a:srgbClr val="243244"/>
@@ -15848,7 +15196,6 @@
           </a:lstStyle>
           <a:p xmlns:a="http://schemas.openxmlformats.org/drawingml/2006/main">
             <a:pPr>
-              <a:buNone/>
               <a:defRPr sz="2400" b="1">
                 <a:solidFill>
                   <a:srgbClr val="243244"/>
@@ -15877,7 +15224,7 @@
           <p:cNvPr id="3" name="">
             <a:extLst xmlns:a="http://schemas.openxmlformats.org/drawingml/2006/main">
               <a:ext uri="{FF2B5EF4-FFF2-40B4-BE49-F238E27FC236}">
-                <a16:creationId xmlns:a16="http://schemas.microsoft.com/office/drawing/2014/main" id="{E978E3E8-04C3-4A97-8D9A-19A3314DE232}"/>
+                <a16:creationId xmlns:a16="http://schemas.microsoft.com/office/drawing/2014/main" id="{D2C4C059-22C6-446C-ACDC-2AFC61237E3A}"/>
               </a:ext>
             </a:extLst>
           </p:cNvPr>
@@ -15914,7 +15261,6 @@
               </a:defRPr>
             </a:defPPr>
             <a:lvl1pPr>
-              <a:buNone/>
               <a:defRPr sz="1275" b="0">
                 <a:solidFill>
                   <a:srgbClr val="596678"/>
@@ -15925,7 +15271,6 @@
               </a:defRPr>
             </a:lvl1pPr>
             <a:lvl2pPr>
-              <a:buNone/>
               <a:defRPr sz="1275" b="0">
                 <a:solidFill>
                   <a:srgbClr val="596678"/>
@@ -15936,7 +15281,6 @@
               </a:defRPr>
             </a:lvl2pPr>
             <a:lvl3pPr>
-              <a:buNone/>
               <a:defRPr sz="1275" b="0">
                 <a:solidFill>
                   <a:srgbClr val="596678"/>
@@ -15947,7 +15291,6 @@
               </a:defRPr>
             </a:lvl3pPr>
             <a:lvl4pPr>
-              <a:buNone/>
               <a:defRPr sz="1275" b="0">
                 <a:solidFill>
                   <a:srgbClr val="596678"/>
@@ -15958,7 +15301,6 @@
               </a:defRPr>
             </a:lvl4pPr>
             <a:lvl5pPr>
-              <a:buNone/>
               <a:defRPr sz="1275" b="0">
                 <a:solidFill>
                   <a:srgbClr val="596678"/>
@@ -15969,7 +15311,6 @@
               </a:defRPr>
             </a:lvl5pPr>
             <a:lvl6pPr>
-              <a:buNone/>
               <a:defRPr sz="1275" b="0">
                 <a:solidFill>
                   <a:srgbClr val="596678"/>
@@ -15980,7 +15321,6 @@
               </a:defRPr>
             </a:lvl6pPr>
             <a:lvl7pPr>
-              <a:buNone/>
               <a:defRPr sz="1275" b="0">
                 <a:solidFill>
                   <a:srgbClr val="596678"/>
@@ -15991,7 +15331,6 @@
               </a:defRPr>
             </a:lvl7pPr>
             <a:lvl8pPr>
-              <a:buNone/>
               <a:defRPr sz="1275" b="0">
                 <a:solidFill>
                   <a:srgbClr val="596678"/>
@@ -16002,7 +15341,6 @@
               </a:defRPr>
             </a:lvl8pPr>
             <a:lvl9pPr>
-              <a:buNone/>
               <a:defRPr sz="1275" b="0">
                 <a:solidFill>
                   <a:srgbClr val="596678"/>
@@ -16015,7 +15353,6 @@
           </a:lstStyle>
           <a:p xmlns:a="http://schemas.openxmlformats.org/drawingml/2006/main">
             <a:pPr>
-              <a:buNone/>
               <a:defRPr sz="1275" b="0">
                 <a:solidFill>
                   <a:srgbClr val="596678"/>
@@ -16044,7 +15381,7 @@
           <p:cNvPr id="4" name="">
             <a:extLst xmlns:a="http://schemas.openxmlformats.org/drawingml/2006/main">
               <a:ext uri="{FF2B5EF4-FFF2-40B4-BE49-F238E27FC236}">
-                <a16:creationId xmlns:a16="http://schemas.microsoft.com/office/drawing/2014/main" id="{03A00D1D-3729-460E-8AFE-9C4D1FB214E2}"/>
+                <a16:creationId xmlns:a16="http://schemas.microsoft.com/office/drawing/2014/main" id="{634651A2-4965-47BC-AB4C-4B4897E4E050}"/>
               </a:ext>
             </a:extLst>
           </p:cNvPr>
@@ -16081,7 +15418,6 @@
               </a:defRPr>
             </a:defPPr>
             <a:lvl1pPr>
-              <a:buNone/>
               <a:defRPr sz="825" b="0">
                 <a:solidFill>
                   <a:srgbClr val="596678"/>
@@ -16092,7 +15428,6 @@
               </a:defRPr>
             </a:lvl1pPr>
             <a:lvl2pPr>
-              <a:buNone/>
               <a:defRPr sz="825" b="0">
                 <a:solidFill>
                   <a:srgbClr val="596678"/>
@@ -16103,7 +15438,6 @@
               </a:defRPr>
             </a:lvl2pPr>
             <a:lvl3pPr>
-              <a:buNone/>
               <a:defRPr sz="825" b="0">
                 <a:solidFill>
                   <a:srgbClr val="596678"/>
@@ -16114,7 +15448,6 @@
               </a:defRPr>
             </a:lvl3pPr>
             <a:lvl4pPr>
-              <a:buNone/>
               <a:defRPr sz="825" b="0">
                 <a:solidFill>
                   <a:srgbClr val="596678"/>
@@ -16125,7 +15458,6 @@
               </a:defRPr>
             </a:lvl4pPr>
             <a:lvl5pPr>
-              <a:buNone/>
               <a:defRPr sz="825" b="0">
                 <a:solidFill>
                   <a:srgbClr val="596678"/>
@@ -16136,7 +15468,6 @@
               </a:defRPr>
             </a:lvl5pPr>
             <a:lvl6pPr>
-              <a:buNone/>
               <a:defRPr sz="825" b="0">
                 <a:solidFill>
                   <a:srgbClr val="596678"/>
@@ -16147,7 +15478,6 @@
               </a:defRPr>
             </a:lvl6pPr>
             <a:lvl7pPr>
-              <a:buNone/>
               <a:defRPr sz="825" b="0">
                 <a:solidFill>
                   <a:srgbClr val="596678"/>
@@ -16158,7 +15488,6 @@
               </a:defRPr>
             </a:lvl7pPr>
             <a:lvl8pPr>
-              <a:buNone/>
               <a:defRPr sz="825" b="0">
                 <a:solidFill>
                   <a:srgbClr val="596678"/>
@@ -16169,7 +15498,6 @@
               </a:defRPr>
             </a:lvl8pPr>
             <a:lvl9pPr>
-              <a:buNone/>
               <a:defRPr sz="825" b="0">
                 <a:solidFill>
                   <a:srgbClr val="596678"/>
@@ -16182,7 +15510,6 @@
           </a:lstStyle>
           <a:p xmlns:a="http://schemas.openxmlformats.org/drawingml/2006/main">
             <a:pPr>
-              <a:buNone/>
               <a:defRPr sz="825" b="0">
                 <a:solidFill>
                   <a:srgbClr val="596678"/>
@@ -16211,7 +15538,7 @@
           <p:cNvPr id="5" name="">
             <a:extLst xmlns:a="http://schemas.openxmlformats.org/drawingml/2006/main">
               <a:ext uri="{FF2B5EF4-FFF2-40B4-BE49-F238E27FC236}">
-                <a16:creationId xmlns:a16="http://schemas.microsoft.com/office/drawing/2014/main" id="{238A05BF-1175-48EA-A4F3-ED29CE97D78E}"/>
+                <a16:creationId xmlns:a16="http://schemas.microsoft.com/office/drawing/2014/main" id="{A3502600-09AF-42A6-881A-0747A2B02831}"/>
               </a:ext>
             </a:extLst>
           </p:cNvPr>
@@ -16248,7 +15575,6 @@
               </a:defRPr>
             </a:defPPr>
             <a:lvl1pPr>
-              <a:buNone/>
               <a:defRPr sz="825" b="1">
                 <a:solidFill>
                   <a:srgbClr val="802D42"/>
@@ -16259,7 +15585,6 @@
               </a:defRPr>
             </a:lvl1pPr>
             <a:lvl2pPr>
-              <a:buNone/>
               <a:defRPr sz="825" b="1">
                 <a:solidFill>
                   <a:srgbClr val="802D42"/>
@@ -16270,7 +15595,6 @@
               </a:defRPr>
             </a:lvl2pPr>
             <a:lvl3pPr>
-              <a:buNone/>
               <a:defRPr sz="825" b="1">
                 <a:solidFill>
                   <a:srgbClr val="802D42"/>
@@ -16281,7 +15605,6 @@
               </a:defRPr>
             </a:lvl3pPr>
             <a:lvl4pPr>
-              <a:buNone/>
               <a:defRPr sz="825" b="1">
                 <a:solidFill>
                   <a:srgbClr val="802D42"/>
@@ -16292,7 +15615,6 @@
               </a:defRPr>
             </a:lvl4pPr>
             <a:lvl5pPr>
-              <a:buNone/>
               <a:defRPr sz="825" b="1">
                 <a:solidFill>
                   <a:srgbClr val="802D42"/>
@@ -16303,7 +15625,6 @@
               </a:defRPr>
             </a:lvl5pPr>
             <a:lvl6pPr>
-              <a:buNone/>
               <a:defRPr sz="825" b="1">
                 <a:solidFill>
                   <a:srgbClr val="802D42"/>
@@ -16314,7 +15635,6 @@
               </a:defRPr>
             </a:lvl6pPr>
             <a:lvl7pPr>
-              <a:buNone/>
               <a:defRPr sz="825" b="1">
                 <a:solidFill>
                   <a:srgbClr val="802D42"/>
@@ -16325,7 +15645,6 @@
               </a:defRPr>
             </a:lvl7pPr>
             <a:lvl8pPr>
-              <a:buNone/>
               <a:defRPr sz="825" b="1">
                 <a:solidFill>
                   <a:srgbClr val="802D42"/>
@@ -16336,7 +15655,6 @@
               </a:defRPr>
             </a:lvl8pPr>
             <a:lvl9pPr>
-              <a:buNone/>
               <a:defRPr sz="825" b="1">
                 <a:solidFill>
                   <a:srgbClr val="802D42"/>
@@ -16349,7 +15667,6 @@
           </a:lstStyle>
           <a:p xmlns:a="http://schemas.openxmlformats.org/drawingml/2006/main">
             <a:pPr>
-              <a:buNone/>
               <a:defRPr sz="825" b="1">
                 <a:solidFill>
                   <a:srgbClr val="802D42"/>
@@ -16378,7 +15695,7 @@
           <p:cNvPr id="6" name="">
             <a:extLst xmlns:a="http://schemas.openxmlformats.org/drawingml/2006/main">
               <a:ext uri="{FF2B5EF4-FFF2-40B4-BE49-F238E27FC236}">
-                <a16:creationId xmlns:a16="http://schemas.microsoft.com/office/drawing/2014/main" id="{EE73F185-6110-4A69-ADB5-EDBF52BA9209}"/>
+                <a16:creationId xmlns:a16="http://schemas.microsoft.com/office/drawing/2014/main" id="{7E6EFFF6-D56B-4C8B-AC41-CEF18A9182BC}"/>
               </a:ext>
             </a:extLst>
           </p:cNvPr>
@@ -16388,7 +15705,7 @@
           <p:nvPr/>
         </p:nvPicPr>
         <p:blipFill>
-          <a:blip xmlns:r="http://schemas.openxmlformats.org/officeDocument/2006/relationships" xmlns:a="http://schemas.openxmlformats.org/drawingml/2006/main" r:embed="R941de592efb2403d"/>
+          <a:blip xmlns:r="http://schemas.openxmlformats.org/officeDocument/2006/relationships" xmlns:a="http://schemas.openxmlformats.org/drawingml/2006/main" r:embed="R644a51b89d754f84"/>
           <a:stretch xmlns:a="http://schemas.openxmlformats.org/drawingml/2006/main"/>
         </p:blipFill>
         <p:spPr>
@@ -16404,7 +15721,7 @@
     </p:spTree>
     <p:extLst>
       <p:ext uri="{BB962C8B-B14F-4D97-AF65-F5344CB8AC3E}">
-        <p14:creationId xmlns:p14="http://schemas.microsoft.com/office/powerpoint/2010/main" val="1678583306"/>
+        <p14:creationId xmlns:p14="http://schemas.microsoft.com/office/powerpoint/2010/main" val="768328360"/>
       </p:ext>
     </p:extLst>
   </p:cSld>
@@ -16435,7 +15752,7 @@
           <p:cNvPr id="7" name="">
             <a:extLst xmlns:a="http://schemas.openxmlformats.org/drawingml/2006/main">
               <a:ext uri="{FF2B5EF4-FFF2-40B4-BE49-F238E27FC236}">
-                <a16:creationId xmlns:a16="http://schemas.microsoft.com/office/drawing/2014/main" id="{C31780E8-8361-4768-8AAC-9746C356159F}"/>
+                <a16:creationId xmlns:a16="http://schemas.microsoft.com/office/drawing/2014/main" id="{6B095437-FCF0-4083-BABA-52D802727D45}"/>
               </a:ext>
             </a:extLst>
           </p:cNvPr>
@@ -16472,7 +15789,6 @@
               </a:defRPr>
             </a:defPPr>
             <a:lvl1pPr>
-              <a:buNone/>
               <a:defRPr sz="900" b="1">
                 <a:solidFill>
                   <a:srgbClr val="802D42"/>
@@ -16483,7 +15799,6 @@
               </a:defRPr>
             </a:lvl1pPr>
             <a:lvl2pPr>
-              <a:buNone/>
               <a:defRPr sz="900" b="1">
                 <a:solidFill>
                   <a:srgbClr val="802D42"/>
@@ -16494,7 +15809,6 @@
               </a:defRPr>
             </a:lvl2pPr>
             <a:lvl3pPr>
-              <a:buNone/>
               <a:defRPr sz="900" b="1">
                 <a:solidFill>
                   <a:srgbClr val="802D42"/>
@@ -16505,7 +15819,6 @@
               </a:defRPr>
             </a:lvl3pPr>
             <a:lvl4pPr>
-              <a:buNone/>
               <a:defRPr sz="900" b="1">
                 <a:solidFill>
                   <a:srgbClr val="802D42"/>
@@ -16516,7 +15829,6 @@
               </a:defRPr>
             </a:lvl4pPr>
             <a:lvl5pPr>
-              <a:buNone/>
               <a:defRPr sz="900" b="1">
                 <a:solidFill>
                   <a:srgbClr val="802D42"/>
@@ -16527,7 +15839,6 @@
               </a:defRPr>
             </a:lvl5pPr>
             <a:lvl6pPr>
-              <a:buNone/>
               <a:defRPr sz="900" b="1">
                 <a:solidFill>
                   <a:srgbClr val="802D42"/>
@@ -16538,7 +15849,6 @@
               </a:defRPr>
             </a:lvl6pPr>
             <a:lvl7pPr>
-              <a:buNone/>
               <a:defRPr sz="900" b="1">
                 <a:solidFill>
                   <a:srgbClr val="802D42"/>
@@ -16549,7 +15859,6 @@
               </a:defRPr>
             </a:lvl7pPr>
             <a:lvl8pPr>
-              <a:buNone/>
               <a:defRPr sz="900" b="1">
                 <a:solidFill>
                   <a:srgbClr val="802D42"/>
@@ -16560,7 +15869,6 @@
               </a:defRPr>
             </a:lvl8pPr>
             <a:lvl9pPr>
-              <a:buNone/>
               <a:defRPr sz="900" b="1">
                 <a:solidFill>
                   <a:srgbClr val="802D42"/>
@@ -16573,7 +15881,6 @@
           </a:lstStyle>
           <a:p xmlns:a="http://schemas.openxmlformats.org/drawingml/2006/main">
             <a:pPr>
-              <a:buNone/>
               <a:defRPr sz="900" b="1">
                 <a:solidFill>
                   <a:srgbClr val="802D42"/>
@@ -16602,7 +15909,7 @@
           <p:cNvPr id="2" name="">
             <a:extLst xmlns:a="http://schemas.openxmlformats.org/drawingml/2006/main">
               <a:ext uri="{FF2B5EF4-FFF2-40B4-BE49-F238E27FC236}">
-                <a16:creationId xmlns:a16="http://schemas.microsoft.com/office/drawing/2014/main" id="{7D9745E0-2D20-4F32-9868-C88C0ECCAFC5}"/>
+                <a16:creationId xmlns:a16="http://schemas.microsoft.com/office/drawing/2014/main" id="{86492EFA-800F-4E4A-8FD7-AADA75AAE0AC}"/>
               </a:ext>
             </a:extLst>
           </p:cNvPr>
@@ -16639,7 +15946,6 @@
               </a:defRPr>
             </a:defPPr>
             <a:lvl1pPr>
-              <a:buNone/>
               <a:defRPr sz="2400" b="1">
                 <a:solidFill>
                   <a:srgbClr val="243244"/>
@@ -16650,7 +15956,6 @@
               </a:defRPr>
             </a:lvl1pPr>
             <a:lvl2pPr>
-              <a:buNone/>
               <a:defRPr sz="2400" b="1">
                 <a:solidFill>
                   <a:srgbClr val="243244"/>
@@ -16661,7 +15966,6 @@
               </a:defRPr>
             </a:lvl2pPr>
             <a:lvl3pPr>
-              <a:buNone/>
               <a:defRPr sz="2400" b="1">
                 <a:solidFill>
                   <a:srgbClr val="243244"/>
@@ -16672,7 +15976,6 @@
               </a:defRPr>
             </a:lvl3pPr>
             <a:lvl4pPr>
-              <a:buNone/>
               <a:defRPr sz="2400" b="1">
                 <a:solidFill>
                   <a:srgbClr val="243244"/>
@@ -16683,7 +15986,6 @@
               </a:defRPr>
             </a:lvl4pPr>
             <a:lvl5pPr>
-              <a:buNone/>
               <a:defRPr sz="2400" b="1">
                 <a:solidFill>
                   <a:srgbClr val="243244"/>
@@ -16694,7 +15996,6 @@
               </a:defRPr>
             </a:lvl5pPr>
             <a:lvl6pPr>
-              <a:buNone/>
               <a:defRPr sz="2400" b="1">
                 <a:solidFill>
                   <a:srgbClr val="243244"/>
@@ -16705,7 +16006,6 @@
               </a:defRPr>
             </a:lvl6pPr>
             <a:lvl7pPr>
-              <a:buNone/>
               <a:defRPr sz="2400" b="1">
                 <a:solidFill>
                   <a:srgbClr val="243244"/>
@@ -16716,7 +16016,6 @@
               </a:defRPr>
             </a:lvl7pPr>
             <a:lvl8pPr>
-              <a:buNone/>
               <a:defRPr sz="2400" b="1">
                 <a:solidFill>
                   <a:srgbClr val="243244"/>
@@ -16727,7 +16026,6 @@
               </a:defRPr>
             </a:lvl8pPr>
             <a:lvl9pPr>
-              <a:buNone/>
               <a:defRPr sz="2400" b="1">
                 <a:solidFill>
                   <a:srgbClr val="243244"/>
@@ -16740,7 +16038,6 @@
           </a:lstStyle>
           <a:p xmlns:a="http://schemas.openxmlformats.org/drawingml/2006/main">
             <a:pPr>
-              <a:buNone/>
               <a:defRPr sz="2400" b="1">
                 <a:solidFill>
                   <a:srgbClr val="243244"/>
@@ -16769,7 +16066,7 @@
           <p:cNvPr id="3" name="">
             <a:extLst xmlns:a="http://schemas.openxmlformats.org/drawingml/2006/main">
               <a:ext uri="{FF2B5EF4-FFF2-40B4-BE49-F238E27FC236}">
-                <a16:creationId xmlns:a16="http://schemas.microsoft.com/office/drawing/2014/main" id="{BD95E3DE-ED36-4E97-A06F-5E0E88D0CF66}"/>
+                <a16:creationId xmlns:a16="http://schemas.microsoft.com/office/drawing/2014/main" id="{692E6FA6-DDF5-4CFD-A0DF-777983C483CE}"/>
               </a:ext>
             </a:extLst>
           </p:cNvPr>
@@ -16806,7 +16103,6 @@
               </a:defRPr>
             </a:defPPr>
             <a:lvl1pPr>
-              <a:buNone/>
               <a:defRPr sz="1275" b="0">
                 <a:solidFill>
                   <a:srgbClr val="596678"/>
@@ -16817,7 +16113,6 @@
               </a:defRPr>
             </a:lvl1pPr>
             <a:lvl2pPr>
-              <a:buNone/>
               <a:defRPr sz="1275" b="0">
                 <a:solidFill>
                   <a:srgbClr val="596678"/>
@@ -16828,7 +16123,6 @@
               </a:defRPr>
             </a:lvl2pPr>
             <a:lvl3pPr>
-              <a:buNone/>
               <a:defRPr sz="1275" b="0">
                 <a:solidFill>
                   <a:srgbClr val="596678"/>
@@ -16839,7 +16133,6 @@
               </a:defRPr>
             </a:lvl3pPr>
             <a:lvl4pPr>
-              <a:buNone/>
               <a:defRPr sz="1275" b="0">
                 <a:solidFill>
                   <a:srgbClr val="596678"/>
@@ -16850,7 +16143,6 @@
               </a:defRPr>
             </a:lvl4pPr>
             <a:lvl5pPr>
-              <a:buNone/>
               <a:defRPr sz="1275" b="0">
                 <a:solidFill>
                   <a:srgbClr val="596678"/>
@@ -16861,7 +16153,6 @@
               </a:defRPr>
             </a:lvl5pPr>
             <a:lvl6pPr>
-              <a:buNone/>
               <a:defRPr sz="1275" b="0">
                 <a:solidFill>
                   <a:srgbClr val="596678"/>
@@ -16872,7 +16163,6 @@
               </a:defRPr>
             </a:lvl6pPr>
             <a:lvl7pPr>
-              <a:buNone/>
               <a:defRPr sz="1275" b="0">
                 <a:solidFill>
                   <a:srgbClr val="596678"/>
@@ -16883,7 +16173,6 @@
               </a:defRPr>
             </a:lvl7pPr>
             <a:lvl8pPr>
-              <a:buNone/>
               <a:defRPr sz="1275" b="0">
                 <a:solidFill>
                   <a:srgbClr val="596678"/>
@@ -16894,7 +16183,6 @@
               </a:defRPr>
             </a:lvl8pPr>
             <a:lvl9pPr>
-              <a:buNone/>
               <a:defRPr sz="1275" b="0">
                 <a:solidFill>
                   <a:srgbClr val="596678"/>
@@ -16907,7 +16195,6 @@
           </a:lstStyle>
           <a:p xmlns:a="http://schemas.openxmlformats.org/drawingml/2006/main">
             <a:pPr>
-              <a:buNone/>
               <a:defRPr sz="1275" b="0">
                 <a:solidFill>
                   <a:srgbClr val="596678"/>
@@ -16936,7 +16223,7 @@
           <p:cNvPr id="4" name="">
             <a:extLst xmlns:a="http://schemas.openxmlformats.org/drawingml/2006/main">
               <a:ext uri="{FF2B5EF4-FFF2-40B4-BE49-F238E27FC236}">
-                <a16:creationId xmlns:a16="http://schemas.microsoft.com/office/drawing/2014/main" id="{39A35A0B-ECCD-4BF5-A264-3F14173A5FA2}"/>
+                <a16:creationId xmlns:a16="http://schemas.microsoft.com/office/drawing/2014/main" id="{92BC3166-DB61-48D6-B8D3-2ABC51462D67}"/>
               </a:ext>
             </a:extLst>
           </p:cNvPr>
@@ -16973,7 +16260,6 @@
               </a:defRPr>
             </a:defPPr>
             <a:lvl1pPr>
-              <a:buNone/>
               <a:defRPr sz="825" b="0">
                 <a:solidFill>
                   <a:srgbClr val="596678"/>
@@ -16984,7 +16270,6 @@
               </a:defRPr>
             </a:lvl1pPr>
             <a:lvl2pPr>
-              <a:buNone/>
               <a:defRPr sz="825" b="0">
                 <a:solidFill>
                   <a:srgbClr val="596678"/>
@@ -16995,7 +16280,6 @@
               </a:defRPr>
             </a:lvl2pPr>
             <a:lvl3pPr>
-              <a:buNone/>
               <a:defRPr sz="825" b="0">
                 <a:solidFill>
                   <a:srgbClr val="596678"/>
@@ -17006,7 +16290,6 @@
               </a:defRPr>
             </a:lvl3pPr>
             <a:lvl4pPr>
-              <a:buNone/>
               <a:defRPr sz="825" b="0">
                 <a:solidFill>
                   <a:srgbClr val="596678"/>
@@ -17017,7 +16300,6 @@
               </a:defRPr>
             </a:lvl4pPr>
             <a:lvl5pPr>
-              <a:buNone/>
               <a:defRPr sz="825" b="0">
                 <a:solidFill>
                   <a:srgbClr val="596678"/>
@@ -17028,7 +16310,6 @@
               </a:defRPr>
             </a:lvl5pPr>
             <a:lvl6pPr>
-              <a:buNone/>
               <a:defRPr sz="825" b="0">
                 <a:solidFill>
                   <a:srgbClr val="596678"/>
@@ -17039,7 +16320,6 @@
               </a:defRPr>
             </a:lvl6pPr>
             <a:lvl7pPr>
-              <a:buNone/>
               <a:defRPr sz="825" b="0">
                 <a:solidFill>
                   <a:srgbClr val="596678"/>
@@ -17050,7 +16330,6 @@
               </a:defRPr>
             </a:lvl7pPr>
             <a:lvl8pPr>
-              <a:buNone/>
               <a:defRPr sz="825" b="0">
                 <a:solidFill>
                   <a:srgbClr val="596678"/>
@@ -17061,7 +16340,6 @@
               </a:defRPr>
             </a:lvl8pPr>
             <a:lvl9pPr>
-              <a:buNone/>
               <a:defRPr sz="825" b="0">
                 <a:solidFill>
                   <a:srgbClr val="596678"/>
@@ -17074,7 +16352,6 @@
           </a:lstStyle>
           <a:p xmlns:a="http://schemas.openxmlformats.org/drawingml/2006/main">
             <a:pPr>
-              <a:buNone/>
               <a:defRPr sz="825" b="0">
                 <a:solidFill>
                   <a:srgbClr val="596678"/>
@@ -17103,7 +16380,7 @@
           <p:cNvPr id="5" name="">
             <a:extLst xmlns:a="http://schemas.openxmlformats.org/drawingml/2006/main">
               <a:ext uri="{FF2B5EF4-FFF2-40B4-BE49-F238E27FC236}">
-                <a16:creationId xmlns:a16="http://schemas.microsoft.com/office/drawing/2014/main" id="{E62BB19B-BA10-4CC7-8122-FB780F3D90AF}"/>
+                <a16:creationId xmlns:a16="http://schemas.microsoft.com/office/drawing/2014/main" id="{696F1E84-5128-4A93-A424-BF7A097C4A1A}"/>
               </a:ext>
             </a:extLst>
           </p:cNvPr>
@@ -17140,7 +16417,6 @@
               </a:defRPr>
             </a:defPPr>
             <a:lvl1pPr>
-              <a:buNone/>
               <a:defRPr sz="825" b="1">
                 <a:solidFill>
                   <a:srgbClr val="802D42"/>
@@ -17151,7 +16427,6 @@
               </a:defRPr>
             </a:lvl1pPr>
             <a:lvl2pPr>
-              <a:buNone/>
               <a:defRPr sz="825" b="1">
                 <a:solidFill>
                   <a:srgbClr val="802D42"/>
@@ -17162,7 +16437,6 @@
               </a:defRPr>
             </a:lvl2pPr>
             <a:lvl3pPr>
-              <a:buNone/>
               <a:defRPr sz="825" b="1">
                 <a:solidFill>
                   <a:srgbClr val="802D42"/>
@@ -17173,7 +16447,6 @@
               </a:defRPr>
             </a:lvl3pPr>
             <a:lvl4pPr>
-              <a:buNone/>
               <a:defRPr sz="825" b="1">
                 <a:solidFill>
                   <a:srgbClr val="802D42"/>
@@ -17184,7 +16457,6 @@
               </a:defRPr>
             </a:lvl4pPr>
             <a:lvl5pPr>
-              <a:buNone/>
               <a:defRPr sz="825" b="1">
                 <a:solidFill>
                   <a:srgbClr val="802D42"/>
@@ -17195,7 +16467,6 @@
               </a:defRPr>
             </a:lvl5pPr>
             <a:lvl6pPr>
-              <a:buNone/>
               <a:defRPr sz="825" b="1">
                 <a:solidFill>
                   <a:srgbClr val="802D42"/>
@@ -17206,7 +16477,6 @@
               </a:defRPr>
             </a:lvl6pPr>
             <a:lvl7pPr>
-              <a:buNone/>
               <a:defRPr sz="825" b="1">
                 <a:solidFill>
                   <a:srgbClr val="802D42"/>
@@ -17217,7 +16487,6 @@
               </a:defRPr>
             </a:lvl7pPr>
             <a:lvl8pPr>
-              <a:buNone/>
               <a:defRPr sz="825" b="1">
                 <a:solidFill>
                   <a:srgbClr val="802D42"/>
@@ -17228,7 +16497,6 @@
               </a:defRPr>
             </a:lvl8pPr>
             <a:lvl9pPr>
-              <a:buNone/>
               <a:defRPr sz="825" b="1">
                 <a:solidFill>
                   <a:srgbClr val="802D42"/>
@@ -17241,7 +16509,6 @@
           </a:lstStyle>
           <a:p xmlns:a="http://schemas.openxmlformats.org/drawingml/2006/main">
             <a:pPr>
-              <a:buNone/>
               <a:defRPr sz="825" b="1">
                 <a:solidFill>
                   <a:srgbClr val="802D42"/>
@@ -17270,7 +16537,7 @@
           <p:cNvPr id="6" name="">
             <a:extLst xmlns:a="http://schemas.openxmlformats.org/drawingml/2006/main">
               <a:ext uri="{FF2B5EF4-FFF2-40B4-BE49-F238E27FC236}">
-                <a16:creationId xmlns:a16="http://schemas.microsoft.com/office/drawing/2014/main" id="{03CE1073-8C33-4BB6-9703-94600073D395}"/>
+                <a16:creationId xmlns:a16="http://schemas.microsoft.com/office/drawing/2014/main" id="{624C30F3-2A27-461C-923E-22507D0C34F8}"/>
               </a:ext>
             </a:extLst>
           </p:cNvPr>
@@ -18011,7 +17278,7 @@
     </p:spTree>
     <p:extLst>
       <p:ext uri="{BB962C8B-B14F-4D97-AF65-F5344CB8AC3E}">
-        <p14:creationId xmlns:p14="http://schemas.microsoft.com/office/powerpoint/2010/main" val="1482381565"/>
+        <p14:creationId xmlns:p14="http://schemas.microsoft.com/office/powerpoint/2010/main" val="41138772"/>
       </p:ext>
     </p:extLst>
   </p:cSld>
@@ -18042,7 +17309,7 @@
           <p:cNvPr id="12" name="">
             <a:extLst xmlns:a="http://schemas.openxmlformats.org/drawingml/2006/main">
               <a:ext uri="{FF2B5EF4-FFF2-40B4-BE49-F238E27FC236}">
-                <a16:creationId xmlns:a16="http://schemas.microsoft.com/office/drawing/2014/main" id="{F4634909-6912-4720-8C47-5381E44ED7AC}"/>
+                <a16:creationId xmlns:a16="http://schemas.microsoft.com/office/drawing/2014/main" id="{D6C2F182-E450-4474-BB7E-377C5D6F0E00}"/>
               </a:ext>
             </a:extLst>
           </p:cNvPr>
@@ -18079,7 +17346,6 @@
               </a:defRPr>
             </a:defPPr>
             <a:lvl1pPr>
-              <a:buNone/>
               <a:defRPr sz="900" b="1">
                 <a:solidFill>
                   <a:srgbClr val="802D42"/>
@@ -18090,7 +17356,6 @@
               </a:defRPr>
             </a:lvl1pPr>
             <a:lvl2pPr>
-              <a:buNone/>
               <a:defRPr sz="900" b="1">
                 <a:solidFill>
                   <a:srgbClr val="802D42"/>
@@ -18101,7 +17366,6 @@
               </a:defRPr>
             </a:lvl2pPr>
             <a:lvl3pPr>
-              <a:buNone/>
               <a:defRPr sz="900" b="1">
                 <a:solidFill>
                   <a:srgbClr val="802D42"/>
@@ -18112,7 +17376,6 @@
               </a:defRPr>
             </a:lvl3pPr>
             <a:lvl4pPr>
-              <a:buNone/>
               <a:defRPr sz="900" b="1">
                 <a:solidFill>
                   <a:srgbClr val="802D42"/>
@@ -18123,7 +17386,6 @@
               </a:defRPr>
             </a:lvl4pPr>
             <a:lvl5pPr>
-              <a:buNone/>
               <a:defRPr sz="900" b="1">
                 <a:solidFill>
                   <a:srgbClr val="802D42"/>
@@ -18134,7 +17396,6 @@
               </a:defRPr>
             </a:lvl5pPr>
             <a:lvl6pPr>
-              <a:buNone/>
               <a:defRPr sz="900" b="1">
                 <a:solidFill>
                   <a:srgbClr val="802D42"/>
@@ -18145,7 +17406,6 @@
               </a:defRPr>
             </a:lvl6pPr>
             <a:lvl7pPr>
-              <a:buNone/>
               <a:defRPr sz="900" b="1">
                 <a:solidFill>
                   <a:srgbClr val="802D42"/>
@@ -18156,7 +17416,6 @@
               </a:defRPr>
             </a:lvl7pPr>
             <a:lvl8pPr>
-              <a:buNone/>
               <a:defRPr sz="900" b="1">
                 <a:solidFill>
                   <a:srgbClr val="802D42"/>
@@ -18167,7 +17426,6 @@
               </a:defRPr>
             </a:lvl8pPr>
             <a:lvl9pPr>
-              <a:buNone/>
               <a:defRPr sz="900" b="1">
                 <a:solidFill>
                   <a:srgbClr val="802D42"/>
@@ -18180,7 +17438,6 @@
           </a:lstStyle>
           <a:p xmlns:a="http://schemas.openxmlformats.org/drawingml/2006/main">
             <a:pPr>
-              <a:buNone/>
               <a:defRPr sz="900" b="1">
                 <a:solidFill>
                   <a:srgbClr val="802D42"/>
@@ -18209,7 +17466,7 @@
           <p:cNvPr id="2" name="">
             <a:extLst xmlns:a="http://schemas.openxmlformats.org/drawingml/2006/main">
               <a:ext uri="{FF2B5EF4-FFF2-40B4-BE49-F238E27FC236}">
-                <a16:creationId xmlns:a16="http://schemas.microsoft.com/office/drawing/2014/main" id="{8ACCA228-9ED2-4294-AD84-B45CD64E0830}"/>
+                <a16:creationId xmlns:a16="http://schemas.microsoft.com/office/drawing/2014/main" id="{6329BB4A-58EE-4842-A963-4FFD3C72AAE3}"/>
               </a:ext>
             </a:extLst>
           </p:cNvPr>
@@ -18246,7 +17503,6 @@
               </a:defRPr>
             </a:defPPr>
             <a:lvl1pPr>
-              <a:buNone/>
               <a:defRPr sz="2400" b="1">
                 <a:solidFill>
                   <a:srgbClr val="243244"/>
@@ -18257,7 +17513,6 @@
               </a:defRPr>
             </a:lvl1pPr>
             <a:lvl2pPr>
-              <a:buNone/>
               <a:defRPr sz="2400" b="1">
                 <a:solidFill>
                   <a:srgbClr val="243244"/>
@@ -18268,7 +17523,6 @@
               </a:defRPr>
             </a:lvl2pPr>
             <a:lvl3pPr>
-              <a:buNone/>
               <a:defRPr sz="2400" b="1">
                 <a:solidFill>
                   <a:srgbClr val="243244"/>
@@ -18279,7 +17533,6 @@
               </a:defRPr>
             </a:lvl3pPr>
             <a:lvl4pPr>
-              <a:buNone/>
               <a:defRPr sz="2400" b="1">
                 <a:solidFill>
                   <a:srgbClr val="243244"/>
@@ -18290,7 +17543,6 @@
               </a:defRPr>
             </a:lvl4pPr>
             <a:lvl5pPr>
-              <a:buNone/>
               <a:defRPr sz="2400" b="1">
                 <a:solidFill>
                   <a:srgbClr val="243244"/>
@@ -18301,7 +17553,6 @@
               </a:defRPr>
             </a:lvl5pPr>
             <a:lvl6pPr>
-              <a:buNone/>
               <a:defRPr sz="2400" b="1">
                 <a:solidFill>
                   <a:srgbClr val="243244"/>
@@ -18312,7 +17563,6 @@
               </a:defRPr>
             </a:lvl6pPr>
             <a:lvl7pPr>
-              <a:buNone/>
               <a:defRPr sz="2400" b="1">
                 <a:solidFill>
                   <a:srgbClr val="243244"/>
@@ -18323,7 +17573,6 @@
               </a:defRPr>
             </a:lvl7pPr>
             <a:lvl8pPr>
-              <a:buNone/>
               <a:defRPr sz="2400" b="1">
                 <a:solidFill>
                   <a:srgbClr val="243244"/>
@@ -18334,7 +17583,6 @@
               </a:defRPr>
             </a:lvl8pPr>
             <a:lvl9pPr>
-              <a:buNone/>
               <a:defRPr sz="2400" b="1">
                 <a:solidFill>
                   <a:srgbClr val="243244"/>
@@ -18347,7 +17595,6 @@
           </a:lstStyle>
           <a:p xmlns:a="http://schemas.openxmlformats.org/drawingml/2006/main">
             <a:pPr>
-              <a:buNone/>
               <a:defRPr sz="2400" b="1">
                 <a:solidFill>
                   <a:srgbClr val="243244"/>
@@ -18376,7 +17623,7 @@
           <p:cNvPr id="3" name="">
             <a:extLst xmlns:a="http://schemas.openxmlformats.org/drawingml/2006/main">
               <a:ext uri="{FF2B5EF4-FFF2-40B4-BE49-F238E27FC236}">
-                <a16:creationId xmlns:a16="http://schemas.microsoft.com/office/drawing/2014/main" id="{864AE6A4-329F-473C-934E-CA9055A56E59}"/>
+                <a16:creationId xmlns:a16="http://schemas.microsoft.com/office/drawing/2014/main" id="{31FCD7D4-46F1-40C1-BCDB-2505703C5D1F}"/>
               </a:ext>
             </a:extLst>
           </p:cNvPr>
@@ -18413,7 +17660,6 @@
               </a:defRPr>
             </a:defPPr>
             <a:lvl1pPr>
-              <a:buNone/>
               <a:defRPr sz="1275" b="0">
                 <a:solidFill>
                   <a:srgbClr val="596678"/>
@@ -18424,7 +17670,6 @@
               </a:defRPr>
             </a:lvl1pPr>
             <a:lvl2pPr>
-              <a:buNone/>
               <a:defRPr sz="1275" b="0">
                 <a:solidFill>
                   <a:srgbClr val="596678"/>
@@ -18435,7 +17680,6 @@
               </a:defRPr>
             </a:lvl2pPr>
             <a:lvl3pPr>
-              <a:buNone/>
               <a:defRPr sz="1275" b="0">
                 <a:solidFill>
                   <a:srgbClr val="596678"/>
@@ -18446,7 +17690,6 @@
               </a:defRPr>
             </a:lvl3pPr>
             <a:lvl4pPr>
-              <a:buNone/>
               <a:defRPr sz="1275" b="0">
                 <a:solidFill>
                   <a:srgbClr val="596678"/>
@@ -18457,7 +17700,6 @@
               </a:defRPr>
             </a:lvl4pPr>
             <a:lvl5pPr>
-              <a:buNone/>
               <a:defRPr sz="1275" b="0">
                 <a:solidFill>
                   <a:srgbClr val="596678"/>
@@ -18468,7 +17710,6 @@
               </a:defRPr>
             </a:lvl5pPr>
             <a:lvl6pPr>
-              <a:buNone/>
               <a:defRPr sz="1275" b="0">
                 <a:solidFill>
                   <a:srgbClr val="596678"/>
@@ -18479,7 +17720,6 @@
               </a:defRPr>
             </a:lvl6pPr>
             <a:lvl7pPr>
-              <a:buNone/>
               <a:defRPr sz="1275" b="0">
                 <a:solidFill>
                   <a:srgbClr val="596678"/>
@@ -18490,7 +17730,6 @@
               </a:defRPr>
             </a:lvl7pPr>
             <a:lvl8pPr>
-              <a:buNone/>
               <a:defRPr sz="1275" b="0">
                 <a:solidFill>
                   <a:srgbClr val="596678"/>
@@ -18501,7 +17740,6 @@
               </a:defRPr>
             </a:lvl8pPr>
             <a:lvl9pPr>
-              <a:buNone/>
               <a:defRPr sz="1275" b="0">
                 <a:solidFill>
                   <a:srgbClr val="596678"/>
@@ -18514,7 +17752,6 @@
           </a:lstStyle>
           <a:p xmlns:a="http://schemas.openxmlformats.org/drawingml/2006/main">
             <a:pPr>
-              <a:buNone/>
               <a:defRPr sz="1275" b="0">
                 <a:solidFill>
                   <a:srgbClr val="596678"/>
@@ -18533,7 +17770,7 @@
                 <a:ea typeface="Arial"/>
                 <a:cs typeface="Arial"/>
               </a:rPr>
-              <a:t>Hernandez Barrios Samuel Rodrigo · Issues #2, #3 y #4</a:t>
+              <a:t>Hernandez Barrios Samuel Rodrigo · Issues #1, #2 y #3</a:t>
             </a:r>
           </a:p>
         </p:txBody>
@@ -18543,7 +17780,7 @@
           <p:cNvPr id="4" name="">
             <a:extLst xmlns:a="http://schemas.openxmlformats.org/drawingml/2006/main">
               <a:ext uri="{FF2B5EF4-FFF2-40B4-BE49-F238E27FC236}">
-                <a16:creationId xmlns:a16="http://schemas.microsoft.com/office/drawing/2014/main" id="{5C001FC5-D4E8-44A1-ABE0-82933F627DF3}"/>
+                <a16:creationId xmlns:a16="http://schemas.microsoft.com/office/drawing/2014/main" id="{37AC77E1-88D7-4694-9126-D2A980D521B6}"/>
               </a:ext>
             </a:extLst>
           </p:cNvPr>
@@ -18580,7 +17817,6 @@
               </a:defRPr>
             </a:defPPr>
             <a:lvl1pPr>
-              <a:buNone/>
               <a:defRPr sz="825" b="0">
                 <a:solidFill>
                   <a:srgbClr val="596678"/>
@@ -18591,7 +17827,6 @@
               </a:defRPr>
             </a:lvl1pPr>
             <a:lvl2pPr>
-              <a:buNone/>
               <a:defRPr sz="825" b="0">
                 <a:solidFill>
                   <a:srgbClr val="596678"/>
@@ -18602,7 +17837,6 @@
               </a:defRPr>
             </a:lvl2pPr>
             <a:lvl3pPr>
-              <a:buNone/>
               <a:defRPr sz="825" b="0">
                 <a:solidFill>
                   <a:srgbClr val="596678"/>
@@ -18613,7 +17847,6 @@
               </a:defRPr>
             </a:lvl3pPr>
             <a:lvl4pPr>
-              <a:buNone/>
               <a:defRPr sz="825" b="0">
                 <a:solidFill>
                   <a:srgbClr val="596678"/>
@@ -18624,7 +17857,6 @@
               </a:defRPr>
             </a:lvl4pPr>
             <a:lvl5pPr>
-              <a:buNone/>
               <a:defRPr sz="825" b="0">
                 <a:solidFill>
                   <a:srgbClr val="596678"/>
@@ -18635,7 +17867,6 @@
               </a:defRPr>
             </a:lvl5pPr>
             <a:lvl6pPr>
-              <a:buNone/>
               <a:defRPr sz="825" b="0">
                 <a:solidFill>
                   <a:srgbClr val="596678"/>
@@ -18646,7 +17877,6 @@
               </a:defRPr>
             </a:lvl6pPr>
             <a:lvl7pPr>
-              <a:buNone/>
               <a:defRPr sz="825" b="0">
                 <a:solidFill>
                   <a:srgbClr val="596678"/>
@@ -18657,7 +17887,6 @@
               </a:defRPr>
             </a:lvl7pPr>
             <a:lvl8pPr>
-              <a:buNone/>
               <a:defRPr sz="825" b="0">
                 <a:solidFill>
                   <a:srgbClr val="596678"/>
@@ -18668,7 +17897,6 @@
               </a:defRPr>
             </a:lvl8pPr>
             <a:lvl9pPr>
-              <a:buNone/>
               <a:defRPr sz="825" b="0">
                 <a:solidFill>
                   <a:srgbClr val="596678"/>
@@ -18681,7 +17909,6 @@
           </a:lstStyle>
           <a:p xmlns:a="http://schemas.openxmlformats.org/drawingml/2006/main">
             <a:pPr>
-              <a:buNone/>
               <a:defRPr sz="825" b="0">
                 <a:solidFill>
                   <a:srgbClr val="596678"/>
@@ -18710,7 +17937,7 @@
           <p:cNvPr id="5" name="">
             <a:extLst xmlns:a="http://schemas.openxmlformats.org/drawingml/2006/main">
               <a:ext uri="{FF2B5EF4-FFF2-40B4-BE49-F238E27FC236}">
-                <a16:creationId xmlns:a16="http://schemas.microsoft.com/office/drawing/2014/main" id="{03AC7536-405B-4FD2-B6BB-AFC7E18B954D}"/>
+                <a16:creationId xmlns:a16="http://schemas.microsoft.com/office/drawing/2014/main" id="{1A0C3E09-4CE9-4BD4-9128-EADDE755A029}"/>
               </a:ext>
             </a:extLst>
           </p:cNvPr>
@@ -18747,7 +17974,6 @@
               </a:defRPr>
             </a:defPPr>
             <a:lvl1pPr>
-              <a:buNone/>
               <a:defRPr sz="825" b="1">
                 <a:solidFill>
                   <a:srgbClr val="802D42"/>
@@ -18758,7 +17984,6 @@
               </a:defRPr>
             </a:lvl1pPr>
             <a:lvl2pPr>
-              <a:buNone/>
               <a:defRPr sz="825" b="1">
                 <a:solidFill>
                   <a:srgbClr val="802D42"/>
@@ -18769,7 +17994,6 @@
               </a:defRPr>
             </a:lvl2pPr>
             <a:lvl3pPr>
-              <a:buNone/>
               <a:defRPr sz="825" b="1">
                 <a:solidFill>
                   <a:srgbClr val="802D42"/>
@@ -18780,7 +18004,6 @@
               </a:defRPr>
             </a:lvl3pPr>
             <a:lvl4pPr>
-              <a:buNone/>
               <a:defRPr sz="825" b="1">
                 <a:solidFill>
                   <a:srgbClr val="802D42"/>
@@ -18791,7 +18014,6 @@
               </a:defRPr>
             </a:lvl4pPr>
             <a:lvl5pPr>
-              <a:buNone/>
               <a:defRPr sz="825" b="1">
                 <a:solidFill>
                   <a:srgbClr val="802D42"/>
@@ -18802,7 +18024,6 @@
               </a:defRPr>
             </a:lvl5pPr>
             <a:lvl6pPr>
-              <a:buNone/>
               <a:defRPr sz="825" b="1">
                 <a:solidFill>
                   <a:srgbClr val="802D42"/>
@@ -18813,7 +18034,6 @@
               </a:defRPr>
             </a:lvl6pPr>
             <a:lvl7pPr>
-              <a:buNone/>
               <a:defRPr sz="825" b="1">
                 <a:solidFill>
                   <a:srgbClr val="802D42"/>
@@ -18824,7 +18044,6 @@
               </a:defRPr>
             </a:lvl7pPr>
             <a:lvl8pPr>
-              <a:buNone/>
               <a:defRPr sz="825" b="1">
                 <a:solidFill>
                   <a:srgbClr val="802D42"/>
@@ -18835,7 +18054,6 @@
               </a:defRPr>
             </a:lvl8pPr>
             <a:lvl9pPr>
-              <a:buNone/>
               <a:defRPr sz="825" b="1">
                 <a:solidFill>
                   <a:srgbClr val="802D42"/>
@@ -18848,7 +18066,6 @@
           </a:lstStyle>
           <a:p xmlns:a="http://schemas.openxmlformats.org/drawingml/2006/main">
             <a:pPr>
-              <a:buNone/>
               <a:defRPr sz="825" b="1">
                 <a:solidFill>
                   <a:srgbClr val="802D42"/>
@@ -18877,7 +18094,7 @@
           <p:cNvPr id="6" name="">
             <a:extLst xmlns:a="http://schemas.openxmlformats.org/drawingml/2006/main">
               <a:ext uri="{FF2B5EF4-FFF2-40B4-BE49-F238E27FC236}">
-                <a16:creationId xmlns:a16="http://schemas.microsoft.com/office/drawing/2014/main" id="{7804E32F-F569-409C-A031-E7F53231A784}"/>
+                <a16:creationId xmlns:a16="http://schemas.microsoft.com/office/drawing/2014/main" id="{4C680773-1ACB-4831-A4DA-5E6C9767291E}"/>
               </a:ext>
             </a:extLst>
           </p:cNvPr>
@@ -18914,7 +18131,6 @@
               </a:defRPr>
             </a:defPPr>
             <a:lvl1pPr>
-              <a:buNone/>
               <a:defRPr sz="1725" b="1">
                 <a:solidFill>
                   <a:srgbClr val="243244"/>
@@ -18925,7 +18141,6 @@
               </a:defRPr>
             </a:lvl1pPr>
             <a:lvl2pPr>
-              <a:buNone/>
               <a:defRPr sz="1725" b="1">
                 <a:solidFill>
                   <a:srgbClr val="243244"/>
@@ -18936,7 +18151,6 @@
               </a:defRPr>
             </a:lvl2pPr>
             <a:lvl3pPr>
-              <a:buNone/>
               <a:defRPr sz="1725" b="1">
                 <a:solidFill>
                   <a:srgbClr val="243244"/>
@@ -18947,7 +18161,6 @@
               </a:defRPr>
             </a:lvl3pPr>
             <a:lvl4pPr>
-              <a:buNone/>
               <a:defRPr sz="1725" b="1">
                 <a:solidFill>
                   <a:srgbClr val="243244"/>
@@ -18958,7 +18171,6 @@
               </a:defRPr>
             </a:lvl4pPr>
             <a:lvl5pPr>
-              <a:buNone/>
               <a:defRPr sz="1725" b="1">
                 <a:solidFill>
                   <a:srgbClr val="243244"/>
@@ -18969,7 +18181,6 @@
               </a:defRPr>
             </a:lvl5pPr>
             <a:lvl6pPr>
-              <a:buNone/>
               <a:defRPr sz="1725" b="1">
                 <a:solidFill>
                   <a:srgbClr val="243244"/>
@@ -18980,7 +18191,6 @@
               </a:defRPr>
             </a:lvl6pPr>
             <a:lvl7pPr>
-              <a:buNone/>
               <a:defRPr sz="1725" b="1">
                 <a:solidFill>
                   <a:srgbClr val="243244"/>
@@ -18991,7 +18201,6 @@
               </a:defRPr>
             </a:lvl7pPr>
             <a:lvl8pPr>
-              <a:buNone/>
               <a:defRPr sz="1725" b="1">
                 <a:solidFill>
                   <a:srgbClr val="243244"/>
@@ -19002,7 +18211,6 @@
               </a:defRPr>
             </a:lvl8pPr>
             <a:lvl9pPr>
-              <a:buNone/>
               <a:defRPr sz="1725" b="1">
                 <a:solidFill>
                   <a:srgbClr val="243244"/>
@@ -19015,7 +18223,6 @@
           </a:lstStyle>
           <a:p xmlns:a="http://schemas.openxmlformats.org/drawingml/2006/main">
             <a:pPr>
-              <a:buNone/>
               <a:defRPr sz="1725" b="1">
                 <a:solidFill>
                   <a:srgbClr val="243244"/>
@@ -19044,7 +18251,7 @@
           <p:cNvPr id="7" name="">
             <a:extLst xmlns:a="http://schemas.openxmlformats.org/drawingml/2006/main">
               <a:ext uri="{FF2B5EF4-FFF2-40B4-BE49-F238E27FC236}">
-                <a16:creationId xmlns:a16="http://schemas.microsoft.com/office/drawing/2014/main" id="{B0421F08-AF4B-419D-A8D8-9E94B0D08655}"/>
+                <a16:creationId xmlns:a16="http://schemas.microsoft.com/office/drawing/2014/main" id="{549D2364-D2DE-4E35-85A7-60AAABE10D04}"/>
               </a:ext>
             </a:extLst>
           </p:cNvPr>
@@ -19081,7 +18288,6 @@
               </a:defRPr>
             </a:defPPr>
             <a:lvl1pPr>
-              <a:buNone/>
               <a:defRPr sz="1275" b="0">
                 <a:solidFill>
                   <a:srgbClr val="596678"/>
@@ -19092,7 +18298,6 @@
               </a:defRPr>
             </a:lvl1pPr>
             <a:lvl2pPr>
-              <a:buNone/>
               <a:defRPr sz="1275" b="0">
                 <a:solidFill>
                   <a:srgbClr val="596678"/>
@@ -19103,7 +18308,6 @@
               </a:defRPr>
             </a:lvl2pPr>
             <a:lvl3pPr>
-              <a:buNone/>
               <a:defRPr sz="1275" b="0">
                 <a:solidFill>
                   <a:srgbClr val="596678"/>
@@ -19114,7 +18318,6 @@
               </a:defRPr>
             </a:lvl3pPr>
             <a:lvl4pPr>
-              <a:buNone/>
               <a:defRPr sz="1275" b="0">
                 <a:solidFill>
                   <a:srgbClr val="596678"/>
@@ -19125,7 +18328,6 @@
               </a:defRPr>
             </a:lvl4pPr>
             <a:lvl5pPr>
-              <a:buNone/>
               <a:defRPr sz="1275" b="0">
                 <a:solidFill>
                   <a:srgbClr val="596678"/>
@@ -19136,7 +18338,6 @@
               </a:defRPr>
             </a:lvl5pPr>
             <a:lvl6pPr>
-              <a:buNone/>
               <a:defRPr sz="1275" b="0">
                 <a:solidFill>
                   <a:srgbClr val="596678"/>
@@ -19147,7 +18348,6 @@
               </a:defRPr>
             </a:lvl6pPr>
             <a:lvl7pPr>
-              <a:buNone/>
               <a:defRPr sz="1275" b="0">
                 <a:solidFill>
                   <a:srgbClr val="596678"/>
@@ -19158,7 +18358,6 @@
               </a:defRPr>
             </a:lvl7pPr>
             <a:lvl8pPr>
-              <a:buNone/>
               <a:defRPr sz="1275" b="0">
                 <a:solidFill>
                   <a:srgbClr val="596678"/>
@@ -19169,7 +18368,6 @@
               </a:defRPr>
             </a:lvl8pPr>
             <a:lvl9pPr>
-              <a:buNone/>
               <a:defRPr sz="1275" b="0">
                 <a:solidFill>
                   <a:srgbClr val="596678"/>
@@ -19182,7 +18380,6 @@
           </a:lstStyle>
           <a:p xmlns:a="http://schemas.openxmlformats.org/drawingml/2006/main">
             <a:pPr>
-              <a:buNone/>
               <a:defRPr sz="1275" b="0">
                 <a:solidFill>
                   <a:srgbClr val="596678"/>
@@ -19211,7 +18408,7 @@
           <p:cNvPr id="8" name="">
             <a:extLst xmlns:a="http://schemas.openxmlformats.org/drawingml/2006/main">
               <a:ext uri="{FF2B5EF4-FFF2-40B4-BE49-F238E27FC236}">
-                <a16:creationId xmlns:a16="http://schemas.microsoft.com/office/drawing/2014/main" id="{D4C79A6B-1E4F-47AD-B9F4-30E7B259720B}"/>
+                <a16:creationId xmlns:a16="http://schemas.microsoft.com/office/drawing/2014/main" id="{8E9619A5-AB6C-497E-8D1A-BDF28869ABD5}"/>
               </a:ext>
             </a:extLst>
           </p:cNvPr>
@@ -19248,7 +18445,6 @@
               </a:defRPr>
             </a:defPPr>
             <a:lvl1pPr>
-              <a:buNone/>
               <a:defRPr sz="1725" b="1">
                 <a:solidFill>
                   <a:srgbClr val="243244"/>
@@ -19259,7 +18455,6 @@
               </a:defRPr>
             </a:lvl1pPr>
             <a:lvl2pPr>
-              <a:buNone/>
               <a:defRPr sz="1725" b="1">
                 <a:solidFill>
                   <a:srgbClr val="243244"/>
@@ -19270,7 +18465,6 @@
               </a:defRPr>
             </a:lvl2pPr>
             <a:lvl3pPr>
-              <a:buNone/>
               <a:defRPr sz="1725" b="1">
                 <a:solidFill>
                   <a:srgbClr val="243244"/>
@@ -19281,7 +18475,6 @@
               </a:defRPr>
             </a:lvl3pPr>
             <a:lvl4pPr>
-              <a:buNone/>
               <a:defRPr sz="1725" b="1">
                 <a:solidFill>
                   <a:srgbClr val="243244"/>
@@ -19292,7 +18485,6 @@
               </a:defRPr>
             </a:lvl4pPr>
             <a:lvl5pPr>
-              <a:buNone/>
               <a:defRPr sz="1725" b="1">
                 <a:solidFill>
                   <a:srgbClr val="243244"/>
@@ -19303,7 +18495,6 @@
               </a:defRPr>
             </a:lvl5pPr>
             <a:lvl6pPr>
-              <a:buNone/>
               <a:defRPr sz="1725" b="1">
                 <a:solidFill>
                   <a:srgbClr val="243244"/>
@@ -19314,7 +18505,6 @@
               </a:defRPr>
             </a:lvl6pPr>
             <a:lvl7pPr>
-              <a:buNone/>
               <a:defRPr sz="1725" b="1">
                 <a:solidFill>
                   <a:srgbClr val="243244"/>
@@ -19325,7 +18515,6 @@
               </a:defRPr>
             </a:lvl7pPr>
             <a:lvl8pPr>
-              <a:buNone/>
               <a:defRPr sz="1725" b="1">
                 <a:solidFill>
                   <a:srgbClr val="243244"/>
@@ -19336,7 +18525,6 @@
               </a:defRPr>
             </a:lvl8pPr>
             <a:lvl9pPr>
-              <a:buNone/>
               <a:defRPr sz="1725" b="1">
                 <a:solidFill>
                   <a:srgbClr val="243244"/>
@@ -19349,7 +18537,6 @@
           </a:lstStyle>
           <a:p xmlns:a="http://schemas.openxmlformats.org/drawingml/2006/main">
             <a:pPr>
-              <a:buNone/>
               <a:defRPr sz="1725" b="1">
                 <a:solidFill>
                   <a:srgbClr val="243244"/>
@@ -19378,7 +18565,7 @@
           <p:cNvPr id="9" name="">
             <a:extLst xmlns:a="http://schemas.openxmlformats.org/drawingml/2006/main">
               <a:ext uri="{FF2B5EF4-FFF2-40B4-BE49-F238E27FC236}">
-                <a16:creationId xmlns:a16="http://schemas.microsoft.com/office/drawing/2014/main" id="{3A4592C7-D330-4BAC-ACAB-5BE8D77E1D06}"/>
+                <a16:creationId xmlns:a16="http://schemas.microsoft.com/office/drawing/2014/main" id="{BAD92A6C-086E-41F5-953E-62689C927707}"/>
               </a:ext>
             </a:extLst>
           </p:cNvPr>
@@ -19415,7 +18602,6 @@
               </a:defRPr>
             </a:defPPr>
             <a:lvl1pPr>
-              <a:buNone/>
               <a:defRPr sz="1275" b="0">
                 <a:solidFill>
                   <a:srgbClr val="596678"/>
@@ -19426,7 +18612,6 @@
               </a:defRPr>
             </a:lvl1pPr>
             <a:lvl2pPr>
-              <a:buNone/>
               <a:defRPr sz="1275" b="0">
                 <a:solidFill>
                   <a:srgbClr val="596678"/>
@@ -19437,7 +18622,6 @@
               </a:defRPr>
             </a:lvl2pPr>
             <a:lvl3pPr>
-              <a:buNone/>
               <a:defRPr sz="1275" b="0">
                 <a:solidFill>
                   <a:srgbClr val="596678"/>
@@ -19448,7 +18632,6 @@
               </a:defRPr>
             </a:lvl3pPr>
             <a:lvl4pPr>
-              <a:buNone/>
               <a:defRPr sz="1275" b="0">
                 <a:solidFill>
                   <a:srgbClr val="596678"/>
@@ -19459,7 +18642,6 @@
               </a:defRPr>
             </a:lvl4pPr>
             <a:lvl5pPr>
-              <a:buNone/>
               <a:defRPr sz="1275" b="0">
                 <a:solidFill>
                   <a:srgbClr val="596678"/>
@@ -19470,7 +18652,6 @@
               </a:defRPr>
             </a:lvl5pPr>
             <a:lvl6pPr>
-              <a:buNone/>
               <a:defRPr sz="1275" b="0">
                 <a:solidFill>
                   <a:srgbClr val="596678"/>
@@ -19481,7 +18662,6 @@
               </a:defRPr>
             </a:lvl6pPr>
             <a:lvl7pPr>
-              <a:buNone/>
               <a:defRPr sz="1275" b="0">
                 <a:solidFill>
                   <a:srgbClr val="596678"/>
@@ -19492,7 +18672,6 @@
               </a:defRPr>
             </a:lvl7pPr>
             <a:lvl8pPr>
-              <a:buNone/>
               <a:defRPr sz="1275" b="0">
                 <a:solidFill>
                   <a:srgbClr val="596678"/>
@@ -19503,7 +18682,6 @@
               </a:defRPr>
             </a:lvl8pPr>
             <a:lvl9pPr>
-              <a:buNone/>
               <a:defRPr sz="1275" b="0">
                 <a:solidFill>
                   <a:srgbClr val="596678"/>
@@ -19516,7 +18694,6 @@
           </a:lstStyle>
           <a:p xmlns:a="http://schemas.openxmlformats.org/drawingml/2006/main">
             <a:pPr>
-              <a:buNone/>
               <a:defRPr sz="1275" b="0">
                 <a:solidFill>
                   <a:srgbClr val="596678"/>
@@ -19545,7 +18722,7 @@
           <p:cNvPr id="10" name="">
             <a:extLst xmlns:a="http://schemas.openxmlformats.org/drawingml/2006/main">
               <a:ext uri="{FF2B5EF4-FFF2-40B4-BE49-F238E27FC236}">
-                <a16:creationId xmlns:a16="http://schemas.microsoft.com/office/drawing/2014/main" id="{1B72C9F9-7AD3-45C1-92F8-8B8F676C8A7E}"/>
+                <a16:creationId xmlns:a16="http://schemas.microsoft.com/office/drawing/2014/main" id="{474D6C2F-4AC2-4D6C-A0C9-1B02D0EC51CD}"/>
               </a:ext>
             </a:extLst>
           </p:cNvPr>
@@ -19582,7 +18759,6 @@
               </a:defRPr>
             </a:defPPr>
             <a:lvl1pPr>
-              <a:buNone/>
               <a:defRPr sz="1725" b="1">
                 <a:solidFill>
                   <a:srgbClr val="243244"/>
@@ -19593,7 +18769,6 @@
               </a:defRPr>
             </a:lvl1pPr>
             <a:lvl2pPr>
-              <a:buNone/>
               <a:defRPr sz="1725" b="1">
                 <a:solidFill>
                   <a:srgbClr val="243244"/>
@@ -19604,7 +18779,6 @@
               </a:defRPr>
             </a:lvl2pPr>
             <a:lvl3pPr>
-              <a:buNone/>
               <a:defRPr sz="1725" b="1">
                 <a:solidFill>
                   <a:srgbClr val="243244"/>
@@ -19615,7 +18789,6 @@
               </a:defRPr>
             </a:lvl3pPr>
             <a:lvl4pPr>
-              <a:buNone/>
               <a:defRPr sz="1725" b="1">
                 <a:solidFill>
                   <a:srgbClr val="243244"/>
@@ -19626,7 +18799,6 @@
               </a:defRPr>
             </a:lvl4pPr>
             <a:lvl5pPr>
-              <a:buNone/>
               <a:defRPr sz="1725" b="1">
                 <a:solidFill>
                   <a:srgbClr val="243244"/>
@@ -19637,7 +18809,6 @@
               </a:defRPr>
             </a:lvl5pPr>
             <a:lvl6pPr>
-              <a:buNone/>
               <a:defRPr sz="1725" b="1">
                 <a:solidFill>
                   <a:srgbClr val="243244"/>
@@ -19648,7 +18819,6 @@
               </a:defRPr>
             </a:lvl6pPr>
             <a:lvl7pPr>
-              <a:buNone/>
               <a:defRPr sz="1725" b="1">
                 <a:solidFill>
                   <a:srgbClr val="243244"/>
@@ -19659,7 +18829,6 @@
               </a:defRPr>
             </a:lvl7pPr>
             <a:lvl8pPr>
-              <a:buNone/>
               <a:defRPr sz="1725" b="1">
                 <a:solidFill>
                   <a:srgbClr val="243244"/>
@@ -19670,7 +18839,6 @@
               </a:defRPr>
             </a:lvl8pPr>
             <a:lvl9pPr>
-              <a:buNone/>
               <a:defRPr sz="1725" b="1">
                 <a:solidFill>
                   <a:srgbClr val="243244"/>
@@ -19683,7 +18851,6 @@
           </a:lstStyle>
           <a:p xmlns:a="http://schemas.openxmlformats.org/drawingml/2006/main">
             <a:pPr>
-              <a:buNone/>
               <a:defRPr sz="1725" b="1">
                 <a:solidFill>
                   <a:srgbClr val="243244"/>
@@ -19712,7 +18879,7 @@
           <p:cNvPr id="11" name="">
             <a:extLst xmlns:a="http://schemas.openxmlformats.org/drawingml/2006/main">
               <a:ext uri="{FF2B5EF4-FFF2-40B4-BE49-F238E27FC236}">
-                <a16:creationId xmlns:a16="http://schemas.microsoft.com/office/drawing/2014/main" id="{61116EFC-654F-4918-9F02-0072DF1E3882}"/>
+                <a16:creationId xmlns:a16="http://schemas.microsoft.com/office/drawing/2014/main" id="{F6AB7DB6-5947-4D99-A179-9F83E89EAE26}"/>
               </a:ext>
             </a:extLst>
           </p:cNvPr>
@@ -19749,7 +18916,6 @@
               </a:defRPr>
             </a:defPPr>
             <a:lvl1pPr>
-              <a:buNone/>
               <a:defRPr sz="1275" b="0">
                 <a:solidFill>
                   <a:srgbClr val="596678"/>
@@ -19760,7 +18926,6 @@
               </a:defRPr>
             </a:lvl1pPr>
             <a:lvl2pPr>
-              <a:buNone/>
               <a:defRPr sz="1275" b="0">
                 <a:solidFill>
                   <a:srgbClr val="596678"/>
@@ -19771,7 +18936,6 @@
               </a:defRPr>
             </a:lvl2pPr>
             <a:lvl3pPr>
-              <a:buNone/>
               <a:defRPr sz="1275" b="0">
                 <a:solidFill>
                   <a:srgbClr val="596678"/>
@@ -19782,7 +18946,6 @@
               </a:defRPr>
             </a:lvl3pPr>
             <a:lvl4pPr>
-              <a:buNone/>
               <a:defRPr sz="1275" b="0">
                 <a:solidFill>
                   <a:srgbClr val="596678"/>
@@ -19793,7 +18956,6 @@
               </a:defRPr>
             </a:lvl4pPr>
             <a:lvl5pPr>
-              <a:buNone/>
               <a:defRPr sz="1275" b="0">
                 <a:solidFill>
                   <a:srgbClr val="596678"/>
@@ -19804,7 +18966,6 @@
               </a:defRPr>
             </a:lvl5pPr>
             <a:lvl6pPr>
-              <a:buNone/>
               <a:defRPr sz="1275" b="0">
                 <a:solidFill>
                   <a:srgbClr val="596678"/>
@@ -19815,7 +18976,6 @@
               </a:defRPr>
             </a:lvl6pPr>
             <a:lvl7pPr>
-              <a:buNone/>
               <a:defRPr sz="1275" b="0">
                 <a:solidFill>
                   <a:srgbClr val="596678"/>
@@ -19826,7 +18986,6 @@
               </a:defRPr>
             </a:lvl7pPr>
             <a:lvl8pPr>
-              <a:buNone/>
               <a:defRPr sz="1275" b="0">
                 <a:solidFill>
                   <a:srgbClr val="596678"/>
@@ -19837,7 +18996,6 @@
               </a:defRPr>
             </a:lvl8pPr>
             <a:lvl9pPr>
-              <a:buNone/>
               <a:defRPr sz="1275" b="0">
                 <a:solidFill>
                   <a:srgbClr val="596678"/>
@@ -19850,7 +19008,6 @@
           </a:lstStyle>
           <a:p xmlns:a="http://schemas.openxmlformats.org/drawingml/2006/main">
             <a:pPr>
-              <a:buNone/>
               <a:defRPr sz="1275" b="0">
                 <a:solidFill>
                   <a:srgbClr val="596678"/>
@@ -19877,7 +19034,7 @@
     </p:spTree>
     <p:extLst>
       <p:ext uri="{BB962C8B-B14F-4D97-AF65-F5344CB8AC3E}">
-        <p14:creationId xmlns:p14="http://schemas.microsoft.com/office/powerpoint/2010/main" val="35790460"/>
+        <p14:creationId xmlns:p14="http://schemas.microsoft.com/office/powerpoint/2010/main" val="1100884955"/>
       </p:ext>
     </p:extLst>
   </p:cSld>
@@ -19908,7 +19065,7 @@
           <p:cNvPr id="12" name="">
             <a:extLst xmlns:a="http://schemas.openxmlformats.org/drawingml/2006/main">
               <a:ext uri="{FF2B5EF4-FFF2-40B4-BE49-F238E27FC236}">
-                <a16:creationId xmlns:a16="http://schemas.microsoft.com/office/drawing/2014/main" id="{B8C801AF-E109-436B-A325-097580C813CC}"/>
+                <a16:creationId xmlns:a16="http://schemas.microsoft.com/office/drawing/2014/main" id="{97C400CA-68C7-4ECA-AA42-6E44F573B701}"/>
               </a:ext>
             </a:extLst>
           </p:cNvPr>
@@ -19945,7 +19102,6 @@
               </a:defRPr>
             </a:defPPr>
             <a:lvl1pPr>
-              <a:buNone/>
               <a:defRPr sz="900" b="1">
                 <a:solidFill>
                   <a:srgbClr val="802D42"/>
@@ -19956,7 +19112,6 @@
               </a:defRPr>
             </a:lvl1pPr>
             <a:lvl2pPr>
-              <a:buNone/>
               <a:defRPr sz="900" b="1">
                 <a:solidFill>
                   <a:srgbClr val="802D42"/>
@@ -19967,7 +19122,6 @@
               </a:defRPr>
             </a:lvl2pPr>
             <a:lvl3pPr>
-              <a:buNone/>
               <a:defRPr sz="900" b="1">
                 <a:solidFill>
                   <a:srgbClr val="802D42"/>
@@ -19978,7 +19132,6 @@
               </a:defRPr>
             </a:lvl3pPr>
             <a:lvl4pPr>
-              <a:buNone/>
               <a:defRPr sz="900" b="1">
                 <a:solidFill>
                   <a:srgbClr val="802D42"/>
@@ -19989,7 +19142,6 @@
               </a:defRPr>
             </a:lvl4pPr>
             <a:lvl5pPr>
-              <a:buNone/>
               <a:defRPr sz="900" b="1">
                 <a:solidFill>
                   <a:srgbClr val="802D42"/>
@@ -20000,7 +19152,6 @@
               </a:defRPr>
             </a:lvl5pPr>
             <a:lvl6pPr>
-              <a:buNone/>
               <a:defRPr sz="900" b="1">
                 <a:solidFill>
                   <a:srgbClr val="802D42"/>
@@ -20011,7 +19162,6 @@
               </a:defRPr>
             </a:lvl6pPr>
             <a:lvl7pPr>
-              <a:buNone/>
               <a:defRPr sz="900" b="1">
                 <a:solidFill>
                   <a:srgbClr val="802D42"/>
@@ -20022,7 +19172,6 @@
               </a:defRPr>
             </a:lvl7pPr>
             <a:lvl8pPr>
-              <a:buNone/>
               <a:defRPr sz="900" b="1">
                 <a:solidFill>
                   <a:srgbClr val="802D42"/>
@@ -20033,7 +19182,6 @@
               </a:defRPr>
             </a:lvl8pPr>
             <a:lvl9pPr>
-              <a:buNone/>
               <a:defRPr sz="900" b="1">
                 <a:solidFill>
                   <a:srgbClr val="802D42"/>
@@ -20046,7 +19194,6 @@
           </a:lstStyle>
           <a:p xmlns:a="http://schemas.openxmlformats.org/drawingml/2006/main">
             <a:pPr>
-              <a:buNone/>
               <a:defRPr sz="900" b="1">
                 <a:solidFill>
                   <a:srgbClr val="802D42"/>
@@ -20075,7 +19222,7 @@
           <p:cNvPr id="2" name="">
             <a:extLst xmlns:a="http://schemas.openxmlformats.org/drawingml/2006/main">
               <a:ext uri="{FF2B5EF4-FFF2-40B4-BE49-F238E27FC236}">
-                <a16:creationId xmlns:a16="http://schemas.microsoft.com/office/drawing/2014/main" id="{EDF20DA5-BFFD-431E-9711-D97ECC3A0B27}"/>
+                <a16:creationId xmlns:a16="http://schemas.microsoft.com/office/drawing/2014/main" id="{F3BBC5A2-261D-4C9E-B206-D505752CD43A}"/>
               </a:ext>
             </a:extLst>
           </p:cNvPr>
@@ -20112,7 +19259,6 @@
               </a:defRPr>
             </a:defPPr>
             <a:lvl1pPr>
-              <a:buNone/>
               <a:defRPr sz="2400" b="1">
                 <a:solidFill>
                   <a:srgbClr val="243244"/>
@@ -20123,7 +19269,6 @@
               </a:defRPr>
             </a:lvl1pPr>
             <a:lvl2pPr>
-              <a:buNone/>
               <a:defRPr sz="2400" b="1">
                 <a:solidFill>
                   <a:srgbClr val="243244"/>
@@ -20134,7 +19279,6 @@
               </a:defRPr>
             </a:lvl2pPr>
             <a:lvl3pPr>
-              <a:buNone/>
               <a:defRPr sz="2400" b="1">
                 <a:solidFill>
                   <a:srgbClr val="243244"/>
@@ -20145,7 +19289,6 @@
               </a:defRPr>
             </a:lvl3pPr>
             <a:lvl4pPr>
-              <a:buNone/>
               <a:defRPr sz="2400" b="1">
                 <a:solidFill>
                   <a:srgbClr val="243244"/>
@@ -20156,7 +19299,6 @@
               </a:defRPr>
             </a:lvl4pPr>
             <a:lvl5pPr>
-              <a:buNone/>
               <a:defRPr sz="2400" b="1">
                 <a:solidFill>
                   <a:srgbClr val="243244"/>
@@ -20167,7 +19309,6 @@
               </a:defRPr>
             </a:lvl5pPr>
             <a:lvl6pPr>
-              <a:buNone/>
               <a:defRPr sz="2400" b="1">
                 <a:solidFill>
                   <a:srgbClr val="243244"/>
@@ -20178,7 +19319,6 @@
               </a:defRPr>
             </a:lvl6pPr>
             <a:lvl7pPr>
-              <a:buNone/>
               <a:defRPr sz="2400" b="1">
                 <a:solidFill>
                   <a:srgbClr val="243244"/>
@@ -20189,7 +19329,6 @@
               </a:defRPr>
             </a:lvl7pPr>
             <a:lvl8pPr>
-              <a:buNone/>
               <a:defRPr sz="2400" b="1">
                 <a:solidFill>
                   <a:srgbClr val="243244"/>
@@ -20200,7 +19339,6 @@
               </a:defRPr>
             </a:lvl8pPr>
             <a:lvl9pPr>
-              <a:buNone/>
               <a:defRPr sz="2400" b="1">
                 <a:solidFill>
                   <a:srgbClr val="243244"/>
@@ -20213,7 +19351,6 @@
           </a:lstStyle>
           <a:p xmlns:a="http://schemas.openxmlformats.org/drawingml/2006/main">
             <a:pPr>
-              <a:buNone/>
               <a:defRPr sz="2400" b="1">
                 <a:solidFill>
                   <a:srgbClr val="243244"/>
@@ -20242,7 +19379,7 @@
           <p:cNvPr id="3" name="">
             <a:extLst xmlns:a="http://schemas.openxmlformats.org/drawingml/2006/main">
               <a:ext uri="{FF2B5EF4-FFF2-40B4-BE49-F238E27FC236}">
-                <a16:creationId xmlns:a16="http://schemas.microsoft.com/office/drawing/2014/main" id="{5D6EFDF9-4E87-4F9A-9A32-9D2C16D9357F}"/>
+                <a16:creationId xmlns:a16="http://schemas.microsoft.com/office/drawing/2014/main" id="{DAA4862D-F13E-4225-B488-0DACFD499A56}"/>
               </a:ext>
             </a:extLst>
           </p:cNvPr>
@@ -20279,7 +19416,6 @@
               </a:defRPr>
             </a:defPPr>
             <a:lvl1pPr>
-              <a:buNone/>
               <a:defRPr sz="1275" b="0">
                 <a:solidFill>
                   <a:srgbClr val="596678"/>
@@ -20290,7 +19426,6 @@
               </a:defRPr>
             </a:lvl1pPr>
             <a:lvl2pPr>
-              <a:buNone/>
               <a:defRPr sz="1275" b="0">
                 <a:solidFill>
                   <a:srgbClr val="596678"/>
@@ -20301,7 +19436,6 @@
               </a:defRPr>
             </a:lvl2pPr>
             <a:lvl3pPr>
-              <a:buNone/>
               <a:defRPr sz="1275" b="0">
                 <a:solidFill>
                   <a:srgbClr val="596678"/>
@@ -20312,7 +19446,6 @@
               </a:defRPr>
             </a:lvl3pPr>
             <a:lvl4pPr>
-              <a:buNone/>
               <a:defRPr sz="1275" b="0">
                 <a:solidFill>
                   <a:srgbClr val="596678"/>
@@ -20323,7 +19456,6 @@
               </a:defRPr>
             </a:lvl4pPr>
             <a:lvl5pPr>
-              <a:buNone/>
               <a:defRPr sz="1275" b="0">
                 <a:solidFill>
                   <a:srgbClr val="596678"/>
@@ -20334,7 +19466,6 @@
               </a:defRPr>
             </a:lvl5pPr>
             <a:lvl6pPr>
-              <a:buNone/>
               <a:defRPr sz="1275" b="0">
                 <a:solidFill>
                   <a:srgbClr val="596678"/>
@@ -20345,7 +19476,6 @@
               </a:defRPr>
             </a:lvl6pPr>
             <a:lvl7pPr>
-              <a:buNone/>
               <a:defRPr sz="1275" b="0">
                 <a:solidFill>
                   <a:srgbClr val="596678"/>
@@ -20356,7 +19486,6 @@
               </a:defRPr>
             </a:lvl7pPr>
             <a:lvl8pPr>
-              <a:buNone/>
               <a:defRPr sz="1275" b="0">
                 <a:solidFill>
                   <a:srgbClr val="596678"/>
@@ -20367,7 +19496,6 @@
               </a:defRPr>
             </a:lvl8pPr>
             <a:lvl9pPr>
-              <a:buNone/>
               <a:defRPr sz="1275" b="0">
                 <a:solidFill>
                   <a:srgbClr val="596678"/>
@@ -20380,7 +19508,6 @@
           </a:lstStyle>
           <a:p xmlns:a="http://schemas.openxmlformats.org/drawingml/2006/main">
             <a:pPr>
-              <a:buNone/>
               <a:defRPr sz="1275" b="0">
                 <a:solidFill>
                   <a:srgbClr val="596678"/>
@@ -20409,7 +19536,7 @@
           <p:cNvPr id="4" name="">
             <a:extLst xmlns:a="http://schemas.openxmlformats.org/drawingml/2006/main">
               <a:ext uri="{FF2B5EF4-FFF2-40B4-BE49-F238E27FC236}">
-                <a16:creationId xmlns:a16="http://schemas.microsoft.com/office/drawing/2014/main" id="{A9B63B55-DEF4-4CE0-BA1B-ECF0C9453FA8}"/>
+                <a16:creationId xmlns:a16="http://schemas.microsoft.com/office/drawing/2014/main" id="{0B9E5E8D-619B-49C7-BE7A-50BFE6A9FA59}"/>
               </a:ext>
             </a:extLst>
           </p:cNvPr>
@@ -20446,7 +19573,6 @@
               </a:defRPr>
             </a:defPPr>
             <a:lvl1pPr>
-              <a:buNone/>
               <a:defRPr sz="825" b="0">
                 <a:solidFill>
                   <a:srgbClr val="596678"/>
@@ -20457,7 +19583,6 @@
               </a:defRPr>
             </a:lvl1pPr>
             <a:lvl2pPr>
-              <a:buNone/>
               <a:defRPr sz="825" b="0">
                 <a:solidFill>
                   <a:srgbClr val="596678"/>
@@ -20468,7 +19593,6 @@
               </a:defRPr>
             </a:lvl2pPr>
             <a:lvl3pPr>
-              <a:buNone/>
               <a:defRPr sz="825" b="0">
                 <a:solidFill>
                   <a:srgbClr val="596678"/>
@@ -20479,7 +19603,6 @@
               </a:defRPr>
             </a:lvl3pPr>
             <a:lvl4pPr>
-              <a:buNone/>
               <a:defRPr sz="825" b="0">
                 <a:solidFill>
                   <a:srgbClr val="596678"/>
@@ -20490,7 +19613,6 @@
               </a:defRPr>
             </a:lvl4pPr>
             <a:lvl5pPr>
-              <a:buNone/>
               <a:defRPr sz="825" b="0">
                 <a:solidFill>
                   <a:srgbClr val="596678"/>
@@ -20501,7 +19623,6 @@
               </a:defRPr>
             </a:lvl5pPr>
             <a:lvl6pPr>
-              <a:buNone/>
               <a:defRPr sz="825" b="0">
                 <a:solidFill>
                   <a:srgbClr val="596678"/>
@@ -20512,7 +19633,6 @@
               </a:defRPr>
             </a:lvl6pPr>
             <a:lvl7pPr>
-              <a:buNone/>
               <a:defRPr sz="825" b="0">
                 <a:solidFill>
                   <a:srgbClr val="596678"/>
@@ -20523,7 +19643,6 @@
               </a:defRPr>
             </a:lvl7pPr>
             <a:lvl8pPr>
-              <a:buNone/>
               <a:defRPr sz="825" b="0">
                 <a:solidFill>
                   <a:srgbClr val="596678"/>
@@ -20534,7 +19653,6 @@
               </a:defRPr>
             </a:lvl8pPr>
             <a:lvl9pPr>
-              <a:buNone/>
               <a:defRPr sz="825" b="0">
                 <a:solidFill>
                   <a:srgbClr val="596678"/>
@@ -20547,7 +19665,6 @@
           </a:lstStyle>
           <a:p xmlns:a="http://schemas.openxmlformats.org/drawingml/2006/main">
             <a:pPr>
-              <a:buNone/>
               <a:defRPr sz="825" b="0">
                 <a:solidFill>
                   <a:srgbClr val="596678"/>
@@ -20576,7 +19693,7 @@
           <p:cNvPr id="5" name="">
             <a:extLst xmlns:a="http://schemas.openxmlformats.org/drawingml/2006/main">
               <a:ext uri="{FF2B5EF4-FFF2-40B4-BE49-F238E27FC236}">
-                <a16:creationId xmlns:a16="http://schemas.microsoft.com/office/drawing/2014/main" id="{1C3F6C7B-809C-47AA-904D-E20F792D5C99}"/>
+                <a16:creationId xmlns:a16="http://schemas.microsoft.com/office/drawing/2014/main" id="{73DBEA5A-E701-4C2D-9017-41B1E8A61DD1}"/>
               </a:ext>
             </a:extLst>
           </p:cNvPr>
@@ -20613,7 +19730,6 @@
               </a:defRPr>
             </a:defPPr>
             <a:lvl1pPr>
-              <a:buNone/>
               <a:defRPr sz="825" b="1">
                 <a:solidFill>
                   <a:srgbClr val="802D42"/>
@@ -20624,7 +19740,6 @@
               </a:defRPr>
             </a:lvl1pPr>
             <a:lvl2pPr>
-              <a:buNone/>
               <a:defRPr sz="825" b="1">
                 <a:solidFill>
                   <a:srgbClr val="802D42"/>
@@ -20635,7 +19750,6 @@
               </a:defRPr>
             </a:lvl2pPr>
             <a:lvl3pPr>
-              <a:buNone/>
               <a:defRPr sz="825" b="1">
                 <a:solidFill>
                   <a:srgbClr val="802D42"/>
@@ -20646,7 +19760,6 @@
               </a:defRPr>
             </a:lvl3pPr>
             <a:lvl4pPr>
-              <a:buNone/>
               <a:defRPr sz="825" b="1">
                 <a:solidFill>
                   <a:srgbClr val="802D42"/>
@@ -20657,7 +19770,6 @@
               </a:defRPr>
             </a:lvl4pPr>
             <a:lvl5pPr>
-              <a:buNone/>
               <a:defRPr sz="825" b="1">
                 <a:solidFill>
                   <a:srgbClr val="802D42"/>
@@ -20668,7 +19780,6 @@
               </a:defRPr>
             </a:lvl5pPr>
             <a:lvl6pPr>
-              <a:buNone/>
               <a:defRPr sz="825" b="1">
                 <a:solidFill>
                   <a:srgbClr val="802D42"/>
@@ -20679,7 +19790,6 @@
               </a:defRPr>
             </a:lvl6pPr>
             <a:lvl7pPr>
-              <a:buNone/>
               <a:defRPr sz="825" b="1">
                 <a:solidFill>
                   <a:srgbClr val="802D42"/>
@@ -20690,7 +19800,6 @@
               </a:defRPr>
             </a:lvl7pPr>
             <a:lvl8pPr>
-              <a:buNone/>
               <a:defRPr sz="825" b="1">
                 <a:solidFill>
                   <a:srgbClr val="802D42"/>
@@ -20701,7 +19810,6 @@
               </a:defRPr>
             </a:lvl8pPr>
             <a:lvl9pPr>
-              <a:buNone/>
               <a:defRPr sz="825" b="1">
                 <a:solidFill>
                   <a:srgbClr val="802D42"/>
@@ -20714,7 +19822,6 @@
           </a:lstStyle>
           <a:p xmlns:a="http://schemas.openxmlformats.org/drawingml/2006/main">
             <a:pPr>
-              <a:buNone/>
               <a:defRPr sz="825" b="1">
                 <a:solidFill>
                   <a:srgbClr val="802D42"/>
@@ -20743,7 +19850,7 @@
           <p:cNvPr id="6" name="">
             <a:extLst xmlns:a="http://schemas.openxmlformats.org/drawingml/2006/main">
               <a:ext uri="{FF2B5EF4-FFF2-40B4-BE49-F238E27FC236}">
-                <a16:creationId xmlns:a16="http://schemas.microsoft.com/office/drawing/2014/main" id="{FFE3911F-DD0C-438B-90DF-866A54FE75B8}"/>
+                <a16:creationId xmlns:a16="http://schemas.microsoft.com/office/drawing/2014/main" id="{15D1264C-68CE-4B9B-99EA-C168A35E7543}"/>
               </a:ext>
             </a:extLst>
           </p:cNvPr>
@@ -20780,7 +19887,6 @@
               </a:defRPr>
             </a:defPPr>
             <a:lvl1pPr>
-              <a:buNone/>
               <a:defRPr sz="1725" b="1">
                 <a:solidFill>
                   <a:srgbClr val="243244"/>
@@ -20791,7 +19897,6 @@
               </a:defRPr>
             </a:lvl1pPr>
             <a:lvl2pPr>
-              <a:buNone/>
               <a:defRPr sz="1725" b="1">
                 <a:solidFill>
                   <a:srgbClr val="243244"/>
@@ -20802,7 +19907,6 @@
               </a:defRPr>
             </a:lvl2pPr>
             <a:lvl3pPr>
-              <a:buNone/>
               <a:defRPr sz="1725" b="1">
                 <a:solidFill>
                   <a:srgbClr val="243244"/>
@@ -20813,7 +19917,6 @@
               </a:defRPr>
             </a:lvl3pPr>
             <a:lvl4pPr>
-              <a:buNone/>
               <a:defRPr sz="1725" b="1">
                 <a:solidFill>
                   <a:srgbClr val="243244"/>
@@ -20824,7 +19927,6 @@
               </a:defRPr>
             </a:lvl4pPr>
             <a:lvl5pPr>
-              <a:buNone/>
               <a:defRPr sz="1725" b="1">
                 <a:solidFill>
                   <a:srgbClr val="243244"/>
@@ -20835,7 +19937,6 @@
               </a:defRPr>
             </a:lvl5pPr>
             <a:lvl6pPr>
-              <a:buNone/>
               <a:defRPr sz="1725" b="1">
                 <a:solidFill>
                   <a:srgbClr val="243244"/>
@@ -20846,7 +19947,6 @@
               </a:defRPr>
             </a:lvl6pPr>
             <a:lvl7pPr>
-              <a:buNone/>
               <a:defRPr sz="1725" b="1">
                 <a:solidFill>
                   <a:srgbClr val="243244"/>
@@ -20857,7 +19957,6 @@
               </a:defRPr>
             </a:lvl7pPr>
             <a:lvl8pPr>
-              <a:buNone/>
               <a:defRPr sz="1725" b="1">
                 <a:solidFill>
                   <a:srgbClr val="243244"/>
@@ -20868,7 +19967,6 @@
               </a:defRPr>
             </a:lvl8pPr>
             <a:lvl9pPr>
-              <a:buNone/>
               <a:defRPr sz="1725" b="1">
                 <a:solidFill>
                   <a:srgbClr val="243244"/>
@@ -20881,7 +19979,6 @@
           </a:lstStyle>
           <a:p xmlns:a="http://schemas.openxmlformats.org/drawingml/2006/main">
             <a:pPr>
-              <a:buNone/>
               <a:defRPr sz="1725" b="1">
                 <a:solidFill>
                   <a:srgbClr val="243244"/>
@@ -20910,7 +20007,7 @@
           <p:cNvPr id="7" name="">
             <a:extLst xmlns:a="http://schemas.openxmlformats.org/drawingml/2006/main">
               <a:ext uri="{FF2B5EF4-FFF2-40B4-BE49-F238E27FC236}">
-                <a16:creationId xmlns:a16="http://schemas.microsoft.com/office/drawing/2014/main" id="{49254DD7-0747-4DB5-8D65-B73E11CC8D1D}"/>
+                <a16:creationId xmlns:a16="http://schemas.microsoft.com/office/drawing/2014/main" id="{782107A0-B36D-461C-BAC4-389A75441218}"/>
               </a:ext>
             </a:extLst>
           </p:cNvPr>
@@ -20947,7 +20044,6 @@
               </a:defRPr>
             </a:defPPr>
             <a:lvl1pPr>
-              <a:buNone/>
               <a:defRPr sz="1275" b="0">
                 <a:solidFill>
                   <a:srgbClr val="596678"/>
@@ -20958,7 +20054,6 @@
               </a:defRPr>
             </a:lvl1pPr>
             <a:lvl2pPr>
-              <a:buNone/>
               <a:defRPr sz="1275" b="0">
                 <a:solidFill>
                   <a:srgbClr val="596678"/>
@@ -20969,7 +20064,6 @@
               </a:defRPr>
             </a:lvl2pPr>
             <a:lvl3pPr>
-              <a:buNone/>
               <a:defRPr sz="1275" b="0">
                 <a:solidFill>
                   <a:srgbClr val="596678"/>
@@ -20980,7 +20074,6 @@
               </a:defRPr>
             </a:lvl3pPr>
             <a:lvl4pPr>
-              <a:buNone/>
               <a:defRPr sz="1275" b="0">
                 <a:solidFill>
                   <a:srgbClr val="596678"/>
@@ -20991,7 +20084,6 @@
               </a:defRPr>
             </a:lvl4pPr>
             <a:lvl5pPr>
-              <a:buNone/>
               <a:defRPr sz="1275" b="0">
                 <a:solidFill>
                   <a:srgbClr val="596678"/>
@@ -21002,7 +20094,6 @@
               </a:defRPr>
             </a:lvl5pPr>
             <a:lvl6pPr>
-              <a:buNone/>
               <a:defRPr sz="1275" b="0">
                 <a:solidFill>
                   <a:srgbClr val="596678"/>
@@ -21013,7 +20104,6 @@
               </a:defRPr>
             </a:lvl6pPr>
             <a:lvl7pPr>
-              <a:buNone/>
               <a:defRPr sz="1275" b="0">
                 <a:solidFill>
                   <a:srgbClr val="596678"/>
@@ -21024,7 +20114,6 @@
               </a:defRPr>
             </a:lvl7pPr>
             <a:lvl8pPr>
-              <a:buNone/>
               <a:defRPr sz="1275" b="0">
                 <a:solidFill>
                   <a:srgbClr val="596678"/>
@@ -21035,7 +20124,6 @@
               </a:defRPr>
             </a:lvl8pPr>
             <a:lvl9pPr>
-              <a:buNone/>
               <a:defRPr sz="1275" b="0">
                 <a:solidFill>
                   <a:srgbClr val="596678"/>
@@ -21048,7 +20136,6 @@
           </a:lstStyle>
           <a:p xmlns:a="http://schemas.openxmlformats.org/drawingml/2006/main">
             <a:pPr>
-              <a:buNone/>
               <a:defRPr sz="1275" b="0">
                 <a:solidFill>
                   <a:srgbClr val="596678"/>
@@ -21077,7 +20164,7 @@
           <p:cNvPr id="8" name="">
             <a:extLst xmlns:a="http://schemas.openxmlformats.org/drawingml/2006/main">
               <a:ext uri="{FF2B5EF4-FFF2-40B4-BE49-F238E27FC236}">
-                <a16:creationId xmlns:a16="http://schemas.microsoft.com/office/drawing/2014/main" id="{2DD56CD9-A576-495E-B16B-BB6815530AE1}"/>
+                <a16:creationId xmlns:a16="http://schemas.microsoft.com/office/drawing/2014/main" id="{32F5A017-0C4F-4738-B1B6-999D2A876C4B}"/>
               </a:ext>
             </a:extLst>
           </p:cNvPr>
@@ -21114,7 +20201,6 @@
               </a:defRPr>
             </a:defPPr>
             <a:lvl1pPr>
-              <a:buNone/>
               <a:defRPr sz="1725" b="1">
                 <a:solidFill>
                   <a:srgbClr val="243244"/>
@@ -21125,7 +20211,6 @@
               </a:defRPr>
             </a:lvl1pPr>
             <a:lvl2pPr>
-              <a:buNone/>
               <a:defRPr sz="1725" b="1">
                 <a:solidFill>
                   <a:srgbClr val="243244"/>
@@ -21136,7 +20221,6 @@
               </a:defRPr>
             </a:lvl2pPr>
             <a:lvl3pPr>
-              <a:buNone/>
               <a:defRPr sz="1725" b="1">
                 <a:solidFill>
                   <a:srgbClr val="243244"/>
@@ -21147,7 +20231,6 @@
               </a:defRPr>
             </a:lvl3pPr>
             <a:lvl4pPr>
-              <a:buNone/>
               <a:defRPr sz="1725" b="1">
                 <a:solidFill>
                   <a:srgbClr val="243244"/>
@@ -21158,7 +20241,6 @@
               </a:defRPr>
             </a:lvl4pPr>
             <a:lvl5pPr>
-              <a:buNone/>
               <a:defRPr sz="1725" b="1">
                 <a:solidFill>
                   <a:srgbClr val="243244"/>
@@ -21169,7 +20251,6 @@
               </a:defRPr>
             </a:lvl5pPr>
             <a:lvl6pPr>
-              <a:buNone/>
               <a:defRPr sz="1725" b="1">
                 <a:solidFill>
                   <a:srgbClr val="243244"/>
@@ -21180,7 +20261,6 @@
               </a:defRPr>
             </a:lvl6pPr>
             <a:lvl7pPr>
-              <a:buNone/>
               <a:defRPr sz="1725" b="1">
                 <a:solidFill>
                   <a:srgbClr val="243244"/>
@@ -21191,7 +20271,6 @@
               </a:defRPr>
             </a:lvl7pPr>
             <a:lvl8pPr>
-              <a:buNone/>
               <a:defRPr sz="1725" b="1">
                 <a:solidFill>
                   <a:srgbClr val="243244"/>
@@ -21202,7 +20281,6 @@
               </a:defRPr>
             </a:lvl8pPr>
             <a:lvl9pPr>
-              <a:buNone/>
               <a:defRPr sz="1725" b="1">
                 <a:solidFill>
                   <a:srgbClr val="243244"/>
@@ -21215,7 +20293,6 @@
           </a:lstStyle>
           <a:p xmlns:a="http://schemas.openxmlformats.org/drawingml/2006/main">
             <a:pPr>
-              <a:buNone/>
               <a:defRPr sz="1725" b="1">
                 <a:solidFill>
                   <a:srgbClr val="243244"/>
@@ -21244,7 +20321,7 @@
           <p:cNvPr id="9" name="">
             <a:extLst xmlns:a="http://schemas.openxmlformats.org/drawingml/2006/main">
               <a:ext uri="{FF2B5EF4-FFF2-40B4-BE49-F238E27FC236}">
-                <a16:creationId xmlns:a16="http://schemas.microsoft.com/office/drawing/2014/main" id="{78CA4191-A355-4F3C-A5D7-0BA7F7BCC72A}"/>
+                <a16:creationId xmlns:a16="http://schemas.microsoft.com/office/drawing/2014/main" id="{8C3A2D34-DD1C-42E4-BACC-F988060105BA}"/>
               </a:ext>
             </a:extLst>
           </p:cNvPr>
@@ -21281,7 +20358,6 @@
               </a:defRPr>
             </a:defPPr>
             <a:lvl1pPr>
-              <a:buNone/>
               <a:defRPr sz="1275" b="0">
                 <a:solidFill>
                   <a:srgbClr val="596678"/>
@@ -21292,7 +20368,6 @@
               </a:defRPr>
             </a:lvl1pPr>
             <a:lvl2pPr>
-              <a:buNone/>
               <a:defRPr sz="1275" b="0">
                 <a:solidFill>
                   <a:srgbClr val="596678"/>
@@ -21303,7 +20378,6 @@
               </a:defRPr>
             </a:lvl2pPr>
             <a:lvl3pPr>
-              <a:buNone/>
               <a:defRPr sz="1275" b="0">
                 <a:solidFill>
                   <a:srgbClr val="596678"/>
@@ -21314,7 +20388,6 @@
               </a:defRPr>
             </a:lvl3pPr>
             <a:lvl4pPr>
-              <a:buNone/>
               <a:defRPr sz="1275" b="0">
                 <a:solidFill>
                   <a:srgbClr val="596678"/>
@@ -21325,7 +20398,6 @@
               </a:defRPr>
             </a:lvl4pPr>
             <a:lvl5pPr>
-              <a:buNone/>
               <a:defRPr sz="1275" b="0">
                 <a:solidFill>
                   <a:srgbClr val="596678"/>
@@ -21336,7 +20408,6 @@
               </a:defRPr>
             </a:lvl5pPr>
             <a:lvl6pPr>
-              <a:buNone/>
               <a:defRPr sz="1275" b="0">
                 <a:solidFill>
                   <a:srgbClr val="596678"/>
@@ -21347,7 +20418,6 @@
               </a:defRPr>
             </a:lvl6pPr>
             <a:lvl7pPr>
-              <a:buNone/>
               <a:defRPr sz="1275" b="0">
                 <a:solidFill>
                   <a:srgbClr val="596678"/>
@@ -21358,7 +20428,6 @@
               </a:defRPr>
             </a:lvl7pPr>
             <a:lvl8pPr>
-              <a:buNone/>
               <a:defRPr sz="1275" b="0">
                 <a:solidFill>
                   <a:srgbClr val="596678"/>
@@ -21369,7 +20438,6 @@
               </a:defRPr>
             </a:lvl8pPr>
             <a:lvl9pPr>
-              <a:buNone/>
               <a:defRPr sz="1275" b="0">
                 <a:solidFill>
                   <a:srgbClr val="596678"/>
@@ -21382,7 +20450,6 @@
           </a:lstStyle>
           <a:p xmlns:a="http://schemas.openxmlformats.org/drawingml/2006/main">
             <a:pPr>
-              <a:buNone/>
               <a:defRPr sz="1275" b="0">
                 <a:solidFill>
                   <a:srgbClr val="596678"/>
@@ -21411,7 +20478,7 @@
           <p:cNvPr id="10" name="">
             <a:extLst xmlns:a="http://schemas.openxmlformats.org/drawingml/2006/main">
               <a:ext uri="{FF2B5EF4-FFF2-40B4-BE49-F238E27FC236}">
-                <a16:creationId xmlns:a16="http://schemas.microsoft.com/office/drawing/2014/main" id="{D71F4442-14CB-4E41-BEAC-AC89BBCFF727}"/>
+                <a16:creationId xmlns:a16="http://schemas.microsoft.com/office/drawing/2014/main" id="{33BB3391-5104-43D9-B028-89A03BB94087}"/>
               </a:ext>
             </a:extLst>
           </p:cNvPr>
@@ -21448,7 +20515,6 @@
               </a:defRPr>
             </a:defPPr>
             <a:lvl1pPr>
-              <a:buNone/>
               <a:defRPr sz="1725" b="1">
                 <a:solidFill>
                   <a:srgbClr val="243244"/>
@@ -21459,7 +20525,6 @@
               </a:defRPr>
             </a:lvl1pPr>
             <a:lvl2pPr>
-              <a:buNone/>
               <a:defRPr sz="1725" b="1">
                 <a:solidFill>
                   <a:srgbClr val="243244"/>
@@ -21470,7 +20535,6 @@
               </a:defRPr>
             </a:lvl2pPr>
             <a:lvl3pPr>
-              <a:buNone/>
               <a:defRPr sz="1725" b="1">
                 <a:solidFill>
                   <a:srgbClr val="243244"/>
@@ -21481,7 +20545,6 @@
               </a:defRPr>
             </a:lvl3pPr>
             <a:lvl4pPr>
-              <a:buNone/>
               <a:defRPr sz="1725" b="1">
                 <a:solidFill>
                   <a:srgbClr val="243244"/>
@@ -21492,7 +20555,6 @@
               </a:defRPr>
             </a:lvl4pPr>
             <a:lvl5pPr>
-              <a:buNone/>
               <a:defRPr sz="1725" b="1">
                 <a:solidFill>
                   <a:srgbClr val="243244"/>
@@ -21503,7 +20565,6 @@
               </a:defRPr>
             </a:lvl5pPr>
             <a:lvl6pPr>
-              <a:buNone/>
               <a:defRPr sz="1725" b="1">
                 <a:solidFill>
                   <a:srgbClr val="243244"/>
@@ -21514,7 +20575,6 @@
               </a:defRPr>
             </a:lvl6pPr>
             <a:lvl7pPr>
-              <a:buNone/>
               <a:defRPr sz="1725" b="1">
                 <a:solidFill>
                   <a:srgbClr val="243244"/>
@@ -21525,7 +20585,6 @@
               </a:defRPr>
             </a:lvl7pPr>
             <a:lvl8pPr>
-              <a:buNone/>
               <a:defRPr sz="1725" b="1">
                 <a:solidFill>
                   <a:srgbClr val="243244"/>
@@ -21536,7 +20595,6 @@
               </a:defRPr>
             </a:lvl8pPr>
             <a:lvl9pPr>
-              <a:buNone/>
               <a:defRPr sz="1725" b="1">
                 <a:solidFill>
                   <a:srgbClr val="243244"/>
@@ -21549,7 +20607,6 @@
           </a:lstStyle>
           <a:p xmlns:a="http://schemas.openxmlformats.org/drawingml/2006/main">
             <a:pPr>
-              <a:buNone/>
               <a:defRPr sz="1725" b="1">
                 <a:solidFill>
                   <a:srgbClr val="243244"/>
@@ -21578,7 +20635,7 @@
           <p:cNvPr id="11" name="">
             <a:extLst xmlns:a="http://schemas.openxmlformats.org/drawingml/2006/main">
               <a:ext uri="{FF2B5EF4-FFF2-40B4-BE49-F238E27FC236}">
-                <a16:creationId xmlns:a16="http://schemas.microsoft.com/office/drawing/2014/main" id="{060163BC-0CC9-4248-961C-6881853D9AD6}"/>
+                <a16:creationId xmlns:a16="http://schemas.microsoft.com/office/drawing/2014/main" id="{FDD3F078-93D3-413A-A689-0DE53598ECDF}"/>
               </a:ext>
             </a:extLst>
           </p:cNvPr>
@@ -21615,7 +20672,6 @@
               </a:defRPr>
             </a:defPPr>
             <a:lvl1pPr>
-              <a:buNone/>
               <a:defRPr sz="1275" b="0">
                 <a:solidFill>
                   <a:srgbClr val="596678"/>
@@ -21626,7 +20682,6 @@
               </a:defRPr>
             </a:lvl1pPr>
             <a:lvl2pPr>
-              <a:buNone/>
               <a:defRPr sz="1275" b="0">
                 <a:solidFill>
                   <a:srgbClr val="596678"/>
@@ -21637,7 +20692,6 @@
               </a:defRPr>
             </a:lvl2pPr>
             <a:lvl3pPr>
-              <a:buNone/>
               <a:defRPr sz="1275" b="0">
                 <a:solidFill>
                   <a:srgbClr val="596678"/>
@@ -21648,7 +20702,6 @@
               </a:defRPr>
             </a:lvl3pPr>
             <a:lvl4pPr>
-              <a:buNone/>
               <a:defRPr sz="1275" b="0">
                 <a:solidFill>
                   <a:srgbClr val="596678"/>
@@ -21659,7 +20712,6 @@
               </a:defRPr>
             </a:lvl4pPr>
             <a:lvl5pPr>
-              <a:buNone/>
               <a:defRPr sz="1275" b="0">
                 <a:solidFill>
                   <a:srgbClr val="596678"/>
@@ -21670,7 +20722,6 @@
               </a:defRPr>
             </a:lvl5pPr>
             <a:lvl6pPr>
-              <a:buNone/>
               <a:defRPr sz="1275" b="0">
                 <a:solidFill>
                   <a:srgbClr val="596678"/>
@@ -21681,7 +20732,6 @@
               </a:defRPr>
             </a:lvl6pPr>
             <a:lvl7pPr>
-              <a:buNone/>
               <a:defRPr sz="1275" b="0">
                 <a:solidFill>
                   <a:srgbClr val="596678"/>
@@ -21692,7 +20742,6 @@
               </a:defRPr>
             </a:lvl7pPr>
             <a:lvl8pPr>
-              <a:buNone/>
               <a:defRPr sz="1275" b="0">
                 <a:solidFill>
                   <a:srgbClr val="596678"/>
@@ -21703,7 +20752,6 @@
               </a:defRPr>
             </a:lvl8pPr>
             <a:lvl9pPr>
-              <a:buNone/>
               <a:defRPr sz="1275" b="0">
                 <a:solidFill>
                   <a:srgbClr val="596678"/>
@@ -21716,7 +20764,6 @@
           </a:lstStyle>
           <a:p xmlns:a="http://schemas.openxmlformats.org/drawingml/2006/main">
             <a:pPr>
-              <a:buNone/>
               <a:defRPr sz="1275" b="0">
                 <a:solidFill>
                   <a:srgbClr val="596678"/>
@@ -21743,7 +20790,7 @@
     </p:spTree>
     <p:extLst>
       <p:ext uri="{BB962C8B-B14F-4D97-AF65-F5344CB8AC3E}">
-        <p14:creationId xmlns:p14="http://schemas.microsoft.com/office/powerpoint/2010/main" val="824689366"/>
+        <p14:creationId xmlns:p14="http://schemas.microsoft.com/office/powerpoint/2010/main" val="1839313499"/>
       </p:ext>
     </p:extLst>
   </p:cSld>

--- a/exposicion/presentacion.pptx
+++ b/exposicion/presentacion.pptx
@@ -2,24 +2,24 @@
 <file path=ppt/presentation.xml><?xml version="1.0" encoding="utf-8"?>
 <p:presentation xmlns:p="http://schemas.openxmlformats.org/presentationml/2006/main">
   <p:sldMasterIdLst>
-    <p:sldMasterId xmlns:r="http://schemas.openxmlformats.org/officeDocument/2006/relationships" id="2147483648" r:id="R6beb22bc2e294786"/>
+    <p:sldMasterId xmlns:r="http://schemas.openxmlformats.org/officeDocument/2006/relationships" id="2147483648" r:id="R0895f6765efe4118"/>
   </p:sldMasterIdLst>
   <p:notesMasterIdLst>
-    <p:notesMasterId xmlns:r="http://schemas.openxmlformats.org/officeDocument/2006/relationships" r:id="Ra87101cb85a64507"/>
+    <p:notesMasterId xmlns:r="http://schemas.openxmlformats.org/officeDocument/2006/relationships" r:id="Rc1d2ab7151ea4018"/>
   </p:notesMasterIdLst>
   <p:sldIdLst>
-    <p:sldId xmlns:r="http://schemas.openxmlformats.org/officeDocument/2006/relationships" id="256" r:id="Rac7713136c3546df"/>
-    <p:sldId xmlns:r="http://schemas.openxmlformats.org/officeDocument/2006/relationships" id="257" r:id="R9285a227e3d94258"/>
-    <p:sldId xmlns:r="http://schemas.openxmlformats.org/officeDocument/2006/relationships" id="258" r:id="R9420e4b215f14f71"/>
-    <p:sldId xmlns:r="http://schemas.openxmlformats.org/officeDocument/2006/relationships" id="259" r:id="Rb24ef35b68ca4b5e"/>
-    <p:sldId xmlns:r="http://schemas.openxmlformats.org/officeDocument/2006/relationships" id="260" r:id="R4d02bfe421534c42"/>
-    <p:sldId xmlns:r="http://schemas.openxmlformats.org/officeDocument/2006/relationships" id="261" r:id="R7c3d4459975f431c"/>
-    <p:sldId xmlns:r="http://schemas.openxmlformats.org/officeDocument/2006/relationships" id="262" r:id="Rf8112fa532774068"/>
-    <p:sldId xmlns:r="http://schemas.openxmlformats.org/officeDocument/2006/relationships" id="263" r:id="R42904302af664d30"/>
-    <p:sldId xmlns:r="http://schemas.openxmlformats.org/officeDocument/2006/relationships" id="264" r:id="Re1f8af7b4a734966"/>
-    <p:sldId xmlns:r="http://schemas.openxmlformats.org/officeDocument/2006/relationships" id="265" r:id="Rd7f3410899e44399"/>
-    <p:sldId xmlns:r="http://schemas.openxmlformats.org/officeDocument/2006/relationships" id="266" r:id="R6aab5ff744a942e9"/>
-    <p:sldId xmlns:r="http://schemas.openxmlformats.org/officeDocument/2006/relationships" id="267" r:id="R1c77bfb1abca4d90"/>
+    <p:sldId xmlns:r="http://schemas.openxmlformats.org/officeDocument/2006/relationships" id="256" r:id="R7df037ef438a4486"/>
+    <p:sldId xmlns:r="http://schemas.openxmlformats.org/officeDocument/2006/relationships" id="257" r:id="Rd0309b987d7c47fa"/>
+    <p:sldId xmlns:r="http://schemas.openxmlformats.org/officeDocument/2006/relationships" id="258" r:id="Rf2bae8a0bb4f4bd8"/>
+    <p:sldId xmlns:r="http://schemas.openxmlformats.org/officeDocument/2006/relationships" id="259" r:id="R76257605fea4460a"/>
+    <p:sldId xmlns:r="http://schemas.openxmlformats.org/officeDocument/2006/relationships" id="260" r:id="R391969b160a649e5"/>
+    <p:sldId xmlns:r="http://schemas.openxmlformats.org/officeDocument/2006/relationships" id="261" r:id="R840bb0303c46424b"/>
+    <p:sldId xmlns:r="http://schemas.openxmlformats.org/officeDocument/2006/relationships" id="262" r:id="Ra3e546669a92480d"/>
+    <p:sldId xmlns:r="http://schemas.openxmlformats.org/officeDocument/2006/relationships" id="263" r:id="Re62b7695d4f94ea1"/>
+    <p:sldId xmlns:r="http://schemas.openxmlformats.org/officeDocument/2006/relationships" id="264" r:id="Redbac85c4394444f"/>
+    <p:sldId xmlns:r="http://schemas.openxmlformats.org/officeDocument/2006/relationships" id="265" r:id="Rfe2ddb72035941e4"/>
+    <p:sldId xmlns:r="http://schemas.openxmlformats.org/officeDocument/2006/relationships" id="266" r:id="R41456706195a45d2"/>
+    <p:sldId xmlns:r="http://schemas.openxmlformats.org/officeDocument/2006/relationships" id="267" r:id="R87bbabde58eb4f75"/>
   </p:sldIdLst>
   <p:sldSz cx="9144000" cy="5143500"/>
   <p:notesSz cx="6858000" cy="9144000"/>
@@ -1163,7 +1163,7 @@
           <a:lstStyle xmlns:a="http://schemas.openxmlformats.org/drawingml/2006/main"/>
           <a:p xmlns:a="http://schemas.openxmlformats.org/drawingml/2006/main">
             <a:r>
-              <a:t>Captura real del 18/10/2026. El filtro pasó de 21 eventos con magnitud mínima 5 a 3 con magnitud mínima 6. La base respondió con 319592 filas en dim_sismos. Comandos reales en capturas/ejecucion-2026-10-18.txt. Sigue pendiente una captura auténtica del arranque en terminal. Los indicadores de población son resultados de la aplicación y no equivalen a personas damnificadas observadas.</a:t>
+              <a:t>Captura real del 18/10/2026. El filtro pasó de 21 eventos con magnitud mínima 5 a 3 con magnitud mínima 6. La base respondió con 319592 filas en dim_sismos. Comandos reales en capturas/ejecucion-2026-10-18.txt. La captura auténtica de PowerShell está en capturas/arranque-terminal-2026-10-18.png. Los indicadores de población son resultados de la aplicación y no equivalen a personas damnificadas observadas.</a:t>
             </a:r>
           </a:p>
         </p:txBody>
@@ -1710,7 +1710,7 @@
           <p:cNvPr id="3" name="Title">
             <a:extLst xmlns:a="http://schemas.openxmlformats.org/drawingml/2006/main">
               <a:ext uri="{FF2B5EF4-FFF2-40B4-BE49-F238E27FC236}">
-                <a16:creationId xmlns:a16="http://schemas.microsoft.com/office/drawing/2014/main" id="{2F281403-FA55-495B-AE56-F3257FF2938C}"/>
+                <a16:creationId xmlns:a16="http://schemas.microsoft.com/office/drawing/2014/main" id="{5643C6EF-3BB1-4F00-989A-80B5FDED0992}"/>
               </a:ext>
             </a:extLst>
           </p:cNvPr>
@@ -1939,7 +1939,7 @@
           <p:cNvPr id="2" name="Subtitle">
             <a:extLst xmlns:a="http://schemas.openxmlformats.org/drawingml/2006/main">
               <a:ext uri="{FF2B5EF4-FFF2-40B4-BE49-F238E27FC236}">
-                <a16:creationId xmlns:a16="http://schemas.microsoft.com/office/drawing/2014/main" id="{FC5EE7E1-CF61-47A0-B2BD-B6BA21CE24A4}"/>
+                <a16:creationId xmlns:a16="http://schemas.microsoft.com/office/drawing/2014/main" id="{0DF69843-FBFE-4C78-9A4F-2041313FEA5C}"/>
               </a:ext>
             </a:extLst>
           </p:cNvPr>
@@ -2185,7 +2185,7 @@
           <p:cNvPr id="2" name="Section title">
             <a:extLst xmlns:a="http://schemas.openxmlformats.org/drawingml/2006/main">
               <a:ext uri="{FF2B5EF4-FFF2-40B4-BE49-F238E27FC236}">
-                <a16:creationId xmlns:a16="http://schemas.microsoft.com/office/drawing/2014/main" id="{C481DECD-777C-4FA6-85A4-0AF7FD0D9B8D}"/>
+                <a16:creationId xmlns:a16="http://schemas.microsoft.com/office/drawing/2014/main" id="{78220ABC-5766-4637-9936-5E3B80BF1F36}"/>
               </a:ext>
             </a:extLst>
           </p:cNvPr>
@@ -2431,7 +2431,7 @@
           <p:cNvPr id="3" name="Title">
             <a:extLst xmlns:a="http://schemas.openxmlformats.org/drawingml/2006/main">
               <a:ext uri="{FF2B5EF4-FFF2-40B4-BE49-F238E27FC236}">
-                <a16:creationId xmlns:a16="http://schemas.microsoft.com/office/drawing/2014/main" id="{3CA8C214-B194-4A78-97C4-D844B3424AE6}"/>
+                <a16:creationId xmlns:a16="http://schemas.microsoft.com/office/drawing/2014/main" id="{2FACF38B-116E-4EAA-83E3-A5F126CFE1D4}"/>
               </a:ext>
             </a:extLst>
           </p:cNvPr>
@@ -2660,7 +2660,7 @@
           <p:cNvPr id="2" name="Body">
             <a:extLst xmlns:a="http://schemas.openxmlformats.org/drawingml/2006/main">
               <a:ext uri="{FF2B5EF4-FFF2-40B4-BE49-F238E27FC236}">
-                <a16:creationId xmlns:a16="http://schemas.microsoft.com/office/drawing/2014/main" id="{6D02B2B4-F23E-409B-8A75-3A1B8FB2E88D}"/>
+                <a16:creationId xmlns:a16="http://schemas.microsoft.com/office/drawing/2014/main" id="{5212935E-8152-4F3E-BE3D-DDA715D63A9C}"/>
               </a:ext>
             </a:extLst>
           </p:cNvPr>
@@ -2906,7 +2906,7 @@
           <p:cNvPr id="4" name="Title">
             <a:extLst xmlns:a="http://schemas.openxmlformats.org/drawingml/2006/main">
               <a:ext uri="{FF2B5EF4-FFF2-40B4-BE49-F238E27FC236}">
-                <a16:creationId xmlns:a16="http://schemas.microsoft.com/office/drawing/2014/main" id="{69A60341-FBD1-4745-B2FC-2657C24FF71F}"/>
+                <a16:creationId xmlns:a16="http://schemas.microsoft.com/office/drawing/2014/main" id="{BE79ADDD-568A-4CCC-900E-7102A55139F9}"/>
               </a:ext>
             </a:extLst>
           </p:cNvPr>
@@ -3135,7 +3135,7 @@
           <p:cNvPr id="2" name="Left column">
             <a:extLst xmlns:a="http://schemas.openxmlformats.org/drawingml/2006/main">
               <a:ext uri="{FF2B5EF4-FFF2-40B4-BE49-F238E27FC236}">
-                <a16:creationId xmlns:a16="http://schemas.microsoft.com/office/drawing/2014/main" id="{354A4EB5-4D37-431E-9BFF-E1C9EEFC82CF}"/>
+                <a16:creationId xmlns:a16="http://schemas.microsoft.com/office/drawing/2014/main" id="{0F5416C4-0109-442B-8399-8E387EAF464B}"/>
               </a:ext>
             </a:extLst>
           </p:cNvPr>
@@ -3364,7 +3364,7 @@
           <p:cNvPr id="3" name="Right column">
             <a:extLst xmlns:a="http://schemas.openxmlformats.org/drawingml/2006/main">
               <a:ext uri="{FF2B5EF4-FFF2-40B4-BE49-F238E27FC236}">
-                <a16:creationId xmlns:a16="http://schemas.microsoft.com/office/drawing/2014/main" id="{26265904-A39C-42A4-AF4D-91C1654C6712}"/>
+                <a16:creationId xmlns:a16="http://schemas.microsoft.com/office/drawing/2014/main" id="{E51F4E7D-0CC8-4A4A-9A26-49C01BAACFA7}"/>
               </a:ext>
             </a:extLst>
           </p:cNvPr>
@@ -3610,7 +3610,7 @@
           <p:cNvPr id="3" name="Title">
             <a:extLst xmlns:a="http://schemas.openxmlformats.org/drawingml/2006/main">
               <a:ext uri="{FF2B5EF4-FFF2-40B4-BE49-F238E27FC236}">
-                <a16:creationId xmlns:a16="http://schemas.microsoft.com/office/drawing/2014/main" id="{40C99027-2D36-43C6-89D9-16C62384B2E4}"/>
+                <a16:creationId xmlns:a16="http://schemas.microsoft.com/office/drawing/2014/main" id="{9BCD321C-8116-45A1-87A0-AF1F41A7951B}"/>
               </a:ext>
             </a:extLst>
           </p:cNvPr>
@@ -3839,7 +3839,7 @@
           <p:cNvPr id="2" name="Left column">
             <a:extLst xmlns:a="http://schemas.openxmlformats.org/drawingml/2006/main">
               <a:ext uri="{FF2B5EF4-FFF2-40B4-BE49-F238E27FC236}">
-                <a16:creationId xmlns:a16="http://schemas.microsoft.com/office/drawing/2014/main" id="{102C85C8-8E34-4EF2-A86E-996BCD929777}"/>
+                <a16:creationId xmlns:a16="http://schemas.microsoft.com/office/drawing/2014/main" id="{FC61158E-7808-4168-9E20-CDB143295BF2}"/>
               </a:ext>
             </a:extLst>
           </p:cNvPr>
@@ -4106,12 +4106,12 @@
   </p:cSld>
   <p:clrMap bg1="lt1" tx1="dk1" bg2="lt2" tx2="dk2" accent1="accent1" accent2="accent2" accent3="accent3" accent4="accent4" accent5="accent5" accent6="accent6" hlink="hlink" folHlink="folHlink"/>
   <p:sldLayoutIdLst>
-    <p:sldLayoutId xmlns:r="http://schemas.openxmlformats.org/officeDocument/2006/relationships" id="2147483649" r:id="R90d4fad17d2a4f06"/>
-    <p:sldLayoutId xmlns:r="http://schemas.openxmlformats.org/officeDocument/2006/relationships" id="2147483650" r:id="Rbf8bab4571dd45d8"/>
-    <p:sldLayoutId xmlns:r="http://schemas.openxmlformats.org/officeDocument/2006/relationships" id="2147483651" r:id="R4bfd3fb293af4723"/>
-    <p:sldLayoutId xmlns:r="http://schemas.openxmlformats.org/officeDocument/2006/relationships" id="2147483652" r:id="R4176b56f38284f11"/>
-    <p:sldLayoutId xmlns:r="http://schemas.openxmlformats.org/officeDocument/2006/relationships" id="2147483653" r:id="Ra71c13d167774d12"/>
-    <p:sldLayoutId xmlns:r="http://schemas.openxmlformats.org/officeDocument/2006/relationships" id="2147483654" r:id="R9534847b6d8a4121"/>
+    <p:sldLayoutId xmlns:r="http://schemas.openxmlformats.org/officeDocument/2006/relationships" id="2147483649" r:id="R5e4d8dc22f464f45"/>
+    <p:sldLayoutId xmlns:r="http://schemas.openxmlformats.org/officeDocument/2006/relationships" id="2147483650" r:id="R23262c351e9a4314"/>
+    <p:sldLayoutId xmlns:r="http://schemas.openxmlformats.org/officeDocument/2006/relationships" id="2147483651" r:id="Raf589dd8e35b4289"/>
+    <p:sldLayoutId xmlns:r="http://schemas.openxmlformats.org/officeDocument/2006/relationships" id="2147483652" r:id="Rf5265a9ac9014f04"/>
+    <p:sldLayoutId xmlns:r="http://schemas.openxmlformats.org/officeDocument/2006/relationships" id="2147483653" r:id="R440fdebb71fd4ebe"/>
+    <p:sldLayoutId xmlns:r="http://schemas.openxmlformats.org/officeDocument/2006/relationships" id="2147483654" r:id="R294c1d3216bf41b4"/>
   </p:sldLayoutIdLst>
   <p:txStyles>
     <p:titleStyle>
@@ -4662,7 +4662,7 @@
           <p:cNvPr id="8" name="">
             <a:extLst xmlns:a="http://schemas.openxmlformats.org/drawingml/2006/main">
               <a:ext uri="{FF2B5EF4-FFF2-40B4-BE49-F238E27FC236}">
-                <a16:creationId xmlns:a16="http://schemas.microsoft.com/office/drawing/2014/main" id="{E8AB5BF9-7AB1-4844-A870-FEB3F9CB7CF7}"/>
+                <a16:creationId xmlns:a16="http://schemas.microsoft.com/office/drawing/2014/main" id="{80A952CD-D038-4D01-A6CD-1CD1EDBC7836}"/>
               </a:ext>
             </a:extLst>
           </p:cNvPr>
@@ -4819,7 +4819,7 @@
           <p:cNvPr id="2" name="">
             <a:extLst xmlns:a="http://schemas.openxmlformats.org/drawingml/2006/main">
               <a:ext uri="{FF2B5EF4-FFF2-40B4-BE49-F238E27FC236}">
-                <a16:creationId xmlns:a16="http://schemas.microsoft.com/office/drawing/2014/main" id="{23AB265A-5529-4AFD-B41B-844C9DCEFA7B}"/>
+                <a16:creationId xmlns:a16="http://schemas.microsoft.com/office/drawing/2014/main" id="{5C1A2644-7646-4E03-A14E-5C27F3ED2F20}"/>
               </a:ext>
             </a:extLst>
           </p:cNvPr>
@@ -4976,7 +4976,7 @@
           <p:cNvPr id="3" name="">
             <a:extLst xmlns:a="http://schemas.openxmlformats.org/drawingml/2006/main">
               <a:ext uri="{FF2B5EF4-FFF2-40B4-BE49-F238E27FC236}">
-                <a16:creationId xmlns:a16="http://schemas.microsoft.com/office/drawing/2014/main" id="{A1FA52B8-C500-46FA-87D3-255C233969AE}"/>
+                <a16:creationId xmlns:a16="http://schemas.microsoft.com/office/drawing/2014/main" id="{48FB9855-30C7-4627-804C-19385B6CFD88}"/>
               </a:ext>
             </a:extLst>
           </p:cNvPr>
@@ -5133,7 +5133,7 @@
           <p:cNvPr id="4" name="">
             <a:extLst xmlns:a="http://schemas.openxmlformats.org/drawingml/2006/main">
               <a:ext uri="{FF2B5EF4-FFF2-40B4-BE49-F238E27FC236}">
-                <a16:creationId xmlns:a16="http://schemas.microsoft.com/office/drawing/2014/main" id="{07534371-17FB-45E7-8D4B-077EDF3D5B9E}"/>
+                <a16:creationId xmlns:a16="http://schemas.microsoft.com/office/drawing/2014/main" id="{3EC51FAD-7D99-443A-A3B0-84399F1D1303}"/>
               </a:ext>
             </a:extLst>
           </p:cNvPr>
@@ -5290,7 +5290,7 @@
           <p:cNvPr id="5" name="">
             <a:extLst xmlns:a="http://schemas.openxmlformats.org/drawingml/2006/main">
               <a:ext uri="{FF2B5EF4-FFF2-40B4-BE49-F238E27FC236}">
-                <a16:creationId xmlns:a16="http://schemas.microsoft.com/office/drawing/2014/main" id="{D77CA480-102D-4B84-8B48-B55627AF3B2F}"/>
+                <a16:creationId xmlns:a16="http://schemas.microsoft.com/office/drawing/2014/main" id="{83EDC30E-76FB-4EE4-BBF5-0B2573B4C7E8}"/>
               </a:ext>
             </a:extLst>
           </p:cNvPr>
@@ -5447,7 +5447,7 @@
           <p:cNvPr id="6" name="">
             <a:extLst xmlns:a="http://schemas.openxmlformats.org/drawingml/2006/main">
               <a:ext uri="{FF2B5EF4-FFF2-40B4-BE49-F238E27FC236}">
-                <a16:creationId xmlns:a16="http://schemas.microsoft.com/office/drawing/2014/main" id="{1D97BC74-291C-40CE-AFD0-057886452428}"/>
+                <a16:creationId xmlns:a16="http://schemas.microsoft.com/office/drawing/2014/main" id="{72E6B886-D467-4EAD-AA9E-99A488FA36E8}"/>
               </a:ext>
             </a:extLst>
           </p:cNvPr>
@@ -5673,7 +5673,7 @@
           <p:cNvPr id="7" name="">
             <a:extLst xmlns:a="http://schemas.openxmlformats.org/drawingml/2006/main">
               <a:ext uri="{FF2B5EF4-FFF2-40B4-BE49-F238E27FC236}">
-                <a16:creationId xmlns:a16="http://schemas.microsoft.com/office/drawing/2014/main" id="{CBB7CF41-0681-4223-BD81-BDA647D61B19}"/>
+                <a16:creationId xmlns:a16="http://schemas.microsoft.com/office/drawing/2014/main" id="{A4D94243-8A79-4562-A8BC-75DAC34F49D1}"/>
               </a:ext>
             </a:extLst>
           </p:cNvPr>
@@ -5828,7 +5828,7 @@
     </p:spTree>
     <p:extLst>
       <p:ext uri="{BB962C8B-B14F-4D97-AF65-F5344CB8AC3E}">
-        <p14:creationId xmlns:p14="http://schemas.microsoft.com/office/powerpoint/2010/main" val="1658412144"/>
+        <p14:creationId xmlns:p14="http://schemas.microsoft.com/office/powerpoint/2010/main" val="991102310"/>
       </p:ext>
     </p:extLst>
   </p:cSld>
@@ -5859,7 +5859,7 @@
           <p:cNvPr id="12" name="">
             <a:extLst xmlns:a="http://schemas.openxmlformats.org/drawingml/2006/main">
               <a:ext uri="{FF2B5EF4-FFF2-40B4-BE49-F238E27FC236}">
-                <a16:creationId xmlns:a16="http://schemas.microsoft.com/office/drawing/2014/main" id="{38EAD472-9E5F-4D09-9E5B-E323D9AF238D}"/>
+                <a16:creationId xmlns:a16="http://schemas.microsoft.com/office/drawing/2014/main" id="{FC1674E6-25D5-4E98-A091-4F334B1B501A}"/>
               </a:ext>
             </a:extLst>
           </p:cNvPr>
@@ -6016,7 +6016,7 @@
           <p:cNvPr id="2" name="">
             <a:extLst xmlns:a="http://schemas.openxmlformats.org/drawingml/2006/main">
               <a:ext uri="{FF2B5EF4-FFF2-40B4-BE49-F238E27FC236}">
-                <a16:creationId xmlns:a16="http://schemas.microsoft.com/office/drawing/2014/main" id="{96DAC909-916E-4327-AD82-8A6864E4C471}"/>
+                <a16:creationId xmlns:a16="http://schemas.microsoft.com/office/drawing/2014/main" id="{6ACC553A-A488-413D-8CB4-D677B706E57C}"/>
               </a:ext>
             </a:extLst>
           </p:cNvPr>
@@ -6173,7 +6173,7 @@
           <p:cNvPr id="3" name="">
             <a:extLst xmlns:a="http://schemas.openxmlformats.org/drawingml/2006/main">
               <a:ext uri="{FF2B5EF4-FFF2-40B4-BE49-F238E27FC236}">
-                <a16:creationId xmlns:a16="http://schemas.microsoft.com/office/drawing/2014/main" id="{78294E09-81BB-4048-B2FD-AAFEC5E9F4CE}"/>
+                <a16:creationId xmlns:a16="http://schemas.microsoft.com/office/drawing/2014/main" id="{0C0C1DAC-293E-4478-8783-E506A8F5DF7C}"/>
               </a:ext>
             </a:extLst>
           </p:cNvPr>
@@ -6330,7 +6330,7 @@
           <p:cNvPr id="4" name="">
             <a:extLst xmlns:a="http://schemas.openxmlformats.org/drawingml/2006/main">
               <a:ext uri="{FF2B5EF4-FFF2-40B4-BE49-F238E27FC236}">
-                <a16:creationId xmlns:a16="http://schemas.microsoft.com/office/drawing/2014/main" id="{36E8E17F-85F9-43DC-9945-2EF1B5CB649D}"/>
+                <a16:creationId xmlns:a16="http://schemas.microsoft.com/office/drawing/2014/main" id="{33A5A7B4-87BE-4EF3-9CA0-EE5FABA0FE17}"/>
               </a:ext>
             </a:extLst>
           </p:cNvPr>
@@ -6487,7 +6487,7 @@
           <p:cNvPr id="5" name="">
             <a:extLst xmlns:a="http://schemas.openxmlformats.org/drawingml/2006/main">
               <a:ext uri="{FF2B5EF4-FFF2-40B4-BE49-F238E27FC236}">
-                <a16:creationId xmlns:a16="http://schemas.microsoft.com/office/drawing/2014/main" id="{0581E15C-EE78-4E7B-A672-50D2C9D8D68F}"/>
+                <a16:creationId xmlns:a16="http://schemas.microsoft.com/office/drawing/2014/main" id="{1C3861B8-4E4E-4EA8-B2B2-3239A8BF6557}"/>
               </a:ext>
             </a:extLst>
           </p:cNvPr>
@@ -6644,7 +6644,7 @@
           <p:cNvPr id="6" name="">
             <a:extLst xmlns:a="http://schemas.openxmlformats.org/drawingml/2006/main">
               <a:ext uri="{FF2B5EF4-FFF2-40B4-BE49-F238E27FC236}">
-                <a16:creationId xmlns:a16="http://schemas.microsoft.com/office/drawing/2014/main" id="{9707187F-E195-47DD-B7C5-3E812428FE79}"/>
+                <a16:creationId xmlns:a16="http://schemas.microsoft.com/office/drawing/2014/main" id="{4AADAF30-4413-456B-8721-0C01D0F553D9}"/>
               </a:ext>
             </a:extLst>
           </p:cNvPr>
@@ -6801,7 +6801,7 @@
           <p:cNvPr id="7" name="">
             <a:extLst xmlns:a="http://schemas.openxmlformats.org/drawingml/2006/main">
               <a:ext uri="{FF2B5EF4-FFF2-40B4-BE49-F238E27FC236}">
-                <a16:creationId xmlns:a16="http://schemas.microsoft.com/office/drawing/2014/main" id="{5F6BFBF3-467A-47C5-9970-DA79ACE84F1E}"/>
+                <a16:creationId xmlns:a16="http://schemas.microsoft.com/office/drawing/2014/main" id="{78A96196-041E-4754-908A-6B42794D31E7}"/>
               </a:ext>
             </a:extLst>
           </p:cNvPr>
@@ -6958,7 +6958,7 @@
           <p:cNvPr id="8" name="">
             <a:extLst xmlns:a="http://schemas.openxmlformats.org/drawingml/2006/main">
               <a:ext uri="{FF2B5EF4-FFF2-40B4-BE49-F238E27FC236}">
-                <a16:creationId xmlns:a16="http://schemas.microsoft.com/office/drawing/2014/main" id="{02A21517-3EE0-492C-B837-BB4BA7827212}"/>
+                <a16:creationId xmlns:a16="http://schemas.microsoft.com/office/drawing/2014/main" id="{CA9C6FC0-2B79-4E69-BE59-FDFC3EEB62CA}"/>
               </a:ext>
             </a:extLst>
           </p:cNvPr>
@@ -7115,7 +7115,7 @@
           <p:cNvPr id="9" name="">
             <a:extLst xmlns:a="http://schemas.openxmlformats.org/drawingml/2006/main">
               <a:ext uri="{FF2B5EF4-FFF2-40B4-BE49-F238E27FC236}">
-                <a16:creationId xmlns:a16="http://schemas.microsoft.com/office/drawing/2014/main" id="{BD58285D-EEEA-4BBB-BD37-C9EA8EA29DFB}"/>
+                <a16:creationId xmlns:a16="http://schemas.microsoft.com/office/drawing/2014/main" id="{21102F40-E2EB-48CB-952F-D9297D85C0D7}"/>
               </a:ext>
             </a:extLst>
           </p:cNvPr>
@@ -7272,7 +7272,7 @@
           <p:cNvPr id="10" name="">
             <a:extLst xmlns:a="http://schemas.openxmlformats.org/drawingml/2006/main">
               <a:ext uri="{FF2B5EF4-FFF2-40B4-BE49-F238E27FC236}">
-                <a16:creationId xmlns:a16="http://schemas.microsoft.com/office/drawing/2014/main" id="{4E8EBB8F-CB61-49E7-B95C-C72AD5209035}"/>
+                <a16:creationId xmlns:a16="http://schemas.microsoft.com/office/drawing/2014/main" id="{BA7CA16F-DD58-49A6-978F-E726838F6470}"/>
               </a:ext>
             </a:extLst>
           </p:cNvPr>
@@ -7429,7 +7429,7 @@
           <p:cNvPr id="11" name="">
             <a:extLst xmlns:a="http://schemas.openxmlformats.org/drawingml/2006/main">
               <a:ext uri="{FF2B5EF4-FFF2-40B4-BE49-F238E27FC236}">
-                <a16:creationId xmlns:a16="http://schemas.microsoft.com/office/drawing/2014/main" id="{732C61AE-1DF7-405C-BFAC-BE4CB50B3CFD}"/>
+                <a16:creationId xmlns:a16="http://schemas.microsoft.com/office/drawing/2014/main" id="{930CAFD4-2429-46D9-9CF5-2A983A5CDBFF}"/>
               </a:ext>
             </a:extLst>
           </p:cNvPr>
@@ -7584,7 +7584,7 @@
     </p:spTree>
     <p:extLst>
       <p:ext uri="{BB962C8B-B14F-4D97-AF65-F5344CB8AC3E}">
-        <p14:creationId xmlns:p14="http://schemas.microsoft.com/office/powerpoint/2010/main" val="598367774"/>
+        <p14:creationId xmlns:p14="http://schemas.microsoft.com/office/powerpoint/2010/main" val="212928731"/>
       </p:ext>
     </p:extLst>
   </p:cSld>
@@ -7615,7 +7615,7 @@
           <p:cNvPr id="12" name="">
             <a:extLst xmlns:a="http://schemas.openxmlformats.org/drawingml/2006/main">
               <a:ext uri="{FF2B5EF4-FFF2-40B4-BE49-F238E27FC236}">
-                <a16:creationId xmlns:a16="http://schemas.microsoft.com/office/drawing/2014/main" id="{6C075B76-217E-403E-B3E5-209563ADAB31}"/>
+                <a16:creationId xmlns:a16="http://schemas.microsoft.com/office/drawing/2014/main" id="{485C3A30-00E8-4E02-B7B2-964C8BF1416B}"/>
               </a:ext>
             </a:extLst>
           </p:cNvPr>
@@ -7772,7 +7772,7 @@
           <p:cNvPr id="2" name="">
             <a:extLst xmlns:a="http://schemas.openxmlformats.org/drawingml/2006/main">
               <a:ext uri="{FF2B5EF4-FFF2-40B4-BE49-F238E27FC236}">
-                <a16:creationId xmlns:a16="http://schemas.microsoft.com/office/drawing/2014/main" id="{CF88C0CF-4163-4EFB-B147-11728BA134D2}"/>
+                <a16:creationId xmlns:a16="http://schemas.microsoft.com/office/drawing/2014/main" id="{9C560C8D-3CD6-4DE2-B643-2D7D9413AAF3}"/>
               </a:ext>
             </a:extLst>
           </p:cNvPr>
@@ -7929,7 +7929,7 @@
           <p:cNvPr id="3" name="">
             <a:extLst xmlns:a="http://schemas.openxmlformats.org/drawingml/2006/main">
               <a:ext uri="{FF2B5EF4-FFF2-40B4-BE49-F238E27FC236}">
-                <a16:creationId xmlns:a16="http://schemas.microsoft.com/office/drawing/2014/main" id="{B1001DF8-6AC1-4E1A-AC9A-D494F695FCBA}"/>
+                <a16:creationId xmlns:a16="http://schemas.microsoft.com/office/drawing/2014/main" id="{072EBB6B-D726-4D8E-96F8-47E61FBA422B}"/>
               </a:ext>
             </a:extLst>
           </p:cNvPr>
@@ -8086,7 +8086,7 @@
           <p:cNvPr id="4" name="">
             <a:extLst xmlns:a="http://schemas.openxmlformats.org/drawingml/2006/main">
               <a:ext uri="{FF2B5EF4-FFF2-40B4-BE49-F238E27FC236}">
-                <a16:creationId xmlns:a16="http://schemas.microsoft.com/office/drawing/2014/main" id="{7D45E2A2-A30D-4AE4-B3EE-F189DD51DF93}"/>
+                <a16:creationId xmlns:a16="http://schemas.microsoft.com/office/drawing/2014/main" id="{AFE47C35-CD50-4BFF-BB12-A328A3B4AE6B}"/>
               </a:ext>
             </a:extLst>
           </p:cNvPr>
@@ -8243,7 +8243,7 @@
           <p:cNvPr id="5" name="">
             <a:extLst xmlns:a="http://schemas.openxmlformats.org/drawingml/2006/main">
               <a:ext uri="{FF2B5EF4-FFF2-40B4-BE49-F238E27FC236}">
-                <a16:creationId xmlns:a16="http://schemas.microsoft.com/office/drawing/2014/main" id="{157D7EC3-BA5B-4714-9533-812F45071419}"/>
+                <a16:creationId xmlns:a16="http://schemas.microsoft.com/office/drawing/2014/main" id="{735A8D58-4421-4172-A3FE-A190DE9A85DD}"/>
               </a:ext>
             </a:extLst>
           </p:cNvPr>
@@ -8400,7 +8400,7 @@
           <p:cNvPr id="6" name="">
             <a:extLst xmlns:a="http://schemas.openxmlformats.org/drawingml/2006/main">
               <a:ext uri="{FF2B5EF4-FFF2-40B4-BE49-F238E27FC236}">
-                <a16:creationId xmlns:a16="http://schemas.microsoft.com/office/drawing/2014/main" id="{D7003FDA-4B0D-4CF9-8054-324222AA2B2C}"/>
+                <a16:creationId xmlns:a16="http://schemas.microsoft.com/office/drawing/2014/main" id="{E35DF69E-4D60-4A73-914D-E84F3BB1C52F}"/>
               </a:ext>
             </a:extLst>
           </p:cNvPr>
@@ -8557,7 +8557,7 @@
           <p:cNvPr id="7" name="">
             <a:extLst xmlns:a="http://schemas.openxmlformats.org/drawingml/2006/main">
               <a:ext uri="{FF2B5EF4-FFF2-40B4-BE49-F238E27FC236}">
-                <a16:creationId xmlns:a16="http://schemas.microsoft.com/office/drawing/2014/main" id="{725EDBC6-5B1E-41BD-9187-DAE74E1B6FA7}"/>
+                <a16:creationId xmlns:a16="http://schemas.microsoft.com/office/drawing/2014/main" id="{5654D7F6-7583-436D-8A16-938156FB8E66}"/>
               </a:ext>
             </a:extLst>
           </p:cNvPr>
@@ -8714,7 +8714,7 @@
           <p:cNvPr id="8" name="">
             <a:extLst xmlns:a="http://schemas.openxmlformats.org/drawingml/2006/main">
               <a:ext uri="{FF2B5EF4-FFF2-40B4-BE49-F238E27FC236}">
-                <a16:creationId xmlns:a16="http://schemas.microsoft.com/office/drawing/2014/main" id="{E0C776F9-5577-4D37-97E5-0088CD21E8F6}"/>
+                <a16:creationId xmlns:a16="http://schemas.microsoft.com/office/drawing/2014/main" id="{483849A8-4AD4-494F-943F-46A4451CC4EB}"/>
               </a:ext>
             </a:extLst>
           </p:cNvPr>
@@ -8871,7 +8871,7 @@
           <p:cNvPr id="9" name="">
             <a:extLst xmlns:a="http://schemas.openxmlformats.org/drawingml/2006/main">
               <a:ext uri="{FF2B5EF4-FFF2-40B4-BE49-F238E27FC236}">
-                <a16:creationId xmlns:a16="http://schemas.microsoft.com/office/drawing/2014/main" id="{39E5826D-5B12-4521-AA43-9992FF7B5740}"/>
+                <a16:creationId xmlns:a16="http://schemas.microsoft.com/office/drawing/2014/main" id="{1BB2F7D0-E19D-48FA-9CFB-F1262C99B0D5}"/>
               </a:ext>
             </a:extLst>
           </p:cNvPr>
@@ -9028,7 +9028,7 @@
           <p:cNvPr id="10" name="">
             <a:extLst xmlns:a="http://schemas.openxmlformats.org/drawingml/2006/main">
               <a:ext uri="{FF2B5EF4-FFF2-40B4-BE49-F238E27FC236}">
-                <a16:creationId xmlns:a16="http://schemas.microsoft.com/office/drawing/2014/main" id="{402473B4-7B4E-4A46-8C98-B15CAADF6E8D}"/>
+                <a16:creationId xmlns:a16="http://schemas.microsoft.com/office/drawing/2014/main" id="{7EACF95E-8438-4AC7-A52A-8AF52B5F1DAC}"/>
               </a:ext>
             </a:extLst>
           </p:cNvPr>
@@ -9185,7 +9185,7 @@
           <p:cNvPr id="11" name="">
             <a:extLst xmlns:a="http://schemas.openxmlformats.org/drawingml/2006/main">
               <a:ext uri="{FF2B5EF4-FFF2-40B4-BE49-F238E27FC236}">
-                <a16:creationId xmlns:a16="http://schemas.microsoft.com/office/drawing/2014/main" id="{507CAD9D-0D99-4DBB-BF76-258B97B9413B}"/>
+                <a16:creationId xmlns:a16="http://schemas.microsoft.com/office/drawing/2014/main" id="{D5212B90-F108-4BB3-89D1-86A6865C61C4}"/>
               </a:ext>
             </a:extLst>
           </p:cNvPr>
@@ -9340,7 +9340,7 @@
     </p:spTree>
     <p:extLst>
       <p:ext uri="{BB962C8B-B14F-4D97-AF65-F5344CB8AC3E}">
-        <p14:creationId xmlns:p14="http://schemas.microsoft.com/office/powerpoint/2010/main" val="193118346"/>
+        <p14:creationId xmlns:p14="http://schemas.microsoft.com/office/powerpoint/2010/main" val="2023782813"/>
       </p:ext>
     </p:extLst>
   </p:cSld>
@@ -9371,7 +9371,7 @@
           <p:cNvPr id="9" name="">
             <a:extLst xmlns:a="http://schemas.openxmlformats.org/drawingml/2006/main">
               <a:ext uri="{FF2B5EF4-FFF2-40B4-BE49-F238E27FC236}">
-                <a16:creationId xmlns:a16="http://schemas.microsoft.com/office/drawing/2014/main" id="{8CA14577-847D-4C65-A6C9-4A64F6574F17}"/>
+                <a16:creationId xmlns:a16="http://schemas.microsoft.com/office/drawing/2014/main" id="{622E7950-3C8C-40B3-AADA-AC12689C9434}"/>
               </a:ext>
             </a:extLst>
           </p:cNvPr>
@@ -9528,7 +9528,7 @@
           <p:cNvPr id="2" name="">
             <a:extLst xmlns:a="http://schemas.openxmlformats.org/drawingml/2006/main">
               <a:ext uri="{FF2B5EF4-FFF2-40B4-BE49-F238E27FC236}">
-                <a16:creationId xmlns:a16="http://schemas.microsoft.com/office/drawing/2014/main" id="{CB2C5697-8276-458F-9658-152B93BCAEE6}"/>
+                <a16:creationId xmlns:a16="http://schemas.microsoft.com/office/drawing/2014/main" id="{A025F575-0C5E-4B70-8CAB-0D2E58C3DBC3}"/>
               </a:ext>
             </a:extLst>
           </p:cNvPr>
@@ -9685,7 +9685,7 @@
           <p:cNvPr id="3" name="">
             <a:extLst xmlns:a="http://schemas.openxmlformats.org/drawingml/2006/main">
               <a:ext uri="{FF2B5EF4-FFF2-40B4-BE49-F238E27FC236}">
-                <a16:creationId xmlns:a16="http://schemas.microsoft.com/office/drawing/2014/main" id="{2C3254C1-FA1E-4060-8096-6FA6FC186AE2}"/>
+                <a16:creationId xmlns:a16="http://schemas.microsoft.com/office/drawing/2014/main" id="{126DD460-E10C-48B9-8473-9684688EF9C0}"/>
               </a:ext>
             </a:extLst>
           </p:cNvPr>
@@ -9842,7 +9842,7 @@
           <p:cNvPr id="4" name="">
             <a:extLst xmlns:a="http://schemas.openxmlformats.org/drawingml/2006/main">
               <a:ext uri="{FF2B5EF4-FFF2-40B4-BE49-F238E27FC236}">
-                <a16:creationId xmlns:a16="http://schemas.microsoft.com/office/drawing/2014/main" id="{F70EBFAF-0674-4A01-8AC2-2843DEE13D3C}"/>
+                <a16:creationId xmlns:a16="http://schemas.microsoft.com/office/drawing/2014/main" id="{4BEA6030-DD9D-48B3-B6E1-F468B7E0DD21}"/>
               </a:ext>
             </a:extLst>
           </p:cNvPr>
@@ -9999,7 +9999,7 @@
           <p:cNvPr id="5" name="">
             <a:extLst xmlns:a="http://schemas.openxmlformats.org/drawingml/2006/main">
               <a:ext uri="{FF2B5EF4-FFF2-40B4-BE49-F238E27FC236}">
-                <a16:creationId xmlns:a16="http://schemas.microsoft.com/office/drawing/2014/main" id="{755BBF5A-5136-4B99-B502-A93C49DB2B3B}"/>
+                <a16:creationId xmlns:a16="http://schemas.microsoft.com/office/drawing/2014/main" id="{BDB4CBCF-AA72-4957-A6C7-6918BD62093E}"/>
               </a:ext>
             </a:extLst>
           </p:cNvPr>
@@ -10156,7 +10156,7 @@
           <p:cNvPr id="6" name="">
             <a:extLst xmlns:a="http://schemas.openxmlformats.org/drawingml/2006/main">
               <a:ext uri="{FF2B5EF4-FFF2-40B4-BE49-F238E27FC236}">
-                <a16:creationId xmlns:a16="http://schemas.microsoft.com/office/drawing/2014/main" id="{1EE331B7-8E85-49F3-8ED1-96EC111A0C56}"/>
+                <a16:creationId xmlns:a16="http://schemas.microsoft.com/office/drawing/2014/main" id="{E5EC0B42-3053-4332-B7ED-3FB92AED6201}"/>
               </a:ext>
             </a:extLst>
           </p:cNvPr>
@@ -10313,7 +10313,7 @@
           <p:cNvPr id="7" name="">
             <a:extLst xmlns:a="http://schemas.openxmlformats.org/drawingml/2006/main">
               <a:ext uri="{FF2B5EF4-FFF2-40B4-BE49-F238E27FC236}">
-                <a16:creationId xmlns:a16="http://schemas.microsoft.com/office/drawing/2014/main" id="{A155DA6E-50DE-485F-84A2-39AD16AC0648}"/>
+                <a16:creationId xmlns:a16="http://schemas.microsoft.com/office/drawing/2014/main" id="{5614AE9E-4254-4093-A887-3D141A2A6AC3}"/>
               </a:ext>
             </a:extLst>
           </p:cNvPr>
@@ -10470,7 +10470,7 @@
           <p:cNvPr id="8" name="">
             <a:extLst xmlns:a="http://schemas.openxmlformats.org/drawingml/2006/main">
               <a:ext uri="{FF2B5EF4-FFF2-40B4-BE49-F238E27FC236}">
-                <a16:creationId xmlns:a16="http://schemas.microsoft.com/office/drawing/2014/main" id="{ADEA1986-B050-4800-A71F-8502355E4E77}"/>
+                <a16:creationId xmlns:a16="http://schemas.microsoft.com/office/drawing/2014/main" id="{2FC4EEF8-3C70-472C-A819-088AE75C5E0B}"/>
               </a:ext>
             </a:extLst>
           </p:cNvPr>
@@ -10617,7 +10617,7 @@
                 <a:ea typeface="Arial"/>
                 <a:cs typeface="Arial"/>
               </a:rPr>
-              <a:t>Pendiente: captura de terminal, issues y revisión del compañero.</a:t>
+              <a:t>Pendiente: nueve issues y revisión del compañero.</a:t>
             </a:r>
           </a:p>
         </p:txBody>
@@ -10625,7 +10625,7 @@
     </p:spTree>
     <p:extLst>
       <p:ext uri="{BB962C8B-B14F-4D97-AF65-F5344CB8AC3E}">
-        <p14:creationId xmlns:p14="http://schemas.microsoft.com/office/powerpoint/2010/main" val="488646761"/>
+        <p14:creationId xmlns:p14="http://schemas.microsoft.com/office/powerpoint/2010/main" val="75224800"/>
       </p:ext>
     </p:extLst>
   </p:cSld>
@@ -10656,7 +10656,7 @@
           <p:cNvPr id="9" name="">
             <a:extLst xmlns:a="http://schemas.openxmlformats.org/drawingml/2006/main">
               <a:ext uri="{FF2B5EF4-FFF2-40B4-BE49-F238E27FC236}">
-                <a16:creationId xmlns:a16="http://schemas.microsoft.com/office/drawing/2014/main" id="{A79524FC-42D3-40FE-A843-605BF82F4509}"/>
+                <a16:creationId xmlns:a16="http://schemas.microsoft.com/office/drawing/2014/main" id="{8D3F16CC-3201-4EA5-837D-5601CA463CF9}"/>
               </a:ext>
             </a:extLst>
           </p:cNvPr>
@@ -10813,7 +10813,7 @@
           <p:cNvPr id="2" name="">
             <a:extLst xmlns:a="http://schemas.openxmlformats.org/drawingml/2006/main">
               <a:ext uri="{FF2B5EF4-FFF2-40B4-BE49-F238E27FC236}">
-                <a16:creationId xmlns:a16="http://schemas.microsoft.com/office/drawing/2014/main" id="{C2B397BA-DD24-4EA7-A31E-4FCE31A7CFEC}"/>
+                <a16:creationId xmlns:a16="http://schemas.microsoft.com/office/drawing/2014/main" id="{0751F5AC-54B2-4921-B66F-EC15E55373A1}"/>
               </a:ext>
             </a:extLst>
           </p:cNvPr>
@@ -10970,7 +10970,7 @@
           <p:cNvPr id="3" name="">
             <a:extLst xmlns:a="http://schemas.openxmlformats.org/drawingml/2006/main">
               <a:ext uri="{FF2B5EF4-FFF2-40B4-BE49-F238E27FC236}">
-                <a16:creationId xmlns:a16="http://schemas.microsoft.com/office/drawing/2014/main" id="{EF1CCEAF-8D01-414D-953B-06A7421468C9}"/>
+                <a16:creationId xmlns:a16="http://schemas.microsoft.com/office/drawing/2014/main" id="{D66F9D8B-A242-44FD-93DC-7891824D8B78}"/>
               </a:ext>
             </a:extLst>
           </p:cNvPr>
@@ -11127,7 +11127,7 @@
           <p:cNvPr id="4" name="">
             <a:extLst xmlns:a="http://schemas.openxmlformats.org/drawingml/2006/main">
               <a:ext uri="{FF2B5EF4-FFF2-40B4-BE49-F238E27FC236}">
-                <a16:creationId xmlns:a16="http://schemas.microsoft.com/office/drawing/2014/main" id="{2C97BA74-B99A-4FAF-AA88-16C39C77D7F8}"/>
+                <a16:creationId xmlns:a16="http://schemas.microsoft.com/office/drawing/2014/main" id="{929BE775-B40B-4D10-8626-0E3AFD358306}"/>
               </a:ext>
             </a:extLst>
           </p:cNvPr>
@@ -11284,7 +11284,7 @@
           <p:cNvPr id="5" name="">
             <a:extLst xmlns:a="http://schemas.openxmlformats.org/drawingml/2006/main">
               <a:ext uri="{FF2B5EF4-FFF2-40B4-BE49-F238E27FC236}">
-                <a16:creationId xmlns:a16="http://schemas.microsoft.com/office/drawing/2014/main" id="{062E600D-68D9-40F7-9479-6C996B68BF7E}"/>
+                <a16:creationId xmlns:a16="http://schemas.microsoft.com/office/drawing/2014/main" id="{A778C735-C042-46B9-BF7E-5969141F8842}"/>
               </a:ext>
             </a:extLst>
           </p:cNvPr>
@@ -11441,7 +11441,7 @@
           <p:cNvPr id="6" name="">
             <a:extLst xmlns:a="http://schemas.openxmlformats.org/drawingml/2006/main">
               <a:ext uri="{FF2B5EF4-FFF2-40B4-BE49-F238E27FC236}">
-                <a16:creationId xmlns:a16="http://schemas.microsoft.com/office/drawing/2014/main" id="{87CA5327-4959-444B-AF63-1F08B8E6B96E}"/>
+                <a16:creationId xmlns:a16="http://schemas.microsoft.com/office/drawing/2014/main" id="{7DFA1A4A-4445-4E8D-98E8-1817CC2D83BF}"/>
               </a:ext>
             </a:extLst>
           </p:cNvPr>
@@ -11598,7 +11598,7 @@
           <p:cNvPr id="7" name="">
             <a:extLst xmlns:a="http://schemas.openxmlformats.org/drawingml/2006/main">
               <a:ext uri="{FF2B5EF4-FFF2-40B4-BE49-F238E27FC236}">
-                <a16:creationId xmlns:a16="http://schemas.microsoft.com/office/drawing/2014/main" id="{4EB72FFD-36FA-42BF-B910-3FF6AD28E962}"/>
+                <a16:creationId xmlns:a16="http://schemas.microsoft.com/office/drawing/2014/main" id="{A69C6407-6D82-4374-9B04-810F9F68363E}"/>
               </a:ext>
             </a:extLst>
           </p:cNvPr>
@@ -11755,7 +11755,7 @@
           <p:cNvPr id="8" name="">
             <a:extLst xmlns:a="http://schemas.openxmlformats.org/drawingml/2006/main">
               <a:ext uri="{FF2B5EF4-FFF2-40B4-BE49-F238E27FC236}">
-                <a16:creationId xmlns:a16="http://schemas.microsoft.com/office/drawing/2014/main" id="{8F28C3F7-8F1F-40BF-A9F4-9758448B9CA7}"/>
+                <a16:creationId xmlns:a16="http://schemas.microsoft.com/office/drawing/2014/main" id="{F8C3A0EB-84D2-4791-9B57-D129CB67D5F8}"/>
               </a:ext>
             </a:extLst>
           </p:cNvPr>
@@ -11910,7 +11910,7 @@
     </p:spTree>
     <p:extLst>
       <p:ext uri="{BB962C8B-B14F-4D97-AF65-F5344CB8AC3E}">
-        <p14:creationId xmlns:p14="http://schemas.microsoft.com/office/powerpoint/2010/main" val="1761873006"/>
+        <p14:creationId xmlns:p14="http://schemas.microsoft.com/office/powerpoint/2010/main" val="294527897"/>
       </p:ext>
     </p:extLst>
   </p:cSld>
@@ -11941,7 +11941,7 @@
           <p:cNvPr id="9" name="">
             <a:extLst xmlns:a="http://schemas.openxmlformats.org/drawingml/2006/main">
               <a:ext uri="{FF2B5EF4-FFF2-40B4-BE49-F238E27FC236}">
-                <a16:creationId xmlns:a16="http://schemas.microsoft.com/office/drawing/2014/main" id="{BA1A5331-8B46-42CF-81CF-FD6FE22709F4}"/>
+                <a16:creationId xmlns:a16="http://schemas.microsoft.com/office/drawing/2014/main" id="{E78FB1A3-CD62-434F-AE43-20977EE0C3DF}"/>
               </a:ext>
             </a:extLst>
           </p:cNvPr>
@@ -12098,7 +12098,7 @@
           <p:cNvPr id="2" name="">
             <a:extLst xmlns:a="http://schemas.openxmlformats.org/drawingml/2006/main">
               <a:ext uri="{FF2B5EF4-FFF2-40B4-BE49-F238E27FC236}">
-                <a16:creationId xmlns:a16="http://schemas.microsoft.com/office/drawing/2014/main" id="{A63B3A3E-B0AA-45E8-95DE-7843288FB235}"/>
+                <a16:creationId xmlns:a16="http://schemas.microsoft.com/office/drawing/2014/main" id="{2E352E5D-0C40-4AA4-8C97-3F3F0858F2B2}"/>
               </a:ext>
             </a:extLst>
           </p:cNvPr>
@@ -12255,7 +12255,7 @@
           <p:cNvPr id="3" name="">
             <a:extLst xmlns:a="http://schemas.openxmlformats.org/drawingml/2006/main">
               <a:ext uri="{FF2B5EF4-FFF2-40B4-BE49-F238E27FC236}">
-                <a16:creationId xmlns:a16="http://schemas.microsoft.com/office/drawing/2014/main" id="{5BAFAC5D-F432-4D5D-9E30-F335D1A743EA}"/>
+                <a16:creationId xmlns:a16="http://schemas.microsoft.com/office/drawing/2014/main" id="{B8024FC9-BF49-425E-9947-94064922275B}"/>
               </a:ext>
             </a:extLst>
           </p:cNvPr>
@@ -12412,7 +12412,7 @@
           <p:cNvPr id="4" name="">
             <a:extLst xmlns:a="http://schemas.openxmlformats.org/drawingml/2006/main">
               <a:ext uri="{FF2B5EF4-FFF2-40B4-BE49-F238E27FC236}">
-                <a16:creationId xmlns:a16="http://schemas.microsoft.com/office/drawing/2014/main" id="{F6A2D188-0DB6-4754-A0A3-D83589F669D6}"/>
+                <a16:creationId xmlns:a16="http://schemas.microsoft.com/office/drawing/2014/main" id="{9DB56C82-5907-4733-A5C6-7F1726E0F101}"/>
               </a:ext>
             </a:extLst>
           </p:cNvPr>
@@ -12569,7 +12569,7 @@
           <p:cNvPr id="5" name="">
             <a:extLst xmlns:a="http://schemas.openxmlformats.org/drawingml/2006/main">
               <a:ext uri="{FF2B5EF4-FFF2-40B4-BE49-F238E27FC236}">
-                <a16:creationId xmlns:a16="http://schemas.microsoft.com/office/drawing/2014/main" id="{BAECA54D-0CC7-4EE1-AE2C-D03BEFA37923}"/>
+                <a16:creationId xmlns:a16="http://schemas.microsoft.com/office/drawing/2014/main" id="{E1B38753-03DE-4E93-A326-C5A4FDF1E63F}"/>
               </a:ext>
             </a:extLst>
           </p:cNvPr>
@@ -12726,7 +12726,7 @@
           <p:cNvPr id="6" name="">
             <a:extLst xmlns:a="http://schemas.openxmlformats.org/drawingml/2006/main">
               <a:ext uri="{FF2B5EF4-FFF2-40B4-BE49-F238E27FC236}">
-                <a16:creationId xmlns:a16="http://schemas.microsoft.com/office/drawing/2014/main" id="{49419D94-B6F3-4057-BDBF-D4A9E7436225}"/>
+                <a16:creationId xmlns:a16="http://schemas.microsoft.com/office/drawing/2014/main" id="{94F0FA90-19C7-4E25-82C8-9B470B337CF3}"/>
               </a:ext>
             </a:extLst>
           </p:cNvPr>
@@ -12883,7 +12883,7 @@
           <p:cNvPr id="7" name="">
             <a:extLst xmlns:a="http://schemas.openxmlformats.org/drawingml/2006/main">
               <a:ext uri="{FF2B5EF4-FFF2-40B4-BE49-F238E27FC236}">
-                <a16:creationId xmlns:a16="http://schemas.microsoft.com/office/drawing/2014/main" id="{B3928A9A-9151-4A9F-8EC6-A62F907EBAB3}"/>
+                <a16:creationId xmlns:a16="http://schemas.microsoft.com/office/drawing/2014/main" id="{8124A639-BC35-442E-B233-F53CF7CEE59E}"/>
               </a:ext>
             </a:extLst>
           </p:cNvPr>
@@ -13040,7 +13040,7 @@
           <p:cNvPr id="8" name="">
             <a:extLst xmlns:a="http://schemas.openxmlformats.org/drawingml/2006/main">
               <a:ext uri="{FF2B5EF4-FFF2-40B4-BE49-F238E27FC236}">
-                <a16:creationId xmlns:a16="http://schemas.microsoft.com/office/drawing/2014/main" id="{F7AB073A-A9AB-4E24-9747-1F654E4BE435}"/>
+                <a16:creationId xmlns:a16="http://schemas.microsoft.com/office/drawing/2014/main" id="{544317D8-CA87-4D95-8231-24C42E8E00FF}"/>
               </a:ext>
             </a:extLst>
           </p:cNvPr>
@@ -13195,7 +13195,7 @@
     </p:spTree>
     <p:extLst>
       <p:ext uri="{BB962C8B-B14F-4D97-AF65-F5344CB8AC3E}">
-        <p14:creationId xmlns:p14="http://schemas.microsoft.com/office/powerpoint/2010/main" val="437329699"/>
+        <p14:creationId xmlns:p14="http://schemas.microsoft.com/office/powerpoint/2010/main" val="451267424"/>
       </p:ext>
     </p:extLst>
   </p:cSld>
@@ -13226,7 +13226,7 @@
           <p:cNvPr id="7" name="">
             <a:extLst xmlns:a="http://schemas.openxmlformats.org/drawingml/2006/main">
               <a:ext uri="{FF2B5EF4-FFF2-40B4-BE49-F238E27FC236}">
-                <a16:creationId xmlns:a16="http://schemas.microsoft.com/office/drawing/2014/main" id="{026F518B-469C-4A30-B025-8BD0132F0B60}"/>
+                <a16:creationId xmlns:a16="http://schemas.microsoft.com/office/drawing/2014/main" id="{214FBB21-518C-46D5-8954-A1565DB62E51}"/>
               </a:ext>
             </a:extLst>
           </p:cNvPr>
@@ -13383,7 +13383,7 @@
           <p:cNvPr id="2" name="">
             <a:extLst xmlns:a="http://schemas.openxmlformats.org/drawingml/2006/main">
               <a:ext uri="{FF2B5EF4-FFF2-40B4-BE49-F238E27FC236}">
-                <a16:creationId xmlns:a16="http://schemas.microsoft.com/office/drawing/2014/main" id="{1D9D507E-C0B0-453E-B884-F2A358645358}"/>
+                <a16:creationId xmlns:a16="http://schemas.microsoft.com/office/drawing/2014/main" id="{90415400-F0E0-44A1-9692-C88CFAC1706E}"/>
               </a:ext>
             </a:extLst>
           </p:cNvPr>
@@ -13540,7 +13540,7 @@
           <p:cNvPr id="3" name="">
             <a:extLst xmlns:a="http://schemas.openxmlformats.org/drawingml/2006/main">
               <a:ext uri="{FF2B5EF4-FFF2-40B4-BE49-F238E27FC236}">
-                <a16:creationId xmlns:a16="http://schemas.microsoft.com/office/drawing/2014/main" id="{6BC26CBA-C909-4977-AFEF-CB849412BD13}"/>
+                <a16:creationId xmlns:a16="http://schemas.microsoft.com/office/drawing/2014/main" id="{FE379BAA-4660-4314-8E20-E813F895288D}"/>
               </a:ext>
             </a:extLst>
           </p:cNvPr>
@@ -13697,7 +13697,7 @@
           <p:cNvPr id="4" name="">
             <a:extLst xmlns:a="http://schemas.openxmlformats.org/drawingml/2006/main">
               <a:ext uri="{FF2B5EF4-FFF2-40B4-BE49-F238E27FC236}">
-                <a16:creationId xmlns:a16="http://schemas.microsoft.com/office/drawing/2014/main" id="{1C2C49FF-56ED-480D-9E63-B62911EC4468}"/>
+                <a16:creationId xmlns:a16="http://schemas.microsoft.com/office/drawing/2014/main" id="{745BA6F6-1682-4B5D-9231-1234A4EC8AAC}"/>
               </a:ext>
             </a:extLst>
           </p:cNvPr>
@@ -13854,7 +13854,7 @@
           <p:cNvPr id="5" name="">
             <a:extLst xmlns:a="http://schemas.openxmlformats.org/drawingml/2006/main">
               <a:ext uri="{FF2B5EF4-FFF2-40B4-BE49-F238E27FC236}">
-                <a16:creationId xmlns:a16="http://schemas.microsoft.com/office/drawing/2014/main" id="{B137B431-FFC9-4C6C-A15D-47B0A64CB9E1}"/>
+                <a16:creationId xmlns:a16="http://schemas.microsoft.com/office/drawing/2014/main" id="{3E25C218-3DFF-4070-A585-453EF7B7F683}"/>
               </a:ext>
             </a:extLst>
           </p:cNvPr>
@@ -14011,7 +14011,7 @@
           <p:cNvPr id="6" name="">
             <a:extLst xmlns:a="http://schemas.openxmlformats.org/drawingml/2006/main">
               <a:ext uri="{FF2B5EF4-FFF2-40B4-BE49-F238E27FC236}">
-                <a16:creationId xmlns:a16="http://schemas.microsoft.com/office/drawing/2014/main" id="{A7D4F58F-68B6-46C2-98E9-EDFC39181BFA}"/>
+                <a16:creationId xmlns:a16="http://schemas.microsoft.com/office/drawing/2014/main" id="{2C9E7A40-51B8-4A03-AD48-0FD06E6238D8}"/>
               </a:ext>
             </a:extLst>
           </p:cNvPr>
@@ -14021,7 +14021,7 @@
           <p:nvPr/>
         </p:nvPicPr>
         <p:blipFill>
-          <a:blip xmlns:r="http://schemas.openxmlformats.org/officeDocument/2006/relationships" xmlns:a="http://schemas.openxmlformats.org/drawingml/2006/main" r:embed="R5a24866ceb1943a6"/>
+          <a:blip xmlns:r="http://schemas.openxmlformats.org/officeDocument/2006/relationships" xmlns:a="http://schemas.openxmlformats.org/drawingml/2006/main" r:embed="Rb3397aeb68604f87"/>
           <a:stretch xmlns:a="http://schemas.openxmlformats.org/drawingml/2006/main"/>
         </p:blipFill>
         <p:spPr>
@@ -14037,7 +14037,7 @@
     </p:spTree>
     <p:extLst>
       <p:ext uri="{BB962C8B-B14F-4D97-AF65-F5344CB8AC3E}">
-        <p14:creationId xmlns:p14="http://schemas.microsoft.com/office/powerpoint/2010/main" val="2082113821"/>
+        <p14:creationId xmlns:p14="http://schemas.microsoft.com/office/powerpoint/2010/main" val="625599579"/>
       </p:ext>
     </p:extLst>
   </p:cSld>
@@ -14068,7 +14068,7 @@
           <p:cNvPr id="7" name="">
             <a:extLst xmlns:a="http://schemas.openxmlformats.org/drawingml/2006/main">
               <a:ext uri="{FF2B5EF4-FFF2-40B4-BE49-F238E27FC236}">
-                <a16:creationId xmlns:a16="http://schemas.microsoft.com/office/drawing/2014/main" id="{64AC9C25-30B1-4B5E-8E39-BBADB7C91319}"/>
+                <a16:creationId xmlns:a16="http://schemas.microsoft.com/office/drawing/2014/main" id="{93DB2E5D-A526-4622-A35D-1936C7AD9862}"/>
               </a:ext>
             </a:extLst>
           </p:cNvPr>
@@ -14225,7 +14225,7 @@
           <p:cNvPr id="2" name="">
             <a:extLst xmlns:a="http://schemas.openxmlformats.org/drawingml/2006/main">
               <a:ext uri="{FF2B5EF4-FFF2-40B4-BE49-F238E27FC236}">
-                <a16:creationId xmlns:a16="http://schemas.microsoft.com/office/drawing/2014/main" id="{71D745F0-83FE-49D0-910B-8DF8E0310AEC}"/>
+                <a16:creationId xmlns:a16="http://schemas.microsoft.com/office/drawing/2014/main" id="{ADAE5D2E-25FF-4476-99EC-382BC95385AF}"/>
               </a:ext>
             </a:extLst>
           </p:cNvPr>
@@ -14382,7 +14382,7 @@
           <p:cNvPr id="3" name="">
             <a:extLst xmlns:a="http://schemas.openxmlformats.org/drawingml/2006/main">
               <a:ext uri="{FF2B5EF4-FFF2-40B4-BE49-F238E27FC236}">
-                <a16:creationId xmlns:a16="http://schemas.microsoft.com/office/drawing/2014/main" id="{1A5CBBF1-E1B0-417B-8D01-9323ACD8E1E3}"/>
+                <a16:creationId xmlns:a16="http://schemas.microsoft.com/office/drawing/2014/main" id="{75C8C1F4-6E9D-4E62-AC92-79D8F6E30C96}"/>
               </a:ext>
             </a:extLst>
           </p:cNvPr>
@@ -14539,7 +14539,7 @@
           <p:cNvPr id="4" name="">
             <a:extLst xmlns:a="http://schemas.openxmlformats.org/drawingml/2006/main">
               <a:ext uri="{FF2B5EF4-FFF2-40B4-BE49-F238E27FC236}">
-                <a16:creationId xmlns:a16="http://schemas.microsoft.com/office/drawing/2014/main" id="{8908D3D5-583D-40B1-879B-2C9899C329C2}"/>
+                <a16:creationId xmlns:a16="http://schemas.microsoft.com/office/drawing/2014/main" id="{B9C03DB5-4660-4501-8DC1-4C9371A0C9F2}"/>
               </a:ext>
             </a:extLst>
           </p:cNvPr>
@@ -14696,7 +14696,7 @@
           <p:cNvPr id="5" name="">
             <a:extLst xmlns:a="http://schemas.openxmlformats.org/drawingml/2006/main">
               <a:ext uri="{FF2B5EF4-FFF2-40B4-BE49-F238E27FC236}">
-                <a16:creationId xmlns:a16="http://schemas.microsoft.com/office/drawing/2014/main" id="{2E9E79B0-6F36-49DE-B2A1-E145FC7F2008}"/>
+                <a16:creationId xmlns:a16="http://schemas.microsoft.com/office/drawing/2014/main" id="{F3B64796-28E1-4DC7-B045-C25F6119B930}"/>
               </a:ext>
             </a:extLst>
           </p:cNvPr>
@@ -14853,7 +14853,7 @@
           <p:cNvPr id="6" name="">
             <a:extLst xmlns:a="http://schemas.openxmlformats.org/drawingml/2006/main">
               <a:ext uri="{FF2B5EF4-FFF2-40B4-BE49-F238E27FC236}">
-                <a16:creationId xmlns:a16="http://schemas.microsoft.com/office/drawing/2014/main" id="{282B5DA6-9B74-47C2-9DCF-DC4F253FB2E2}"/>
+                <a16:creationId xmlns:a16="http://schemas.microsoft.com/office/drawing/2014/main" id="{05F02711-92C4-4336-AAB5-CE87AFE3AEAA}"/>
               </a:ext>
             </a:extLst>
           </p:cNvPr>
@@ -14863,7 +14863,7 @@
           <p:nvPr/>
         </p:nvPicPr>
         <p:blipFill>
-          <a:blip xmlns:r="http://schemas.openxmlformats.org/officeDocument/2006/relationships" xmlns:a="http://schemas.openxmlformats.org/drawingml/2006/main" r:embed="R2574242b18b446a0"/>
+          <a:blip xmlns:r="http://schemas.openxmlformats.org/officeDocument/2006/relationships" xmlns:a="http://schemas.openxmlformats.org/drawingml/2006/main" r:embed="Rc50ff65b72c4461c"/>
           <a:stretch xmlns:a="http://schemas.openxmlformats.org/drawingml/2006/main"/>
         </p:blipFill>
         <p:spPr>
@@ -14879,7 +14879,7 @@
     </p:spTree>
     <p:extLst>
       <p:ext uri="{BB962C8B-B14F-4D97-AF65-F5344CB8AC3E}">
-        <p14:creationId xmlns:p14="http://schemas.microsoft.com/office/powerpoint/2010/main" val="93500615"/>
+        <p14:creationId xmlns:p14="http://schemas.microsoft.com/office/powerpoint/2010/main" val="354166101"/>
       </p:ext>
     </p:extLst>
   </p:cSld>
@@ -14910,7 +14910,7 @@
           <p:cNvPr id="7" name="">
             <a:extLst xmlns:a="http://schemas.openxmlformats.org/drawingml/2006/main">
               <a:ext uri="{FF2B5EF4-FFF2-40B4-BE49-F238E27FC236}">
-                <a16:creationId xmlns:a16="http://schemas.microsoft.com/office/drawing/2014/main" id="{DF296F56-A3BA-48FA-B4AB-7D6E5EE0F3ED}"/>
+                <a16:creationId xmlns:a16="http://schemas.microsoft.com/office/drawing/2014/main" id="{A18FEAB7-A4AE-427F-89B5-C2EFD0B1215C}"/>
               </a:ext>
             </a:extLst>
           </p:cNvPr>
@@ -15067,7 +15067,7 @@
           <p:cNvPr id="2" name="">
             <a:extLst xmlns:a="http://schemas.openxmlformats.org/drawingml/2006/main">
               <a:ext uri="{FF2B5EF4-FFF2-40B4-BE49-F238E27FC236}">
-                <a16:creationId xmlns:a16="http://schemas.microsoft.com/office/drawing/2014/main" id="{096D19B4-744E-4FA6-834C-3DAD10236A88}"/>
+                <a16:creationId xmlns:a16="http://schemas.microsoft.com/office/drawing/2014/main" id="{C6219B22-A1C0-4DA0-A1BC-B1E134C574DC}"/>
               </a:ext>
             </a:extLst>
           </p:cNvPr>
@@ -15224,7 +15224,7 @@
           <p:cNvPr id="3" name="">
             <a:extLst xmlns:a="http://schemas.openxmlformats.org/drawingml/2006/main">
               <a:ext uri="{FF2B5EF4-FFF2-40B4-BE49-F238E27FC236}">
-                <a16:creationId xmlns:a16="http://schemas.microsoft.com/office/drawing/2014/main" id="{D2C4C059-22C6-446C-ACDC-2AFC61237E3A}"/>
+                <a16:creationId xmlns:a16="http://schemas.microsoft.com/office/drawing/2014/main" id="{B64FF62F-59A0-4BDB-BD25-C9469898083F}"/>
               </a:ext>
             </a:extLst>
           </p:cNvPr>
@@ -15381,7 +15381,7 @@
           <p:cNvPr id="4" name="">
             <a:extLst xmlns:a="http://schemas.openxmlformats.org/drawingml/2006/main">
               <a:ext uri="{FF2B5EF4-FFF2-40B4-BE49-F238E27FC236}">
-                <a16:creationId xmlns:a16="http://schemas.microsoft.com/office/drawing/2014/main" id="{634651A2-4965-47BC-AB4C-4B4897E4E050}"/>
+                <a16:creationId xmlns:a16="http://schemas.microsoft.com/office/drawing/2014/main" id="{496D242B-09FC-4387-9C15-5C5DD51A20D3}"/>
               </a:ext>
             </a:extLst>
           </p:cNvPr>
@@ -15538,7 +15538,7 @@
           <p:cNvPr id="5" name="">
             <a:extLst xmlns:a="http://schemas.openxmlformats.org/drawingml/2006/main">
               <a:ext uri="{FF2B5EF4-FFF2-40B4-BE49-F238E27FC236}">
-                <a16:creationId xmlns:a16="http://schemas.microsoft.com/office/drawing/2014/main" id="{A3502600-09AF-42A6-881A-0747A2B02831}"/>
+                <a16:creationId xmlns:a16="http://schemas.microsoft.com/office/drawing/2014/main" id="{624F6B33-A14D-4375-9B02-1A4D5F3C6870}"/>
               </a:ext>
             </a:extLst>
           </p:cNvPr>
@@ -15695,7 +15695,7 @@
           <p:cNvPr id="6" name="">
             <a:extLst xmlns:a="http://schemas.openxmlformats.org/drawingml/2006/main">
               <a:ext uri="{FF2B5EF4-FFF2-40B4-BE49-F238E27FC236}">
-                <a16:creationId xmlns:a16="http://schemas.microsoft.com/office/drawing/2014/main" id="{7E6EFFF6-D56B-4C8B-AC41-CEF18A9182BC}"/>
+                <a16:creationId xmlns:a16="http://schemas.microsoft.com/office/drawing/2014/main" id="{5ED74110-1774-405B-B268-3BC5E4EBEDC2}"/>
               </a:ext>
             </a:extLst>
           </p:cNvPr>
@@ -15705,7 +15705,7 @@
           <p:nvPr/>
         </p:nvPicPr>
         <p:blipFill>
-          <a:blip xmlns:r="http://schemas.openxmlformats.org/officeDocument/2006/relationships" xmlns:a="http://schemas.openxmlformats.org/drawingml/2006/main" r:embed="R644a51b89d754f84"/>
+          <a:blip xmlns:r="http://schemas.openxmlformats.org/officeDocument/2006/relationships" xmlns:a="http://schemas.openxmlformats.org/drawingml/2006/main" r:embed="R47f21ab833fa4768"/>
           <a:stretch xmlns:a="http://schemas.openxmlformats.org/drawingml/2006/main"/>
         </p:blipFill>
         <p:spPr>
@@ -15721,7 +15721,7 @@
     </p:spTree>
     <p:extLst>
       <p:ext uri="{BB962C8B-B14F-4D97-AF65-F5344CB8AC3E}">
-        <p14:creationId xmlns:p14="http://schemas.microsoft.com/office/powerpoint/2010/main" val="768328360"/>
+        <p14:creationId xmlns:p14="http://schemas.microsoft.com/office/powerpoint/2010/main" val="1980205195"/>
       </p:ext>
     </p:extLst>
   </p:cSld>
@@ -15752,7 +15752,7 @@
           <p:cNvPr id="7" name="">
             <a:extLst xmlns:a="http://schemas.openxmlformats.org/drawingml/2006/main">
               <a:ext uri="{FF2B5EF4-FFF2-40B4-BE49-F238E27FC236}">
-                <a16:creationId xmlns:a16="http://schemas.microsoft.com/office/drawing/2014/main" id="{6B095437-FCF0-4083-BABA-52D802727D45}"/>
+                <a16:creationId xmlns:a16="http://schemas.microsoft.com/office/drawing/2014/main" id="{043AAB30-C42F-49FA-A0AF-32800200AE79}"/>
               </a:ext>
             </a:extLst>
           </p:cNvPr>
@@ -15909,7 +15909,7 @@
           <p:cNvPr id="2" name="">
             <a:extLst xmlns:a="http://schemas.openxmlformats.org/drawingml/2006/main">
               <a:ext uri="{FF2B5EF4-FFF2-40B4-BE49-F238E27FC236}">
-                <a16:creationId xmlns:a16="http://schemas.microsoft.com/office/drawing/2014/main" id="{86492EFA-800F-4E4A-8FD7-AADA75AAE0AC}"/>
+                <a16:creationId xmlns:a16="http://schemas.microsoft.com/office/drawing/2014/main" id="{C293074B-D90D-485E-9040-9414EC8E3431}"/>
               </a:ext>
             </a:extLst>
           </p:cNvPr>
@@ -16066,7 +16066,7 @@
           <p:cNvPr id="3" name="">
             <a:extLst xmlns:a="http://schemas.openxmlformats.org/drawingml/2006/main">
               <a:ext uri="{FF2B5EF4-FFF2-40B4-BE49-F238E27FC236}">
-                <a16:creationId xmlns:a16="http://schemas.microsoft.com/office/drawing/2014/main" id="{692E6FA6-DDF5-4CFD-A0DF-777983C483CE}"/>
+                <a16:creationId xmlns:a16="http://schemas.microsoft.com/office/drawing/2014/main" id="{6F697ADF-8450-478D-9A3E-C5E29391B329}"/>
               </a:ext>
             </a:extLst>
           </p:cNvPr>
@@ -16223,7 +16223,7 @@
           <p:cNvPr id="4" name="">
             <a:extLst xmlns:a="http://schemas.openxmlformats.org/drawingml/2006/main">
               <a:ext uri="{FF2B5EF4-FFF2-40B4-BE49-F238E27FC236}">
-                <a16:creationId xmlns:a16="http://schemas.microsoft.com/office/drawing/2014/main" id="{92BC3166-DB61-48D6-B8D3-2ABC51462D67}"/>
+                <a16:creationId xmlns:a16="http://schemas.microsoft.com/office/drawing/2014/main" id="{8AE3429B-8B91-46F4-8441-063008CF23D0}"/>
               </a:ext>
             </a:extLst>
           </p:cNvPr>
@@ -16380,7 +16380,7 @@
           <p:cNvPr id="5" name="">
             <a:extLst xmlns:a="http://schemas.openxmlformats.org/drawingml/2006/main">
               <a:ext uri="{FF2B5EF4-FFF2-40B4-BE49-F238E27FC236}">
-                <a16:creationId xmlns:a16="http://schemas.microsoft.com/office/drawing/2014/main" id="{696F1E84-5128-4A93-A424-BF7A097C4A1A}"/>
+                <a16:creationId xmlns:a16="http://schemas.microsoft.com/office/drawing/2014/main" id="{9EDD5720-EA4D-441B-9E4C-80AF5A0A31D8}"/>
               </a:ext>
             </a:extLst>
           </p:cNvPr>
@@ -16537,7 +16537,7 @@
           <p:cNvPr id="6" name="">
             <a:extLst xmlns:a="http://schemas.openxmlformats.org/drawingml/2006/main">
               <a:ext uri="{FF2B5EF4-FFF2-40B4-BE49-F238E27FC236}">
-                <a16:creationId xmlns:a16="http://schemas.microsoft.com/office/drawing/2014/main" id="{624C30F3-2A27-461C-923E-22507D0C34F8}"/>
+                <a16:creationId xmlns:a16="http://schemas.microsoft.com/office/drawing/2014/main" id="{EC8358A8-469B-4F44-9B62-7838B316575F}"/>
               </a:ext>
             </a:extLst>
           </p:cNvPr>
@@ -17278,7 +17278,7 @@
     </p:spTree>
     <p:extLst>
       <p:ext uri="{BB962C8B-B14F-4D97-AF65-F5344CB8AC3E}">
-        <p14:creationId xmlns:p14="http://schemas.microsoft.com/office/powerpoint/2010/main" val="41138772"/>
+        <p14:creationId xmlns:p14="http://schemas.microsoft.com/office/powerpoint/2010/main" val="1881660197"/>
       </p:ext>
     </p:extLst>
   </p:cSld>
@@ -17309,7 +17309,7 @@
           <p:cNvPr id="12" name="">
             <a:extLst xmlns:a="http://schemas.openxmlformats.org/drawingml/2006/main">
               <a:ext uri="{FF2B5EF4-FFF2-40B4-BE49-F238E27FC236}">
-                <a16:creationId xmlns:a16="http://schemas.microsoft.com/office/drawing/2014/main" id="{D6C2F182-E450-4474-BB7E-377C5D6F0E00}"/>
+                <a16:creationId xmlns:a16="http://schemas.microsoft.com/office/drawing/2014/main" id="{6070EC37-1C9F-43E2-92A1-0DD1B2C1AA91}"/>
               </a:ext>
             </a:extLst>
           </p:cNvPr>
@@ -17466,7 +17466,7 @@
           <p:cNvPr id="2" name="">
             <a:extLst xmlns:a="http://schemas.openxmlformats.org/drawingml/2006/main">
               <a:ext uri="{FF2B5EF4-FFF2-40B4-BE49-F238E27FC236}">
-                <a16:creationId xmlns:a16="http://schemas.microsoft.com/office/drawing/2014/main" id="{6329BB4A-58EE-4842-A963-4FFD3C72AAE3}"/>
+                <a16:creationId xmlns:a16="http://schemas.microsoft.com/office/drawing/2014/main" id="{62F3C8D7-F98A-45F8-8345-3B8C688AA8E1}"/>
               </a:ext>
             </a:extLst>
           </p:cNvPr>
@@ -17623,7 +17623,7 @@
           <p:cNvPr id="3" name="">
             <a:extLst xmlns:a="http://schemas.openxmlformats.org/drawingml/2006/main">
               <a:ext uri="{FF2B5EF4-FFF2-40B4-BE49-F238E27FC236}">
-                <a16:creationId xmlns:a16="http://schemas.microsoft.com/office/drawing/2014/main" id="{31FCD7D4-46F1-40C1-BCDB-2505703C5D1F}"/>
+                <a16:creationId xmlns:a16="http://schemas.microsoft.com/office/drawing/2014/main" id="{E144876C-2D78-4CB4-BE05-978E688D05C5}"/>
               </a:ext>
             </a:extLst>
           </p:cNvPr>
@@ -17780,7 +17780,7 @@
           <p:cNvPr id="4" name="">
             <a:extLst xmlns:a="http://schemas.openxmlformats.org/drawingml/2006/main">
               <a:ext uri="{FF2B5EF4-FFF2-40B4-BE49-F238E27FC236}">
-                <a16:creationId xmlns:a16="http://schemas.microsoft.com/office/drawing/2014/main" id="{37AC77E1-88D7-4694-9126-D2A980D521B6}"/>
+                <a16:creationId xmlns:a16="http://schemas.microsoft.com/office/drawing/2014/main" id="{EE2A9F43-4E16-4412-A375-1F7D75060806}"/>
               </a:ext>
             </a:extLst>
           </p:cNvPr>
@@ -17937,7 +17937,7 @@
           <p:cNvPr id="5" name="">
             <a:extLst xmlns:a="http://schemas.openxmlformats.org/drawingml/2006/main">
               <a:ext uri="{FF2B5EF4-FFF2-40B4-BE49-F238E27FC236}">
-                <a16:creationId xmlns:a16="http://schemas.microsoft.com/office/drawing/2014/main" id="{1A0C3E09-4CE9-4BD4-9128-EADDE755A029}"/>
+                <a16:creationId xmlns:a16="http://schemas.microsoft.com/office/drawing/2014/main" id="{6C77294A-5AF9-414F-9B7F-A21E01249125}"/>
               </a:ext>
             </a:extLst>
           </p:cNvPr>
@@ -18094,7 +18094,7 @@
           <p:cNvPr id="6" name="">
             <a:extLst xmlns:a="http://schemas.openxmlformats.org/drawingml/2006/main">
               <a:ext uri="{FF2B5EF4-FFF2-40B4-BE49-F238E27FC236}">
-                <a16:creationId xmlns:a16="http://schemas.microsoft.com/office/drawing/2014/main" id="{4C680773-1ACB-4831-A4DA-5E6C9767291E}"/>
+                <a16:creationId xmlns:a16="http://schemas.microsoft.com/office/drawing/2014/main" id="{E3C2201B-69E0-47FE-95F0-21754FFC5904}"/>
               </a:ext>
             </a:extLst>
           </p:cNvPr>
@@ -18251,7 +18251,7 @@
           <p:cNvPr id="7" name="">
             <a:extLst xmlns:a="http://schemas.openxmlformats.org/drawingml/2006/main">
               <a:ext uri="{FF2B5EF4-FFF2-40B4-BE49-F238E27FC236}">
-                <a16:creationId xmlns:a16="http://schemas.microsoft.com/office/drawing/2014/main" id="{549D2364-D2DE-4E35-85A7-60AAABE10D04}"/>
+                <a16:creationId xmlns:a16="http://schemas.microsoft.com/office/drawing/2014/main" id="{B6CDF267-1B19-4080-B891-14474AFBEB92}"/>
               </a:ext>
             </a:extLst>
           </p:cNvPr>
@@ -18408,7 +18408,7 @@
           <p:cNvPr id="8" name="">
             <a:extLst xmlns:a="http://schemas.openxmlformats.org/drawingml/2006/main">
               <a:ext uri="{FF2B5EF4-FFF2-40B4-BE49-F238E27FC236}">
-                <a16:creationId xmlns:a16="http://schemas.microsoft.com/office/drawing/2014/main" id="{8E9619A5-AB6C-497E-8D1A-BDF28869ABD5}"/>
+                <a16:creationId xmlns:a16="http://schemas.microsoft.com/office/drawing/2014/main" id="{061F9E10-00BC-4B31-A7BA-B83A43A58025}"/>
               </a:ext>
             </a:extLst>
           </p:cNvPr>
@@ -18565,7 +18565,7 @@
           <p:cNvPr id="9" name="">
             <a:extLst xmlns:a="http://schemas.openxmlformats.org/drawingml/2006/main">
               <a:ext uri="{FF2B5EF4-FFF2-40B4-BE49-F238E27FC236}">
-                <a16:creationId xmlns:a16="http://schemas.microsoft.com/office/drawing/2014/main" id="{BAD92A6C-086E-41F5-953E-62689C927707}"/>
+                <a16:creationId xmlns:a16="http://schemas.microsoft.com/office/drawing/2014/main" id="{0692F9AA-598D-4ECE-A498-53E9D928A3D2}"/>
               </a:ext>
             </a:extLst>
           </p:cNvPr>
@@ -18722,7 +18722,7 @@
           <p:cNvPr id="10" name="">
             <a:extLst xmlns:a="http://schemas.openxmlformats.org/drawingml/2006/main">
               <a:ext uri="{FF2B5EF4-FFF2-40B4-BE49-F238E27FC236}">
-                <a16:creationId xmlns:a16="http://schemas.microsoft.com/office/drawing/2014/main" id="{474D6C2F-4AC2-4D6C-A0C9-1B02D0EC51CD}"/>
+                <a16:creationId xmlns:a16="http://schemas.microsoft.com/office/drawing/2014/main" id="{F5924A9A-69C0-49A0-B013-13D75380A0FE}"/>
               </a:ext>
             </a:extLst>
           </p:cNvPr>
@@ -18879,7 +18879,7 @@
           <p:cNvPr id="11" name="">
             <a:extLst xmlns:a="http://schemas.openxmlformats.org/drawingml/2006/main">
               <a:ext uri="{FF2B5EF4-FFF2-40B4-BE49-F238E27FC236}">
-                <a16:creationId xmlns:a16="http://schemas.microsoft.com/office/drawing/2014/main" id="{F6AB7DB6-5947-4D99-A179-9F83E89EAE26}"/>
+                <a16:creationId xmlns:a16="http://schemas.microsoft.com/office/drawing/2014/main" id="{E90ED4B3-01F3-4CB6-B7FE-9DFC0DE078B8}"/>
               </a:ext>
             </a:extLst>
           </p:cNvPr>
@@ -19034,7 +19034,7 @@
     </p:spTree>
     <p:extLst>
       <p:ext uri="{BB962C8B-B14F-4D97-AF65-F5344CB8AC3E}">
-        <p14:creationId xmlns:p14="http://schemas.microsoft.com/office/powerpoint/2010/main" val="1100884955"/>
+        <p14:creationId xmlns:p14="http://schemas.microsoft.com/office/powerpoint/2010/main" val="1516532919"/>
       </p:ext>
     </p:extLst>
   </p:cSld>
@@ -19065,7 +19065,7 @@
           <p:cNvPr id="12" name="">
             <a:extLst xmlns:a="http://schemas.openxmlformats.org/drawingml/2006/main">
               <a:ext uri="{FF2B5EF4-FFF2-40B4-BE49-F238E27FC236}">
-                <a16:creationId xmlns:a16="http://schemas.microsoft.com/office/drawing/2014/main" id="{97C400CA-68C7-4ECA-AA42-6E44F573B701}"/>
+                <a16:creationId xmlns:a16="http://schemas.microsoft.com/office/drawing/2014/main" id="{F5AF7A41-432D-4893-A6D3-E627A72A7CDE}"/>
               </a:ext>
             </a:extLst>
           </p:cNvPr>
@@ -19222,7 +19222,7 @@
           <p:cNvPr id="2" name="">
             <a:extLst xmlns:a="http://schemas.openxmlformats.org/drawingml/2006/main">
               <a:ext uri="{FF2B5EF4-FFF2-40B4-BE49-F238E27FC236}">
-                <a16:creationId xmlns:a16="http://schemas.microsoft.com/office/drawing/2014/main" id="{F3BBC5A2-261D-4C9E-B206-D505752CD43A}"/>
+                <a16:creationId xmlns:a16="http://schemas.microsoft.com/office/drawing/2014/main" id="{7227B503-2285-4818-8761-C2F2AEC123ED}"/>
               </a:ext>
             </a:extLst>
           </p:cNvPr>
@@ -19379,7 +19379,7 @@
           <p:cNvPr id="3" name="">
             <a:extLst xmlns:a="http://schemas.openxmlformats.org/drawingml/2006/main">
               <a:ext uri="{FF2B5EF4-FFF2-40B4-BE49-F238E27FC236}">
-                <a16:creationId xmlns:a16="http://schemas.microsoft.com/office/drawing/2014/main" id="{DAA4862D-F13E-4225-B488-0DACFD499A56}"/>
+                <a16:creationId xmlns:a16="http://schemas.microsoft.com/office/drawing/2014/main" id="{A55B4672-69AD-4CEF-95C0-6560B68AAB7F}"/>
               </a:ext>
             </a:extLst>
           </p:cNvPr>
@@ -19536,7 +19536,7 @@
           <p:cNvPr id="4" name="">
             <a:extLst xmlns:a="http://schemas.openxmlformats.org/drawingml/2006/main">
               <a:ext uri="{FF2B5EF4-FFF2-40B4-BE49-F238E27FC236}">
-                <a16:creationId xmlns:a16="http://schemas.microsoft.com/office/drawing/2014/main" id="{0B9E5E8D-619B-49C7-BE7A-50BFE6A9FA59}"/>
+                <a16:creationId xmlns:a16="http://schemas.microsoft.com/office/drawing/2014/main" id="{8D69CE75-993E-4201-B686-D4754B99DB08}"/>
               </a:ext>
             </a:extLst>
           </p:cNvPr>
@@ -19693,7 +19693,7 @@
           <p:cNvPr id="5" name="">
             <a:extLst xmlns:a="http://schemas.openxmlformats.org/drawingml/2006/main">
               <a:ext uri="{FF2B5EF4-FFF2-40B4-BE49-F238E27FC236}">
-                <a16:creationId xmlns:a16="http://schemas.microsoft.com/office/drawing/2014/main" id="{73DBEA5A-E701-4C2D-9017-41B1E8A61DD1}"/>
+                <a16:creationId xmlns:a16="http://schemas.microsoft.com/office/drawing/2014/main" id="{2BE1CE6B-0086-494B-BCF5-15C1D87E8F90}"/>
               </a:ext>
             </a:extLst>
           </p:cNvPr>
@@ -19850,7 +19850,7 @@
           <p:cNvPr id="6" name="">
             <a:extLst xmlns:a="http://schemas.openxmlformats.org/drawingml/2006/main">
               <a:ext uri="{FF2B5EF4-FFF2-40B4-BE49-F238E27FC236}">
-                <a16:creationId xmlns:a16="http://schemas.microsoft.com/office/drawing/2014/main" id="{15D1264C-68CE-4B9B-99EA-C168A35E7543}"/>
+                <a16:creationId xmlns:a16="http://schemas.microsoft.com/office/drawing/2014/main" id="{76407D9F-7CEF-40F9-B4AE-063196EDD701}"/>
               </a:ext>
             </a:extLst>
           </p:cNvPr>
@@ -20007,7 +20007,7 @@
           <p:cNvPr id="7" name="">
             <a:extLst xmlns:a="http://schemas.openxmlformats.org/drawingml/2006/main">
               <a:ext uri="{FF2B5EF4-FFF2-40B4-BE49-F238E27FC236}">
-                <a16:creationId xmlns:a16="http://schemas.microsoft.com/office/drawing/2014/main" id="{782107A0-B36D-461C-BAC4-389A75441218}"/>
+                <a16:creationId xmlns:a16="http://schemas.microsoft.com/office/drawing/2014/main" id="{F8886837-A913-4F4D-8585-9DC2949C6E5B}"/>
               </a:ext>
             </a:extLst>
           </p:cNvPr>
@@ -20164,7 +20164,7 @@
           <p:cNvPr id="8" name="">
             <a:extLst xmlns:a="http://schemas.openxmlformats.org/drawingml/2006/main">
               <a:ext uri="{FF2B5EF4-FFF2-40B4-BE49-F238E27FC236}">
-                <a16:creationId xmlns:a16="http://schemas.microsoft.com/office/drawing/2014/main" id="{32F5A017-0C4F-4738-B1B6-999D2A876C4B}"/>
+                <a16:creationId xmlns:a16="http://schemas.microsoft.com/office/drawing/2014/main" id="{992B7017-9DC0-4018-8729-8099410D9A3E}"/>
               </a:ext>
             </a:extLst>
           </p:cNvPr>
@@ -20321,7 +20321,7 @@
           <p:cNvPr id="9" name="">
             <a:extLst xmlns:a="http://schemas.openxmlformats.org/drawingml/2006/main">
               <a:ext uri="{FF2B5EF4-FFF2-40B4-BE49-F238E27FC236}">
-                <a16:creationId xmlns:a16="http://schemas.microsoft.com/office/drawing/2014/main" id="{8C3A2D34-DD1C-42E4-BACC-F988060105BA}"/>
+                <a16:creationId xmlns:a16="http://schemas.microsoft.com/office/drawing/2014/main" id="{20B43142-C7D0-4B50-9FD7-608916708951}"/>
               </a:ext>
             </a:extLst>
           </p:cNvPr>
@@ -20478,7 +20478,7 @@
           <p:cNvPr id="10" name="">
             <a:extLst xmlns:a="http://schemas.openxmlformats.org/drawingml/2006/main">
               <a:ext uri="{FF2B5EF4-FFF2-40B4-BE49-F238E27FC236}">
-                <a16:creationId xmlns:a16="http://schemas.microsoft.com/office/drawing/2014/main" id="{33BB3391-5104-43D9-B028-89A03BB94087}"/>
+                <a16:creationId xmlns:a16="http://schemas.microsoft.com/office/drawing/2014/main" id="{9985C195-8881-4D1C-8E52-ACDDE7F468D3}"/>
               </a:ext>
             </a:extLst>
           </p:cNvPr>
@@ -20635,7 +20635,7 @@
           <p:cNvPr id="11" name="">
             <a:extLst xmlns:a="http://schemas.openxmlformats.org/drawingml/2006/main">
               <a:ext uri="{FF2B5EF4-FFF2-40B4-BE49-F238E27FC236}">
-                <a16:creationId xmlns:a16="http://schemas.microsoft.com/office/drawing/2014/main" id="{FDD3F078-93D3-413A-A689-0DE53598ECDF}"/>
+                <a16:creationId xmlns:a16="http://schemas.microsoft.com/office/drawing/2014/main" id="{1CCB075D-2977-4BF8-8EAD-3716B9194241}"/>
               </a:ext>
             </a:extLst>
           </p:cNvPr>
@@ -20790,7 +20790,7 @@
     </p:spTree>
     <p:extLst>
       <p:ext uri="{BB962C8B-B14F-4D97-AF65-F5344CB8AC3E}">
-        <p14:creationId xmlns:p14="http://schemas.microsoft.com/office/powerpoint/2010/main" val="1839313499"/>
+        <p14:creationId xmlns:p14="http://schemas.microsoft.com/office/powerpoint/2010/main" val="994286881"/>
       </p:ext>
     </p:extLst>
   </p:cSld>
